--- a/docs/presentations/2026-08-24-timing-quality/Janasunani_2.0_Timing_and_Quality.pptx
+++ b/docs/presentations/2026-08-24-timing-quality/Janasunani_2.0_Timing_and_Quality.pptx
@@ -655,13 +655,31 @@
           <a:p/>
           <a:p>
             <a:r>
-              <a:t>WHAT WE FOUND. Normalised exact-text divergence 1.000 on both runs: the two systems differed on every single page. Sarvam returns more characters, ratio 1.2433 then 1.3345. Neither fact is an accuracy result. Divergence says they disagree, never who is right.</a:t>
+              <a:t>WHAT WE FOUND, AND WHAT IT COVERS. Normalised exact-text divergence 1.000 on both runs: the two systems differed on every page. Sarvam returns more characters, ratio 1.2433 then 1.3345. That figure is TRANSCRIPTION ONLY. It compares OCR text and says nothing about the category or summary fields. Divergence says they disagree, never who is right.</a:t>
             </a:r>
           </a:p>
           <a:p/>
           <a:p>
             <a:r>
-              <a:t>WHY THERE IS NO ACCURACY NUMBER. Category accuracy was the declared primary outcome and came back null: the sample carried no gold labels. Separately, a schema bug returned HTTP 400 on every extract submission until 2026-08-09, so the one arm holding real ground truth produced nothing. Every test mocked the transport, so no test could see the 400.</a:t>
+              <a:t>THE EXTRACT FIELDS WERE NEVER GRADED. Sarvam did return them: 61 extract jobs completed in the 300-page run. Nothing was compared against them.</a:t>
+            </a:r>
+          </a:p>
+          <a:p/>
+          <a:p>
+            <a:r>
+              <a:t>  Category was the DECLARED PRIMARY OUTCOME and came back null. Reason, verbatim from outputs/sarvam_validation/sarvam_scorecard.md: 'Not measured — no gold labels (gold_category) in sample; run with --join-metadata from the lake slice.' This is the cheap gap. The recorded category already sits in our own database; the sample was simply not joined to it. Unlike OCR, no new ground truth has to be created.</a:t>
+            </a:r>
+          </a:p>
+          <a:p/>
+          <a:p>
+            <a:r>
+              <a:t>  Summary was only ever scoped as divergence against BART with no gold referee, and summary_divergence is the same function as divergence_rate under another name (sarvam_scorecard.py:234). Even fully run it could only have said the two summaries differ, never which was better. It was not run: no paired sarvam_summary / pipeline_summary in the sample.</a:t>
+            </a:r>
+          </a:p>
+          <a:p/>
+          <a:p>
+            <a:r>
+              <a:t>  A schema bug returned HTTP 400 on every extract submission until 2026-08-09, which is why the 5-page validation run has no extract output at all. Every test mocked the transport, so no test could see the 400.</a:t>
             </a:r>
           </a:p>
           <a:p/>
@@ -4215,7 +4233,7 @@
                 <a:ea typeface="Calibri" pitchFamily="34" charset="-122"/>
                 <a:cs typeface="Calibri" pitchFamily="34" charset="-120"/>
               </a:rPr>
-              <a:t>AN OUTSIDE OPTION</a:t>
+              <a:t>THE OUTSIDE OPTION: SARVAM</a:t>
             </a:r>
             <a:endParaRPr lang="en-US" sz="1500" dirty="0"/>
           </a:p>
@@ -4503,7 +4521,7 @@
                 <a:ea typeface="Calibri" pitchFamily="34" charset="-122"/>
                 <a:cs typeface="Calibri" pitchFamily="34" charset="-120"/>
               </a:rPr>
-              <a:t>Using it sends citizen documents outside our control.</a:t>
+              <a:t>Different is not better. Using it also sends citizen documents outside our control.</a:t>
             </a:r>
             <a:endParaRPr lang="en-US" sz="2000" dirty="0"/>
           </a:p>
@@ -4815,7 +4833,7 @@
                 <a:ea typeface="Calibri" pitchFamily="34" charset="-122"/>
                 <a:cs typeface="Calibri" pitchFamily="34" charset="-120"/>
               </a:rPr>
-              <a:t>We have no accuracy result. Nobody made a hand-typed answer key.</a:t>
+              <a:t>The category and summary it returned were never graded against anything.</a:t>
             </a:r>
           </a:p>
         </p:txBody>

--- a/docs/presentations/2026-08-24-timing-quality/Janasunani_2.0_Timing_and_Quality.pptx
+++ b/docs/presentations/2026-08-24-timing-quality/Janasunani_2.0_Timing_and_Quality.pptx
@@ -15,6 +15,7 @@
     <p:sldId id="274" r:id="rId24"/>
     <p:sldId id="275" r:id="rId25"/>
     <p:sldId id="276" r:id="rId26"/>
+    <p:sldId id="277" r:id="rId27"/>
   </p:sldIdLst>
   <p:sldSz cx="12192000" cy="6858000"/>
   <p:notesSz cx="6858000" cy="12192000"/>
@@ -492,6 +493,21 @@
           </a:p>
           <a:p>
             <a:r>
+              <a:t>  AGAINST A TRIVIAL BASELINE, computed from the per-class supports in outputs/evaluation/categorization_historical_v1.json. The test set is lopsided: Social Welfare 1,179, Housing 743, Miscellaneous 724, together 2,646 of 3,160. Always guessing the single biggest scores 37.3% against the model's 46.6%, a lift of 9.2 points. Always guessing the biggest three scores 83.7% against the model's 90.9%, a lift of 7.2 points. Say this if anyone treats 91% as the headline.</a:t>
+            </a:r>
+          </a:p>
+          <a:p>
+            <a:r>
+              <a:t>  Per class the spread is wide. Best: Land Matters F1 62.4%, Energy 62.3%, Social Welfare 62.1%. Worst: General 4.6%, Public Utility 11.1%, Financial Assistance 12.1%. Miscellaneous has 724 cases and 11.7% recall, because a catch-all class has no signature to learn. No class sits at F1 zero.</a:t>
+            </a:r>
+          </a:p>
+          <a:p>
+            <a:r>
+              <a:t>  The DSI reference of 71.04% for MuRIL is NOT a comparison. It was measured on typed subject lines with a different split and issue #127 warns against putting the two side by side. We have not re-run that model on this split, so no head-to-head exists.</a:t>
+            </a:r>
+          </a:p>
+          <a:p>
+            <a:r>
               <a:t>Summary: critical-fact recall 65.48% over 84 facts, 8 of 26 usable unedited, residual PII in output 4/26 = 15.38%. One judge, not an officer. All four coherent Odia cases were skipped by an English-only gate.</a:t>
             </a:r>
           </a:p>
@@ -555,37 +571,43 @@
           <a:lstStyle/>
           <a:p>
             <a:r>
-              <a:t>Do not cut this slide for time. It is the one that makes the rest credible.</a:t>
+              <a:t>The ladder is janasunani/routing/provider.py. Three modes: ROUTER_DEFAULT 'crosswalk' is the shipped path and runs crosswalk, then mapping tables, then generic fallback; 'rules' skips the crosswalk and reproduces pre-#33 behaviour, useful to isolate the crosswalk in a comparison; ROUTER_INCIDENCE 'incidence' serves a checksummed empirical-Bayes artifact with the same ladder underneath it.</a:t>
             </a:r>
           </a:p>
           <a:p/>
           <a:p>
             <a:r>
-              <a:t>1. OCR ground truth was never commissioned and has no owner, issue #53. It cannot be produced by an agent, because it is the answer key an agent would be scored against.</a:t>
+              <a:t>RUNG 1, the crosswalk. Artifact janasunani/routing/reference/routing_crosswalk.json: 34 by-category keys, 257 by-subcategory, 971 by-category-district, 5,084 on the full key. Held-out performance, outputs/evaluation/routing_historical_{informative,all}.json: top-3 79.68% and top-1 54.96% on informative categories (n=142,181); 69.04% and 45.14% across all eligible (n=208,267). Train 2021-23, validate 2024, final refit on train plus validation, test on an untouched 2025. Selected alpha=100 with a one-year history window.</a:t>
             </a:r>
           </a:p>
           <a:p/>
           <a:p>
             <a:r>
-              <a:t>2. 824 predicted spans against 480 marked. The recogniser over-fires, and the gold set cannot separate a missed label from an over-redaction. Filed as open.</a:t>
+              <a:t>RUNG 2, why a fallback is needed at all. The ORTPSA masters carry no category-to-department foreign key: intCategoryGrp is NULL on all 62 categories (janasunani/routing/crosswalk.py:3, mappings.py:36). MappingRouter can only bridge by exact name, which covers a handful of the 62. That absence is the whole reason the crosswalk had to be learned from history instead of read off a table.</a:t>
             </a:r>
           </a:p>
           <a:p/>
           <a:p>
             <a:r>
-              <a:t>3. The officer-hours figure that circulates, 201,000 to 302,000 across 1,209,144 resolved cases, is a denominator and not a saving. It is the size of the prize, not anything realised.</a:t>
+              <a:t>RUNG 3, the trained model. Opt-in via JANASUNANI_ROUTER=incidence, artifact checksummed, and IncidenceRoutingProvider falls through to the crosswalk and rules when a lookup fails, logging rather than failing silently.</a:t>
             </a:r>
           </a:p>
           <a:p/>
           <a:p>
             <a:r>
-              <a:t>Two more we do not claim, if asked: no gain from duplicate detection beyond the 37,299 repeats officers already confirmed, and no accuracy result for the outside option on slide 6.</a:t>
+              <a:t>THE CAVEAT THAT MATTERS, and it applies to all three rungs. Every one of them measures agreement with the historical destination, not jurisdictional correctness. A correct-authority adjudication does not exist. Roughly 300 closed cases read by hand would settle it.</a:t>
             </a:r>
           </a:p>
           <a:p/>
           <a:p>
             <a:r>
-              <a:t>If someone asks why so little is claimed: because the alternative is claiming things we cannot defend, and this deck has to survive the room checking it.</a:t>
+              <a:t>Macro-F1 is weak, 25.2% informative and 19.8% all eligible, and about a dozen departments sit at F1 zero. The top-three framing is doing real work here.</a:t>
+            </a:r>
+          </a:p>
+          <a:p/>
+          <a:p>
+            <a:r>
+              <a:t>WITHDRAWN, do not use: the in-sample crosswalk figures 60.9 / 67.5 / 72.8, which are resubstitution. And any routing time saving: an estimated 11 to 23 day gain held on validation 2024 and failed on the untouched 2025 test year at -2.35 days against a standard error of 3.50. Withdrawn 23 August, commits 879c24c and 365e3b4.</a:t>
             </a:r>
           </a:p>
         </p:txBody>
@@ -631,73 +653,37 @@
           <a:lstStyle/>
           <a:p>
             <a:r>
-              <a:t>The provider is Sarvam. Two endpoints, billed separately: digitise at ₹0.50 a page returns text and layout; extract at ₹1.00 a page returns schema-driven fields. Both is ₹1.50. Source: janasunani/evaluation/pricing.py, checked against the Sarvam dashboard 2026-08-07. Our local pipeline is ₹0.00 a page.</a:t>
+              <a:t>Do not cut this slide for time. It is the one that makes the rest credible.</a:t>
             </a:r>
           </a:p>
           <a:p/>
           <a:p>
             <a:r>
-              <a:t>THE FOUR EXTRACT FIELDS, which is the 'does more' claim: grievance_category, summary, district, grievance_text. That is our OCR, categoriser and summariser in one call. janasunani/evaluation/sarvam_grievance_schema.py, schema v1, pinned so a later edit cannot silently move a headline number. docs/DELIVERY.md:163: 'our pipeline has no equivalent'.</a:t>
+              <a:t>1. OCR ground truth was never commissioned and has no owner, issue #53. It cannot be produced by an agent, because it is the answer key an agent would be scored against.</a:t>
             </a:r>
           </a:p>
           <a:p/>
           <a:p>
             <a:r>
-              <a:t>LANGUAGE. Sarvam Vision lists all 22 scheduled languages plus English, Odia among them. There is also a separate transliteration API for romanized Odia (od-IN), which we do not solve at all today. Our own summariser skipped all four coherent Odia cases through an English-only gate, and non-English text is downgraded to Uncategorized.</a:t>
+              <a:t>2. 824 predicted spans against 480 marked. The recogniser over-fires, and the gold set cannot separate a missed label from an over-redaction. Filed as open.</a:t>
             </a:r>
           </a:p>
           <a:p/>
           <a:p>
             <a:r>
-              <a:t>WHAT WE ACTUALLY RAN. Two runs, docs/evidence/sarvam_cached_benchmark.json. A 5-page validation (₹7.50) and a 300-page run that died at 65 pages on credit exhaustion, 3 HTTP 402s, 7 job failures. 61 pages paired and scored in total.</a:t>
+              <a:t>3. The officer-hours figure that circulates, 201,000 to 302,000 across 1,209,144 resolved cases, is a denominator and not a saving. It is the size of the prize, not anything realised.</a:t>
             </a:r>
           </a:p>
           <a:p/>
           <a:p>
             <a:r>
-              <a:t>WHAT WE FOUND, AND WHAT IT COVERS. Normalised exact-text divergence 1.000 on both runs: the two systems differed on every page. Sarvam returns more characters, ratio 1.2433 then 1.3345. That figure is TRANSCRIPTION ONLY. It compares OCR text and says nothing about the category or summary fields. Divergence says they disagree, never who is right.</a:t>
+              <a:t>Two more we do not claim, if asked: no gain from duplicate detection beyond the 37,299 repeats officers already confirmed, and no accuracy result for the outside option on slide 6.</a:t>
             </a:r>
           </a:p>
           <a:p/>
           <a:p>
             <a:r>
-              <a:t>THE EXTRACT FIELDS WERE NEVER GRADED. Sarvam did return them: 61 extract jobs completed in the 300-page run. Nothing was compared against them.</a:t>
-            </a:r>
-          </a:p>
-          <a:p/>
-          <a:p>
-            <a:r>
-              <a:t>  Category was the DECLARED PRIMARY OUTCOME and came back null. Reason, verbatim from outputs/sarvam_validation/sarvam_scorecard.md: 'Not measured — no gold labels (gold_category) in sample; run with --join-metadata from the lake slice.' This is the cheap gap. The recorded category already sits in our own database; the sample was simply not joined to it. Unlike OCR, no new ground truth has to be created.</a:t>
-            </a:r>
-          </a:p>
-          <a:p/>
-          <a:p>
-            <a:r>
-              <a:t>  Summary was only ever scoped as divergence against BART with no gold referee, and summary_divergence is the same function as divergence_rate under another name (sarvam_scorecard.py:234). Even fully run it could only have said the two summaries differ, never which was better. It was not run: no paired sarvam_summary / pipeline_summary in the sample.</a:t>
-            </a:r>
-          </a:p>
-          <a:p/>
-          <a:p>
-            <a:r>
-              <a:t>  A schema bug returned HTTP 400 on every extract submission until 2026-08-09, which is why the 5-page validation run has no extract output at all. Every test mocked the transport, so no test could see the 400.</a:t>
-            </a:r>
-          </a:p>
-          <a:p/>
-          <a:p>
-            <a:r>
-              <a:t>NOT MEASURED, do not claim: OCR accuracy, category accuracy, summary quality, latency (stated in four places), actual billed cost (every rupee figure is list price), observed language split, handwritten versus printed split.</a:t>
-            </a:r>
-          </a:p>
-          <a:p/>
-          <a:p>
-            <a:r>
-              <a:t>GOVERNANCE. Trust tier authorized-external. Authorisation is a GoO-Sarvam MoU with sign-off from the Additional Chief Secretary, Electronics &amp; IT, accepted 2026-08-07, on the basis that no state statute currently governs the transfer. All three provider controls remain UNVERIFIED: retention terms, encryption in transit, encryption at rest. Authorisation and verification are recorded separately on purpose. One module may make the call, janasunani/egress/, every attempt is audit-logged, and a kill switch falls back to local pytesseract.</a:t>
-            </a:r>
-          </a:p>
-          <a:p/>
-          <a:p>
-            <a:r>
-              <a:t>COST AT SCALE, projected list price: ₹48,000 to digitise the 96,469-page English corpus, ₹145,000 for both endpoints, ₹8,050 to push 1.37M subjects through the 105B text model. At 10 requests a minute, which does not rise with the plan tier, the full corpus is roughly ten days of continuous calling. It is a measurement instrument, not a backfill path. Do not quote ₹700; that was priced on the withdrawn 30B model.</a:t>
+              <a:t>If someone asks why so little is claimed: because the alternative is claiming things we cannot defend, and this deck has to survive the room checking it.</a:t>
             </a:r>
           </a:p>
         </p:txBody>
@@ -711,6 +697,118 @@
 </file>
 
 <file path=ppt/notesSlides/notesSlide20.xml><?xml version="1.0" encoding="utf-8"?>
+<p:notes xmlns:a="http://schemas.openxmlformats.org/drawingml/2006/main" xmlns:p="http://schemas.openxmlformats.org/presentationml/2006/main" xmlns:r="http://schemas.openxmlformats.org/officeDocument/2006/relationships">
+  <p:cSld>
+    <p:spTree>
+      <p:nvGrpSpPr>
+        <p:cNvPr id="1" name=""/>
+        <p:cNvGrpSpPr/>
+        <p:nvPr/>
+      </p:nvGrpSpPr>
+      <p:grpSpPr>
+        <a:xfrm>
+          <a:off x="0" y="0"/>
+          <a:ext cx="0" cy="0"/>
+          <a:chOff x="0" y="0"/>
+          <a:chExt cx="0" cy="0"/>
+        </a:xfrm>
+      </p:grpSpPr>
+      <p:sp>
+        <p:nvSpPr>
+          <p:cNvPr id="3" name="Notes Placeholder 2"/>
+          <p:cNvSpPr>
+            <a:spLocks noGrp="1"/>
+          </p:cNvSpPr>
+          <p:nvPr>
+            <p:ph type="body" idx="1"/>
+          </p:nvPr>
+        </p:nvSpPr>
+        <p:spPr/>
+        <p:txBody>
+          <a:bodyPr/>
+          <a:lstStyle/>
+          <a:p>
+            <a:r>
+              <a:t>The provider is Sarvam. Two endpoints, billed separately: digitise at ₹0.50 a page returns text and layout; extract at ₹1.00 a page returns schema-driven fields. Both is ₹1.50. Source: janasunani/evaluation/pricing.py, checked against the Sarvam dashboard 2026-08-07. Our local pipeline is ₹0.00 a page.</a:t>
+            </a:r>
+          </a:p>
+          <a:p/>
+          <a:p>
+            <a:r>
+              <a:t>THE FOUR EXTRACT FIELDS, which is the 'does more' claim: grievance_category, summary, district, grievance_text. That is our OCR, categoriser and summariser in one call. janasunani/evaluation/sarvam_grievance_schema.py, schema v1, pinned so a later edit cannot silently move a headline number. docs/DELIVERY.md:163: 'our pipeline has no equivalent'.</a:t>
+            </a:r>
+          </a:p>
+          <a:p/>
+          <a:p>
+            <a:r>
+              <a:t>LANGUAGE. Sarvam Vision lists all 22 scheduled languages plus English, Odia among them. There is also a separate transliteration API for romanized Odia (od-IN), which we do not solve at all today. Our own summariser skipped all four coherent Odia cases through an English-only gate, and non-English text is downgraded to Uncategorized.</a:t>
+            </a:r>
+          </a:p>
+          <a:p/>
+          <a:p>
+            <a:r>
+              <a:t>WHAT WE ACTUALLY RAN. Two runs, docs/evidence/sarvam_cached_benchmark.json. A 5-page validation (₹7.50) and a 300-page run that died at 65 pages on credit exhaustion, 3 HTTP 402s, 7 job failures. 61 pages paired and scored in total.</a:t>
+            </a:r>
+          </a:p>
+          <a:p/>
+          <a:p>
+            <a:r>
+              <a:t>WHAT WE FOUND, AND WHAT IT COVERS. Normalised exact-text divergence 1.000 on both runs: the two systems differed on every page. Sarvam returns more characters, ratio 1.2433 then 1.3345. That figure is TRANSCRIPTION ONLY. It compares OCR text and says nothing about the category or summary fields. Divergence says they disagree, never who is right.</a:t>
+            </a:r>
+          </a:p>
+          <a:p/>
+          <a:p>
+            <a:r>
+              <a:t>THE EXTRACT FIELDS WERE NEVER GRADED. Sarvam did return them: 61 extract jobs completed in the 300-page run. Nothing was compared against them.</a:t>
+            </a:r>
+          </a:p>
+          <a:p/>
+          <a:p>
+            <a:r>
+              <a:t>  Category was the DECLARED PRIMARY OUTCOME and came back null. Reason, verbatim from outputs/sarvam_validation/sarvam_scorecard.md: 'Not measured — no gold labels (gold_category) in sample; run with --join-metadata from the lake slice.' This is the cheap gap. The recorded category already sits in our own database; the sample was simply not joined to it. Unlike OCR, no new ground truth has to be created.</a:t>
+            </a:r>
+          </a:p>
+          <a:p/>
+          <a:p>
+            <a:r>
+              <a:t>  Summary was only ever scoped as divergence against BART with no gold referee, and summary_divergence is the same function as divergence_rate under another name (sarvam_scorecard.py:234). Even fully run it could only have said the two summaries differ, never which was better. It was not run: no paired sarvam_summary / pipeline_summary in the sample.</a:t>
+            </a:r>
+          </a:p>
+          <a:p/>
+          <a:p>
+            <a:r>
+              <a:t>  A schema bug returned HTTP 400 on every extract submission until 2026-08-09, which is why the 5-page validation run has no extract output at all. Every test mocked the transport, so no test could see the 400.</a:t>
+            </a:r>
+          </a:p>
+          <a:p/>
+          <a:p>
+            <a:r>
+              <a:t>NOT MEASURED, do not claim: OCR accuracy, category accuracy, summary quality, latency (stated in four places), actual billed cost (every rupee figure is list price), observed language split, handwritten versus printed split.</a:t>
+            </a:r>
+          </a:p>
+          <a:p/>
+          <a:p>
+            <a:r>
+              <a:t>GOVERNANCE. Trust tier authorized-external. Authorisation is a GoO-Sarvam MoU with sign-off from the Additional Chief Secretary, Electronics &amp; IT, accepted 2026-08-07, on the basis that no state statute currently governs the transfer. All three provider controls remain UNVERIFIED: retention terms, encryption in transit, encryption at rest. Authorisation and verification are recorded separately on purpose. One module may make the call, janasunani/egress/, every attempt is audit-logged, and a kill switch falls back to local pytesseract.</a:t>
+            </a:r>
+          </a:p>
+          <a:p/>
+          <a:p>
+            <a:r>
+              <a:t>COST AT SCALE, projected list price: ₹48,000 to digitise the 96,469-page English corpus, ₹145,000 for both endpoints, ₹8,050 to push 1.37M subjects through the 105B text model. At 10 requests a minute, which does not rise with the plan tier, the full corpus is roughly ten days of continuous calling. It is a measurement instrument, not a backfill path. Do not quote ₹700; that was priced on the withdrawn 30B model.</a:t>
+            </a:r>
+          </a:p>
+        </p:txBody>
+      </p:sp>
+    </p:spTree>
+  </p:cSld>
+  <p:clrMapOvr>
+    <a:masterClrMapping/>
+  </p:clrMapOvr>
+</p:notes>
+</file>
+
+<file path=ppt/notesSlides/notesSlide21.xml><?xml version="1.0" encoding="utf-8"?>
 <p:notes xmlns:a="http://schemas.openxmlformats.org/drawingml/2006/main" xmlns:p="http://schemas.openxmlformats.org/presentationml/2006/main" xmlns:r="http://schemas.openxmlformats.org/officeDocument/2006/relationships">
   <p:cSld>
     <p:spTree>
@@ -2536,7 +2634,7 @@
                           </a:solidFill>
                           <a:latin typeface="Calibri"/>
                         </a:rPr>
-                        <a:t>How good</a:t>
+                        <a:t>How good, and on how many</a:t>
                       </a:r>
                     </a:p>
                   </a:txBody>
@@ -2664,7 +2762,7 @@
                           </a:solidFill>
                           <a:latin typeface="Calibri"/>
                         </a:rPr>
-                        <a:t>not measured</a:t>
+                        <a:t>never measured</a:t>
                       </a:r>
                     </a:p>
                   </a:txBody>
@@ -2792,7 +2890,7 @@
                           </a:solidFill>
                           <a:latin typeface="Calibri"/>
                         </a:rPr>
-                        <a:t>78% of marked items found</a:t>
+                        <a:t>found 78% of the items we marked, on 480</a:t>
                       </a:r>
                     </a:p>
                   </a:txBody>
@@ -2920,7 +3018,7 @@
                           </a:solidFill>
                           <a:latin typeface="Calibri"/>
                         </a:rPr>
-                        <a:t>caught 13 of 13</a:t>
+                        <a:t>caught all 13 needing review, out of 57 cases</a:t>
                       </a:r>
                     </a:p>
                   </a:txBody>
@@ -3048,7 +3146,7 @@
                           </a:solidFill>
                           <a:latin typeface="Calibri"/>
                         </a:rPr>
-                        <a:t>right one in the top three, 91%</a:t>
+                        <a:t>right one in its top three, 91% of 3,160</a:t>
                       </a:r>
                     </a:p>
                   </a:txBody>
@@ -3176,7 +3274,7 @@
                           </a:solidFill>
                           <a:latin typeface="Calibri"/>
                         </a:rPr>
-                        <a:t>8 of 26 usable as they stand</a:t>
+                        <a:t>26 drafts read, 8 usable without an edit</a:t>
                       </a:r>
                     </a:p>
                   </a:txBody>
@@ -3304,7 +3402,7 @@
                           </a:solidFill>
                           <a:latin typeface="Calibri"/>
                         </a:rPr>
-                        <a:t>right one in the top three, 80%</a:t>
+                        <a:t>right one in its top three, 80% of 142,181</a:t>
                       </a:r>
                     </a:p>
                   </a:txBody>
@@ -3439,7 +3537,7 @@
                 </a:solidFill>
                 <a:latin typeface="Calibri"/>
               </a:rPr>
-              <a:t>Speeds are means on a scanned document, n=20. Quality figures come from held-out test sets. Sample sizes vary by stage and are in the notes.</a:t>
+              <a:t>Speeds are means on one scanned document, n=20. Categories are lopsided: always guessing the three biggest scores 84%, so the model adds 7 points.</a:t>
             </a:r>
           </a:p>
         </p:txBody>
@@ -3495,7 +3593,7 @@
                 <a:ea typeface="Calibri" pitchFamily="34" charset="-122"/>
                 <a:cs typeface="Calibri" pitchFamily="34" charset="-120"/>
               </a:rPr>
-              <a:t>THE LIMITS</a:t>
+              <a:t>SUGGESTING A DEPARTMENT</a:t>
             </a:r>
             <a:endParaRPr lang="en-US" sz="1500" dirty="0"/>
           </a:p>
@@ -3534,7 +3632,7 @@
                 <a:ea typeface="Cambria" pitchFamily="34" charset="-122"/>
                 <a:cs typeface="Cambria" pitchFamily="34" charset="-120"/>
               </a:rPr>
-              <a:t>What we cannot measure</a:t>
+              <a:t>Three rungs, tried in order</a:t>
             </a:r>
             <a:endParaRPr lang="en-US" sz="3400" dirty="0"/>
           </a:p>
@@ -3542,62 +3640,89 @@
       </p:sp>
       <p:sp>
         <p:nvSpPr>
-          <p:cNvPr id="4" name="Text 2"/>
-          <p:cNvSpPr/>
-          <p:nvPr/>
-        </p:nvSpPr>
-        <p:spPr>
-          <a:xfrm>
-            <a:off x="640080" y="2194560"/>
-            <a:ext cx="502920" cy="640080"/>
-          </a:xfrm>
-          <a:prstGeom prst="rect">
-            <a:avLst/>
-          </a:prstGeom>
-          <a:noFill/>
-          <a:ln/>
-        </p:spPr>
-        <p:txBody>
-          <a:bodyPr wrap="square" lIns="0" tIns="0" rIns="0" bIns="0" rtlCol="0" anchor="ctr"/>
+          <p:cNvPr id="4" name="Shape 2"/>
+          <p:cNvSpPr/>
+          <p:nvPr/>
+        </p:nvSpPr>
+        <p:spPr>
+          <a:xfrm>
+            <a:off x="640080" y="2359152"/>
+            <a:ext cx="128016" cy="777240"/>
+          </a:xfrm>
+          <a:prstGeom prst="rect">
+            <a:avLst/>
+          </a:prstGeom>
+          <a:solidFill>
+            <a:srgbClr val="7A1F2B"/>
+          </a:solidFill>
+          <a:ln/>
+        </p:spPr>
+        <p:txBody>
+          <a:bodyPr/>
+          <a:lstStyle/>
+          <a:p>
+            <a:endParaRPr lang="en-IN"/>
+          </a:p>
+        </p:txBody>
+      </p:sp>
+      <p:sp>
+        <p:nvSpPr>
+          <p:cNvPr id="5" name="Text 3"/>
+          <p:cNvSpPr/>
+          <p:nvPr/>
+        </p:nvSpPr>
+        <p:spPr>
+          <a:xfrm>
+            <a:off x="960120" y="2286000"/>
+            <a:ext cx="3291840" cy="822960"/>
+          </a:xfrm>
+          <a:prstGeom prst="rect">
+            <a:avLst/>
+          </a:prstGeom>
+          <a:noFill/>
+          <a:ln/>
+        </p:spPr>
+        <p:txBody>
+          <a:bodyPr wrap="square" lIns="0" tIns="0" rIns="0" bIns="0" rtlCol="0" anchor="t"/>
           <a:lstStyle/>
           <a:p>
             <a:pPr marL="0" indent="0" algn="l">
               <a:buNone/>
             </a:pPr>
             <a:r>
-              <a:rPr lang="en-US" sz="3200" b="1" dirty="0">
-                <a:solidFill>
-                  <a:srgbClr val="7A1F2B"/>
+              <a:rPr lang="en-US" sz="2100" b="1" dirty="0">
+                <a:solidFill>
+                  <a:srgbClr val="1E1F24"/>
                 </a:solidFill>
                 <a:latin typeface="Cambria" pitchFamily="34" charset="0"/>
                 <a:ea typeface="Cambria" pitchFamily="34" charset="-122"/>
                 <a:cs typeface="Cambria" pitchFamily="34" charset="-120"/>
               </a:rPr>
-              <a:t>1</a:t>
-            </a:r>
-            <a:endParaRPr lang="en-US" sz="3200" dirty="0"/>
-          </a:p>
-        </p:txBody>
-      </p:sp>
-      <p:sp>
-        <p:nvSpPr>
-          <p:cNvPr id="5" name="Text 3"/>
-          <p:cNvSpPr/>
-          <p:nvPr/>
-        </p:nvSpPr>
-        <p:spPr>
-          <a:xfrm>
-            <a:off x="1280160" y="2194560"/>
-            <a:ext cx="5852160" cy="822960"/>
-          </a:xfrm>
-          <a:prstGeom prst="rect">
-            <a:avLst/>
-          </a:prstGeom>
-          <a:noFill/>
-          <a:ln/>
-        </p:spPr>
-        <p:txBody>
-          <a:bodyPr wrap="square" lIns="0" tIns="0" rIns="0" bIns="0" rtlCol="0" anchor="ctr"/>
+              <a:t>Learned from history</a:t>
+            </a:r>
+            <a:endParaRPr lang="en-US" sz="2100" dirty="0"/>
+          </a:p>
+        </p:txBody>
+      </p:sp>
+      <p:sp>
+        <p:nvSpPr>
+          <p:cNvPr id="6" name="Text 4"/>
+          <p:cNvSpPr/>
+          <p:nvPr/>
+        </p:nvSpPr>
+        <p:spPr>
+          <a:xfrm>
+            <a:off x="4389120" y="2286000"/>
+            <a:ext cx="7680960" cy="822960"/>
+          </a:xfrm>
+          <a:prstGeom prst="rect">
+            <a:avLst/>
+          </a:prstGeom>
+          <a:noFill/>
+          <a:ln/>
+        </p:spPr>
+        <p:txBody>
+          <a:bodyPr wrap="square" lIns="0" tIns="0" rIns="0" bIns="0" rtlCol="0" anchor="t"/>
           <a:lstStyle/>
           <a:p>
             <a:pPr marL="0" indent="0" algn="l">
@@ -3607,45 +3732,38 @@
               <a:buNone/>
             </a:pPr>
             <a:r>
-              <a:rPr lang="en-US" sz="1850" dirty="0">
-                <a:solidFill>
-                  <a:srgbClr val="1E1F24"/>
+              <a:rPr lang="en-US" sz="1900" dirty="0">
+                <a:solidFill>
+                  <a:srgbClr val="44464D"/>
                 </a:solidFill>
                 <a:latin typeface="Calibri" pitchFamily="34" charset="0"/>
                 <a:ea typeface="Calibri" pitchFamily="34" charset="-122"/>
                 <a:cs typeface="Calibri" pitchFamily="34" charset="-120"/>
               </a:rPr>
-              <a:t>We cannot say how accurately it reads a page.</a:t>
-            </a:r>
-            <a:endParaRPr lang="en-US" sz="1850" dirty="0"/>
-          </a:p>
-        </p:txBody>
-      </p:sp>
-      <p:sp>
-        <p:nvSpPr>
-          <p:cNvPr id="6" name="Shape 4"/>
-          <p:cNvSpPr/>
-          <p:nvPr/>
-        </p:nvSpPr>
-        <p:spPr>
-          <a:xfrm>
-            <a:off x="7406640" y="2212848"/>
-            <a:ext cx="4114800" cy="777240"/>
-          </a:xfrm>
-          <a:prstGeom prst="roundRect">
-            <a:avLst>
-              <a:gd name="adj" fmla="val 7059"/>
-            </a:avLst>
+              <a:t>5,084 keys built from where past grievances were actually sent. Right department in its top three 80% of the time on a year we held back.</a:t>
+            </a:r>
+            <a:endParaRPr lang="en-US" sz="1900" dirty="0"/>
+          </a:p>
+        </p:txBody>
+      </p:sp>
+      <p:sp>
+        <p:nvSpPr>
+          <p:cNvPr id="7" name="Shape 5"/>
+          <p:cNvSpPr/>
+          <p:nvPr/>
+        </p:nvSpPr>
+        <p:spPr>
+          <a:xfrm>
+            <a:off x="640080" y="3456432"/>
+            <a:ext cx="128016" cy="777240"/>
+          </a:xfrm>
+          <a:prstGeom prst="rect">
+            <a:avLst/>
           </a:prstGeom>
           <a:solidFill>
-            <a:srgbClr val="F4F4F6"/>
+            <a:srgbClr val="7A1F2B"/>
           </a:solidFill>
-          <a:ln w="12700">
-            <a:solidFill>
-              <a:srgbClr val="D6D8DD"/>
-            </a:solidFill>
-            <a:prstDash val="solid"/>
-          </a:ln>
+          <a:ln/>
         </p:spPr>
         <p:txBody>
           <a:bodyPr/>
@@ -3657,134 +3775,62 @@
       </p:sp>
       <p:sp>
         <p:nvSpPr>
-          <p:cNvPr id="7" name="Text 5"/>
-          <p:cNvSpPr/>
-          <p:nvPr/>
-        </p:nvSpPr>
-        <p:spPr>
-          <a:xfrm>
-            <a:off x="7571232" y="2212848"/>
-            <a:ext cx="3794760" cy="777240"/>
-          </a:xfrm>
-          <a:prstGeom prst="rect">
-            <a:avLst/>
-          </a:prstGeom>
-          <a:noFill/>
-          <a:ln/>
-        </p:spPr>
-        <p:txBody>
-          <a:bodyPr wrap="square" lIns="0" tIns="0" rIns="0" bIns="0" rtlCol="0" anchor="ctr"/>
+          <p:cNvPr id="8" name="Text 6"/>
+          <p:cNvSpPr/>
+          <p:nvPr/>
+        </p:nvSpPr>
+        <p:spPr>
+          <a:xfrm>
+            <a:off x="960120" y="3383280"/>
+            <a:ext cx="3291840" cy="822960"/>
+          </a:xfrm>
+          <a:prstGeom prst="rect">
+            <a:avLst/>
+          </a:prstGeom>
+          <a:noFill/>
+          <a:ln/>
+        </p:spPr>
+        <p:txBody>
+          <a:bodyPr wrap="square" lIns="0" tIns="0" rIns="0" bIns="0" rtlCol="0" anchor="t"/>
           <a:lstStyle/>
           <a:p>
             <a:pPr marL="0" indent="0" algn="l">
-              <a:lnSpc>
-                <a:spcPct val="100000"/>
-              </a:lnSpc>
-              <a:buNone/>
-            </a:pPr>
-            <a:r>
-              <a:rPr lang="en-US" sz="1450" dirty="0">
+              <a:buNone/>
+            </a:pPr>
+            <a:r>
+              <a:rPr lang="en-US" sz="2100" b="1" dirty="0">
                 <a:solidFill>
                   <a:srgbClr val="1E1F24"/>
-                </a:solidFill>
-                <a:latin typeface="Calibri" pitchFamily="34" charset="0"/>
-                <a:ea typeface="Calibri" pitchFamily="34" charset="-122"/>
-                <a:cs typeface="Calibri" pitchFamily="34" charset="-120"/>
-              </a:rPr>
-              <a:t>Nobody has hand-typed a set of pages to check against. No system can be scored, ours or anyone else's.</a:t>
-            </a:r>
-            <a:endParaRPr lang="en-US" sz="1450" dirty="0"/>
-          </a:p>
-        </p:txBody>
-      </p:sp>
-      <p:sp>
-        <p:nvSpPr>
-          <p:cNvPr id="8" name="Shape 6"/>
-          <p:cNvSpPr/>
-          <p:nvPr/>
-        </p:nvSpPr>
-        <p:spPr>
-          <a:xfrm>
-            <a:off x="640080" y="3154680"/>
-            <a:ext cx="10881360" cy="0"/>
-          </a:xfrm>
-          <a:prstGeom prst="line">
-            <a:avLst/>
-          </a:prstGeom>
-          <a:noFill/>
-          <a:ln w="9525">
-            <a:solidFill>
-              <a:srgbClr val="D6D8DD"/>
-            </a:solidFill>
-            <a:prstDash val="solid"/>
-          </a:ln>
-        </p:spPr>
-        <p:txBody>
-          <a:bodyPr/>
-          <a:lstStyle/>
-          <a:p>
-            <a:endParaRPr lang="en-IN"/>
-          </a:p>
-        </p:txBody>
-      </p:sp>
-      <p:sp>
-        <p:nvSpPr>
-          <p:cNvPr id="9" name="Text 7"/>
-          <p:cNvSpPr/>
-          <p:nvPr/>
-        </p:nvSpPr>
-        <p:spPr>
-          <a:xfrm>
-            <a:off x="640080" y="3291840"/>
-            <a:ext cx="502920" cy="640080"/>
-          </a:xfrm>
-          <a:prstGeom prst="rect">
-            <a:avLst/>
-          </a:prstGeom>
-          <a:noFill/>
-          <a:ln/>
-        </p:spPr>
-        <p:txBody>
-          <a:bodyPr wrap="square" lIns="0" tIns="0" rIns="0" bIns="0" rtlCol="0" anchor="ctr"/>
-          <a:lstStyle/>
-          <a:p>
-            <a:pPr marL="0" indent="0" algn="l">
-              <a:buNone/>
-            </a:pPr>
-            <a:r>
-              <a:rPr lang="en-US" sz="3200" b="1" dirty="0">
-                <a:solidFill>
-                  <a:srgbClr val="7A1F2B"/>
                 </a:solidFill>
                 <a:latin typeface="Cambria" pitchFamily="34" charset="0"/>
                 <a:ea typeface="Cambria" pitchFamily="34" charset="-122"/>
                 <a:cs typeface="Cambria" pitchFamily="34" charset="-120"/>
               </a:rPr>
-              <a:t>2</a:t>
-            </a:r>
-            <a:endParaRPr lang="en-US" sz="3200" dirty="0"/>
-          </a:p>
-        </p:txBody>
-      </p:sp>
-      <p:sp>
-        <p:nvSpPr>
-          <p:cNvPr id="10" name="Text 8"/>
-          <p:cNvSpPr/>
-          <p:nvPr/>
-        </p:nvSpPr>
-        <p:spPr>
-          <a:xfrm>
-            <a:off x="1280160" y="3291840"/>
-            <a:ext cx="5852160" cy="822960"/>
-          </a:xfrm>
-          <a:prstGeom prst="rect">
-            <a:avLst/>
-          </a:prstGeom>
-          <a:noFill/>
-          <a:ln/>
-        </p:spPr>
-        <p:txBody>
-          <a:bodyPr wrap="square" lIns="0" tIns="0" rIns="0" bIns="0" rtlCol="0" anchor="ctr"/>
+              <a:t>The master tables</a:t>
+            </a:r>
+            <a:endParaRPr lang="en-US" sz="2100" dirty="0"/>
+          </a:p>
+        </p:txBody>
+      </p:sp>
+      <p:sp>
+        <p:nvSpPr>
+          <p:cNvPr id="9" name="Text 7"/>
+          <p:cNvSpPr/>
+          <p:nvPr/>
+        </p:nvSpPr>
+        <p:spPr>
+          <a:xfrm>
+            <a:off x="4389120" y="3383280"/>
+            <a:ext cx="7680960" cy="822960"/>
+          </a:xfrm>
+          <a:prstGeom prst="rect">
+            <a:avLst/>
+          </a:prstGeom>
+          <a:noFill/>
+          <a:ln/>
+        </p:spPr>
+        <p:txBody>
+          <a:bodyPr wrap="square" lIns="0" tIns="0" rIns="0" bIns="0" rtlCol="0" anchor="t"/>
           <a:lstStyle/>
           <a:p>
             <a:pPr marL="0" indent="0" algn="l">
@@ -3794,45 +3840,38 @@
               <a:buNone/>
             </a:pPr>
             <a:r>
-              <a:rPr lang="en-US" sz="1850" dirty="0">
-                <a:solidFill>
-                  <a:srgbClr val="1E1F24"/>
+              <a:rPr lang="en-US" sz="1900" dirty="0">
+                <a:solidFill>
+                  <a:srgbClr val="44464D"/>
                 </a:solidFill>
                 <a:latin typeface="Calibri" pitchFamily="34" charset="0"/>
                 <a:ea typeface="Calibri" pitchFamily="34" charset="-122"/>
                 <a:cs typeface="Calibri" pitchFamily="34" charset="-120"/>
               </a:rPr>
-              <a:t>We cannot say how often redaction hides too much.</a:t>
-            </a:r>
-            <a:endParaRPr lang="en-US" sz="1850" dirty="0"/>
-          </a:p>
-        </p:txBody>
-      </p:sp>
-      <p:sp>
-        <p:nvSpPr>
-          <p:cNvPr id="11" name="Shape 9"/>
-          <p:cNvSpPr/>
-          <p:nvPr/>
-        </p:nvSpPr>
-        <p:spPr>
-          <a:xfrm>
-            <a:off x="7406640" y="3310128"/>
-            <a:ext cx="4114800" cy="777240"/>
-          </a:xfrm>
-          <a:prstGeom prst="roundRect">
-            <a:avLst>
-              <a:gd name="adj" fmla="val 7059"/>
-            </a:avLst>
+              <a:t>The fallback. The department field is empty on all 62 categories, so this rung can only match on an exact name and rarely answers.</a:t>
+            </a:r>
+            <a:endParaRPr lang="en-US" sz="1900" dirty="0"/>
+          </a:p>
+        </p:txBody>
+      </p:sp>
+      <p:sp>
+        <p:nvSpPr>
+          <p:cNvPr id="10" name="Shape 8"/>
+          <p:cNvSpPr/>
+          <p:nvPr/>
+        </p:nvSpPr>
+        <p:spPr>
+          <a:xfrm>
+            <a:off x="640080" y="4553712"/>
+            <a:ext cx="128016" cy="777240"/>
+          </a:xfrm>
+          <a:prstGeom prst="rect">
+            <a:avLst/>
           </a:prstGeom>
           <a:solidFill>
-            <a:srgbClr val="F4F4F6"/>
+            <a:srgbClr val="7A1F2B"/>
           </a:solidFill>
-          <a:ln w="12700">
-            <a:solidFill>
-              <a:srgbClr val="D6D8DD"/>
-            </a:solidFill>
-            <a:prstDash val="solid"/>
-          </a:ln>
+          <a:ln/>
         </p:spPr>
         <p:txBody>
           <a:bodyPr/>
@@ -3844,128 +3883,62 @@
       </p:sp>
       <p:sp>
         <p:nvSpPr>
-          <p:cNvPr id="12" name="Text 10"/>
-          <p:cNvSpPr/>
-          <p:nvPr/>
-        </p:nvSpPr>
-        <p:spPr>
-          <a:xfrm>
-            <a:off x="7571232" y="3310128"/>
-            <a:ext cx="3794760" cy="777240"/>
-          </a:xfrm>
-          <a:prstGeom prst="rect">
-            <a:avLst/>
-          </a:prstGeom>
-          <a:noFill/>
-          <a:ln/>
-        </p:spPr>
-        <p:txBody>
-          <a:bodyPr wrap="square" lIns="0" tIns="0" rIns="0" bIns="0" rtlCol="0" anchor="ctr"/>
-          <a:lstStyle/>
-          <a:p>
-            <a:r>
-              <a:rPr lang="en-US" sz="1450" dirty="0">
+          <p:cNvPr id="11" name="Text 9"/>
+          <p:cNvSpPr/>
+          <p:nvPr/>
+        </p:nvSpPr>
+        <p:spPr>
+          <a:xfrm>
+            <a:off x="960120" y="4480560"/>
+            <a:ext cx="3291840" cy="822960"/>
+          </a:xfrm>
+          <a:prstGeom prst="rect">
+            <a:avLst/>
+          </a:prstGeom>
+          <a:noFill/>
+          <a:ln/>
+        </p:spPr>
+        <p:txBody>
+          <a:bodyPr wrap="square" lIns="0" tIns="0" rIns="0" bIns="0" rtlCol="0" anchor="t"/>
+          <a:lstStyle/>
+          <a:p>
+            <a:pPr marL="0" indent="0" algn="l">
+              <a:buNone/>
+            </a:pPr>
+            <a:r>
+              <a:rPr lang="en-US" sz="2100" b="1" dirty="0">
                 <a:solidFill>
                   <a:srgbClr val="1E1F24"/>
-                </a:solidFill>
-                <a:latin typeface="Calibri" pitchFamily="34" charset="0"/>
-                <a:ea typeface="Calibri" pitchFamily="34" charset="-122"/>
-                <a:cs typeface="Calibri" pitchFamily="34" charset="-120"/>
-              </a:rPr>
-              <a:t>We marked what should be hidden. We never marked what should not, so a miss and an over-redaction look the same.</a:t>
-            </a:r>
-            <a:endParaRPr lang="en-US" sz="1450" dirty="0"/>
-          </a:p>
-        </p:txBody>
-      </p:sp>
-      <p:sp>
-        <p:nvSpPr>
-          <p:cNvPr id="13" name="Shape 11"/>
-          <p:cNvSpPr/>
-          <p:nvPr/>
-        </p:nvSpPr>
-        <p:spPr>
-          <a:xfrm>
-            <a:off x="640080" y="4251960"/>
-            <a:ext cx="10881360" cy="0"/>
-          </a:xfrm>
-          <a:prstGeom prst="line">
-            <a:avLst/>
-          </a:prstGeom>
-          <a:noFill/>
-          <a:ln w="9525">
-            <a:solidFill>
-              <a:srgbClr val="D6D8DD"/>
-            </a:solidFill>
-            <a:prstDash val="solid"/>
-          </a:ln>
-        </p:spPr>
-        <p:txBody>
-          <a:bodyPr/>
-          <a:lstStyle/>
-          <a:p>
-            <a:endParaRPr lang="en-IN"/>
-          </a:p>
-        </p:txBody>
-      </p:sp>
-      <p:sp>
-        <p:nvSpPr>
-          <p:cNvPr id="14" name="Text 12"/>
-          <p:cNvSpPr/>
-          <p:nvPr/>
-        </p:nvSpPr>
-        <p:spPr>
-          <a:xfrm>
-            <a:off x="640080" y="4389120"/>
-            <a:ext cx="502920" cy="640080"/>
-          </a:xfrm>
-          <a:prstGeom prst="rect">
-            <a:avLst/>
-          </a:prstGeom>
-          <a:noFill/>
-          <a:ln/>
-        </p:spPr>
-        <p:txBody>
-          <a:bodyPr wrap="square" lIns="0" tIns="0" rIns="0" bIns="0" rtlCol="0" anchor="ctr"/>
-          <a:lstStyle/>
-          <a:p>
-            <a:pPr marL="0" indent="0" algn="l">
-              <a:buNone/>
-            </a:pPr>
-            <a:r>
-              <a:rPr lang="en-US" sz="3200" b="1" dirty="0">
-                <a:solidFill>
-                  <a:srgbClr val="7A1F2B"/>
                 </a:solidFill>
                 <a:latin typeface="Cambria" pitchFamily="34" charset="0"/>
                 <a:ea typeface="Cambria" pitchFamily="34" charset="-122"/>
                 <a:cs typeface="Cambria" pitchFamily="34" charset="-120"/>
               </a:rPr>
-              <a:t>3</a:t>
-            </a:r>
-            <a:endParaRPr lang="en-US" sz="3200" dirty="0"/>
-          </a:p>
-        </p:txBody>
-      </p:sp>
-      <p:sp>
-        <p:nvSpPr>
-          <p:cNvPr id="15" name="Text 13"/>
-          <p:cNvSpPr/>
-          <p:nvPr/>
-        </p:nvSpPr>
-        <p:spPr>
-          <a:xfrm>
-            <a:off x="1280160" y="4389120"/>
-            <a:ext cx="5852160" cy="822960"/>
-          </a:xfrm>
-          <a:prstGeom prst="rect">
-            <a:avLst/>
-          </a:prstGeom>
-          <a:noFill/>
-          <a:ln/>
-        </p:spPr>
-        <p:txBody>
-          <a:bodyPr wrap="square" lIns="0" tIns="0" rIns="0" bIns="0" rtlCol="0" anchor="ctr"/>
+              <a:t>A trained model</a:t>
+            </a:r>
+            <a:endParaRPr lang="en-US" sz="2100" dirty="0"/>
+          </a:p>
+        </p:txBody>
+      </p:sp>
+      <p:sp>
+        <p:nvSpPr>
+          <p:cNvPr id="12" name="Text 10"/>
+          <p:cNvSpPr/>
+          <p:nvPr/>
+        </p:nvSpPr>
+        <p:spPr>
+          <a:xfrm>
+            <a:off x="4389120" y="4480560"/>
+            <a:ext cx="7680960" cy="822960"/>
+          </a:xfrm>
+          <a:prstGeom prst="rect">
+            <a:avLst/>
+          </a:prstGeom>
+          <a:noFill/>
+          <a:ln/>
+        </p:spPr>
+        <p:txBody>
+          <a:bodyPr wrap="square" lIns="0" tIns="0" rIns="0" bIns="0" rtlCol="0" anchor="t"/>
           <a:lstStyle/>
           <a:p>
             <a:pPr marL="0" indent="0" algn="l">
@@ -3975,64 +3948,30 @@
               <a:buNone/>
             </a:pPr>
             <a:r>
-              <a:rPr lang="en-US" sz="1850" dirty="0">
-                <a:solidFill>
-                  <a:srgbClr val="1E1F24"/>
+              <a:rPr lang="en-US" sz="1900" dirty="0">
+                <a:solidFill>
+                  <a:srgbClr val="44464D"/>
                 </a:solidFill>
                 <a:latin typeface="Calibri" pitchFamily="34" charset="0"/>
                 <a:ea typeface="Calibri" pitchFamily="34" charset="-122"/>
                 <a:cs typeface="Calibri" pitchFamily="34" charset="-120"/>
               </a:rPr>
-              <a:t>We cannot say it saves officer time.</a:t>
-            </a:r>
-            <a:endParaRPr lang="en-US" sz="1850" dirty="0"/>
-          </a:p>
-        </p:txBody>
-      </p:sp>
-      <p:sp>
-        <p:nvSpPr>
-          <p:cNvPr id="16" name="Shape 14"/>
-          <p:cNvSpPr/>
-          <p:nvPr/>
-        </p:nvSpPr>
-        <p:spPr>
-          <a:xfrm>
-            <a:off x="7406640" y="4407408"/>
-            <a:ext cx="4114800" cy="777240"/>
-          </a:xfrm>
-          <a:prstGeom prst="roundRect">
-            <a:avLst>
-              <a:gd name="adj" fmla="val 7059"/>
-            </a:avLst>
-          </a:prstGeom>
-          <a:solidFill>
-            <a:srgbClr val="F4F4F6"/>
-          </a:solidFill>
-          <a:ln w="12700">
-            <a:solidFill>
-              <a:srgbClr val="D6D8DD"/>
-            </a:solidFill>
-            <a:prstDash val="solid"/>
-          </a:ln>
-        </p:spPr>
-        <p:txBody>
-          <a:bodyPr/>
-          <a:lstStyle/>
-          <a:p>
-            <a:endParaRPr lang="en-IN" b="1"/>
-          </a:p>
-        </p:txBody>
-      </p:sp>
-      <p:sp>
-        <p:nvSpPr>
-          <p:cNvPr id="17" name="Text 15"/>
-          <p:cNvSpPr/>
-          <p:nvPr/>
-        </p:nvSpPr>
-        <p:spPr>
-          <a:xfrm>
-            <a:off x="7571232" y="4407408"/>
-            <a:ext cx="3794760" cy="777240"/>
+              <a:t>Off by default. When it cannot answer it falls back to the rungs above rather than guessing.</a:t>
+            </a:r>
+            <a:endParaRPr lang="en-US" sz="1900" dirty="0"/>
+          </a:p>
+        </p:txBody>
+      </p:sp>
+      <p:sp>
+        <p:nvSpPr>
+          <p:cNvPr id="13" name="Text 11"/>
+          <p:cNvSpPr/>
+          <p:nvPr/>
+        </p:nvSpPr>
+        <p:spPr>
+          <a:xfrm>
+            <a:off x="640080" y="6419088"/>
+            <a:ext cx="5486400" cy="274320"/>
           </a:xfrm>
           <a:prstGeom prst="rect">
             <a:avLst/>
@@ -4045,36 +3984,33 @@
           <a:lstStyle/>
           <a:p>
             <a:pPr marL="0" indent="0" algn="l">
-              <a:lnSpc>
-                <a:spcPct val="100000"/>
-              </a:lnSpc>
-              <a:buNone/>
-            </a:pPr>
-            <a:r>
-              <a:rPr lang="en-US" sz="1450" dirty="0">
-                <a:solidFill>
-                  <a:srgbClr val="1E1F24"/>
+              <a:buNone/>
+            </a:pPr>
+            <a:r>
+              <a:rPr lang="en-US" sz="850" dirty="0">
+                <a:solidFill>
+                  <a:srgbClr val="6C6E76"/>
                 </a:solidFill>
                 <a:latin typeface="Calibri" pitchFamily="34" charset="0"/>
                 <a:ea typeface="Calibri" pitchFamily="34" charset="-122"/>
                 <a:cs typeface="Calibri" pitchFamily="34" charset="-120"/>
               </a:rPr>
-              <a:t>The 10 to 15 minute baseline is self-reported and was never timed. No trial has been run.</a:t>
-            </a:r>
-            <a:endParaRPr lang="en-US" sz="1450" dirty="0"/>
-          </a:p>
-        </p:txBody>
-      </p:sp>
-      <p:sp>
-        <p:nvSpPr>
-          <p:cNvPr id="18" name="Text 16"/>
-          <p:cNvSpPr/>
-          <p:nvPr/>
-        </p:nvSpPr>
-        <p:spPr>
-          <a:xfrm>
-            <a:off x="640080" y="5577840"/>
-            <a:ext cx="10881360" cy="365760"/>
+              <a:t>Data, Policy and Innovation Centre</a:t>
+            </a:r>
+            <a:endParaRPr lang="en-US" sz="850" dirty="0"/>
+          </a:p>
+        </p:txBody>
+      </p:sp>
+      <p:sp>
+        <p:nvSpPr>
+          <p:cNvPr id="14" name="Text 12"/>
+          <p:cNvSpPr/>
+          <p:nvPr/>
+        </p:nvSpPr>
+        <p:spPr>
+          <a:xfrm>
+            <a:off x="6035040" y="6419088"/>
+            <a:ext cx="5486400" cy="274320"/>
           </a:xfrm>
           <a:prstGeom prst="rect">
             <a:avLst/>
@@ -4086,11 +4022,11 @@
           <a:bodyPr wrap="square" lIns="0" tIns="0" rIns="0" bIns="0" rtlCol="0" anchor="ctr"/>
           <a:lstStyle/>
           <a:p>
-            <a:pPr marL="0" indent="0" algn="l">
-              <a:buNone/>
-            </a:pPr>
-            <a:r>
-              <a:rPr lang="en-US" sz="1650" b="1" i="1" dirty="0">
+            <a:pPr marL="0" indent="0" algn="r">
+              <a:buNone/>
+            </a:pPr>
+            <a:r>
+              <a:rPr lang="en-US" sz="850" dirty="0">
                 <a:solidFill>
                   <a:srgbClr val="6C6E76"/>
                 </a:solidFill>
@@ -4098,46 +4034,7 @@
                 <a:ea typeface="Calibri" pitchFamily="34" charset="-122"/>
                 <a:cs typeface="Calibri" pitchFamily="34" charset="-120"/>
               </a:rPr>
-              <a:t>Every figure in this deck was produced by us, on our own data. None of it has been checked by an officer.</a:t>
-            </a:r>
-            <a:endParaRPr lang="en-US" sz="1650" b="1" dirty="0"/>
-          </a:p>
-        </p:txBody>
-      </p:sp>
-      <p:sp>
-        <p:nvSpPr>
-          <p:cNvPr id="19" name="Text 17"/>
-          <p:cNvSpPr/>
-          <p:nvPr/>
-        </p:nvSpPr>
-        <p:spPr>
-          <a:xfrm>
-            <a:off x="640080" y="6419088"/>
-            <a:ext cx="5486400" cy="274320"/>
-          </a:xfrm>
-          <a:prstGeom prst="rect">
-            <a:avLst/>
-          </a:prstGeom>
-          <a:noFill/>
-          <a:ln/>
-        </p:spPr>
-        <p:txBody>
-          <a:bodyPr wrap="square" lIns="0" tIns="0" rIns="0" bIns="0" rtlCol="0" anchor="ctr"/>
-          <a:lstStyle/>
-          <a:p>
-            <a:pPr marL="0" indent="0" algn="l">
-              <a:buNone/>
-            </a:pPr>
-            <a:r>
-              <a:rPr lang="en-US" sz="850" dirty="0">
-                <a:solidFill>
-                  <a:srgbClr val="6C6E76"/>
-                </a:solidFill>
-                <a:latin typeface="Calibri" pitchFamily="34" charset="0"/>
-                <a:ea typeface="Calibri" pitchFamily="34" charset="-122"/>
-                <a:cs typeface="Calibri" pitchFamily="34" charset="-120"/>
-              </a:rPr>
-              <a:t>Data, Policy and Innovation Centre</a:t>
+              <a:t>Government of Odisha  ×  University of Chicago Trust</a:t>
             </a:r>
             <a:endParaRPr lang="en-US" sz="850" dirty="0"/>
           </a:p>
@@ -4145,40 +4042,36 @@
       </p:sp>
       <p:sp>
         <p:nvSpPr>
-          <p:cNvPr id="20" name="Text 18"/>
-          <p:cNvSpPr/>
-          <p:nvPr/>
-        </p:nvSpPr>
-        <p:spPr>
-          <a:xfrm>
-            <a:off x="6035040" y="6419088"/>
-            <a:ext cx="5486400" cy="274320"/>
-          </a:xfrm>
-          <a:prstGeom prst="rect">
-            <a:avLst/>
-          </a:prstGeom>
-          <a:noFill/>
-          <a:ln/>
-        </p:spPr>
-        <p:txBody>
-          <a:bodyPr wrap="square" lIns="0" tIns="0" rIns="0" bIns="0" rtlCol="0" anchor="ctr"/>
-          <a:lstStyle/>
-          <a:p>
-            <a:pPr marL="0" indent="0" algn="r">
-              <a:buNone/>
-            </a:pPr>
-            <a:r>
-              <a:rPr lang="en-US" sz="850" dirty="0">
-                <a:solidFill>
-                  <a:srgbClr val="6C6E76"/>
-                </a:solidFill>
-                <a:latin typeface="Calibri" pitchFamily="34" charset="0"/>
-                <a:ea typeface="Calibri" pitchFamily="34" charset="-122"/>
-                <a:cs typeface="Calibri" pitchFamily="34" charset="-120"/>
-              </a:rPr>
-              <a:t>Government of Odisha  ×  University of Chicago Trust</a:t>
-            </a:r>
-            <a:endParaRPr lang="en-US" sz="850" dirty="0"/>
+          <p:cNvPr id="15" name="TextBox 14"/>
+          <p:cNvSpPr txBox="1"/>
+          <p:nvPr/>
+        </p:nvSpPr>
+        <p:spPr>
+          <a:xfrm>
+            <a:off x="640080" y="5742432"/>
+            <a:ext cx="10881360" cy="384048"/>
+          </a:xfrm>
+          <a:prstGeom prst="rect">
+            <a:avLst/>
+          </a:prstGeom>
+          <a:noFill/>
+        </p:spPr>
+        <p:txBody>
+          <a:bodyPr wrap="square" lIns="0" rIns="0" tIns="0" bIns="0">
+            <a:spAutoFit/>
+          </a:bodyPr>
+          <a:lstStyle/>
+          <a:p>
+            <a:pPr algn="l"/>
+            <a:r>
+              <a:rPr sz="1700" b="1" i="0">
+                <a:solidFill>
+                  <a:srgbClr val="7A1F2B"/>
+                </a:solidFill>
+                <a:latin typeface="Calibri"/>
+              </a:rPr>
+              <a:t>Every rung learns where grievances were sent. None of them knows where a grievance should go.</a:t>
+            </a:r>
           </a:p>
         </p:txBody>
       </p:sp>
@@ -4233,7 +4126,7 @@
                 <a:ea typeface="Calibri" pitchFamily="34" charset="-122"/>
                 <a:cs typeface="Calibri" pitchFamily="34" charset="-120"/>
               </a:rPr>
-              <a:t>THE OUTSIDE OPTION: SARVAM</a:t>
+              <a:t>THE LIMITS</a:t>
             </a:r>
             <a:endParaRPr lang="en-US" sz="1500" dirty="0"/>
           </a:p>
@@ -4272,7 +4165,7 @@
                 <a:ea typeface="Cambria" pitchFamily="34" charset="-122"/>
                 <a:cs typeface="Cambria" pitchFamily="34" charset="-120"/>
               </a:rPr>
-              <a:t>It does more. We have not shown it does better.</a:t>
+              <a:t>What we cannot measure</a:t>
             </a:r>
             <a:endParaRPr lang="en-US" sz="3400" dirty="0"/>
           </a:p>
@@ -4280,14 +4173,53 @@
       </p:sp>
       <p:sp>
         <p:nvSpPr>
+          <p:cNvPr id="4" name="Text 2"/>
+          <p:cNvSpPr/>
+          <p:nvPr/>
+        </p:nvSpPr>
+        <p:spPr>
+          <a:xfrm>
+            <a:off x="640080" y="2194560"/>
+            <a:ext cx="502920" cy="640080"/>
+          </a:xfrm>
+          <a:prstGeom prst="rect">
+            <a:avLst/>
+          </a:prstGeom>
+          <a:noFill/>
+          <a:ln/>
+        </p:spPr>
+        <p:txBody>
+          <a:bodyPr wrap="square" lIns="0" tIns="0" rIns="0" bIns="0" rtlCol="0" anchor="ctr"/>
+          <a:lstStyle/>
+          <a:p>
+            <a:pPr marL="0" indent="0" algn="l">
+              <a:buNone/>
+            </a:pPr>
+            <a:r>
+              <a:rPr lang="en-US" sz="3200" b="1" dirty="0">
+                <a:solidFill>
+                  <a:srgbClr val="7A1F2B"/>
+                </a:solidFill>
+                <a:latin typeface="Cambria" pitchFamily="34" charset="0"/>
+                <a:ea typeface="Cambria" pitchFamily="34" charset="-122"/>
+                <a:cs typeface="Cambria" pitchFamily="34" charset="-120"/>
+              </a:rPr>
+              <a:t>1</a:t>
+            </a:r>
+            <a:endParaRPr lang="en-US" sz="3200" dirty="0"/>
+          </a:p>
+        </p:txBody>
+      </p:sp>
+      <p:sp>
+        <p:nvSpPr>
           <p:cNvPr id="5" name="Text 3"/>
           <p:cNvSpPr/>
           <p:nvPr/>
         </p:nvSpPr>
         <p:spPr>
           <a:xfrm>
-            <a:off x="640080" y="2179321"/>
-            <a:ext cx="10881360" cy="292608"/>
+            <a:off x="1280160" y="2194560"/>
+            <a:ext cx="5852160" cy="822960"/>
           </a:xfrm>
           <a:prstGeom prst="rect">
             <a:avLst/>
@@ -4300,20 +4232,23 @@
           <a:lstStyle/>
           <a:p>
             <a:pPr marL="0" indent="0" algn="l">
-              <a:buNone/>
-            </a:pPr>
-            <a:r>
-              <a:rPr lang="en-US" sz="1350" b="1" kern="0" spc="150" dirty="0">
-                <a:solidFill>
-                  <a:srgbClr val="7A1F2B"/>
+              <a:lnSpc>
+                <a:spcPct val="105000"/>
+              </a:lnSpc>
+              <a:buNone/>
+            </a:pPr>
+            <a:r>
+              <a:rPr lang="en-US" sz="1850" dirty="0">
+                <a:solidFill>
+                  <a:srgbClr val="1E1F24"/>
                 </a:solidFill>
                 <a:latin typeface="Calibri" pitchFamily="34" charset="0"/>
                 <a:ea typeface="Calibri" pitchFamily="34" charset="-122"/>
                 <a:cs typeface="Calibri" pitchFamily="34" charset="-120"/>
               </a:rPr>
-              <a:t>What it does</a:t>
-            </a:r>
-            <a:endParaRPr lang="en-US" sz="1350" dirty="0"/>
+              <a:t>We cannot say how accurately it reads a page.</a:t>
+            </a:r>
+            <a:endParaRPr lang="en-US" sz="1850" dirty="0"/>
           </a:p>
         </p:txBody>
       </p:sp>
@@ -4325,16 +4260,23 @@
         </p:nvSpPr>
         <p:spPr>
           <a:xfrm>
-            <a:off x="640080" y="2663953"/>
-            <a:ext cx="91440" cy="91440"/>
-          </a:xfrm>
-          <a:prstGeom prst="rect">
-            <a:avLst/>
+            <a:off x="7406640" y="2212848"/>
+            <a:ext cx="4114800" cy="777240"/>
+          </a:xfrm>
+          <a:prstGeom prst="roundRect">
+            <a:avLst>
+              <a:gd name="adj" fmla="val 7059"/>
+            </a:avLst>
           </a:prstGeom>
           <a:solidFill>
-            <a:srgbClr val="7A1F2B"/>
+            <a:srgbClr val="F4F4F6"/>
           </a:solidFill>
-          <a:ln/>
+          <a:ln w="12700">
+            <a:solidFill>
+              <a:srgbClr val="D6D8DD"/>
+            </a:solidFill>
+            <a:prstDash val="solid"/>
+          </a:ln>
         </p:spPr>
         <p:txBody>
           <a:bodyPr/>
@@ -4352,24 +4294,27 @@
         </p:nvSpPr>
         <p:spPr>
           <a:xfrm>
-            <a:off x="932688" y="2545081"/>
-            <a:ext cx="10607040" cy="411480"/>
-          </a:xfrm>
-          <a:prstGeom prst="rect">
-            <a:avLst/>
-          </a:prstGeom>
-          <a:noFill/>
-          <a:ln/>
-        </p:spPr>
-        <p:txBody>
-          <a:bodyPr wrap="square" lIns="0" tIns="0" rIns="0" bIns="0" rtlCol="0" anchor="t"/>
+            <a:off x="7571232" y="2212848"/>
+            <a:ext cx="3794760" cy="777240"/>
+          </a:xfrm>
+          <a:prstGeom prst="rect">
+            <a:avLst/>
+          </a:prstGeom>
+          <a:noFill/>
+          <a:ln/>
+        </p:spPr>
+        <p:txBody>
+          <a:bodyPr wrap="square" lIns="0" tIns="0" rIns="0" bIns="0" rtlCol="0" anchor="ctr"/>
           <a:lstStyle/>
           <a:p>
             <a:pPr marL="0" indent="0" algn="l">
-              <a:buNone/>
-            </a:pPr>
-            <a:r>
-              <a:rPr lang="en-US" sz="1800" dirty="0">
+              <a:lnSpc>
+                <a:spcPct val="100000"/>
+              </a:lnSpc>
+              <a:buNone/>
+            </a:pPr>
+            <a:r>
+              <a:rPr lang="en-US" sz="1450" dirty="0">
                 <a:solidFill>
                   <a:srgbClr val="1E1F24"/>
                 </a:solidFill>
@@ -4377,9 +4322,9 @@
                 <a:ea typeface="Calibri" pitchFamily="34" charset="-122"/>
                 <a:cs typeface="Calibri" pitchFamily="34" charset="-120"/>
               </a:rPr>
-              <a:t>One call at ₹1.50 a page returns the text, a category, a one-line summary and the district.</a:t>
-            </a:r>
-            <a:endParaRPr lang="en-US" sz="1800" dirty="0"/>
+              <a:t>Nobody has hand-typed a set of pages to check against. No system can be scored, ours or anyone else's.</a:t>
+            </a:r>
+            <a:endParaRPr lang="en-US" sz="1450" dirty="0"/>
           </a:p>
         </p:txBody>
       </p:sp>
@@ -4391,16 +4336,19 @@
         </p:nvSpPr>
         <p:spPr>
           <a:xfrm>
-            <a:off x="640080" y="3166873"/>
-            <a:ext cx="91440" cy="91440"/>
-          </a:xfrm>
-          <a:prstGeom prst="rect">
-            <a:avLst/>
-          </a:prstGeom>
-          <a:solidFill>
-            <a:srgbClr val="7A1F2B"/>
-          </a:solidFill>
-          <a:ln/>
+            <a:off x="640080" y="3154680"/>
+            <a:ext cx="10881360" cy="0"/>
+          </a:xfrm>
+          <a:prstGeom prst="line">
+            <a:avLst/>
+          </a:prstGeom>
+          <a:noFill/>
+          <a:ln w="9525">
+            <a:solidFill>
+              <a:srgbClr val="D6D8DD"/>
+            </a:solidFill>
+            <a:prstDash val="solid"/>
+          </a:ln>
         </p:spPr>
         <p:txBody>
           <a:bodyPr/>
@@ -4418,24 +4366,66 @@
         </p:nvSpPr>
         <p:spPr>
           <a:xfrm>
-            <a:off x="932688" y="3048001"/>
-            <a:ext cx="10607040" cy="411480"/>
-          </a:xfrm>
-          <a:prstGeom prst="rect">
-            <a:avLst/>
-          </a:prstGeom>
-          <a:noFill/>
-          <a:ln/>
-        </p:spPr>
-        <p:txBody>
-          <a:bodyPr wrap="square" lIns="0" tIns="0" rIns="0" bIns="0" rtlCol="0" anchor="t"/>
+            <a:off x="640080" y="3291840"/>
+            <a:ext cx="502920" cy="640080"/>
+          </a:xfrm>
+          <a:prstGeom prst="rect">
+            <a:avLst/>
+          </a:prstGeom>
+          <a:noFill/>
+          <a:ln/>
+        </p:spPr>
+        <p:txBody>
+          <a:bodyPr wrap="square" lIns="0" tIns="0" rIns="0" bIns="0" rtlCol="0" anchor="ctr"/>
           <a:lstStyle/>
           <a:p>
             <a:pPr marL="0" indent="0" algn="l">
               <a:buNone/>
             </a:pPr>
             <a:r>
-              <a:rPr lang="en-US" sz="1800" dirty="0">
+              <a:rPr lang="en-US" sz="3200" b="1" dirty="0">
+                <a:solidFill>
+                  <a:srgbClr val="7A1F2B"/>
+                </a:solidFill>
+                <a:latin typeface="Cambria" pitchFamily="34" charset="0"/>
+                <a:ea typeface="Cambria" pitchFamily="34" charset="-122"/>
+                <a:cs typeface="Cambria" pitchFamily="34" charset="-120"/>
+              </a:rPr>
+              <a:t>2</a:t>
+            </a:r>
+            <a:endParaRPr lang="en-US" sz="3200" dirty="0"/>
+          </a:p>
+        </p:txBody>
+      </p:sp>
+      <p:sp>
+        <p:nvSpPr>
+          <p:cNvPr id="10" name="Text 8"/>
+          <p:cNvSpPr/>
+          <p:nvPr/>
+        </p:nvSpPr>
+        <p:spPr>
+          <a:xfrm>
+            <a:off x="1280160" y="3291840"/>
+            <a:ext cx="5852160" cy="822960"/>
+          </a:xfrm>
+          <a:prstGeom prst="rect">
+            <a:avLst/>
+          </a:prstGeom>
+          <a:noFill/>
+          <a:ln/>
+        </p:spPr>
+        <p:txBody>
+          <a:bodyPr wrap="square" lIns="0" tIns="0" rIns="0" bIns="0" rtlCol="0" anchor="ctr"/>
+          <a:lstStyle/>
+          <a:p>
+            <a:pPr marL="0" indent="0" algn="l">
+              <a:lnSpc>
+                <a:spcPct val="105000"/>
+              </a:lnSpc>
+              <a:buNone/>
+            </a:pPr>
+            <a:r>
+              <a:rPr lang="en-US" sz="1850" dirty="0">
                 <a:solidFill>
                   <a:srgbClr val="1E1F24"/>
                 </a:solidFill>
@@ -4443,22 +4433,56 @@
                 <a:ea typeface="Calibri" pitchFamily="34" charset="-122"/>
                 <a:cs typeface="Calibri" pitchFamily="34" charset="-120"/>
               </a:rPr>
-              <a:t>It reads 22 Indian languages including Odia. Ours reads English.</a:t>
-            </a:r>
-            <a:endParaRPr lang="en-US" sz="1800" dirty="0"/>
-          </a:p>
-        </p:txBody>
-      </p:sp>
-      <p:sp>
-        <p:nvSpPr>
-          <p:cNvPr id="10" name="Text 8"/>
-          <p:cNvSpPr/>
-          <p:nvPr/>
-        </p:nvSpPr>
-        <p:spPr>
-          <a:xfrm>
-            <a:off x="640080" y="3972025"/>
-            <a:ext cx="10881360" cy="292608"/>
+              <a:t>We cannot say how often redaction hides too much.</a:t>
+            </a:r>
+            <a:endParaRPr lang="en-US" sz="1850" dirty="0"/>
+          </a:p>
+        </p:txBody>
+      </p:sp>
+      <p:sp>
+        <p:nvSpPr>
+          <p:cNvPr id="11" name="Shape 9"/>
+          <p:cNvSpPr/>
+          <p:nvPr/>
+        </p:nvSpPr>
+        <p:spPr>
+          <a:xfrm>
+            <a:off x="7406640" y="3310128"/>
+            <a:ext cx="4114800" cy="777240"/>
+          </a:xfrm>
+          <a:prstGeom prst="roundRect">
+            <a:avLst>
+              <a:gd name="adj" fmla="val 7059"/>
+            </a:avLst>
+          </a:prstGeom>
+          <a:solidFill>
+            <a:srgbClr val="F4F4F6"/>
+          </a:solidFill>
+          <a:ln w="12700">
+            <a:solidFill>
+              <a:srgbClr val="D6D8DD"/>
+            </a:solidFill>
+            <a:prstDash val="solid"/>
+          </a:ln>
+        </p:spPr>
+        <p:txBody>
+          <a:bodyPr/>
+          <a:lstStyle/>
+          <a:p>
+            <a:endParaRPr lang="en-IN"/>
+          </a:p>
+        </p:txBody>
+      </p:sp>
+      <p:sp>
+        <p:nvSpPr>
+          <p:cNvPr id="12" name="Text 10"/>
+          <p:cNvSpPr/>
+          <p:nvPr/>
+        </p:nvSpPr>
+        <p:spPr>
+          <a:xfrm>
+            <a:off x="7571232" y="3310128"/>
+            <a:ext cx="3794760" cy="777240"/>
           </a:xfrm>
           <a:prstGeom prst="rect">
             <a:avLst/>
@@ -4470,21 +4494,87 @@
           <a:bodyPr wrap="square" lIns="0" tIns="0" rIns="0" bIns="0" rtlCol="0" anchor="ctr"/>
           <a:lstStyle/>
           <a:p>
-            <a:pPr marL="0" indent="0" algn="l">
-              <a:buNone/>
-            </a:pPr>
-            <a:r>
-              <a:rPr lang="en-US" sz="1350" b="1" kern="0" spc="150" dirty="0">
-                <a:solidFill>
-                  <a:srgbClr val="7A1F2B"/>
+            <a:r>
+              <a:rPr lang="en-US" sz="1450" dirty="0">
+                <a:solidFill>
+                  <a:srgbClr val="1E1F24"/>
                 </a:solidFill>
                 <a:latin typeface="Calibri" pitchFamily="34" charset="0"/>
                 <a:ea typeface="Calibri" pitchFamily="34" charset="-122"/>
                 <a:cs typeface="Calibri" pitchFamily="34" charset="-120"/>
               </a:rPr>
-              <a:t>What we established</a:t>
-            </a:r>
-            <a:endParaRPr lang="en-US" sz="1350" dirty="0"/>
+              <a:t>We marked what should be hidden. We never marked what should not, so a miss and an over-redaction look the same.</a:t>
+            </a:r>
+            <a:endParaRPr lang="en-US" sz="1450" dirty="0"/>
+          </a:p>
+        </p:txBody>
+      </p:sp>
+      <p:sp>
+        <p:nvSpPr>
+          <p:cNvPr id="13" name="Shape 11"/>
+          <p:cNvSpPr/>
+          <p:nvPr/>
+        </p:nvSpPr>
+        <p:spPr>
+          <a:xfrm>
+            <a:off x="640080" y="4251960"/>
+            <a:ext cx="10881360" cy="0"/>
+          </a:xfrm>
+          <a:prstGeom prst="line">
+            <a:avLst/>
+          </a:prstGeom>
+          <a:noFill/>
+          <a:ln w="9525">
+            <a:solidFill>
+              <a:srgbClr val="D6D8DD"/>
+            </a:solidFill>
+            <a:prstDash val="solid"/>
+          </a:ln>
+        </p:spPr>
+        <p:txBody>
+          <a:bodyPr/>
+          <a:lstStyle/>
+          <a:p>
+            <a:endParaRPr lang="en-IN"/>
+          </a:p>
+        </p:txBody>
+      </p:sp>
+      <p:sp>
+        <p:nvSpPr>
+          <p:cNvPr id="14" name="Text 12"/>
+          <p:cNvSpPr/>
+          <p:nvPr/>
+        </p:nvSpPr>
+        <p:spPr>
+          <a:xfrm>
+            <a:off x="640080" y="4389120"/>
+            <a:ext cx="502920" cy="640080"/>
+          </a:xfrm>
+          <a:prstGeom prst="rect">
+            <a:avLst/>
+          </a:prstGeom>
+          <a:noFill/>
+          <a:ln/>
+        </p:spPr>
+        <p:txBody>
+          <a:bodyPr wrap="square" lIns="0" tIns="0" rIns="0" bIns="0" rtlCol="0" anchor="ctr"/>
+          <a:lstStyle/>
+          <a:p>
+            <a:pPr marL="0" indent="0" algn="l">
+              <a:buNone/>
+            </a:pPr>
+            <a:r>
+              <a:rPr lang="en-US" sz="3200" b="1" dirty="0">
+                <a:solidFill>
+                  <a:srgbClr val="7A1F2B"/>
+                </a:solidFill>
+                <a:latin typeface="Cambria" pitchFamily="34" charset="0"/>
+                <a:ea typeface="Cambria" pitchFamily="34" charset="-122"/>
+                <a:cs typeface="Cambria" pitchFamily="34" charset="-120"/>
+              </a:rPr>
+              <a:t>3</a:t>
+            </a:r>
+            <a:endParaRPr lang="en-US" sz="3200" dirty="0"/>
           </a:p>
         </p:txBody>
       </p:sp>
@@ -4496,8 +4586,8 @@
         </p:nvSpPr>
         <p:spPr>
           <a:xfrm>
-            <a:off x="640080" y="5532120"/>
-            <a:ext cx="9144000" cy="457200"/>
+            <a:off x="1280160" y="4389120"/>
+            <a:ext cx="5852160" cy="822960"/>
           </a:xfrm>
           <a:prstGeom prst="rect">
             <a:avLst/>
@@ -4510,33 +4600,70 @@
           <a:lstStyle/>
           <a:p>
             <a:pPr marL="0" indent="0" algn="l">
-              <a:buNone/>
-            </a:pPr>
-            <a:r>
-              <a:rPr lang="en-US" sz="2000" b="1" i="1" dirty="0">
-                <a:solidFill>
-                  <a:srgbClr val="7A1F2B"/>
+              <a:lnSpc>
+                <a:spcPct val="105000"/>
+              </a:lnSpc>
+              <a:buNone/>
+            </a:pPr>
+            <a:r>
+              <a:rPr lang="en-US" sz="1850" dirty="0">
+                <a:solidFill>
+                  <a:srgbClr val="1E1F24"/>
                 </a:solidFill>
                 <a:latin typeface="Calibri" pitchFamily="34" charset="0"/>
                 <a:ea typeface="Calibri" pitchFamily="34" charset="-122"/>
                 <a:cs typeface="Calibri" pitchFamily="34" charset="-120"/>
               </a:rPr>
-              <a:t>Different is not better. Using it also sends citizen documents outside our control.</a:t>
-            </a:r>
-            <a:endParaRPr lang="en-US" sz="2000" dirty="0"/>
-          </a:p>
-        </p:txBody>
-      </p:sp>
-      <p:sp>
-        <p:nvSpPr>
-          <p:cNvPr id="16" name="Text 14"/>
-          <p:cNvSpPr/>
-          <p:nvPr/>
-        </p:nvSpPr>
-        <p:spPr>
-          <a:xfrm>
-            <a:off x="640080" y="6419088"/>
-            <a:ext cx="5486400" cy="274320"/>
+              <a:t>We cannot say it saves officer time.</a:t>
+            </a:r>
+            <a:endParaRPr lang="en-US" sz="1850" dirty="0"/>
+          </a:p>
+        </p:txBody>
+      </p:sp>
+      <p:sp>
+        <p:nvSpPr>
+          <p:cNvPr id="16" name="Shape 14"/>
+          <p:cNvSpPr/>
+          <p:nvPr/>
+        </p:nvSpPr>
+        <p:spPr>
+          <a:xfrm>
+            <a:off x="7406640" y="4407408"/>
+            <a:ext cx="4114800" cy="777240"/>
+          </a:xfrm>
+          <a:prstGeom prst="roundRect">
+            <a:avLst>
+              <a:gd name="adj" fmla="val 7059"/>
+            </a:avLst>
+          </a:prstGeom>
+          <a:solidFill>
+            <a:srgbClr val="F4F4F6"/>
+          </a:solidFill>
+          <a:ln w="12700">
+            <a:solidFill>
+              <a:srgbClr val="D6D8DD"/>
+            </a:solidFill>
+            <a:prstDash val="solid"/>
+          </a:ln>
+        </p:spPr>
+        <p:txBody>
+          <a:bodyPr/>
+          <a:lstStyle/>
+          <a:p>
+            <a:endParaRPr lang="en-IN" b="1"/>
+          </a:p>
+        </p:txBody>
+      </p:sp>
+      <p:sp>
+        <p:nvSpPr>
+          <p:cNvPr id="17" name="Text 15"/>
+          <p:cNvSpPr/>
+          <p:nvPr/>
+        </p:nvSpPr>
+        <p:spPr>
+          <a:xfrm>
+            <a:off x="7571232" y="4407408"/>
+            <a:ext cx="3794760" cy="777240"/>
           </a:xfrm>
           <a:prstGeom prst="rect">
             <a:avLst/>
@@ -4549,33 +4676,36 @@
           <a:lstStyle/>
           <a:p>
             <a:pPr marL="0" indent="0" algn="l">
-              <a:buNone/>
-            </a:pPr>
-            <a:r>
-              <a:rPr lang="en-US" sz="850" dirty="0">
-                <a:solidFill>
-                  <a:srgbClr val="6C6E76"/>
+              <a:lnSpc>
+                <a:spcPct val="100000"/>
+              </a:lnSpc>
+              <a:buNone/>
+            </a:pPr>
+            <a:r>
+              <a:rPr lang="en-US" sz="1450" dirty="0">
+                <a:solidFill>
+                  <a:srgbClr val="1E1F24"/>
                 </a:solidFill>
                 <a:latin typeface="Calibri" pitchFamily="34" charset="0"/>
                 <a:ea typeface="Calibri" pitchFamily="34" charset="-122"/>
                 <a:cs typeface="Calibri" pitchFamily="34" charset="-120"/>
               </a:rPr>
-              <a:t>Data, Policy and Innovation Centre</a:t>
-            </a:r>
-            <a:endParaRPr lang="en-US" sz="850" dirty="0"/>
-          </a:p>
-        </p:txBody>
-      </p:sp>
-      <p:sp>
-        <p:nvSpPr>
-          <p:cNvPr id="17" name="Text 15"/>
-          <p:cNvSpPr/>
-          <p:nvPr/>
-        </p:nvSpPr>
-        <p:spPr>
-          <a:xfrm>
-            <a:off x="6035040" y="6419088"/>
-            <a:ext cx="5486400" cy="274320"/>
+              <a:t>The 10 to 15 minute baseline is self-reported and was never timed. No trial has been run.</a:t>
+            </a:r>
+            <a:endParaRPr lang="en-US" sz="1450" dirty="0"/>
+          </a:p>
+        </p:txBody>
+      </p:sp>
+      <p:sp>
+        <p:nvSpPr>
+          <p:cNvPr id="18" name="Text 16"/>
+          <p:cNvSpPr/>
+          <p:nvPr/>
+        </p:nvSpPr>
+        <p:spPr>
+          <a:xfrm>
+            <a:off x="640080" y="5577840"/>
+            <a:ext cx="10881360" cy="365760"/>
           </a:xfrm>
           <a:prstGeom prst="rect">
             <a:avLst/>
@@ -4587,11 +4717,11 @@
           <a:bodyPr wrap="square" lIns="0" tIns="0" rIns="0" bIns="0" rtlCol="0" anchor="ctr"/>
           <a:lstStyle/>
           <a:p>
-            <a:pPr marL="0" indent="0" algn="r">
-              <a:buNone/>
-            </a:pPr>
-            <a:r>
-              <a:rPr lang="en-US" sz="850" dirty="0">
+            <a:pPr marL="0" indent="0" algn="l">
+              <a:buNone/>
+            </a:pPr>
+            <a:r>
+              <a:rPr lang="en-US" sz="1650" b="1" i="1" dirty="0">
                 <a:solidFill>
                   <a:srgbClr val="6C6E76"/>
                 </a:solidFill>
@@ -4599,242 +4729,87 @@
                 <a:ea typeface="Calibri" pitchFamily="34" charset="-122"/>
                 <a:cs typeface="Calibri" pitchFamily="34" charset="-120"/>
               </a:rPr>
-              <a:t>Government of Odisha  ×  University of Chicago Trust</a:t>
-            </a:r>
-            <a:endParaRPr lang="en-US" sz="850" dirty="0"/>
-          </a:p>
-        </p:txBody>
-      </p:sp>
-      <p:sp>
-        <p:nvSpPr>
-          <p:cNvPr id="27" name="Shape 3">
-            <a:extLst>
-              <a:ext uri="{FF2B5EF4-FFF2-40B4-BE49-F238E27FC236}">
-                <a16:creationId xmlns:a16="http://schemas.microsoft.com/office/drawing/2014/main" id="{8EA7243F-3A2E-791F-90D8-11B33EB858C8}"/>
-              </a:ext>
-            </a:extLst>
-          </p:cNvPr>
-          <p:cNvSpPr/>
-          <p:nvPr/>
-        </p:nvSpPr>
-        <p:spPr>
-          <a:xfrm>
-            <a:off x="632059" y="3571929"/>
-            <a:ext cx="91440" cy="91440"/>
-          </a:xfrm>
-          <a:prstGeom prst="rect">
-            <a:avLst/>
-          </a:prstGeom>
-          <a:solidFill>
-            <a:srgbClr val="7A1F2B"/>
-          </a:solidFill>
-          <a:ln/>
-        </p:spPr>
-        <p:txBody>
-          <a:bodyPr/>
-          <a:lstStyle/>
-          <a:p>
-            <a:endParaRPr lang="en-IN" dirty="0"/>
-          </a:p>
-        </p:txBody>
-      </p:sp>
-      <p:sp>
-        <p:nvSpPr>
-          <p:cNvPr id="29" name="Text 4">
-            <a:extLst>
-              <a:ext uri="{FF2B5EF4-FFF2-40B4-BE49-F238E27FC236}">
-                <a16:creationId xmlns:a16="http://schemas.microsoft.com/office/drawing/2014/main" id="{9F020A29-8C39-EAFD-C8B8-DBAB2A5F634C}"/>
-              </a:ext>
-            </a:extLst>
-          </p:cNvPr>
-          <p:cNvSpPr/>
-          <p:nvPr/>
-        </p:nvSpPr>
-        <p:spPr>
-          <a:xfrm>
-            <a:off x="924667" y="3453057"/>
-            <a:ext cx="10607040" cy="411480"/>
-          </a:xfrm>
-          <a:prstGeom prst="rect">
-            <a:avLst/>
-          </a:prstGeom>
-          <a:noFill/>
-          <a:ln/>
-        </p:spPr>
-        <p:txBody>
-          <a:bodyPr wrap="square" lIns="0" tIns="0" rIns="0" bIns="0" rtlCol="0" anchor="t"/>
+              <a:t>Every figure in this deck was produced by us, on our own data. None of it has been checked by an officer.</a:t>
+            </a:r>
+            <a:endParaRPr lang="en-US" sz="1650" b="1" dirty="0"/>
+          </a:p>
+        </p:txBody>
+      </p:sp>
+      <p:sp>
+        <p:nvSpPr>
+          <p:cNvPr id="19" name="Text 17"/>
+          <p:cNvSpPr/>
+          <p:nvPr/>
+        </p:nvSpPr>
+        <p:spPr>
+          <a:xfrm>
+            <a:off x="640080" y="6419088"/>
+            <a:ext cx="5486400" cy="274320"/>
+          </a:xfrm>
+          <a:prstGeom prst="rect">
+            <a:avLst/>
+          </a:prstGeom>
+          <a:noFill/>
+          <a:ln/>
+        </p:spPr>
+        <p:txBody>
+          <a:bodyPr wrap="square" lIns="0" tIns="0" rIns="0" bIns="0" rtlCol="0" anchor="ctr"/>
           <a:lstStyle/>
           <a:p>
             <a:pPr marL="0" indent="0" algn="l">
               <a:buNone/>
             </a:pPr>
             <a:r>
-              <a:rPr lang="en-US" sz="1800" dirty="0">
-                <a:solidFill>
-                  <a:srgbClr val="1E1F24"/>
+              <a:rPr lang="en-US" sz="850" dirty="0">
+                <a:solidFill>
+                  <a:srgbClr val="6C6E76"/>
                 </a:solidFill>
                 <a:latin typeface="Calibri" pitchFamily="34" charset="0"/>
                 <a:ea typeface="Calibri" pitchFamily="34" charset="-122"/>
                 <a:cs typeface="Calibri" pitchFamily="34" charset="-120"/>
               </a:rPr>
-              <a:t>It reads handwriting. Ours does not.</a:t>
-            </a:r>
-            <a:endParaRPr lang="en-US" sz="1800" dirty="0"/>
-          </a:p>
-        </p:txBody>
-      </p:sp>
-      <p:sp>
-        <p:nvSpPr>
-          <p:cNvPr id="31" name="Shape 8">
-            <a:extLst>
-              <a:ext uri="{FF2B5EF4-FFF2-40B4-BE49-F238E27FC236}">
-                <a16:creationId xmlns:a16="http://schemas.microsoft.com/office/drawing/2014/main" id="{25210A73-5BE3-463C-04D8-421B6ACD8FD7}"/>
-              </a:ext>
-            </a:extLst>
-          </p:cNvPr>
-          <p:cNvSpPr/>
-          <p:nvPr/>
-        </p:nvSpPr>
-        <p:spPr>
-          <a:xfrm>
-            <a:off x="632059" y="4458260"/>
-            <a:ext cx="91440" cy="91440"/>
-          </a:xfrm>
-          <a:prstGeom prst="rect">
-            <a:avLst/>
-          </a:prstGeom>
-          <a:solidFill>
-            <a:srgbClr val="7A1F2B"/>
-          </a:solidFill>
-          <a:ln/>
-        </p:spPr>
-        <p:txBody>
-          <a:bodyPr/>
-          <a:lstStyle/>
-          <a:p>
-            <a:endParaRPr lang="en-IN"/>
-          </a:p>
-        </p:txBody>
-      </p:sp>
-      <p:sp>
-        <p:nvSpPr>
-          <p:cNvPr id="33" name="Text 9">
-            <a:extLst>
-              <a:ext uri="{FF2B5EF4-FFF2-40B4-BE49-F238E27FC236}">
-                <a16:creationId xmlns:a16="http://schemas.microsoft.com/office/drawing/2014/main" id="{A6157D09-2797-0B89-7747-CE5934045003}"/>
-              </a:ext>
-            </a:extLst>
-          </p:cNvPr>
-          <p:cNvSpPr/>
-          <p:nvPr/>
-        </p:nvSpPr>
-        <p:spPr>
-          <a:xfrm>
-            <a:off x="924667" y="4339388"/>
-            <a:ext cx="10607040" cy="411480"/>
-          </a:xfrm>
-          <a:prstGeom prst="rect">
-            <a:avLst/>
-          </a:prstGeom>
-          <a:noFill/>
-          <a:ln/>
-        </p:spPr>
-        <p:txBody>
-          <a:bodyPr wrap="square" lIns="0" tIns="0" rIns="0" bIns="0" rtlCol="0" anchor="t"/>
-          <a:lstStyle/>
-          <a:p>
-            <a:pPr marL="0" indent="0" algn="l">
-              <a:buNone/>
-            </a:pPr>
-            <a:r>
-              <a:rPr lang="en-US" sz="1800" dirty="0">
-                <a:solidFill>
-                  <a:srgbClr val="1E1F24"/>
+              <a:t>Data, Policy and Innovation Centre</a:t>
+            </a:r>
+            <a:endParaRPr lang="en-US" sz="850" dirty="0"/>
+          </a:p>
+        </p:txBody>
+      </p:sp>
+      <p:sp>
+        <p:nvSpPr>
+          <p:cNvPr id="20" name="Text 18"/>
+          <p:cNvSpPr/>
+          <p:nvPr/>
+        </p:nvSpPr>
+        <p:spPr>
+          <a:xfrm>
+            <a:off x="6035040" y="6419088"/>
+            <a:ext cx="5486400" cy="274320"/>
+          </a:xfrm>
+          <a:prstGeom prst="rect">
+            <a:avLst/>
+          </a:prstGeom>
+          <a:noFill/>
+          <a:ln/>
+        </p:spPr>
+        <p:txBody>
+          <a:bodyPr wrap="square" lIns="0" tIns="0" rIns="0" bIns="0" rtlCol="0" anchor="ctr"/>
+          <a:lstStyle/>
+          <a:p>
+            <a:pPr marL="0" indent="0" algn="r">
+              <a:buNone/>
+            </a:pPr>
+            <a:r>
+              <a:rPr lang="en-US" sz="850" dirty="0">
+                <a:solidFill>
+                  <a:srgbClr val="6C6E76"/>
                 </a:solidFill>
                 <a:latin typeface="Calibri" pitchFamily="34" charset="0"/>
                 <a:ea typeface="Calibri" pitchFamily="34" charset="-122"/>
                 <a:cs typeface="Calibri" pitchFamily="34" charset="-120"/>
               </a:rPr>
-              <a:t>On all 61 pages we compared, the two systems produced different text.</a:t>
-            </a:r>
-            <a:endParaRPr lang="en-US" sz="1800" dirty="0"/>
-          </a:p>
-        </p:txBody>
-      </p:sp>
-      <p:sp>
-        <p:nvSpPr>
-          <p:cNvPr id="35" name="Shape 10">
-            <a:extLst>
-              <a:ext uri="{FF2B5EF4-FFF2-40B4-BE49-F238E27FC236}">
-                <a16:creationId xmlns:a16="http://schemas.microsoft.com/office/drawing/2014/main" id="{16BEB2B2-75AE-B017-BEB6-8D7DF2D87DD6}"/>
-              </a:ext>
-            </a:extLst>
-          </p:cNvPr>
-          <p:cNvSpPr/>
-          <p:nvPr/>
-        </p:nvSpPr>
-        <p:spPr>
-          <a:xfrm>
-            <a:off x="632059" y="4961180"/>
-            <a:ext cx="91440" cy="91440"/>
-          </a:xfrm>
-          <a:prstGeom prst="rect">
-            <a:avLst/>
-          </a:prstGeom>
-          <a:solidFill>
-            <a:srgbClr val="7A1F2B"/>
-          </a:solidFill>
-          <a:ln/>
-        </p:spPr>
-        <p:txBody>
-          <a:bodyPr/>
-          <a:lstStyle/>
-          <a:p>
-            <a:endParaRPr lang="en-IN"/>
-          </a:p>
-        </p:txBody>
-      </p:sp>
-      <p:sp>
-        <p:nvSpPr>
-          <p:cNvPr id="37" name="Text 11">
-            <a:extLst>
-              <a:ext uri="{FF2B5EF4-FFF2-40B4-BE49-F238E27FC236}">
-                <a16:creationId xmlns:a16="http://schemas.microsoft.com/office/drawing/2014/main" id="{E4B7C2E5-1571-8403-3E23-54FAD9D0D9A0}"/>
-              </a:ext>
-            </a:extLst>
-          </p:cNvPr>
-          <p:cNvSpPr/>
-          <p:nvPr/>
-        </p:nvSpPr>
-        <p:spPr>
-          <a:xfrm>
-            <a:off x="924667" y="4842308"/>
-            <a:ext cx="10607040" cy="411480"/>
-          </a:xfrm>
-          <a:prstGeom prst="rect">
-            <a:avLst/>
-          </a:prstGeom>
-          <a:noFill/>
-          <a:ln/>
-        </p:spPr>
-        <p:txBody>
-          <a:bodyPr wrap="square" lIns="0" tIns="0" rIns="0" bIns="0" rtlCol="0" anchor="t"/>
-          <a:lstStyle/>
-          <a:p>
-            <a:pPr marL="0" indent="0" algn="l">
-              <a:buNone/>
-            </a:pPr>
-            <a:r>
-              <a:rPr lang="en-US" sz="1800" dirty="0">
-                <a:solidFill>
-                  <a:srgbClr val="1E1F24"/>
-                </a:solidFill>
-                <a:latin typeface="Calibri" pitchFamily="34" charset="0"/>
-                <a:ea typeface="Calibri" pitchFamily="34" charset="-122"/>
-                <a:cs typeface="Calibri" pitchFamily="34" charset="-120"/>
-              </a:rPr>
-              <a:t>The category and summary it returned were never graded against anything.</a:t>
-            </a:r>
+              <a:t>Government of Odisha  ×  University of Chicago Trust</a:t>
+            </a:r>
+            <a:endParaRPr lang="en-US" sz="850" dirty="0"/>
           </a:p>
         </p:txBody>
       </p:sp>
@@ -4847,6 +4822,662 @@
 </file>
 
 <file path=ppt/slides/slide20.xml><?xml version="1.0" encoding="utf-8"?>
+<p:sld xmlns:a="http://schemas.openxmlformats.org/drawingml/2006/main" xmlns:p="http://schemas.openxmlformats.org/presentationml/2006/main" xmlns:r="http://schemas.openxmlformats.org/officeDocument/2006/relationships">
+  <p:cSld>
+    <p:spTree>
+      <p:nvGrpSpPr>
+        <p:cNvPr id="1" name=""/>
+        <p:cNvGrpSpPr/>
+        <p:nvPr/>
+      </p:nvGrpSpPr>
+      <p:grpSpPr/>
+      <p:sp>
+        <p:nvSpPr>
+          <p:cNvPr id="2" name="Text 0"/>
+          <p:cNvSpPr/>
+          <p:nvPr/>
+        </p:nvSpPr>
+        <p:spPr>
+          <a:xfrm>
+            <a:off x="640080" y="457200"/>
+            <a:ext cx="10881360" cy="320040"/>
+          </a:xfrm>
+          <a:prstGeom prst="rect">
+            <a:avLst/>
+          </a:prstGeom>
+          <a:noFill/>
+          <a:ln/>
+        </p:spPr>
+        <p:txBody>
+          <a:bodyPr wrap="square" lIns="0" tIns="0" rIns="0" bIns="0" rtlCol="0" anchor="ctr"/>
+          <a:lstStyle/>
+          <a:p>
+            <a:pPr marL="0" indent="0" algn="l">
+              <a:buNone/>
+            </a:pPr>
+            <a:r>
+              <a:rPr lang="en-US" sz="1500" b="1" kern="0" spc="200" dirty="0">
+                <a:solidFill>
+                  <a:srgbClr val="7A1F2B"/>
+                </a:solidFill>
+                <a:latin typeface="Calibri" pitchFamily="34" charset="0"/>
+                <a:ea typeface="Calibri" pitchFamily="34" charset="-122"/>
+                <a:cs typeface="Calibri" pitchFamily="34" charset="-120"/>
+              </a:rPr>
+              <a:t>THE OUTSIDE OPTION: SARVAM</a:t>
+            </a:r>
+            <a:endParaRPr lang="en-US" sz="1500" dirty="0"/>
+          </a:p>
+        </p:txBody>
+      </p:sp>
+      <p:sp>
+        <p:nvSpPr>
+          <p:cNvPr id="3" name="Text 1"/>
+          <p:cNvSpPr/>
+          <p:nvPr/>
+        </p:nvSpPr>
+        <p:spPr>
+          <a:xfrm>
+            <a:off x="640080" y="868680"/>
+            <a:ext cx="10881360" cy="914400"/>
+          </a:xfrm>
+          <a:prstGeom prst="rect">
+            <a:avLst/>
+          </a:prstGeom>
+          <a:noFill/>
+          <a:ln/>
+        </p:spPr>
+        <p:txBody>
+          <a:bodyPr wrap="square" lIns="0" tIns="0" rIns="0" bIns="0" rtlCol="0" anchor="ctr"/>
+          <a:lstStyle/>
+          <a:p>
+            <a:pPr marL="0" indent="0" algn="l">
+              <a:buNone/>
+            </a:pPr>
+            <a:r>
+              <a:rPr lang="en-US" sz="3400" b="1" dirty="0">
+                <a:solidFill>
+                  <a:srgbClr val="1E1F24"/>
+                </a:solidFill>
+                <a:latin typeface="Cambria" pitchFamily="34" charset="0"/>
+                <a:ea typeface="Cambria" pitchFamily="34" charset="-122"/>
+                <a:cs typeface="Cambria" pitchFamily="34" charset="-120"/>
+              </a:rPr>
+              <a:t>It does more. We have not shown it does better.</a:t>
+            </a:r>
+            <a:endParaRPr lang="en-US" sz="3400" dirty="0"/>
+          </a:p>
+        </p:txBody>
+      </p:sp>
+      <p:sp>
+        <p:nvSpPr>
+          <p:cNvPr id="5" name="Text 3"/>
+          <p:cNvSpPr/>
+          <p:nvPr/>
+        </p:nvSpPr>
+        <p:spPr>
+          <a:xfrm>
+            <a:off x="640080" y="2179321"/>
+            <a:ext cx="10881360" cy="292608"/>
+          </a:xfrm>
+          <a:prstGeom prst="rect">
+            <a:avLst/>
+          </a:prstGeom>
+          <a:noFill/>
+          <a:ln/>
+        </p:spPr>
+        <p:txBody>
+          <a:bodyPr wrap="square" lIns="0" tIns="0" rIns="0" bIns="0" rtlCol="0" anchor="ctr"/>
+          <a:lstStyle/>
+          <a:p>
+            <a:pPr marL="0" indent="0" algn="l">
+              <a:buNone/>
+            </a:pPr>
+            <a:r>
+              <a:rPr lang="en-US" sz="1350" b="1" kern="0" spc="150" dirty="0">
+                <a:solidFill>
+                  <a:srgbClr val="7A1F2B"/>
+                </a:solidFill>
+                <a:latin typeface="Calibri" pitchFamily="34" charset="0"/>
+                <a:ea typeface="Calibri" pitchFamily="34" charset="-122"/>
+                <a:cs typeface="Calibri" pitchFamily="34" charset="-120"/>
+              </a:rPr>
+              <a:t>What it does</a:t>
+            </a:r>
+            <a:endParaRPr lang="en-US" sz="1350" dirty="0"/>
+          </a:p>
+        </p:txBody>
+      </p:sp>
+      <p:sp>
+        <p:nvSpPr>
+          <p:cNvPr id="6" name="Shape 4"/>
+          <p:cNvSpPr/>
+          <p:nvPr/>
+        </p:nvSpPr>
+        <p:spPr>
+          <a:xfrm>
+            <a:off x="640080" y="2663953"/>
+            <a:ext cx="91440" cy="91440"/>
+          </a:xfrm>
+          <a:prstGeom prst="rect">
+            <a:avLst/>
+          </a:prstGeom>
+          <a:solidFill>
+            <a:srgbClr val="7A1F2B"/>
+          </a:solidFill>
+          <a:ln/>
+        </p:spPr>
+        <p:txBody>
+          <a:bodyPr/>
+          <a:lstStyle/>
+          <a:p>
+            <a:endParaRPr lang="en-IN"/>
+          </a:p>
+        </p:txBody>
+      </p:sp>
+      <p:sp>
+        <p:nvSpPr>
+          <p:cNvPr id="7" name="Text 5"/>
+          <p:cNvSpPr/>
+          <p:nvPr/>
+        </p:nvSpPr>
+        <p:spPr>
+          <a:xfrm>
+            <a:off x="932688" y="2545081"/>
+            <a:ext cx="10607040" cy="411480"/>
+          </a:xfrm>
+          <a:prstGeom prst="rect">
+            <a:avLst/>
+          </a:prstGeom>
+          <a:noFill/>
+          <a:ln/>
+        </p:spPr>
+        <p:txBody>
+          <a:bodyPr wrap="square" lIns="0" tIns="0" rIns="0" bIns="0" rtlCol="0" anchor="t"/>
+          <a:lstStyle/>
+          <a:p>
+            <a:pPr marL="0" indent="0" algn="l">
+              <a:buNone/>
+            </a:pPr>
+            <a:r>
+              <a:rPr lang="en-US" sz="1800" dirty="0">
+                <a:solidFill>
+                  <a:srgbClr val="1E1F24"/>
+                </a:solidFill>
+                <a:latin typeface="Calibri" pitchFamily="34" charset="0"/>
+                <a:ea typeface="Calibri" pitchFamily="34" charset="-122"/>
+                <a:cs typeface="Calibri" pitchFamily="34" charset="-120"/>
+              </a:rPr>
+              <a:t>One call at ₹1.50 a page returns the text, a category, a one-line summary and the district.</a:t>
+            </a:r>
+            <a:endParaRPr lang="en-US" sz="1800" dirty="0"/>
+          </a:p>
+        </p:txBody>
+      </p:sp>
+      <p:sp>
+        <p:nvSpPr>
+          <p:cNvPr id="8" name="Shape 6"/>
+          <p:cNvSpPr/>
+          <p:nvPr/>
+        </p:nvSpPr>
+        <p:spPr>
+          <a:xfrm>
+            <a:off x="640080" y="3166873"/>
+            <a:ext cx="91440" cy="91440"/>
+          </a:xfrm>
+          <a:prstGeom prst="rect">
+            <a:avLst/>
+          </a:prstGeom>
+          <a:solidFill>
+            <a:srgbClr val="7A1F2B"/>
+          </a:solidFill>
+          <a:ln/>
+        </p:spPr>
+        <p:txBody>
+          <a:bodyPr/>
+          <a:lstStyle/>
+          <a:p>
+            <a:endParaRPr lang="en-IN"/>
+          </a:p>
+        </p:txBody>
+      </p:sp>
+      <p:sp>
+        <p:nvSpPr>
+          <p:cNvPr id="9" name="Text 7"/>
+          <p:cNvSpPr/>
+          <p:nvPr/>
+        </p:nvSpPr>
+        <p:spPr>
+          <a:xfrm>
+            <a:off x="932688" y="3048001"/>
+            <a:ext cx="10607040" cy="411480"/>
+          </a:xfrm>
+          <a:prstGeom prst="rect">
+            <a:avLst/>
+          </a:prstGeom>
+          <a:noFill/>
+          <a:ln/>
+        </p:spPr>
+        <p:txBody>
+          <a:bodyPr wrap="square" lIns="0" tIns="0" rIns="0" bIns="0" rtlCol="0" anchor="t"/>
+          <a:lstStyle/>
+          <a:p>
+            <a:pPr marL="0" indent="0" algn="l">
+              <a:buNone/>
+            </a:pPr>
+            <a:r>
+              <a:rPr lang="en-US" sz="1800" dirty="0">
+                <a:solidFill>
+                  <a:srgbClr val="1E1F24"/>
+                </a:solidFill>
+                <a:latin typeface="Calibri" pitchFamily="34" charset="0"/>
+                <a:ea typeface="Calibri" pitchFamily="34" charset="-122"/>
+                <a:cs typeface="Calibri" pitchFamily="34" charset="-120"/>
+              </a:rPr>
+              <a:t>It reads 22 Indian languages including Odia. Ours reads English.</a:t>
+            </a:r>
+            <a:endParaRPr lang="en-US" sz="1800" dirty="0"/>
+          </a:p>
+        </p:txBody>
+      </p:sp>
+      <p:sp>
+        <p:nvSpPr>
+          <p:cNvPr id="10" name="Text 8"/>
+          <p:cNvSpPr/>
+          <p:nvPr/>
+        </p:nvSpPr>
+        <p:spPr>
+          <a:xfrm>
+            <a:off x="640080" y="3972025"/>
+            <a:ext cx="10881360" cy="292608"/>
+          </a:xfrm>
+          <a:prstGeom prst="rect">
+            <a:avLst/>
+          </a:prstGeom>
+          <a:noFill/>
+          <a:ln/>
+        </p:spPr>
+        <p:txBody>
+          <a:bodyPr wrap="square" lIns="0" tIns="0" rIns="0" bIns="0" rtlCol="0" anchor="ctr"/>
+          <a:lstStyle/>
+          <a:p>
+            <a:pPr marL="0" indent="0" algn="l">
+              <a:buNone/>
+            </a:pPr>
+            <a:r>
+              <a:rPr lang="en-US" sz="1350" b="1" kern="0" spc="150" dirty="0">
+                <a:solidFill>
+                  <a:srgbClr val="7A1F2B"/>
+                </a:solidFill>
+                <a:latin typeface="Calibri" pitchFamily="34" charset="0"/>
+                <a:ea typeface="Calibri" pitchFamily="34" charset="-122"/>
+                <a:cs typeface="Calibri" pitchFamily="34" charset="-120"/>
+              </a:rPr>
+              <a:t>What we established</a:t>
+            </a:r>
+            <a:endParaRPr lang="en-US" sz="1350" dirty="0"/>
+          </a:p>
+        </p:txBody>
+      </p:sp>
+      <p:sp>
+        <p:nvSpPr>
+          <p:cNvPr id="15" name="Text 13"/>
+          <p:cNvSpPr/>
+          <p:nvPr/>
+        </p:nvSpPr>
+        <p:spPr>
+          <a:xfrm>
+            <a:off x="640080" y="5532120"/>
+            <a:ext cx="9144000" cy="457200"/>
+          </a:xfrm>
+          <a:prstGeom prst="rect">
+            <a:avLst/>
+          </a:prstGeom>
+          <a:noFill/>
+          <a:ln/>
+        </p:spPr>
+        <p:txBody>
+          <a:bodyPr wrap="square" lIns="0" tIns="0" rIns="0" bIns="0" rtlCol="0" anchor="ctr"/>
+          <a:lstStyle/>
+          <a:p>
+            <a:pPr marL="0" indent="0" algn="l">
+              <a:buNone/>
+            </a:pPr>
+            <a:r>
+              <a:rPr lang="en-US" sz="2000" b="1" i="1" dirty="0">
+                <a:solidFill>
+                  <a:srgbClr val="7A1F2B"/>
+                </a:solidFill>
+                <a:latin typeface="Calibri" pitchFamily="34" charset="0"/>
+                <a:ea typeface="Calibri" pitchFamily="34" charset="-122"/>
+                <a:cs typeface="Calibri" pitchFamily="34" charset="-120"/>
+              </a:rPr>
+              <a:t>Different is not better. Using it also sends citizen documents outside our control.</a:t>
+            </a:r>
+            <a:endParaRPr lang="en-US" sz="2000" dirty="0"/>
+          </a:p>
+        </p:txBody>
+      </p:sp>
+      <p:sp>
+        <p:nvSpPr>
+          <p:cNvPr id="16" name="Text 14"/>
+          <p:cNvSpPr/>
+          <p:nvPr/>
+        </p:nvSpPr>
+        <p:spPr>
+          <a:xfrm>
+            <a:off x="640080" y="6419088"/>
+            <a:ext cx="5486400" cy="274320"/>
+          </a:xfrm>
+          <a:prstGeom prst="rect">
+            <a:avLst/>
+          </a:prstGeom>
+          <a:noFill/>
+          <a:ln/>
+        </p:spPr>
+        <p:txBody>
+          <a:bodyPr wrap="square" lIns="0" tIns="0" rIns="0" bIns="0" rtlCol="0" anchor="ctr"/>
+          <a:lstStyle/>
+          <a:p>
+            <a:pPr marL="0" indent="0" algn="l">
+              <a:buNone/>
+            </a:pPr>
+            <a:r>
+              <a:rPr lang="en-US" sz="850" dirty="0">
+                <a:solidFill>
+                  <a:srgbClr val="6C6E76"/>
+                </a:solidFill>
+                <a:latin typeface="Calibri" pitchFamily="34" charset="0"/>
+                <a:ea typeface="Calibri" pitchFamily="34" charset="-122"/>
+                <a:cs typeface="Calibri" pitchFamily="34" charset="-120"/>
+              </a:rPr>
+              <a:t>Data, Policy and Innovation Centre</a:t>
+            </a:r>
+            <a:endParaRPr lang="en-US" sz="850" dirty="0"/>
+          </a:p>
+        </p:txBody>
+      </p:sp>
+      <p:sp>
+        <p:nvSpPr>
+          <p:cNvPr id="17" name="Text 15"/>
+          <p:cNvSpPr/>
+          <p:nvPr/>
+        </p:nvSpPr>
+        <p:spPr>
+          <a:xfrm>
+            <a:off x="6035040" y="6419088"/>
+            <a:ext cx="5486400" cy="274320"/>
+          </a:xfrm>
+          <a:prstGeom prst="rect">
+            <a:avLst/>
+          </a:prstGeom>
+          <a:noFill/>
+          <a:ln/>
+        </p:spPr>
+        <p:txBody>
+          <a:bodyPr wrap="square" lIns="0" tIns="0" rIns="0" bIns="0" rtlCol="0" anchor="ctr"/>
+          <a:lstStyle/>
+          <a:p>
+            <a:pPr marL="0" indent="0" algn="r">
+              <a:buNone/>
+            </a:pPr>
+            <a:r>
+              <a:rPr lang="en-US" sz="850" dirty="0">
+                <a:solidFill>
+                  <a:srgbClr val="6C6E76"/>
+                </a:solidFill>
+                <a:latin typeface="Calibri" pitchFamily="34" charset="0"/>
+                <a:ea typeface="Calibri" pitchFamily="34" charset="-122"/>
+                <a:cs typeface="Calibri" pitchFamily="34" charset="-120"/>
+              </a:rPr>
+              <a:t>Government of Odisha  ×  University of Chicago Trust</a:t>
+            </a:r>
+            <a:endParaRPr lang="en-US" sz="850" dirty="0"/>
+          </a:p>
+        </p:txBody>
+      </p:sp>
+      <p:sp>
+        <p:nvSpPr>
+          <p:cNvPr id="27" name="Shape 3">
+            <a:extLst>
+              <a:ext uri="{FF2B5EF4-FFF2-40B4-BE49-F238E27FC236}">
+                <a16:creationId xmlns:a16="http://schemas.microsoft.com/office/drawing/2014/main" id="{8EA7243F-3A2E-791F-90D8-11B33EB858C8}"/>
+              </a:ext>
+            </a:extLst>
+          </p:cNvPr>
+          <p:cNvSpPr/>
+          <p:nvPr/>
+        </p:nvSpPr>
+        <p:spPr>
+          <a:xfrm>
+            <a:off x="632059" y="3571929"/>
+            <a:ext cx="91440" cy="91440"/>
+          </a:xfrm>
+          <a:prstGeom prst="rect">
+            <a:avLst/>
+          </a:prstGeom>
+          <a:solidFill>
+            <a:srgbClr val="7A1F2B"/>
+          </a:solidFill>
+          <a:ln/>
+        </p:spPr>
+        <p:txBody>
+          <a:bodyPr/>
+          <a:lstStyle/>
+          <a:p>
+            <a:endParaRPr lang="en-IN" dirty="0"/>
+          </a:p>
+        </p:txBody>
+      </p:sp>
+      <p:sp>
+        <p:nvSpPr>
+          <p:cNvPr id="29" name="Text 4">
+            <a:extLst>
+              <a:ext uri="{FF2B5EF4-FFF2-40B4-BE49-F238E27FC236}">
+                <a16:creationId xmlns:a16="http://schemas.microsoft.com/office/drawing/2014/main" id="{9F020A29-8C39-EAFD-C8B8-DBAB2A5F634C}"/>
+              </a:ext>
+            </a:extLst>
+          </p:cNvPr>
+          <p:cNvSpPr/>
+          <p:nvPr/>
+        </p:nvSpPr>
+        <p:spPr>
+          <a:xfrm>
+            <a:off x="924667" y="3453057"/>
+            <a:ext cx="10607040" cy="411480"/>
+          </a:xfrm>
+          <a:prstGeom prst="rect">
+            <a:avLst/>
+          </a:prstGeom>
+          <a:noFill/>
+          <a:ln/>
+        </p:spPr>
+        <p:txBody>
+          <a:bodyPr wrap="square" lIns="0" tIns="0" rIns="0" bIns="0" rtlCol="0" anchor="t"/>
+          <a:lstStyle/>
+          <a:p>
+            <a:pPr marL="0" indent="0" algn="l">
+              <a:buNone/>
+            </a:pPr>
+            <a:r>
+              <a:rPr lang="en-US" sz="1800" dirty="0">
+                <a:solidFill>
+                  <a:srgbClr val="1E1F24"/>
+                </a:solidFill>
+                <a:latin typeface="Calibri" pitchFamily="34" charset="0"/>
+                <a:ea typeface="Calibri" pitchFamily="34" charset="-122"/>
+                <a:cs typeface="Calibri" pitchFamily="34" charset="-120"/>
+              </a:rPr>
+              <a:t>It reads handwriting. Ours does not.</a:t>
+            </a:r>
+            <a:endParaRPr lang="en-US" sz="1800" dirty="0"/>
+          </a:p>
+        </p:txBody>
+      </p:sp>
+      <p:sp>
+        <p:nvSpPr>
+          <p:cNvPr id="31" name="Shape 8">
+            <a:extLst>
+              <a:ext uri="{FF2B5EF4-FFF2-40B4-BE49-F238E27FC236}">
+                <a16:creationId xmlns:a16="http://schemas.microsoft.com/office/drawing/2014/main" id="{25210A73-5BE3-463C-04D8-421B6ACD8FD7}"/>
+              </a:ext>
+            </a:extLst>
+          </p:cNvPr>
+          <p:cNvSpPr/>
+          <p:nvPr/>
+        </p:nvSpPr>
+        <p:spPr>
+          <a:xfrm>
+            <a:off x="632059" y="4458260"/>
+            <a:ext cx="91440" cy="91440"/>
+          </a:xfrm>
+          <a:prstGeom prst="rect">
+            <a:avLst/>
+          </a:prstGeom>
+          <a:solidFill>
+            <a:srgbClr val="7A1F2B"/>
+          </a:solidFill>
+          <a:ln/>
+        </p:spPr>
+        <p:txBody>
+          <a:bodyPr/>
+          <a:lstStyle/>
+          <a:p>
+            <a:endParaRPr lang="en-IN"/>
+          </a:p>
+        </p:txBody>
+      </p:sp>
+      <p:sp>
+        <p:nvSpPr>
+          <p:cNvPr id="33" name="Text 9">
+            <a:extLst>
+              <a:ext uri="{FF2B5EF4-FFF2-40B4-BE49-F238E27FC236}">
+                <a16:creationId xmlns:a16="http://schemas.microsoft.com/office/drawing/2014/main" id="{A6157D09-2797-0B89-7747-CE5934045003}"/>
+              </a:ext>
+            </a:extLst>
+          </p:cNvPr>
+          <p:cNvSpPr/>
+          <p:nvPr/>
+        </p:nvSpPr>
+        <p:spPr>
+          <a:xfrm>
+            <a:off x="924667" y="4339388"/>
+            <a:ext cx="10607040" cy="411480"/>
+          </a:xfrm>
+          <a:prstGeom prst="rect">
+            <a:avLst/>
+          </a:prstGeom>
+          <a:noFill/>
+          <a:ln/>
+        </p:spPr>
+        <p:txBody>
+          <a:bodyPr wrap="square" lIns="0" tIns="0" rIns="0" bIns="0" rtlCol="0" anchor="t"/>
+          <a:lstStyle/>
+          <a:p>
+            <a:pPr marL="0" indent="0" algn="l">
+              <a:buNone/>
+            </a:pPr>
+            <a:r>
+              <a:rPr lang="en-US" sz="1800" dirty="0">
+                <a:solidFill>
+                  <a:srgbClr val="1E1F24"/>
+                </a:solidFill>
+                <a:latin typeface="Calibri" pitchFamily="34" charset="0"/>
+                <a:ea typeface="Calibri" pitchFamily="34" charset="-122"/>
+                <a:cs typeface="Calibri" pitchFamily="34" charset="-120"/>
+              </a:rPr>
+              <a:t>On all 61 pages we compared, the two systems produced different text.</a:t>
+            </a:r>
+            <a:endParaRPr lang="en-US" sz="1800" dirty="0"/>
+          </a:p>
+        </p:txBody>
+      </p:sp>
+      <p:sp>
+        <p:nvSpPr>
+          <p:cNvPr id="35" name="Shape 10">
+            <a:extLst>
+              <a:ext uri="{FF2B5EF4-FFF2-40B4-BE49-F238E27FC236}">
+                <a16:creationId xmlns:a16="http://schemas.microsoft.com/office/drawing/2014/main" id="{16BEB2B2-75AE-B017-BEB6-8D7DF2D87DD6}"/>
+              </a:ext>
+            </a:extLst>
+          </p:cNvPr>
+          <p:cNvSpPr/>
+          <p:nvPr/>
+        </p:nvSpPr>
+        <p:spPr>
+          <a:xfrm>
+            <a:off x="632059" y="4961180"/>
+            <a:ext cx="91440" cy="91440"/>
+          </a:xfrm>
+          <a:prstGeom prst="rect">
+            <a:avLst/>
+          </a:prstGeom>
+          <a:solidFill>
+            <a:srgbClr val="7A1F2B"/>
+          </a:solidFill>
+          <a:ln/>
+        </p:spPr>
+        <p:txBody>
+          <a:bodyPr/>
+          <a:lstStyle/>
+          <a:p>
+            <a:endParaRPr lang="en-IN"/>
+          </a:p>
+        </p:txBody>
+      </p:sp>
+      <p:sp>
+        <p:nvSpPr>
+          <p:cNvPr id="37" name="Text 11">
+            <a:extLst>
+              <a:ext uri="{FF2B5EF4-FFF2-40B4-BE49-F238E27FC236}">
+                <a16:creationId xmlns:a16="http://schemas.microsoft.com/office/drawing/2014/main" id="{E4B7C2E5-1571-8403-3E23-54FAD9D0D9A0}"/>
+              </a:ext>
+            </a:extLst>
+          </p:cNvPr>
+          <p:cNvSpPr/>
+          <p:nvPr/>
+        </p:nvSpPr>
+        <p:spPr>
+          <a:xfrm>
+            <a:off x="924667" y="4842308"/>
+            <a:ext cx="10607040" cy="411480"/>
+          </a:xfrm>
+          <a:prstGeom prst="rect">
+            <a:avLst/>
+          </a:prstGeom>
+          <a:noFill/>
+          <a:ln/>
+        </p:spPr>
+        <p:txBody>
+          <a:bodyPr wrap="square" lIns="0" tIns="0" rIns="0" bIns="0" rtlCol="0" anchor="t"/>
+          <a:lstStyle/>
+          <a:p>
+            <a:pPr marL="0" indent="0" algn="l">
+              <a:buNone/>
+            </a:pPr>
+            <a:r>
+              <a:rPr lang="en-US" sz="1800" dirty="0">
+                <a:solidFill>
+                  <a:srgbClr val="1E1F24"/>
+                </a:solidFill>
+                <a:latin typeface="Calibri" pitchFamily="34" charset="0"/>
+                <a:ea typeface="Calibri" pitchFamily="34" charset="-122"/>
+                <a:cs typeface="Calibri" pitchFamily="34" charset="-120"/>
+              </a:rPr>
+              <a:t>The category and summary it returned were never graded against anything.</a:t>
+            </a:r>
+          </a:p>
+        </p:txBody>
+      </p:sp>
+    </p:spTree>
+  </p:cSld>
+  <p:clrMapOvr>
+    <a:masterClrMapping/>
+  </p:clrMapOvr>
+</p:sld>
+</file>
+
+<file path=ppt/slides/slide21.xml><?xml version="1.0" encoding="utf-8"?>
 <p:sld xmlns:a="http://schemas.openxmlformats.org/drawingml/2006/main" xmlns:p="http://schemas.openxmlformats.org/presentationml/2006/main" xmlns:r="http://schemas.openxmlformats.org/officeDocument/2006/relationships">
   <p:cSld>
     <p:spTree>

--- a/docs/presentations/2026-08-24-timing-quality/Janasunani_2.0_Timing_and_Quality.pptx
+++ b/docs/presentations/2026-08-24-timing-quality/Janasunani_2.0_Timing_and_Quality.pptx
@@ -583,7 +583,28 @@
           <a:p/>
           <a:p>
             <a:r>
-              <a:t>RUNG 2, why a fallback is needed at all. The ORTPSA masters carry no category-to-department foreign key: intCategoryGrp is NULL on all 62 categories (janasunani/routing/crosswalk.py:3, mappings.py:36). MappingRouter can only bridge by exact name, which covers a handful of the 62. That absence is the whole reason the crosswalk had to be learned from history instead of read off a table.</a:t>
+              <a:t>Below the crosswalk sit the ORTPSA master tables and a generic fallback. They are off this slide because they rarely answer: intCategoryGrp is NULL on all 62 categories, so no category-to-department link exists and MappingRouter can only bridge by exact name. That absence is why the crosswalk had to be learned from history rather than read off a table. Mention it only if someone asks what happens when the crosswalk has no key.</a:t>
+            </a:r>
+          </a:p>
+          <a:p/>
+          <a:p>
+            <a:r>
+              <a:t>ROW 3, THE OUTCOME MODEL. Design of record is docs/experiments/routing-outcome-model.tex, 42 pages. It asks a different question from the rows above: not where a grievance was sent, but whether sending it elsewhere would have closed it faster without losing whether action was taken.</a:t>
+            </a:r>
+          </a:p>
+          <a:p>
+            <a:r>
+              <a:t>  Treatment is the department and the complete role chain chosen together at assignment, the intention to route. Outcome is days to closure capped at 365, with inverse-probability censoring weights so cases still open at the snapshot do not silently drop out. Two estimators are reported separately: a direct outcome model and an augmented, doubly-robust one.</a:t>
+            </a:r>
+          </a:p>
+          <a:p>
+            <a:r>
+              <a:t>  Result: validation 2024 gave +26.77 days (SE 4.04). The untouched 2025 test year gave -2.35 (SE 3.50). No routing gain is established and no recommendation is published.</a:t>
+            </a:r>
+          </a:p>
+          <a:p>
+            <a:r>
+              <a:t>  Why it failed, if pushed. Positivity breaks: on the test year only 15.6% of cases have the recommended route anywhere in observed support, and effective sample size falls to 7% of n, so the direct estimator is extrapolating into empty cells. The design document also states plainly that its no-interference assumption 'in a queueing system is false' — route everyone to the fast office and it stops being fast. Unconfoundedness is invoked on an information set smaller than the officer's, missing congestion and trailing destination performance. And the test year is a seven-month window being asked about a 365-day outcome, so replication and truncation cannot be separated.</a:t>
             </a:r>
           </a:p>
           <a:p/>
@@ -3632,7 +3653,7 @@
                 <a:ea typeface="Cambria" pitchFamily="34" charset="-122"/>
                 <a:cs typeface="Cambria" pitchFamily="34" charset="-120"/>
               </a:rPr>
-              <a:t>Three rungs, tried in order</a:t>
+              <a:t>What we ship, and what we could not show</a:t>
             </a:r>
             <a:endParaRPr lang="en-US" sz="3400" dirty="0"/>
           </a:p>
@@ -3806,7 +3827,7 @@
                 <a:ea typeface="Cambria" pitchFamily="34" charset="-122"/>
                 <a:cs typeface="Cambria" pitchFamily="34" charset="-120"/>
               </a:rPr>
-              <a:t>The master tables</a:t>
+              <a:t>A trained model</a:t>
             </a:r>
             <a:endParaRPr lang="en-US" sz="2100" dirty="0"/>
           </a:p>
@@ -3848,7 +3869,7 @@
                 <a:ea typeface="Calibri" pitchFamily="34" charset="-122"/>
                 <a:cs typeface="Calibri" pitchFamily="34" charset="-120"/>
               </a:rPr>
-              <a:t>The fallback. The department field is empty on all 62 categories, so this rung can only match on an exact name and rarely answers.</a:t>
+              <a:t>Off by default. When it cannot answer it falls back to the learned keys rather than guessing.</a:t>
             </a:r>
             <a:endParaRPr lang="en-US" sz="1900" dirty="0"/>
           </a:p>
@@ -3914,7 +3935,7 @@
                 <a:ea typeface="Cambria" pitchFamily="34" charset="-122"/>
                 <a:cs typeface="Cambria" pitchFamily="34" charset="-120"/>
               </a:rPr>
-              <a:t>A trained model</a:t>
+              <a:t>Would another route be faster?</a:t>
             </a:r>
             <a:endParaRPr lang="en-US" sz="2100" dirty="0"/>
           </a:p>
@@ -3956,7 +3977,7 @@
                 <a:ea typeface="Calibri" pitchFamily="34" charset="-122"/>
                 <a:cs typeface="Calibri" pitchFamily="34" charset="-120"/>
               </a:rPr>
-              <a:t>Off by default. When it cannot answer it falls back to the rungs above rather than guessing.</a:t>
+              <a:t>We built a full causal model to test it. It showed a gain on one year and nothing on the next, so we withdrew the estimate.</a:t>
             </a:r>
             <a:endParaRPr lang="en-US" sz="1900" dirty="0"/>
           </a:p>
@@ -4070,7 +4091,7 @@
                 </a:solidFill>
                 <a:latin typeface="Calibri"/>
               </a:rPr>
-              <a:t>Every rung learns where grievances were sent. None of them knows where a grievance should go.</a:t>
+              <a:t>All of it learns where grievances were sent. None of it knows where one should go.</a:t>
             </a:r>
           </a:p>
         </p:txBody>

--- a/docs/presentations/2026-08-24-timing-quality/Janasunani_2.0_Timing_and_Quality.pptx
+++ b/docs/presentations/2026-08-24-timing-quality/Janasunani_2.0_Timing_and_Quality.pptx
@@ -16,6 +16,7 @@
     <p:sldId id="275" r:id="rId25"/>
     <p:sldId id="276" r:id="rId26"/>
     <p:sldId id="277" r:id="rId27"/>
+    <p:sldId id="278" r:id="rId28"/>
   </p:sldIdLst>
   <p:sldSz cx="12192000" cy="6858000"/>
   <p:notesSz cx="6858000" cy="12192000"/>
@@ -674,37 +675,76 @@
           <a:lstStyle/>
           <a:p>
             <a:r>
-              <a:t>Do not cut this slide for time. It is the one that makes the rest credible.</a:t>
+              <a:t>Ninety seconds. The table is the argument; do not narrate every row.</a:t>
             </a:r>
           </a:p>
           <a:p/>
           <a:p>
             <a:r>
-              <a:t>1. OCR ground truth was never commissioned and has no owner, issue #53. It cannot be produced by an agent, because it is the answer key an agent would be scored against.</a:t>
+              <a:t>Say: on 2024 the two estimators land 2.3 days apart. On 2025 they land 33 apart. Same code, same pipeline, one year later. When a direct and a doubly-robust estimator diverge like that, the divergence measures missing overlap. It is not a choice between two answers.</a:t>
             </a:r>
           </a:p>
           <a:p/>
           <a:p>
             <a:r>
-              <a:t>2. 824 predicted spans against 480 marked. The recogniser over-fires, and the gold set cannot separate a missed label from an over-redaction. Filed as open.</a:t>
+              <a:t>SOURCES, live 19 August refit. ope_val_ridge.json (n=450,567) and ope_test_ridge.json (n=113,535), both under outputs/experiments/routing_outcome/. Row 1 is delta_direct, 24.50 and 30.53. Row 2 is delta_dr, 26.77 (SE 4.04) and -2.35 (SE 3.50). Row 3 is the historical arm, where v_dr is the observed IPCW mean and v_direct is the model's prediction of it: 97.84 against 93.22 on validation, 108.69 against 49.74 on test. Row 4 is overlap.match_rate, 0.380 and 0.156. Row 5 is censoring_rate_of_split, 0.092 and 0.344.</a:t>
             </a:r>
           </a:p>
           <a:p/>
           <a:p>
             <a:r>
-              <a:t>3. The officer-hours figure that circulates, 201,000 to 302,000 across 1,209,144 resolved cases, is a denominator and not a saving. It is the size of the prize, not anything realised.</a:t>
+              <a:t>DO NOT USE routing-outcome-ope-val-ridge-2026-08-13.json. Its validation match rate of 0.536 and its +20.1 belong to the withdrawn run and it sits in docs/experiments/superseded/. Quoting it to dramatise the collapse re-cites the thing we retracted.</a:t>
             </a:r>
           </a:p>
           <a:p/>
           <a:p>
             <a:r>
-              <a:t>Two more we do not claim, if asked: no gain from duplicate detection beyond the 37,299 repeats officers already confirmed, and no accuracy result for the outside option on slide 6.</a:t>
+              <a:t>'So which estimator do you believe?' Neither, on the test year. The direct one extrapolates into cells where the recommended route was never taken, and row 3 shows it is 118% wrong on the one arm we can check. The doubly-robust one down-weights those cells, leaving an effective sample of 7% of n. The honest statement is that the test year cannot answer the question.</a:t>
             </a:r>
           </a:p>
           <a:p/>
           <a:p>
             <a:r>
-              <a:t>If someone asks why so little is claimed: because the alternative is claiming things we cannot defend, and this deck has to survive the room checking it.</a:t>
+              <a:t>'Is this replication failure or truncation?' They cannot be separated in this design. The snapshot is 2025-07-30, so the cohort has at most seven months against a 365-day outcome and censoring runs 3.1%, 9.2%, 34.4%. Answering it needs a later snapshot, not a better estimator.</a:t>
+            </a:r>
+          </a:p>
+          <a:p/>
+          <a:p>
+            <a:r>
+              <a:t>'What about a different outcome model?' Boosting instead of ridge gives 12.40 on validation against ridge's 26.77, and 0.15 on test against -2.35. The two families disagree by a factor of two on the year that looked positive and agree on zero for the year that did not. The validation gain was never stable either.</a:t>
+            </a:r>
+          </a:p>
+          <a:p/>
+          <a:p>
+            <a:r>
+              <a:t>Only if pushed further:</a:t>
+            </a:r>
+          </a:p>
+          <a:p>
+            <a:r>
+              <a:t>- No interference is assumed, and the design document says that assumption 'in a queueing system is false'. Route everyone to the fast office and it stops being fast. That bounds any future version of this exercise.</a:t>
+            </a:r>
+          </a:p>
+          <a:p>
+            <a:r>
+              <a:t>- Unconfoundedness is invoked on less information than the assigning officer had. Congestion and trailing destination performance are absent from the covariates.</a:t>
+            </a:r>
+          </a:p>
+          <a:p>
+            <a:r>
+              <a:t>- Treatment provenance is unresolved. dept_id and vchAllEscUser may record final state rather than the initial assignment.</a:t>
+            </a:r>
+          </a:p>
+          <a:p/>
+          <a:p>
+            <a:r>
+              <a:t>WITHDRAWN, do not use: any routing time saving, including the 11 to 23 day band. Do not present it as conservative, provisional or pending. There is no estimate.</a:t>
+            </a:r>
+          </a:p>
+          <a:p/>
+          <a:p>
+            <a:r>
+              <a:t>What we are NOT saying: that routing gains do not exist. We are saying this design on this data cannot detect one.</a:t>
             </a:r>
           </a:p>
         </p:txBody>
@@ -750,73 +790,37 @@
           <a:lstStyle/>
           <a:p>
             <a:r>
-              <a:t>The provider is Sarvam. Two endpoints, billed separately: digitise at ₹0.50 a page returns text and layout; extract at ₹1.00 a page returns schema-driven fields. Both is ₹1.50. Source: janasunani/evaluation/pricing.py, checked against the Sarvam dashboard 2026-08-07. Our local pipeline is ₹0.00 a page.</a:t>
+              <a:t>Do not cut this slide for time. It is the one that makes the rest credible.</a:t>
             </a:r>
           </a:p>
           <a:p/>
           <a:p>
             <a:r>
-              <a:t>THE FOUR EXTRACT FIELDS, which is the 'does more' claim: grievance_category, summary, district, grievance_text. That is our OCR, categoriser and summariser in one call. janasunani/evaluation/sarvam_grievance_schema.py, schema v1, pinned so a later edit cannot silently move a headline number. docs/DELIVERY.md:163: 'our pipeline has no equivalent'.</a:t>
+              <a:t>1. OCR ground truth was never commissioned and has no owner, issue #53. It cannot be produced by an agent, because it is the answer key an agent would be scored against.</a:t>
             </a:r>
           </a:p>
           <a:p/>
           <a:p>
             <a:r>
-              <a:t>LANGUAGE. Sarvam Vision lists all 22 scheduled languages plus English, Odia among them. There is also a separate transliteration API for romanized Odia (od-IN), which we do not solve at all today. Our own summariser skipped all four coherent Odia cases through an English-only gate, and non-English text is downgraded to Uncategorized.</a:t>
+              <a:t>2. 824 predicted spans against 480 marked. The recogniser over-fires, and the gold set cannot separate a missed label from an over-redaction. Filed as open.</a:t>
             </a:r>
           </a:p>
           <a:p/>
           <a:p>
             <a:r>
-              <a:t>WHAT WE ACTUALLY RAN. Two runs, docs/evidence/sarvam_cached_benchmark.json. A 5-page validation (₹7.50) and a 300-page run that died at 65 pages on credit exhaustion, 3 HTTP 402s, 7 job failures. 61 pages paired and scored in total.</a:t>
+              <a:t>3. The officer-hours figure that circulates, 201,000 to 302,000 across 1,209,144 resolved cases, is a denominator and not a saving. It is the size of the prize, not anything realised.</a:t>
             </a:r>
           </a:p>
           <a:p/>
           <a:p>
             <a:r>
-              <a:t>WHAT WE FOUND, AND WHAT IT COVERS. Normalised exact-text divergence 1.000 on both runs: the two systems differed on every page. Sarvam returns more characters, ratio 1.2433 then 1.3345. That figure is TRANSCRIPTION ONLY. It compares OCR text and says nothing about the category or summary fields. Divergence says they disagree, never who is right.</a:t>
+              <a:t>Two more we do not claim, if asked: no gain from duplicate detection beyond the 37,299 repeats officers already confirmed, and no accuracy result for the outside option on slide 6.</a:t>
             </a:r>
           </a:p>
           <a:p/>
           <a:p>
             <a:r>
-              <a:t>THE EXTRACT FIELDS WERE NEVER GRADED. Sarvam did return them: 61 extract jobs completed in the 300-page run. Nothing was compared against them.</a:t>
-            </a:r>
-          </a:p>
-          <a:p/>
-          <a:p>
-            <a:r>
-              <a:t>  Category was the DECLARED PRIMARY OUTCOME and came back null. Reason, verbatim from outputs/sarvam_validation/sarvam_scorecard.md: 'Not measured — no gold labels (gold_category) in sample; run with --join-metadata from the lake slice.' This is the cheap gap. The recorded category already sits in our own database; the sample was simply not joined to it. Unlike OCR, no new ground truth has to be created.</a:t>
-            </a:r>
-          </a:p>
-          <a:p/>
-          <a:p>
-            <a:r>
-              <a:t>  Summary was only ever scoped as divergence against BART with no gold referee, and summary_divergence is the same function as divergence_rate under another name (sarvam_scorecard.py:234). Even fully run it could only have said the two summaries differ, never which was better. It was not run: no paired sarvam_summary / pipeline_summary in the sample.</a:t>
-            </a:r>
-          </a:p>
-          <a:p/>
-          <a:p>
-            <a:r>
-              <a:t>  A schema bug returned HTTP 400 on every extract submission until 2026-08-09, which is why the 5-page validation run has no extract output at all. Every test mocked the transport, so no test could see the 400.</a:t>
-            </a:r>
-          </a:p>
-          <a:p/>
-          <a:p>
-            <a:r>
-              <a:t>NOT MEASURED, do not claim: OCR accuracy, category accuracy, summary quality, latency (stated in four places), actual billed cost (every rupee figure is list price), observed language split, handwritten versus printed split.</a:t>
-            </a:r>
-          </a:p>
-          <a:p/>
-          <a:p>
-            <a:r>
-              <a:t>GOVERNANCE. Trust tier authorized-external. Authorisation is a GoO-Sarvam MoU with sign-off from the Additional Chief Secretary, Electronics &amp; IT, accepted 2026-08-07, on the basis that no state statute currently governs the transfer. All three provider controls remain UNVERIFIED: retention terms, encryption in transit, encryption at rest. Authorisation and verification are recorded separately on purpose. One module may make the call, janasunani/egress/, every attempt is audit-logged, and a kill switch falls back to local pytesseract.</a:t>
-            </a:r>
-          </a:p>
-          <a:p/>
-          <a:p>
-            <a:r>
-              <a:t>COST AT SCALE, projected list price: ₹48,000 to digitise the 96,469-page English corpus, ₹145,000 for both endpoints, ₹8,050 to push 1.37M subjects through the 105B text model. At 10 requests a minute, which does not rise with the plan tier, the full corpus is roughly ten days of continuous calling. It is a measurement instrument, not a backfill path. Do not quote ₹700; that was priced on the withdrawn 30B model.</a:t>
+              <a:t>If someone asks why so little is claimed: because the alternative is claiming things we cannot defend, and this deck has to survive the room checking it.</a:t>
             </a:r>
           </a:p>
         </p:txBody>
@@ -830,6 +834,118 @@
 </file>
 
 <file path=ppt/notesSlides/notesSlide21.xml><?xml version="1.0" encoding="utf-8"?>
+<p:notes xmlns:a="http://schemas.openxmlformats.org/drawingml/2006/main" xmlns:p="http://schemas.openxmlformats.org/presentationml/2006/main" xmlns:r="http://schemas.openxmlformats.org/officeDocument/2006/relationships">
+  <p:cSld>
+    <p:spTree>
+      <p:nvGrpSpPr>
+        <p:cNvPr id="1" name=""/>
+        <p:cNvGrpSpPr/>
+        <p:nvPr/>
+      </p:nvGrpSpPr>
+      <p:grpSpPr>
+        <a:xfrm>
+          <a:off x="0" y="0"/>
+          <a:ext cx="0" cy="0"/>
+          <a:chOff x="0" y="0"/>
+          <a:chExt cx="0" cy="0"/>
+        </a:xfrm>
+      </p:grpSpPr>
+      <p:sp>
+        <p:nvSpPr>
+          <p:cNvPr id="3" name="Notes Placeholder 2"/>
+          <p:cNvSpPr>
+            <a:spLocks noGrp="1"/>
+          </p:cNvSpPr>
+          <p:nvPr>
+            <p:ph type="body" idx="1"/>
+          </p:nvPr>
+        </p:nvSpPr>
+        <p:spPr/>
+        <p:txBody>
+          <a:bodyPr/>
+          <a:lstStyle/>
+          <a:p>
+            <a:r>
+              <a:t>The provider is Sarvam. Two endpoints, billed separately: digitise at ₹0.50 a page returns text and layout; extract at ₹1.00 a page returns schema-driven fields. Both is ₹1.50. Source: janasunani/evaluation/pricing.py, checked against the Sarvam dashboard 2026-08-07. Our local pipeline is ₹0.00 a page.</a:t>
+            </a:r>
+          </a:p>
+          <a:p/>
+          <a:p>
+            <a:r>
+              <a:t>THE FOUR EXTRACT FIELDS, which is the 'does more' claim: grievance_category, summary, district, grievance_text. That is our OCR, categoriser and summariser in one call. janasunani/evaluation/sarvam_grievance_schema.py, schema v1, pinned so a later edit cannot silently move a headline number. docs/DELIVERY.md:163: 'our pipeline has no equivalent'.</a:t>
+            </a:r>
+          </a:p>
+          <a:p/>
+          <a:p>
+            <a:r>
+              <a:t>LANGUAGE. Sarvam Vision lists all 22 scheduled languages plus English, Odia among them. There is also a separate transliteration API for romanized Odia (od-IN), which we do not solve at all today. Our own summariser skipped all four coherent Odia cases through an English-only gate, and non-English text is downgraded to Uncategorized.</a:t>
+            </a:r>
+          </a:p>
+          <a:p/>
+          <a:p>
+            <a:r>
+              <a:t>WHAT WE ACTUALLY RAN. Two runs, docs/evidence/sarvam_cached_benchmark.json. A 5-page validation (₹7.50) and a 300-page run that died at 65 pages on credit exhaustion, 3 HTTP 402s, 7 job failures. 61 pages paired and scored in total.</a:t>
+            </a:r>
+          </a:p>
+          <a:p/>
+          <a:p>
+            <a:r>
+              <a:t>WHAT WE FOUND, AND WHAT IT COVERS. Normalised exact-text divergence 1.000 on both runs: the two systems differed on every page. Sarvam returns more characters, ratio 1.2433 then 1.3345. That figure is TRANSCRIPTION ONLY. It compares OCR text and says nothing about the category or summary fields. Divergence says they disagree, never who is right.</a:t>
+            </a:r>
+          </a:p>
+          <a:p/>
+          <a:p>
+            <a:r>
+              <a:t>THE EXTRACT FIELDS WERE NEVER GRADED. Sarvam did return them: 61 extract jobs completed in the 300-page run. Nothing was compared against them.</a:t>
+            </a:r>
+          </a:p>
+          <a:p/>
+          <a:p>
+            <a:r>
+              <a:t>  Category was the DECLARED PRIMARY OUTCOME and came back null. Reason, verbatim from outputs/sarvam_validation/sarvam_scorecard.md: 'Not measured — no gold labels (gold_category) in sample; run with --join-metadata from the lake slice.' This is the cheap gap. The recorded category already sits in our own database; the sample was simply not joined to it. Unlike OCR, no new ground truth has to be created.</a:t>
+            </a:r>
+          </a:p>
+          <a:p/>
+          <a:p>
+            <a:r>
+              <a:t>  Summary was only ever scoped as divergence against BART with no gold referee, and summary_divergence is the same function as divergence_rate under another name (sarvam_scorecard.py:234). Even fully run it could only have said the two summaries differ, never which was better. It was not run: no paired sarvam_summary / pipeline_summary in the sample.</a:t>
+            </a:r>
+          </a:p>
+          <a:p/>
+          <a:p>
+            <a:r>
+              <a:t>  A schema bug returned HTTP 400 on every extract submission until 2026-08-09, which is why the 5-page validation run has no extract output at all. Every test mocked the transport, so no test could see the 400.</a:t>
+            </a:r>
+          </a:p>
+          <a:p/>
+          <a:p>
+            <a:r>
+              <a:t>NOT MEASURED, do not claim: OCR accuracy, category accuracy, summary quality, latency (stated in four places), actual billed cost (every rupee figure is list price), observed language split, handwritten versus printed split.</a:t>
+            </a:r>
+          </a:p>
+          <a:p/>
+          <a:p>
+            <a:r>
+              <a:t>GOVERNANCE. Trust tier authorized-external. Authorisation is a GoO-Sarvam MoU with sign-off from the Additional Chief Secretary, Electronics &amp; IT, accepted 2026-08-07, on the basis that no state statute currently governs the transfer. All three provider controls remain UNVERIFIED: retention terms, encryption in transit, encryption at rest. Authorisation and verification are recorded separately on purpose. One module may make the call, janasunani/egress/, every attempt is audit-logged, and a kill switch falls back to local pytesseract.</a:t>
+            </a:r>
+          </a:p>
+          <a:p/>
+          <a:p>
+            <a:r>
+              <a:t>COST AT SCALE, projected list price: ₹48,000 to digitise the 96,469-page English corpus, ₹145,000 for both endpoints, ₹8,050 to push 1.37M subjects through the 105B text model. At 10 requests a minute, which does not rise with the plan tier, the full corpus is roughly ten days of continuous calling. It is a measurement instrument, not a backfill path. Do not quote ₹700; that was priced on the withdrawn 30B model.</a:t>
+            </a:r>
+          </a:p>
+        </p:txBody>
+      </p:sp>
+    </p:spTree>
+  </p:cSld>
+  <p:clrMapOvr>
+    <a:masterClrMapping/>
+  </p:clrMapOvr>
+</p:notes>
+</file>
+
+<file path=ppt/notesSlides/notesSlide22.xml><?xml version="1.0" encoding="utf-8"?>
 <p:notes xmlns:a="http://schemas.openxmlformats.org/drawingml/2006/main" xmlns:p="http://schemas.openxmlformats.org/presentationml/2006/main" xmlns:r="http://schemas.openxmlformats.org/officeDocument/2006/relationships">
   <p:cSld>
     <p:spTree>
@@ -3827,7 +3943,7 @@
                 <a:ea typeface="Cambria" pitchFamily="34" charset="-122"/>
                 <a:cs typeface="Cambria" pitchFamily="34" charset="-120"/>
               </a:rPr>
-              <a:t>A trained model</a:t>
+              <a:t>Where it falls back</a:t>
             </a:r>
             <a:endParaRPr lang="en-US" sz="2100" dirty="0"/>
           </a:p>
@@ -3869,7 +3985,7 @@
                 <a:ea typeface="Calibri" pitchFamily="34" charset="-122"/>
                 <a:cs typeface="Calibri" pitchFamily="34" charset="-120"/>
               </a:rPr>
-              <a:t>Off by default. When it cannot answer it falls back to the learned keys rather than guessing.</a:t>
+              <a:t>No master table links a category to a department, so the keys had to be learned. When no key matches it drops to matching on name.</a:t>
             </a:r>
             <a:endParaRPr lang="en-US" sz="1900" dirty="0"/>
           </a:p>
@@ -3877,121 +3993,52 @@
       </p:sp>
       <p:sp>
         <p:nvSpPr>
-          <p:cNvPr id="10" name="Shape 8"/>
-          <p:cNvSpPr/>
-          <p:nvPr/>
-        </p:nvSpPr>
-        <p:spPr>
-          <a:xfrm>
-            <a:off x="640080" y="4553712"/>
-            <a:ext cx="128016" cy="777240"/>
-          </a:xfrm>
-          <a:prstGeom prst="rect">
-            <a:avLst/>
-          </a:prstGeom>
-          <a:solidFill>
-            <a:srgbClr val="7A1F2B"/>
-          </a:solidFill>
-          <a:ln/>
-        </p:spPr>
-        <p:txBody>
-          <a:bodyPr/>
-          <a:lstStyle/>
-          <a:p>
-            <a:endParaRPr lang="en-IN"/>
-          </a:p>
-        </p:txBody>
-      </p:sp>
-      <p:sp>
-        <p:nvSpPr>
-          <p:cNvPr id="11" name="Text 9"/>
-          <p:cNvSpPr/>
-          <p:nvPr/>
-        </p:nvSpPr>
-        <p:spPr>
-          <a:xfrm>
-            <a:off x="960120" y="4480560"/>
-            <a:ext cx="3291840" cy="822960"/>
-          </a:xfrm>
-          <a:prstGeom prst="rect">
-            <a:avLst/>
-          </a:prstGeom>
-          <a:noFill/>
-          <a:ln/>
-        </p:spPr>
-        <p:txBody>
-          <a:bodyPr wrap="square" lIns="0" tIns="0" rIns="0" bIns="0" rtlCol="0" anchor="t"/>
+          <p:cNvPr id="13" name="Text 11"/>
+          <p:cNvSpPr/>
+          <p:nvPr/>
+        </p:nvSpPr>
+        <p:spPr>
+          <a:xfrm>
+            <a:off x="640080" y="6419088"/>
+            <a:ext cx="5486400" cy="274320"/>
+          </a:xfrm>
+          <a:prstGeom prst="rect">
+            <a:avLst/>
+          </a:prstGeom>
+          <a:noFill/>
+          <a:ln/>
+        </p:spPr>
+        <p:txBody>
+          <a:bodyPr wrap="square" lIns="0" tIns="0" rIns="0" bIns="0" rtlCol="0" anchor="ctr"/>
           <a:lstStyle/>
           <a:p>
             <a:pPr marL="0" indent="0" algn="l">
               <a:buNone/>
             </a:pPr>
             <a:r>
-              <a:rPr lang="en-US" sz="2100" b="1" dirty="0">
-                <a:solidFill>
-                  <a:srgbClr val="1E1F24"/>
-                </a:solidFill>
-                <a:latin typeface="Cambria" pitchFamily="34" charset="0"/>
-                <a:ea typeface="Cambria" pitchFamily="34" charset="-122"/>
-                <a:cs typeface="Cambria" pitchFamily="34" charset="-120"/>
-              </a:rPr>
-              <a:t>Would another route be faster?</a:t>
-            </a:r>
-            <a:endParaRPr lang="en-US" sz="2100" dirty="0"/>
-          </a:p>
-        </p:txBody>
-      </p:sp>
-      <p:sp>
-        <p:nvSpPr>
-          <p:cNvPr id="12" name="Text 10"/>
-          <p:cNvSpPr/>
-          <p:nvPr/>
-        </p:nvSpPr>
-        <p:spPr>
-          <a:xfrm>
-            <a:off x="4389120" y="4480560"/>
-            <a:ext cx="7680960" cy="822960"/>
-          </a:xfrm>
-          <a:prstGeom prst="rect">
-            <a:avLst/>
-          </a:prstGeom>
-          <a:noFill/>
-          <a:ln/>
-        </p:spPr>
-        <p:txBody>
-          <a:bodyPr wrap="square" lIns="0" tIns="0" rIns="0" bIns="0" rtlCol="0" anchor="t"/>
-          <a:lstStyle/>
-          <a:p>
-            <a:pPr marL="0" indent="0" algn="l">
-              <a:lnSpc>
-                <a:spcPct val="105000"/>
-              </a:lnSpc>
-              <a:buNone/>
-            </a:pPr>
-            <a:r>
-              <a:rPr lang="en-US" sz="1900" dirty="0">
-                <a:solidFill>
-                  <a:srgbClr val="44464D"/>
+              <a:rPr lang="en-US" sz="850" dirty="0">
+                <a:solidFill>
+                  <a:srgbClr val="6C6E76"/>
                 </a:solidFill>
                 <a:latin typeface="Calibri" pitchFamily="34" charset="0"/>
                 <a:ea typeface="Calibri" pitchFamily="34" charset="-122"/>
                 <a:cs typeface="Calibri" pitchFamily="34" charset="-120"/>
               </a:rPr>
-              <a:t>We built a full causal model to test it. It showed a gain on one year and nothing on the next, so we withdrew the estimate.</a:t>
-            </a:r>
-            <a:endParaRPr lang="en-US" sz="1900" dirty="0"/>
-          </a:p>
-        </p:txBody>
-      </p:sp>
-      <p:sp>
-        <p:nvSpPr>
-          <p:cNvPr id="13" name="Text 11"/>
-          <p:cNvSpPr/>
-          <p:nvPr/>
-        </p:nvSpPr>
-        <p:spPr>
-          <a:xfrm>
-            <a:off x="640080" y="6419088"/>
+              <a:t>Data, Policy and Innovation Centre</a:t>
+            </a:r>
+            <a:endParaRPr lang="en-US" sz="850" dirty="0"/>
+          </a:p>
+        </p:txBody>
+      </p:sp>
+      <p:sp>
+        <p:nvSpPr>
+          <p:cNvPr id="14" name="Text 12"/>
+          <p:cNvSpPr/>
+          <p:nvPr/>
+        </p:nvSpPr>
+        <p:spPr>
+          <a:xfrm>
+            <a:off x="6035040" y="6419088"/>
             <a:ext cx="5486400" cy="274320"/>
           </a:xfrm>
           <a:prstGeom prst="rect">
@@ -4004,7 +4051,7 @@
           <a:bodyPr wrap="square" lIns="0" tIns="0" rIns="0" bIns="0" rtlCol="0" anchor="ctr"/>
           <a:lstStyle/>
           <a:p>
-            <a:pPr marL="0" indent="0" algn="l">
+            <a:pPr marL="0" indent="0" algn="r">
               <a:buNone/>
             </a:pPr>
             <a:r>
@@ -4016,45 +4063,6 @@
                 <a:ea typeface="Calibri" pitchFamily="34" charset="-122"/>
                 <a:cs typeface="Calibri" pitchFamily="34" charset="-120"/>
               </a:rPr>
-              <a:t>Data, Policy and Innovation Centre</a:t>
-            </a:r>
-            <a:endParaRPr lang="en-US" sz="850" dirty="0"/>
-          </a:p>
-        </p:txBody>
-      </p:sp>
-      <p:sp>
-        <p:nvSpPr>
-          <p:cNvPr id="14" name="Text 12"/>
-          <p:cNvSpPr/>
-          <p:nvPr/>
-        </p:nvSpPr>
-        <p:spPr>
-          <a:xfrm>
-            <a:off x="6035040" y="6419088"/>
-            <a:ext cx="5486400" cy="274320"/>
-          </a:xfrm>
-          <a:prstGeom prst="rect">
-            <a:avLst/>
-          </a:prstGeom>
-          <a:noFill/>
-          <a:ln/>
-        </p:spPr>
-        <p:txBody>
-          <a:bodyPr wrap="square" lIns="0" tIns="0" rIns="0" bIns="0" rtlCol="0" anchor="ctr"/>
-          <a:lstStyle/>
-          <a:p>
-            <a:pPr marL="0" indent="0" algn="r">
-              <a:buNone/>
-            </a:pPr>
-            <a:r>
-              <a:rPr lang="en-US" sz="850" dirty="0">
-                <a:solidFill>
-                  <a:srgbClr val="6C6E76"/>
-                </a:solidFill>
-                <a:latin typeface="Calibri" pitchFamily="34" charset="0"/>
-                <a:ea typeface="Calibri" pitchFamily="34" charset="-122"/>
-                <a:cs typeface="Calibri" pitchFamily="34" charset="-120"/>
-              </a:rPr>
               <a:t>Government of Odisha  ×  University of Chicago Trust</a:t>
             </a:r>
             <a:endParaRPr lang="en-US" sz="850" dirty="0"/>
@@ -4069,7 +4077,7 @@
         </p:nvSpPr>
         <p:spPr>
           <a:xfrm>
-            <a:off x="640080" y="5742432"/>
+            <a:off x="640080" y="4617720"/>
             <a:ext cx="10881360" cy="384048"/>
           </a:xfrm>
           <a:prstGeom prst="rect">
@@ -4147,7 +4155,7 @@
                 <a:ea typeface="Calibri" pitchFamily="34" charset="-122"/>
                 <a:cs typeface="Calibri" pitchFamily="34" charset="-120"/>
               </a:rPr>
-              <a:t>THE LIMITS</a:t>
+              <a:t>WOULD ANOTHER ROUTE BE FASTER?</a:t>
             </a:r>
             <a:endParaRPr lang="en-US" sz="1500" dirty="0"/>
           </a:p>
@@ -4186,7 +4194,7 @@
                 <a:ea typeface="Cambria" pitchFamily="34" charset="-122"/>
                 <a:cs typeface="Cambria" pitchFamily="34" charset="-120"/>
               </a:rPr>
-              <a:t>What we cannot measure</a:t>
+              <a:t>The estimate did not survive the second year.</a:t>
             </a:r>
             <a:endParaRPr lang="en-US" sz="3400" dirty="0"/>
           </a:p>
@@ -4194,14 +4202,14 @@
       </p:sp>
       <p:sp>
         <p:nvSpPr>
-          <p:cNvPr id="4" name="Text 2"/>
-          <p:cNvSpPr/>
-          <p:nvPr/>
-        </p:nvSpPr>
-        <p:spPr>
-          <a:xfrm>
-            <a:off x="640080" y="2194560"/>
-            <a:ext cx="502920" cy="640080"/>
+          <p:cNvPr id="13" name="Text 11"/>
+          <p:cNvSpPr/>
+          <p:nvPr/>
+        </p:nvSpPr>
+        <p:spPr>
+          <a:xfrm>
+            <a:off x="640080" y="6419088"/>
+            <a:ext cx="5486400" cy="274320"/>
           </a:xfrm>
           <a:prstGeom prst="rect">
             <a:avLst/>
@@ -4217,106 +4225,30 @@
               <a:buNone/>
             </a:pPr>
             <a:r>
-              <a:rPr lang="en-US" sz="3200" b="1" dirty="0">
-                <a:solidFill>
-                  <a:srgbClr val="7A1F2B"/>
-                </a:solidFill>
-                <a:latin typeface="Cambria" pitchFamily="34" charset="0"/>
-                <a:ea typeface="Cambria" pitchFamily="34" charset="-122"/>
-                <a:cs typeface="Cambria" pitchFamily="34" charset="-120"/>
-              </a:rPr>
-              <a:t>1</a:t>
-            </a:r>
-            <a:endParaRPr lang="en-US" sz="3200" dirty="0"/>
-          </a:p>
-        </p:txBody>
-      </p:sp>
-      <p:sp>
-        <p:nvSpPr>
-          <p:cNvPr id="5" name="Text 3"/>
-          <p:cNvSpPr/>
-          <p:nvPr/>
-        </p:nvSpPr>
-        <p:spPr>
-          <a:xfrm>
-            <a:off x="1280160" y="2194560"/>
-            <a:ext cx="5852160" cy="822960"/>
-          </a:xfrm>
-          <a:prstGeom prst="rect">
-            <a:avLst/>
-          </a:prstGeom>
-          <a:noFill/>
-          <a:ln/>
-        </p:spPr>
-        <p:txBody>
-          <a:bodyPr wrap="square" lIns="0" tIns="0" rIns="0" bIns="0" rtlCol="0" anchor="ctr"/>
-          <a:lstStyle/>
-          <a:p>
-            <a:pPr marL="0" indent="0" algn="l">
-              <a:lnSpc>
-                <a:spcPct val="105000"/>
-              </a:lnSpc>
-              <a:buNone/>
-            </a:pPr>
-            <a:r>
-              <a:rPr lang="en-US" sz="1850" dirty="0">
-                <a:solidFill>
-                  <a:srgbClr val="1E1F24"/>
+              <a:rPr lang="en-US" sz="850" dirty="0">
+                <a:solidFill>
+                  <a:srgbClr val="6C6E76"/>
                 </a:solidFill>
                 <a:latin typeface="Calibri" pitchFamily="34" charset="0"/>
                 <a:ea typeface="Calibri" pitchFamily="34" charset="-122"/>
                 <a:cs typeface="Calibri" pitchFamily="34" charset="-120"/>
               </a:rPr>
-              <a:t>We cannot say how accurately it reads a page.</a:t>
-            </a:r>
-            <a:endParaRPr lang="en-US" sz="1850" dirty="0"/>
-          </a:p>
-        </p:txBody>
-      </p:sp>
-      <p:sp>
-        <p:nvSpPr>
-          <p:cNvPr id="6" name="Shape 4"/>
-          <p:cNvSpPr/>
-          <p:nvPr/>
-        </p:nvSpPr>
-        <p:spPr>
-          <a:xfrm>
-            <a:off x="7406640" y="2212848"/>
-            <a:ext cx="4114800" cy="777240"/>
-          </a:xfrm>
-          <a:prstGeom prst="roundRect">
-            <a:avLst>
-              <a:gd name="adj" fmla="val 7059"/>
-            </a:avLst>
-          </a:prstGeom>
-          <a:solidFill>
-            <a:srgbClr val="F4F4F6"/>
-          </a:solidFill>
-          <a:ln w="12700">
-            <a:solidFill>
-              <a:srgbClr val="D6D8DD"/>
-            </a:solidFill>
-            <a:prstDash val="solid"/>
-          </a:ln>
-        </p:spPr>
-        <p:txBody>
-          <a:bodyPr/>
-          <a:lstStyle/>
-          <a:p>
-            <a:endParaRPr lang="en-IN"/>
-          </a:p>
-        </p:txBody>
-      </p:sp>
-      <p:sp>
-        <p:nvSpPr>
-          <p:cNvPr id="7" name="Text 5"/>
-          <p:cNvSpPr/>
-          <p:nvPr/>
-        </p:nvSpPr>
-        <p:spPr>
-          <a:xfrm>
-            <a:off x="7571232" y="2212848"/>
-            <a:ext cx="3794760" cy="777240"/>
+              <a:t>Data, Policy and Innovation Centre</a:t>
+            </a:r>
+            <a:endParaRPr lang="en-US" sz="850" dirty="0"/>
+          </a:p>
+        </p:txBody>
+      </p:sp>
+      <p:sp>
+        <p:nvSpPr>
+          <p:cNvPr id="14" name="Text 12"/>
+          <p:cNvSpPr/>
+          <p:nvPr/>
+        </p:nvSpPr>
+        <p:spPr>
+          <a:xfrm>
+            <a:off x="6035040" y="6419088"/>
+            <a:ext cx="5486400" cy="274320"/>
           </a:xfrm>
           <a:prstGeom prst="rect">
             <a:avLst/>
@@ -4328,509 +4260,989 @@
           <a:bodyPr wrap="square" lIns="0" tIns="0" rIns="0" bIns="0" rtlCol="0" anchor="ctr"/>
           <a:lstStyle/>
           <a:p>
-            <a:pPr marL="0" indent="0" algn="l">
-              <a:lnSpc>
-                <a:spcPct val="100000"/>
-              </a:lnSpc>
+            <a:pPr marL="0" indent="0" algn="r">
               <a:buNone/>
             </a:pPr>
             <a:r>
-              <a:rPr lang="en-US" sz="1450" dirty="0">
-                <a:solidFill>
-                  <a:srgbClr val="1E1F24"/>
+              <a:rPr lang="en-US" sz="850" dirty="0">
+                <a:solidFill>
+                  <a:srgbClr val="6C6E76"/>
                 </a:solidFill>
                 <a:latin typeface="Calibri" pitchFamily="34" charset="0"/>
                 <a:ea typeface="Calibri" pitchFamily="34" charset="-122"/>
                 <a:cs typeface="Calibri" pitchFamily="34" charset="-120"/>
               </a:rPr>
-              <a:t>Nobody has hand-typed a set of pages to check against. No system can be scored, ours or anyone else's.</a:t>
-            </a:r>
-            <a:endParaRPr lang="en-US" sz="1450" dirty="0"/>
-          </a:p>
-        </p:txBody>
-      </p:sp>
-      <p:sp>
-        <p:nvSpPr>
-          <p:cNvPr id="8" name="Shape 6"/>
-          <p:cNvSpPr/>
-          <p:nvPr/>
-        </p:nvSpPr>
-        <p:spPr>
-          <a:xfrm>
-            <a:off x="640080" y="3154680"/>
-            <a:ext cx="10881360" cy="0"/>
-          </a:xfrm>
-          <a:prstGeom prst="line">
-            <a:avLst/>
-          </a:prstGeom>
-          <a:noFill/>
-          <a:ln w="9525">
-            <a:solidFill>
-              <a:srgbClr val="D6D8DD"/>
-            </a:solidFill>
-            <a:prstDash val="solid"/>
-          </a:ln>
-        </p:spPr>
-        <p:txBody>
-          <a:bodyPr/>
-          <a:lstStyle/>
-          <a:p>
-            <a:endParaRPr lang="en-IN"/>
-          </a:p>
-        </p:txBody>
-      </p:sp>
-      <p:sp>
-        <p:nvSpPr>
-          <p:cNvPr id="9" name="Text 7"/>
-          <p:cNvSpPr/>
-          <p:nvPr/>
-        </p:nvSpPr>
-        <p:spPr>
-          <a:xfrm>
-            <a:off x="640080" y="3291840"/>
-            <a:ext cx="502920" cy="640080"/>
-          </a:xfrm>
-          <a:prstGeom prst="rect">
-            <a:avLst/>
-          </a:prstGeom>
-          <a:noFill/>
-          <a:ln/>
-        </p:spPr>
-        <p:txBody>
-          <a:bodyPr wrap="square" lIns="0" tIns="0" rIns="0" bIns="0" rtlCol="0" anchor="ctr"/>
-          <a:lstStyle/>
-          <a:p>
-            <a:pPr marL="0" indent="0" algn="l">
-              <a:buNone/>
-            </a:pPr>
-            <a:r>
-              <a:rPr lang="en-US" sz="3200" b="1" dirty="0">
+              <a:t>Government of Odisha  ×  University of Chicago Trust</a:t>
+            </a:r>
+            <a:endParaRPr lang="en-US" sz="850" dirty="0"/>
+          </a:p>
+        </p:txBody>
+      </p:sp>
+      <p:sp>
+        <p:nvSpPr>
+          <p:cNvPr id="15" name="TextBox 14"/>
+          <p:cNvSpPr txBox="1"/>
+          <p:nvPr/>
+        </p:nvSpPr>
+        <p:spPr>
+          <a:xfrm>
+            <a:off x="640080" y="1847088"/>
+            <a:ext cx="10881360" cy="329184"/>
+          </a:xfrm>
+          <a:prstGeom prst="rect">
+            <a:avLst/>
+          </a:prstGeom>
+          <a:noFill/>
+        </p:spPr>
+        <p:txBody>
+          <a:bodyPr wrap="square" lIns="0" rIns="0" tIns="0" bIns="0">
+            <a:spAutoFit/>
+          </a:bodyPr>
+          <a:lstStyle/>
+          <a:p>
+            <a:pPr algn="l"/>
+            <a:r>
+              <a:rPr sz="1700" b="0" i="0">
+                <a:solidFill>
+                  <a:srgbClr val="44464D"/>
+                </a:solidFill>
+                <a:latin typeface="Calibri"/>
+              </a:rPr>
+              <a:t>We tested whether a different department would have closed the case faster.</a:t>
+            </a:r>
+          </a:p>
+        </p:txBody>
+      </p:sp>
+      <p:graphicFrame>
+        <p:nvGraphicFramePr>
+          <p:cNvPr id="16" name="Table 15"/>
+          <p:cNvGraphicFramePr>
+            <a:graphicFrameLocks noGrp="1"/>
+          </p:cNvGraphicFramePr>
+          <p:nvPr/>
+        </p:nvGraphicFramePr>
+        <p:xfrm>
+          <a:off x="640080" y="2331720"/>
+          <a:ext cx="10881360" cy="2468880"/>
+        </p:xfrm>
+        <a:graphic>
+          <a:graphicData uri="http://schemas.openxmlformats.org/drawingml/2006/table">
+            <a:tbl>
+              <a:tblPr/>
+              <a:tblGrid>
+                <a:gridCol w="5486400"/>
+                <a:gridCol w="2697480"/>
+                <a:gridCol w="2697480"/>
+              </a:tblGrid>
+              <a:tr h="365760">
+                <a:tc>
+                  <a:txBody>
+                    <a:bodyPr wrap="square"/>
+                    <a:lstStyle/>
+                    <a:p>
+                      <a:r>
+                        <a:rPr sz="1300" b="1">
+                          <a:solidFill>
+                            <a:srgbClr val="FFFFFF"/>
+                          </a:solidFill>
+                          <a:latin typeface="Calibri"/>
+                        </a:rPr>
+                        <a:t>What we measured</a:t>
+                      </a:r>
+                    </a:p>
+                  </a:txBody>
+                  <a:tcPr anchor="ctr" marL="128016" marR="91440" marT="36576" marB="36576">
+                    <a:solidFill>
+                      <a:srgbClr val="7A1F2B"/>
+                    </a:solidFill>
+                    <a:lnL w="6350" cap="flat" cmpd="sng" algn="ctr">
+                      <a:solidFill>
+                        <a:srgbClr val="7A1F2B"/>
+                      </a:solidFill>
+                    </a:lnL>
+                    <a:lnR w="6350" cap="flat" cmpd="sng" algn="ctr">
+                      <a:solidFill>
+                        <a:srgbClr val="7A1F2B"/>
+                      </a:solidFill>
+                    </a:lnR>
+                    <a:lnT w="6350" cap="flat" cmpd="sng" algn="ctr">
+                      <a:solidFill>
+                        <a:srgbClr val="7A1F2B"/>
+                      </a:solidFill>
+                    </a:lnT>
+                    <a:lnB w="6350" cap="flat" cmpd="sng" algn="ctr">
+                      <a:solidFill>
+                        <a:srgbClr val="7A1F2B"/>
+                      </a:solidFill>
+                    </a:lnB>
+                  </a:tcPr>
+                </a:tc>
+                <a:tc>
+                  <a:txBody>
+                    <a:bodyPr wrap="square"/>
+                    <a:lstStyle/>
+                    <a:p>
+                      <a:r>
+                        <a:rPr sz="1300" b="1">
+                          <a:solidFill>
+                            <a:srgbClr val="FFFFFF"/>
+                          </a:solidFill>
+                          <a:latin typeface="Calibri"/>
+                        </a:rPr>
+                        <a:t>2024, held out</a:t>
+                      </a:r>
+                    </a:p>
+                  </a:txBody>
+                  <a:tcPr anchor="ctr" marL="128016" marR="91440" marT="36576" marB="36576">
+                    <a:solidFill>
+                      <a:srgbClr val="7A1F2B"/>
+                    </a:solidFill>
+                    <a:lnL w="6350" cap="flat" cmpd="sng" algn="ctr">
+                      <a:solidFill>
+                        <a:srgbClr val="7A1F2B"/>
+                      </a:solidFill>
+                    </a:lnL>
+                    <a:lnR w="6350" cap="flat" cmpd="sng" algn="ctr">
+                      <a:solidFill>
+                        <a:srgbClr val="7A1F2B"/>
+                      </a:solidFill>
+                    </a:lnR>
+                    <a:lnT w="6350" cap="flat" cmpd="sng" algn="ctr">
+                      <a:solidFill>
+                        <a:srgbClr val="7A1F2B"/>
+                      </a:solidFill>
+                    </a:lnT>
+                    <a:lnB w="6350" cap="flat" cmpd="sng" algn="ctr">
+                      <a:solidFill>
+                        <a:srgbClr val="7A1F2B"/>
+                      </a:solidFill>
+                    </a:lnB>
+                  </a:tcPr>
+                </a:tc>
+                <a:tc>
+                  <a:txBody>
+                    <a:bodyPr wrap="square"/>
+                    <a:lstStyle/>
+                    <a:p>
+                      <a:r>
+                        <a:rPr sz="1300" b="1">
+                          <a:solidFill>
+                            <a:srgbClr val="FFFFFF"/>
+                          </a:solidFill>
+                          <a:latin typeface="Calibri"/>
+                        </a:rPr>
+                        <a:t>2025, untouched</a:t>
+                      </a:r>
+                    </a:p>
+                  </a:txBody>
+                  <a:tcPr anchor="ctr" marL="128016" marR="91440" marT="36576" marB="36576">
+                    <a:solidFill>
+                      <a:srgbClr val="7A1F2B"/>
+                    </a:solidFill>
+                    <a:lnL w="6350" cap="flat" cmpd="sng" algn="ctr">
+                      <a:solidFill>
+                        <a:srgbClr val="7A1F2B"/>
+                      </a:solidFill>
+                    </a:lnL>
+                    <a:lnR w="6350" cap="flat" cmpd="sng" algn="ctr">
+                      <a:solidFill>
+                        <a:srgbClr val="7A1F2B"/>
+                      </a:solidFill>
+                    </a:lnR>
+                    <a:lnT w="6350" cap="flat" cmpd="sng" algn="ctr">
+                      <a:solidFill>
+                        <a:srgbClr val="7A1F2B"/>
+                      </a:solidFill>
+                    </a:lnT>
+                    <a:lnB w="6350" cap="flat" cmpd="sng" algn="ctr">
+                      <a:solidFill>
+                        <a:srgbClr val="7A1F2B"/>
+                      </a:solidFill>
+                    </a:lnB>
+                  </a:tcPr>
+                </a:tc>
+              </a:tr>
+              <a:tr h="420624">
+                <a:tc>
+                  <a:txBody>
+                    <a:bodyPr wrap="square"/>
+                    <a:lstStyle/>
+                    <a:p>
+                      <a:r>
+                        <a:rPr sz="1500" b="1">
+                          <a:solidFill>
+                            <a:srgbClr val="1E1F24"/>
+                          </a:solidFill>
+                          <a:latin typeface="Calibri"/>
+                        </a:rPr>
+                        <a:t>Outcome model alone</a:t>
+                      </a:r>
+                    </a:p>
+                  </a:txBody>
+                  <a:tcPr anchor="ctr" marL="128016" marR="91440" marT="36576" marB="36576">
+                    <a:solidFill>
+                      <a:srgbClr val="FFFFFF"/>
+                    </a:solidFill>
+                    <a:lnL w="6350" cap="flat" cmpd="sng" algn="ctr">
+                      <a:solidFill>
+                        <a:srgbClr val="DDDDDD"/>
+                      </a:solidFill>
+                    </a:lnL>
+                    <a:lnR w="6350" cap="flat" cmpd="sng" algn="ctr">
+                      <a:solidFill>
+                        <a:srgbClr val="DDDDDD"/>
+                      </a:solidFill>
+                    </a:lnR>
+                    <a:lnT w="6350" cap="flat" cmpd="sng" algn="ctr">
+                      <a:solidFill>
+                        <a:srgbClr val="DDDDDD"/>
+                      </a:solidFill>
+                    </a:lnT>
+                    <a:lnB w="6350" cap="flat" cmpd="sng" algn="ctr">
+                      <a:solidFill>
+                        <a:srgbClr val="DDDDDD"/>
+                      </a:solidFill>
+                    </a:lnB>
+                  </a:tcPr>
+                </a:tc>
+                <a:tc>
+                  <a:txBody>
+                    <a:bodyPr wrap="square"/>
+                    <a:lstStyle/>
+                    <a:p>
+                      <a:r>
+                        <a:rPr sz="1500" b="0">
+                          <a:solidFill>
+                            <a:srgbClr val="44464D"/>
+                          </a:solidFill>
+                          <a:latin typeface="Calibri"/>
+                        </a:rPr>
+                        <a:t>+24.5 days</a:t>
+                      </a:r>
+                    </a:p>
+                  </a:txBody>
+                  <a:tcPr anchor="ctr" marL="128016" marR="91440" marT="36576" marB="36576">
+                    <a:solidFill>
+                      <a:srgbClr val="FFFFFF"/>
+                    </a:solidFill>
+                    <a:lnL w="6350" cap="flat" cmpd="sng" algn="ctr">
+                      <a:solidFill>
+                        <a:srgbClr val="DDDDDD"/>
+                      </a:solidFill>
+                    </a:lnL>
+                    <a:lnR w="6350" cap="flat" cmpd="sng" algn="ctr">
+                      <a:solidFill>
+                        <a:srgbClr val="DDDDDD"/>
+                      </a:solidFill>
+                    </a:lnR>
+                    <a:lnT w="6350" cap="flat" cmpd="sng" algn="ctr">
+                      <a:solidFill>
+                        <a:srgbClr val="DDDDDD"/>
+                      </a:solidFill>
+                    </a:lnT>
+                    <a:lnB w="6350" cap="flat" cmpd="sng" algn="ctr">
+                      <a:solidFill>
+                        <a:srgbClr val="DDDDDD"/>
+                      </a:solidFill>
+                    </a:lnB>
+                  </a:tcPr>
+                </a:tc>
+                <a:tc>
+                  <a:txBody>
+                    <a:bodyPr wrap="square"/>
+                    <a:lstStyle/>
+                    <a:p>
+                      <a:r>
+                        <a:rPr sz="1500" b="0">
+                          <a:solidFill>
+                            <a:srgbClr val="44464D"/>
+                          </a:solidFill>
+                          <a:latin typeface="Calibri"/>
+                        </a:rPr>
+                        <a:t>+30.5 days</a:t>
+                      </a:r>
+                    </a:p>
+                  </a:txBody>
+                  <a:tcPr anchor="ctr" marL="128016" marR="91440" marT="36576" marB="36576">
+                    <a:solidFill>
+                      <a:srgbClr val="FFFFFF"/>
+                    </a:solidFill>
+                    <a:lnL w="6350" cap="flat" cmpd="sng" algn="ctr">
+                      <a:solidFill>
+                        <a:srgbClr val="DDDDDD"/>
+                      </a:solidFill>
+                    </a:lnL>
+                    <a:lnR w="6350" cap="flat" cmpd="sng" algn="ctr">
+                      <a:solidFill>
+                        <a:srgbClr val="DDDDDD"/>
+                      </a:solidFill>
+                    </a:lnR>
+                    <a:lnT w="6350" cap="flat" cmpd="sng" algn="ctr">
+                      <a:solidFill>
+                        <a:srgbClr val="DDDDDD"/>
+                      </a:solidFill>
+                    </a:lnT>
+                    <a:lnB w="6350" cap="flat" cmpd="sng" algn="ctr">
+                      <a:solidFill>
+                        <a:srgbClr val="DDDDDD"/>
+                      </a:solidFill>
+                    </a:lnB>
+                  </a:tcPr>
+                </a:tc>
+              </a:tr>
+              <a:tr h="420624">
+                <a:tc>
+                  <a:txBody>
+                    <a:bodyPr wrap="square"/>
+                    <a:lstStyle/>
+                    <a:p>
+                      <a:r>
+                        <a:rPr sz="1500" b="1">
+                          <a:solidFill>
+                            <a:srgbClr val="1E1F24"/>
+                          </a:solidFill>
+                          <a:latin typeface="Calibri"/>
+                        </a:rPr>
+                        <a:t>Doubly robust</a:t>
+                      </a:r>
+                    </a:p>
+                  </a:txBody>
+                  <a:tcPr anchor="ctr" marL="128016" marR="91440" marT="36576" marB="36576">
+                    <a:solidFill>
+                      <a:srgbClr val="F2F2F2"/>
+                    </a:solidFill>
+                    <a:lnL w="6350" cap="flat" cmpd="sng" algn="ctr">
+                      <a:solidFill>
+                        <a:srgbClr val="DDDDDD"/>
+                      </a:solidFill>
+                    </a:lnL>
+                    <a:lnR w="6350" cap="flat" cmpd="sng" algn="ctr">
+                      <a:solidFill>
+                        <a:srgbClr val="DDDDDD"/>
+                      </a:solidFill>
+                    </a:lnR>
+                    <a:lnT w="6350" cap="flat" cmpd="sng" algn="ctr">
+                      <a:solidFill>
+                        <a:srgbClr val="DDDDDD"/>
+                      </a:solidFill>
+                    </a:lnT>
+                    <a:lnB w="6350" cap="flat" cmpd="sng" algn="ctr">
+                      <a:solidFill>
+                        <a:srgbClr val="DDDDDD"/>
+                      </a:solidFill>
+                    </a:lnB>
+                  </a:tcPr>
+                </a:tc>
+                <a:tc>
+                  <a:txBody>
+                    <a:bodyPr wrap="square"/>
+                    <a:lstStyle/>
+                    <a:p>
+                      <a:r>
+                        <a:rPr sz="1500" b="0">
+                          <a:solidFill>
+                            <a:srgbClr val="44464D"/>
+                          </a:solidFill>
+                          <a:latin typeface="Calibri"/>
+                        </a:rPr>
+                        <a:t>+26.8 days (SE 4.0)</a:t>
+                      </a:r>
+                    </a:p>
+                  </a:txBody>
+                  <a:tcPr anchor="ctr" marL="128016" marR="91440" marT="36576" marB="36576">
+                    <a:solidFill>
+                      <a:srgbClr val="F2F2F2"/>
+                    </a:solidFill>
+                    <a:lnL w="6350" cap="flat" cmpd="sng" algn="ctr">
+                      <a:solidFill>
+                        <a:srgbClr val="DDDDDD"/>
+                      </a:solidFill>
+                    </a:lnL>
+                    <a:lnR w="6350" cap="flat" cmpd="sng" algn="ctr">
+                      <a:solidFill>
+                        <a:srgbClr val="DDDDDD"/>
+                      </a:solidFill>
+                    </a:lnR>
+                    <a:lnT w="6350" cap="flat" cmpd="sng" algn="ctr">
+                      <a:solidFill>
+                        <a:srgbClr val="DDDDDD"/>
+                      </a:solidFill>
+                    </a:lnT>
+                    <a:lnB w="6350" cap="flat" cmpd="sng" algn="ctr">
+                      <a:solidFill>
+                        <a:srgbClr val="DDDDDD"/>
+                      </a:solidFill>
+                    </a:lnB>
+                  </a:tcPr>
+                </a:tc>
+                <a:tc>
+                  <a:txBody>
+                    <a:bodyPr wrap="square"/>
+                    <a:lstStyle/>
+                    <a:p>
+                      <a:r>
+                        <a:rPr sz="1500" b="0">
+                          <a:solidFill>
+                            <a:srgbClr val="44464D"/>
+                          </a:solidFill>
+                          <a:latin typeface="Calibri"/>
+                        </a:rPr>
+                        <a:t>−2.3 days (SE 3.5)</a:t>
+                      </a:r>
+                    </a:p>
+                  </a:txBody>
+                  <a:tcPr anchor="ctr" marL="128016" marR="91440" marT="36576" marB="36576">
+                    <a:solidFill>
+                      <a:srgbClr val="F2F2F2"/>
+                    </a:solidFill>
+                    <a:lnL w="6350" cap="flat" cmpd="sng" algn="ctr">
+                      <a:solidFill>
+                        <a:srgbClr val="DDDDDD"/>
+                      </a:solidFill>
+                    </a:lnL>
+                    <a:lnR w="6350" cap="flat" cmpd="sng" algn="ctr">
+                      <a:solidFill>
+                        <a:srgbClr val="DDDDDD"/>
+                      </a:solidFill>
+                    </a:lnR>
+                    <a:lnT w="6350" cap="flat" cmpd="sng" algn="ctr">
+                      <a:solidFill>
+                        <a:srgbClr val="DDDDDD"/>
+                      </a:solidFill>
+                    </a:lnT>
+                    <a:lnB w="6350" cap="flat" cmpd="sng" algn="ctr">
+                      <a:solidFill>
+                        <a:srgbClr val="DDDDDD"/>
+                      </a:solidFill>
+                    </a:lnB>
+                  </a:tcPr>
+                </a:tc>
+              </a:tr>
+              <a:tr h="420624">
+                <a:tc>
+                  <a:txBody>
+                    <a:bodyPr wrap="square"/>
+                    <a:lstStyle/>
+                    <a:p>
+                      <a:r>
+                        <a:rPr sz="1500" b="1">
+                          <a:solidFill>
+                            <a:srgbClr val="1E1F24"/>
+                          </a:solidFill>
+                          <a:latin typeface="Calibri"/>
+                        </a:rPr>
+                        <a:t>Error predicting the routes actually used</a:t>
+                      </a:r>
+                    </a:p>
+                  </a:txBody>
+                  <a:tcPr anchor="ctr" marL="128016" marR="91440" marT="36576" marB="36576">
+                    <a:solidFill>
+                      <a:srgbClr val="FFFFFF"/>
+                    </a:solidFill>
+                    <a:lnL w="6350" cap="flat" cmpd="sng" algn="ctr">
+                      <a:solidFill>
+                        <a:srgbClr val="DDDDDD"/>
+                      </a:solidFill>
+                    </a:lnL>
+                    <a:lnR w="6350" cap="flat" cmpd="sng" algn="ctr">
+                      <a:solidFill>
+                        <a:srgbClr val="DDDDDD"/>
+                      </a:solidFill>
+                    </a:lnR>
+                    <a:lnT w="6350" cap="flat" cmpd="sng" algn="ctr">
+                      <a:solidFill>
+                        <a:srgbClr val="DDDDDD"/>
+                      </a:solidFill>
+                    </a:lnT>
+                    <a:lnB w="6350" cap="flat" cmpd="sng" algn="ctr">
+                      <a:solidFill>
+                        <a:srgbClr val="DDDDDD"/>
+                      </a:solidFill>
+                    </a:lnB>
+                  </a:tcPr>
+                </a:tc>
+                <a:tc>
+                  <a:txBody>
+                    <a:bodyPr wrap="square"/>
+                    <a:lstStyle/>
+                    <a:p>
+                      <a:r>
+                        <a:rPr sz="1500" b="0">
+                          <a:solidFill>
+                            <a:srgbClr val="44464D"/>
+                          </a:solidFill>
+                          <a:latin typeface="Calibri"/>
+                        </a:rPr>
+                        <a:t>5%</a:t>
+                      </a:r>
+                    </a:p>
+                  </a:txBody>
+                  <a:tcPr anchor="ctr" marL="128016" marR="91440" marT="36576" marB="36576">
+                    <a:solidFill>
+                      <a:srgbClr val="FFFFFF"/>
+                    </a:solidFill>
+                    <a:lnL w="6350" cap="flat" cmpd="sng" algn="ctr">
+                      <a:solidFill>
+                        <a:srgbClr val="DDDDDD"/>
+                      </a:solidFill>
+                    </a:lnL>
+                    <a:lnR w="6350" cap="flat" cmpd="sng" algn="ctr">
+                      <a:solidFill>
+                        <a:srgbClr val="DDDDDD"/>
+                      </a:solidFill>
+                    </a:lnR>
+                    <a:lnT w="6350" cap="flat" cmpd="sng" algn="ctr">
+                      <a:solidFill>
+                        <a:srgbClr val="DDDDDD"/>
+                      </a:solidFill>
+                    </a:lnT>
+                    <a:lnB w="6350" cap="flat" cmpd="sng" algn="ctr">
+                      <a:solidFill>
+                        <a:srgbClr val="DDDDDD"/>
+                      </a:solidFill>
+                    </a:lnB>
+                  </a:tcPr>
+                </a:tc>
+                <a:tc>
+                  <a:txBody>
+                    <a:bodyPr wrap="square"/>
+                    <a:lstStyle/>
+                    <a:p>
+                      <a:r>
+                        <a:rPr sz="1500" b="0">
+                          <a:solidFill>
+                            <a:srgbClr val="44464D"/>
+                          </a:solidFill>
+                          <a:latin typeface="Calibri"/>
+                        </a:rPr>
+                        <a:t>118%</a:t>
+                      </a:r>
+                    </a:p>
+                  </a:txBody>
+                  <a:tcPr anchor="ctr" marL="128016" marR="91440" marT="36576" marB="36576">
+                    <a:solidFill>
+                      <a:srgbClr val="FFFFFF"/>
+                    </a:solidFill>
+                    <a:lnL w="6350" cap="flat" cmpd="sng" algn="ctr">
+                      <a:solidFill>
+                        <a:srgbClr val="DDDDDD"/>
+                      </a:solidFill>
+                    </a:lnL>
+                    <a:lnR w="6350" cap="flat" cmpd="sng" algn="ctr">
+                      <a:solidFill>
+                        <a:srgbClr val="DDDDDD"/>
+                      </a:solidFill>
+                    </a:lnR>
+                    <a:lnT w="6350" cap="flat" cmpd="sng" algn="ctr">
+                      <a:solidFill>
+                        <a:srgbClr val="DDDDDD"/>
+                      </a:solidFill>
+                    </a:lnT>
+                    <a:lnB w="6350" cap="flat" cmpd="sng" algn="ctr">
+                      <a:solidFill>
+                        <a:srgbClr val="DDDDDD"/>
+                      </a:solidFill>
+                    </a:lnB>
+                  </a:tcPr>
+                </a:tc>
+              </a:tr>
+              <a:tr h="420624">
+                <a:tc>
+                  <a:txBody>
+                    <a:bodyPr wrap="square"/>
+                    <a:lstStyle/>
+                    <a:p>
+                      <a:r>
+                        <a:rPr sz="1500" b="1">
+                          <a:solidFill>
+                            <a:srgbClr val="1E1F24"/>
+                          </a:solidFill>
+                          <a:latin typeface="Calibri"/>
+                        </a:rPr>
+                        <a:t>Suggested route has precedent in that category and district</a:t>
+                      </a:r>
+                    </a:p>
+                  </a:txBody>
+                  <a:tcPr anchor="ctr" marL="128016" marR="91440" marT="36576" marB="36576">
+                    <a:solidFill>
+                      <a:srgbClr val="F2F2F2"/>
+                    </a:solidFill>
+                    <a:lnL w="6350" cap="flat" cmpd="sng" algn="ctr">
+                      <a:solidFill>
+                        <a:srgbClr val="DDDDDD"/>
+                      </a:solidFill>
+                    </a:lnL>
+                    <a:lnR w="6350" cap="flat" cmpd="sng" algn="ctr">
+                      <a:solidFill>
+                        <a:srgbClr val="DDDDDD"/>
+                      </a:solidFill>
+                    </a:lnR>
+                    <a:lnT w="6350" cap="flat" cmpd="sng" algn="ctr">
+                      <a:solidFill>
+                        <a:srgbClr val="DDDDDD"/>
+                      </a:solidFill>
+                    </a:lnT>
+                    <a:lnB w="6350" cap="flat" cmpd="sng" algn="ctr">
+                      <a:solidFill>
+                        <a:srgbClr val="DDDDDD"/>
+                      </a:solidFill>
+                    </a:lnB>
+                  </a:tcPr>
+                </a:tc>
+                <a:tc>
+                  <a:txBody>
+                    <a:bodyPr wrap="square"/>
+                    <a:lstStyle/>
+                    <a:p>
+                      <a:r>
+                        <a:rPr sz="1500" b="0">
+                          <a:solidFill>
+                            <a:srgbClr val="44464D"/>
+                          </a:solidFill>
+                          <a:latin typeface="Calibri"/>
+                        </a:rPr>
+                        <a:t>38% of cases</a:t>
+                      </a:r>
+                    </a:p>
+                  </a:txBody>
+                  <a:tcPr anchor="ctr" marL="128016" marR="91440" marT="36576" marB="36576">
+                    <a:solidFill>
+                      <a:srgbClr val="F2F2F2"/>
+                    </a:solidFill>
+                    <a:lnL w="6350" cap="flat" cmpd="sng" algn="ctr">
+                      <a:solidFill>
+                        <a:srgbClr val="DDDDDD"/>
+                      </a:solidFill>
+                    </a:lnL>
+                    <a:lnR w="6350" cap="flat" cmpd="sng" algn="ctr">
+                      <a:solidFill>
+                        <a:srgbClr val="DDDDDD"/>
+                      </a:solidFill>
+                    </a:lnR>
+                    <a:lnT w="6350" cap="flat" cmpd="sng" algn="ctr">
+                      <a:solidFill>
+                        <a:srgbClr val="DDDDDD"/>
+                      </a:solidFill>
+                    </a:lnT>
+                    <a:lnB w="6350" cap="flat" cmpd="sng" algn="ctr">
+                      <a:solidFill>
+                        <a:srgbClr val="DDDDDD"/>
+                      </a:solidFill>
+                    </a:lnB>
+                  </a:tcPr>
+                </a:tc>
+                <a:tc>
+                  <a:txBody>
+                    <a:bodyPr wrap="square"/>
+                    <a:lstStyle/>
+                    <a:p>
+                      <a:r>
+                        <a:rPr sz="1500" b="0">
+                          <a:solidFill>
+                            <a:srgbClr val="44464D"/>
+                          </a:solidFill>
+                          <a:latin typeface="Calibri"/>
+                        </a:rPr>
+                        <a:t>16% of cases</a:t>
+                      </a:r>
+                    </a:p>
+                  </a:txBody>
+                  <a:tcPr anchor="ctr" marL="128016" marR="91440" marT="36576" marB="36576">
+                    <a:solidFill>
+                      <a:srgbClr val="F2F2F2"/>
+                    </a:solidFill>
+                    <a:lnL w="6350" cap="flat" cmpd="sng" algn="ctr">
+                      <a:solidFill>
+                        <a:srgbClr val="DDDDDD"/>
+                      </a:solidFill>
+                    </a:lnL>
+                    <a:lnR w="6350" cap="flat" cmpd="sng" algn="ctr">
+                      <a:solidFill>
+                        <a:srgbClr val="DDDDDD"/>
+                      </a:solidFill>
+                    </a:lnR>
+                    <a:lnT w="6350" cap="flat" cmpd="sng" algn="ctr">
+                      <a:solidFill>
+                        <a:srgbClr val="DDDDDD"/>
+                      </a:solidFill>
+                    </a:lnT>
+                    <a:lnB w="6350" cap="flat" cmpd="sng" algn="ctr">
+                      <a:solidFill>
+                        <a:srgbClr val="DDDDDD"/>
+                      </a:solidFill>
+                    </a:lnB>
+                  </a:tcPr>
+                </a:tc>
+              </a:tr>
+              <a:tr h="420624">
+                <a:tc>
+                  <a:txBody>
+                    <a:bodyPr wrap="square"/>
+                    <a:lstStyle/>
+                    <a:p>
+                      <a:r>
+                        <a:rPr sz="1500" b="1">
+                          <a:solidFill>
+                            <a:srgbClr val="1E1F24"/>
+                          </a:solidFill>
+                          <a:latin typeface="Calibri"/>
+                        </a:rPr>
+                        <a:t>Still open when the data was cut</a:t>
+                      </a:r>
+                    </a:p>
+                  </a:txBody>
+                  <a:tcPr anchor="ctr" marL="128016" marR="91440" marT="36576" marB="36576">
+                    <a:solidFill>
+                      <a:srgbClr val="FFFFFF"/>
+                    </a:solidFill>
+                    <a:lnL w="6350" cap="flat" cmpd="sng" algn="ctr">
+                      <a:solidFill>
+                        <a:srgbClr val="DDDDDD"/>
+                      </a:solidFill>
+                    </a:lnL>
+                    <a:lnR w="6350" cap="flat" cmpd="sng" algn="ctr">
+                      <a:solidFill>
+                        <a:srgbClr val="DDDDDD"/>
+                      </a:solidFill>
+                    </a:lnR>
+                    <a:lnT w="6350" cap="flat" cmpd="sng" algn="ctr">
+                      <a:solidFill>
+                        <a:srgbClr val="DDDDDD"/>
+                      </a:solidFill>
+                    </a:lnT>
+                    <a:lnB w="6350" cap="flat" cmpd="sng" algn="ctr">
+                      <a:solidFill>
+                        <a:srgbClr val="DDDDDD"/>
+                      </a:solidFill>
+                    </a:lnB>
+                  </a:tcPr>
+                </a:tc>
+                <a:tc>
+                  <a:txBody>
+                    <a:bodyPr wrap="square"/>
+                    <a:lstStyle/>
+                    <a:p>
+                      <a:r>
+                        <a:rPr sz="1500" b="0">
+                          <a:solidFill>
+                            <a:srgbClr val="44464D"/>
+                          </a:solidFill>
+                          <a:latin typeface="Calibri"/>
+                        </a:rPr>
+                        <a:t>9%</a:t>
+                      </a:r>
+                    </a:p>
+                  </a:txBody>
+                  <a:tcPr anchor="ctr" marL="128016" marR="91440" marT="36576" marB="36576">
+                    <a:solidFill>
+                      <a:srgbClr val="FFFFFF"/>
+                    </a:solidFill>
+                    <a:lnL w="6350" cap="flat" cmpd="sng" algn="ctr">
+                      <a:solidFill>
+                        <a:srgbClr val="DDDDDD"/>
+                      </a:solidFill>
+                    </a:lnL>
+                    <a:lnR w="6350" cap="flat" cmpd="sng" algn="ctr">
+                      <a:solidFill>
+                        <a:srgbClr val="DDDDDD"/>
+                      </a:solidFill>
+                    </a:lnR>
+                    <a:lnT w="6350" cap="flat" cmpd="sng" algn="ctr">
+                      <a:solidFill>
+                        <a:srgbClr val="DDDDDD"/>
+                      </a:solidFill>
+                    </a:lnT>
+                    <a:lnB w="6350" cap="flat" cmpd="sng" algn="ctr">
+                      <a:solidFill>
+                        <a:srgbClr val="DDDDDD"/>
+                      </a:solidFill>
+                    </a:lnB>
+                  </a:tcPr>
+                </a:tc>
+                <a:tc>
+                  <a:txBody>
+                    <a:bodyPr wrap="square"/>
+                    <a:lstStyle/>
+                    <a:p>
+                      <a:r>
+                        <a:rPr sz="1500" b="0">
+                          <a:solidFill>
+                            <a:srgbClr val="44464D"/>
+                          </a:solidFill>
+                          <a:latin typeface="Calibri"/>
+                        </a:rPr>
+                        <a:t>34%</a:t>
+                      </a:r>
+                    </a:p>
+                  </a:txBody>
+                  <a:tcPr anchor="ctr" marL="128016" marR="91440" marT="36576" marB="36576">
+                    <a:solidFill>
+                      <a:srgbClr val="FFFFFF"/>
+                    </a:solidFill>
+                    <a:lnL w="6350" cap="flat" cmpd="sng" algn="ctr">
+                      <a:solidFill>
+                        <a:srgbClr val="DDDDDD"/>
+                      </a:solidFill>
+                    </a:lnL>
+                    <a:lnR w="6350" cap="flat" cmpd="sng" algn="ctr">
+                      <a:solidFill>
+                        <a:srgbClr val="DDDDDD"/>
+                      </a:solidFill>
+                    </a:lnR>
+                    <a:lnT w="6350" cap="flat" cmpd="sng" algn="ctr">
+                      <a:solidFill>
+                        <a:srgbClr val="DDDDDD"/>
+                      </a:solidFill>
+                    </a:lnT>
+                    <a:lnB w="6350" cap="flat" cmpd="sng" algn="ctr">
+                      <a:solidFill>
+                        <a:srgbClr val="DDDDDD"/>
+                      </a:solidFill>
+                    </a:lnB>
+                  </a:tcPr>
+                </a:tc>
+              </a:tr>
+            </a:tbl>
+          </a:graphicData>
+        </a:graphic>
+      </p:graphicFrame>
+      <p:sp>
+        <p:nvSpPr>
+          <p:cNvPr id="17" name="TextBox 16"/>
+          <p:cNvSpPr txBox="1"/>
+          <p:nvPr/>
+        </p:nvSpPr>
+        <p:spPr>
+          <a:xfrm>
+            <a:off x="640080" y="4956048"/>
+            <a:ext cx="10881360" cy="310896"/>
+          </a:xfrm>
+          <a:prstGeom prst="rect">
+            <a:avLst/>
+          </a:prstGeom>
+          <a:noFill/>
+        </p:spPr>
+        <p:txBody>
+          <a:bodyPr wrap="square" lIns="0" rIns="0" tIns="0" bIns="0">
+            <a:spAutoFit/>
+          </a:bodyPr>
+          <a:lstStyle/>
+          <a:p>
+            <a:pPr algn="l"/>
+            <a:r>
+              <a:rPr sz="1500" b="0" i="0">
+                <a:solidFill>
+                  <a:srgbClr val="1E1F24"/>
+                </a:solidFill>
+                <a:latin typeface="Calibri"/>
+              </a:rPr>
+              <a:t>We withdrew the estimate. No routing gain is established.</a:t>
+            </a:r>
+          </a:p>
+        </p:txBody>
+      </p:sp>
+      <p:sp>
+        <p:nvSpPr>
+          <p:cNvPr id="18" name="TextBox 17"/>
+          <p:cNvSpPr txBox="1"/>
+          <p:nvPr/>
+        </p:nvSpPr>
+        <p:spPr>
+          <a:xfrm>
+            <a:off x="640080" y="5413248"/>
+            <a:ext cx="10881360" cy="237744"/>
+          </a:xfrm>
+          <a:prstGeom prst="rect">
+            <a:avLst/>
+          </a:prstGeom>
+          <a:noFill/>
+        </p:spPr>
+        <p:txBody>
+          <a:bodyPr wrap="square" lIns="0" rIns="0" tIns="0" bIns="0">
+            <a:spAutoFit/>
+          </a:bodyPr>
+          <a:lstStyle/>
+          <a:p>
+            <a:pPr algn="l"/>
+            <a:r>
+              <a:rPr sz="1200" b="0" i="1">
+                <a:solidFill>
+                  <a:srgbClr val="6C6E76"/>
+                </a:solidFill>
+                <a:latin typeface="Calibri"/>
+              </a:rPr>
+              <a:t>Positive means the suggested route closed faster. The direct estimator reports no standard error.</a:t>
+            </a:r>
+          </a:p>
+        </p:txBody>
+      </p:sp>
+      <p:sp>
+        <p:nvSpPr>
+          <p:cNvPr id="19" name="TextBox 18"/>
+          <p:cNvSpPr txBox="1"/>
+          <p:nvPr/>
+        </p:nvSpPr>
+        <p:spPr>
+          <a:xfrm>
+            <a:off x="640080" y="5614416"/>
+            <a:ext cx="10881360" cy="237744"/>
+          </a:xfrm>
+          <a:prstGeom prst="rect">
+            <a:avLst/>
+          </a:prstGeom>
+          <a:noFill/>
+        </p:spPr>
+        <p:txBody>
+          <a:bodyPr wrap="square" lIns="0" rIns="0" tIns="0" bIns="0">
+            <a:spAutoFit/>
+          </a:bodyPr>
+          <a:lstStyle/>
+          <a:p>
+            <a:pPr algn="l"/>
+            <a:r>
+              <a:rPr sz="1200" b="0" i="1">
+                <a:solidFill>
+                  <a:srgbClr val="6C6E76"/>
+                </a:solidFill>
+                <a:latin typeface="Calibri"/>
+              </a:rPr>
+              <a:t>The 2025 data stops seven months in. The outcome is measured at 365 days.</a:t>
+            </a:r>
+          </a:p>
+        </p:txBody>
+      </p:sp>
+      <p:sp>
+        <p:nvSpPr>
+          <p:cNvPr id="20" name="TextBox 19"/>
+          <p:cNvSpPr txBox="1"/>
+          <p:nvPr/>
+        </p:nvSpPr>
+        <p:spPr>
+          <a:xfrm>
+            <a:off x="640080" y="5961888"/>
+            <a:ext cx="10881360" cy="384048"/>
+          </a:xfrm>
+          <a:prstGeom prst="rect">
+            <a:avLst/>
+          </a:prstGeom>
+          <a:noFill/>
+        </p:spPr>
+        <p:txBody>
+          <a:bodyPr wrap="square" lIns="0" rIns="0" tIns="0" bIns="0">
+            <a:spAutoFit/>
+          </a:bodyPr>
+          <a:lstStyle/>
+          <a:p>
+            <a:pPr algn="l"/>
+            <a:r>
+              <a:rPr sz="1700" b="1" i="0">
                 <a:solidFill>
                   <a:srgbClr val="7A1F2B"/>
                 </a:solidFill>
-                <a:latin typeface="Cambria" pitchFamily="34" charset="0"/>
-                <a:ea typeface="Cambria" pitchFamily="34" charset="-122"/>
-                <a:cs typeface="Cambria" pitchFamily="34" charset="-120"/>
-              </a:rPr>
-              <a:t>2</a:t>
-            </a:r>
-            <a:endParaRPr lang="en-US" sz="3200" dirty="0"/>
-          </a:p>
-        </p:txBody>
-      </p:sp>
-      <p:sp>
-        <p:nvSpPr>
-          <p:cNvPr id="10" name="Text 8"/>
-          <p:cNvSpPr/>
-          <p:nvPr/>
-        </p:nvSpPr>
-        <p:spPr>
-          <a:xfrm>
-            <a:off x="1280160" y="3291840"/>
-            <a:ext cx="5852160" cy="822960"/>
-          </a:xfrm>
-          <a:prstGeom prst="rect">
-            <a:avLst/>
-          </a:prstGeom>
-          <a:noFill/>
-          <a:ln/>
-        </p:spPr>
-        <p:txBody>
-          <a:bodyPr wrap="square" lIns="0" tIns="0" rIns="0" bIns="0" rtlCol="0" anchor="ctr"/>
-          <a:lstStyle/>
-          <a:p>
-            <a:pPr marL="0" indent="0" algn="l">
-              <a:lnSpc>
-                <a:spcPct val="105000"/>
-              </a:lnSpc>
-              <a:buNone/>
-            </a:pPr>
-            <a:r>
-              <a:rPr lang="en-US" sz="1850" dirty="0">
-                <a:solidFill>
-                  <a:srgbClr val="1E1F24"/>
-                </a:solidFill>
-                <a:latin typeface="Calibri" pitchFamily="34" charset="0"/>
-                <a:ea typeface="Calibri" pitchFamily="34" charset="-122"/>
-                <a:cs typeface="Calibri" pitchFamily="34" charset="-120"/>
-              </a:rPr>
-              <a:t>We cannot say how often redaction hides too much.</a:t>
-            </a:r>
-            <a:endParaRPr lang="en-US" sz="1850" dirty="0"/>
-          </a:p>
-        </p:txBody>
-      </p:sp>
-      <p:sp>
-        <p:nvSpPr>
-          <p:cNvPr id="11" name="Shape 9"/>
-          <p:cNvSpPr/>
-          <p:nvPr/>
-        </p:nvSpPr>
-        <p:spPr>
-          <a:xfrm>
-            <a:off x="7406640" y="3310128"/>
-            <a:ext cx="4114800" cy="777240"/>
-          </a:xfrm>
-          <a:prstGeom prst="roundRect">
-            <a:avLst>
-              <a:gd name="adj" fmla="val 7059"/>
-            </a:avLst>
-          </a:prstGeom>
-          <a:solidFill>
-            <a:srgbClr val="F4F4F6"/>
-          </a:solidFill>
-          <a:ln w="12700">
-            <a:solidFill>
-              <a:srgbClr val="D6D8DD"/>
-            </a:solidFill>
-            <a:prstDash val="solid"/>
-          </a:ln>
-        </p:spPr>
-        <p:txBody>
-          <a:bodyPr/>
-          <a:lstStyle/>
-          <a:p>
-            <a:endParaRPr lang="en-IN"/>
-          </a:p>
-        </p:txBody>
-      </p:sp>
-      <p:sp>
-        <p:nvSpPr>
-          <p:cNvPr id="12" name="Text 10"/>
-          <p:cNvSpPr/>
-          <p:nvPr/>
-        </p:nvSpPr>
-        <p:spPr>
-          <a:xfrm>
-            <a:off x="7571232" y="3310128"/>
-            <a:ext cx="3794760" cy="777240"/>
-          </a:xfrm>
-          <a:prstGeom prst="rect">
-            <a:avLst/>
-          </a:prstGeom>
-          <a:noFill/>
-          <a:ln/>
-        </p:spPr>
-        <p:txBody>
-          <a:bodyPr wrap="square" lIns="0" tIns="0" rIns="0" bIns="0" rtlCol="0" anchor="ctr"/>
-          <a:lstStyle/>
-          <a:p>
-            <a:r>
-              <a:rPr lang="en-US" sz="1450" dirty="0">
-                <a:solidFill>
-                  <a:srgbClr val="1E1F24"/>
-                </a:solidFill>
-                <a:latin typeface="Calibri" pitchFamily="34" charset="0"/>
-                <a:ea typeface="Calibri" pitchFamily="34" charset="-122"/>
-                <a:cs typeface="Calibri" pitchFamily="34" charset="-120"/>
-              </a:rPr>
-              <a:t>We marked what should be hidden. We never marked what should not, so a miss and an over-redaction look the same.</a:t>
-            </a:r>
-            <a:endParaRPr lang="en-US" sz="1450" dirty="0"/>
-          </a:p>
-        </p:txBody>
-      </p:sp>
-      <p:sp>
-        <p:nvSpPr>
-          <p:cNvPr id="13" name="Shape 11"/>
-          <p:cNvSpPr/>
-          <p:nvPr/>
-        </p:nvSpPr>
-        <p:spPr>
-          <a:xfrm>
-            <a:off x="640080" y="4251960"/>
-            <a:ext cx="10881360" cy="0"/>
-          </a:xfrm>
-          <a:prstGeom prst="line">
-            <a:avLst/>
-          </a:prstGeom>
-          <a:noFill/>
-          <a:ln w="9525">
-            <a:solidFill>
-              <a:srgbClr val="D6D8DD"/>
-            </a:solidFill>
-            <a:prstDash val="solid"/>
-          </a:ln>
-        </p:spPr>
-        <p:txBody>
-          <a:bodyPr/>
-          <a:lstStyle/>
-          <a:p>
-            <a:endParaRPr lang="en-IN"/>
-          </a:p>
-        </p:txBody>
-      </p:sp>
-      <p:sp>
-        <p:nvSpPr>
-          <p:cNvPr id="14" name="Text 12"/>
-          <p:cNvSpPr/>
-          <p:nvPr/>
-        </p:nvSpPr>
-        <p:spPr>
-          <a:xfrm>
-            <a:off x="640080" y="4389120"/>
-            <a:ext cx="502920" cy="640080"/>
-          </a:xfrm>
-          <a:prstGeom prst="rect">
-            <a:avLst/>
-          </a:prstGeom>
-          <a:noFill/>
-          <a:ln/>
-        </p:spPr>
-        <p:txBody>
-          <a:bodyPr wrap="square" lIns="0" tIns="0" rIns="0" bIns="0" rtlCol="0" anchor="ctr"/>
-          <a:lstStyle/>
-          <a:p>
-            <a:pPr marL="0" indent="0" algn="l">
-              <a:buNone/>
-            </a:pPr>
-            <a:r>
-              <a:rPr lang="en-US" sz="3200" b="1" dirty="0">
-                <a:solidFill>
-                  <a:srgbClr val="7A1F2B"/>
-                </a:solidFill>
-                <a:latin typeface="Cambria" pitchFamily="34" charset="0"/>
-                <a:ea typeface="Cambria" pitchFamily="34" charset="-122"/>
-                <a:cs typeface="Cambria" pitchFamily="34" charset="-120"/>
-              </a:rPr>
-              <a:t>3</a:t>
-            </a:r>
-            <a:endParaRPr lang="en-US" sz="3200" dirty="0"/>
-          </a:p>
-        </p:txBody>
-      </p:sp>
-      <p:sp>
-        <p:nvSpPr>
-          <p:cNvPr id="15" name="Text 13"/>
-          <p:cNvSpPr/>
-          <p:nvPr/>
-        </p:nvSpPr>
-        <p:spPr>
-          <a:xfrm>
-            <a:off x="1280160" y="4389120"/>
-            <a:ext cx="5852160" cy="822960"/>
-          </a:xfrm>
-          <a:prstGeom prst="rect">
-            <a:avLst/>
-          </a:prstGeom>
-          <a:noFill/>
-          <a:ln/>
-        </p:spPr>
-        <p:txBody>
-          <a:bodyPr wrap="square" lIns="0" tIns="0" rIns="0" bIns="0" rtlCol="0" anchor="ctr"/>
-          <a:lstStyle/>
-          <a:p>
-            <a:pPr marL="0" indent="0" algn="l">
-              <a:lnSpc>
-                <a:spcPct val="105000"/>
-              </a:lnSpc>
-              <a:buNone/>
-            </a:pPr>
-            <a:r>
-              <a:rPr lang="en-US" sz="1850" dirty="0">
-                <a:solidFill>
-                  <a:srgbClr val="1E1F24"/>
-                </a:solidFill>
-                <a:latin typeface="Calibri" pitchFamily="34" charset="0"/>
-                <a:ea typeface="Calibri" pitchFamily="34" charset="-122"/>
-                <a:cs typeface="Calibri" pitchFamily="34" charset="-120"/>
-              </a:rPr>
-              <a:t>We cannot say it saves officer time.</a:t>
-            </a:r>
-            <a:endParaRPr lang="en-US" sz="1850" dirty="0"/>
-          </a:p>
-        </p:txBody>
-      </p:sp>
-      <p:sp>
-        <p:nvSpPr>
-          <p:cNvPr id="16" name="Shape 14"/>
-          <p:cNvSpPr/>
-          <p:nvPr/>
-        </p:nvSpPr>
-        <p:spPr>
-          <a:xfrm>
-            <a:off x="7406640" y="4407408"/>
-            <a:ext cx="4114800" cy="777240"/>
-          </a:xfrm>
-          <a:prstGeom prst="roundRect">
-            <a:avLst>
-              <a:gd name="adj" fmla="val 7059"/>
-            </a:avLst>
-          </a:prstGeom>
-          <a:solidFill>
-            <a:srgbClr val="F4F4F6"/>
-          </a:solidFill>
-          <a:ln w="12700">
-            <a:solidFill>
-              <a:srgbClr val="D6D8DD"/>
-            </a:solidFill>
-            <a:prstDash val="solid"/>
-          </a:ln>
-        </p:spPr>
-        <p:txBody>
-          <a:bodyPr/>
-          <a:lstStyle/>
-          <a:p>
-            <a:endParaRPr lang="en-IN" b="1"/>
-          </a:p>
-        </p:txBody>
-      </p:sp>
-      <p:sp>
-        <p:nvSpPr>
-          <p:cNvPr id="17" name="Text 15"/>
-          <p:cNvSpPr/>
-          <p:nvPr/>
-        </p:nvSpPr>
-        <p:spPr>
-          <a:xfrm>
-            <a:off x="7571232" y="4407408"/>
-            <a:ext cx="3794760" cy="777240"/>
-          </a:xfrm>
-          <a:prstGeom prst="rect">
-            <a:avLst/>
-          </a:prstGeom>
-          <a:noFill/>
-          <a:ln/>
-        </p:spPr>
-        <p:txBody>
-          <a:bodyPr wrap="square" lIns="0" tIns="0" rIns="0" bIns="0" rtlCol="0" anchor="ctr"/>
-          <a:lstStyle/>
-          <a:p>
-            <a:pPr marL="0" indent="0" algn="l">
-              <a:lnSpc>
-                <a:spcPct val="100000"/>
-              </a:lnSpc>
-              <a:buNone/>
-            </a:pPr>
-            <a:r>
-              <a:rPr lang="en-US" sz="1450" dirty="0">
-                <a:solidFill>
-                  <a:srgbClr val="1E1F24"/>
-                </a:solidFill>
-                <a:latin typeface="Calibri" pitchFamily="34" charset="0"/>
-                <a:ea typeface="Calibri" pitchFamily="34" charset="-122"/>
-                <a:cs typeface="Calibri" pitchFamily="34" charset="-120"/>
-              </a:rPr>
-              <a:t>The 10 to 15 minute baseline is self-reported and was never timed. No trial has been run.</a:t>
-            </a:r>
-            <a:endParaRPr lang="en-US" sz="1450" dirty="0"/>
-          </a:p>
-        </p:txBody>
-      </p:sp>
-      <p:sp>
-        <p:nvSpPr>
-          <p:cNvPr id="18" name="Text 16"/>
-          <p:cNvSpPr/>
-          <p:nvPr/>
-        </p:nvSpPr>
-        <p:spPr>
-          <a:xfrm>
-            <a:off x="640080" y="5577840"/>
-            <a:ext cx="10881360" cy="365760"/>
-          </a:xfrm>
-          <a:prstGeom prst="rect">
-            <a:avLst/>
-          </a:prstGeom>
-          <a:noFill/>
-          <a:ln/>
-        </p:spPr>
-        <p:txBody>
-          <a:bodyPr wrap="square" lIns="0" tIns="0" rIns="0" bIns="0" rtlCol="0" anchor="ctr"/>
-          <a:lstStyle/>
-          <a:p>
-            <a:pPr marL="0" indent="0" algn="l">
-              <a:buNone/>
-            </a:pPr>
-            <a:r>
-              <a:rPr lang="en-US" sz="1650" b="1" i="1" dirty="0">
-                <a:solidFill>
-                  <a:srgbClr val="6C6E76"/>
-                </a:solidFill>
-                <a:latin typeface="Calibri" pitchFamily="34" charset="0"/>
-                <a:ea typeface="Calibri" pitchFamily="34" charset="-122"/>
-                <a:cs typeface="Calibri" pitchFamily="34" charset="-120"/>
-              </a:rPr>
-              <a:t>Every figure in this deck was produced by us, on our own data. None of it has been checked by an officer.</a:t>
-            </a:r>
-            <a:endParaRPr lang="en-US" sz="1650" b="1" dirty="0"/>
-          </a:p>
-        </p:txBody>
-      </p:sp>
-      <p:sp>
-        <p:nvSpPr>
-          <p:cNvPr id="19" name="Text 17"/>
-          <p:cNvSpPr/>
-          <p:nvPr/>
-        </p:nvSpPr>
-        <p:spPr>
-          <a:xfrm>
-            <a:off x="640080" y="6419088"/>
-            <a:ext cx="5486400" cy="274320"/>
-          </a:xfrm>
-          <a:prstGeom prst="rect">
-            <a:avLst/>
-          </a:prstGeom>
-          <a:noFill/>
-          <a:ln/>
-        </p:spPr>
-        <p:txBody>
-          <a:bodyPr wrap="square" lIns="0" tIns="0" rIns="0" bIns="0" rtlCol="0" anchor="ctr"/>
-          <a:lstStyle/>
-          <a:p>
-            <a:pPr marL="0" indent="0" algn="l">
-              <a:buNone/>
-            </a:pPr>
-            <a:r>
-              <a:rPr lang="en-US" sz="850" dirty="0">
-                <a:solidFill>
-                  <a:srgbClr val="6C6E76"/>
-                </a:solidFill>
-                <a:latin typeface="Calibri" pitchFamily="34" charset="0"/>
-                <a:ea typeface="Calibri" pitchFamily="34" charset="-122"/>
-                <a:cs typeface="Calibri" pitchFamily="34" charset="-120"/>
-              </a:rPr>
-              <a:t>Data, Policy and Innovation Centre</a:t>
-            </a:r>
-            <a:endParaRPr lang="en-US" sz="850" dirty="0"/>
-          </a:p>
-        </p:txBody>
-      </p:sp>
-      <p:sp>
-        <p:nvSpPr>
-          <p:cNvPr id="20" name="Text 18"/>
-          <p:cNvSpPr/>
-          <p:nvPr/>
-        </p:nvSpPr>
-        <p:spPr>
-          <a:xfrm>
-            <a:off x="6035040" y="6419088"/>
-            <a:ext cx="5486400" cy="274320"/>
-          </a:xfrm>
-          <a:prstGeom prst="rect">
-            <a:avLst/>
-          </a:prstGeom>
-          <a:noFill/>
-          <a:ln/>
-        </p:spPr>
-        <p:txBody>
-          <a:bodyPr wrap="square" lIns="0" tIns="0" rIns="0" bIns="0" rtlCol="0" anchor="ctr"/>
-          <a:lstStyle/>
-          <a:p>
-            <a:pPr marL="0" indent="0" algn="r">
-              <a:buNone/>
-            </a:pPr>
-            <a:r>
-              <a:rPr lang="en-US" sz="850" dirty="0">
-                <a:solidFill>
-                  <a:srgbClr val="6C6E76"/>
-                </a:solidFill>
-                <a:latin typeface="Calibri" pitchFamily="34" charset="0"/>
-                <a:ea typeface="Calibri" pitchFamily="34" charset="-122"/>
-                <a:cs typeface="Calibri" pitchFamily="34" charset="-120"/>
-              </a:rPr>
-              <a:t>Government of Odisha  ×  University of Chicago Trust</a:t>
-            </a:r>
-            <a:endParaRPr lang="en-US" sz="850" dirty="0"/>
+                <a:latin typeface="Calibri"/>
+              </a:rPr>
+              <a:t>Two estimators on the same data disagreed by 33 days. The disagreement is the finding.</a:t>
+            </a:r>
           </a:p>
         </p:txBody>
       </p:sp>
@@ -4885,7 +5297,7 @@
                 <a:ea typeface="Calibri" pitchFamily="34" charset="-122"/>
                 <a:cs typeface="Calibri" pitchFamily="34" charset="-120"/>
               </a:rPr>
-              <a:t>THE OUTSIDE OPTION: SARVAM</a:t>
+              <a:t>THE LIMITS</a:t>
             </a:r>
             <a:endParaRPr lang="en-US" sz="1500" dirty="0"/>
           </a:p>
@@ -4924,7 +5336,7 @@
                 <a:ea typeface="Cambria" pitchFamily="34" charset="-122"/>
                 <a:cs typeface="Cambria" pitchFamily="34" charset="-120"/>
               </a:rPr>
-              <a:t>It does more. We have not shown it does better.</a:t>
+              <a:t>What we cannot measure</a:t>
             </a:r>
             <a:endParaRPr lang="en-US" sz="3400" dirty="0"/>
           </a:p>
@@ -4932,14 +5344,14 @@
       </p:sp>
       <p:sp>
         <p:nvSpPr>
-          <p:cNvPr id="5" name="Text 3"/>
-          <p:cNvSpPr/>
-          <p:nvPr/>
-        </p:nvSpPr>
-        <p:spPr>
-          <a:xfrm>
-            <a:off x="640080" y="2179321"/>
-            <a:ext cx="10881360" cy="292608"/>
+          <p:cNvPr id="4" name="Text 2"/>
+          <p:cNvSpPr/>
+          <p:nvPr/>
+        </p:nvSpPr>
+        <p:spPr>
+          <a:xfrm>
+            <a:off x="640080" y="2194560"/>
+            <a:ext cx="502920" cy="640080"/>
           </a:xfrm>
           <a:prstGeom prst="rect">
             <a:avLst/>
@@ -4955,17 +5367,59 @@
               <a:buNone/>
             </a:pPr>
             <a:r>
-              <a:rPr lang="en-US" sz="1350" b="1" kern="0" spc="150" dirty="0">
+              <a:rPr lang="en-US" sz="3200" b="1" dirty="0">
                 <a:solidFill>
                   <a:srgbClr val="7A1F2B"/>
+                </a:solidFill>
+                <a:latin typeface="Cambria" pitchFamily="34" charset="0"/>
+                <a:ea typeface="Cambria" pitchFamily="34" charset="-122"/>
+                <a:cs typeface="Cambria" pitchFamily="34" charset="-120"/>
+              </a:rPr>
+              <a:t>1</a:t>
+            </a:r>
+            <a:endParaRPr lang="en-US" sz="3200" dirty="0"/>
+          </a:p>
+        </p:txBody>
+      </p:sp>
+      <p:sp>
+        <p:nvSpPr>
+          <p:cNvPr id="5" name="Text 3"/>
+          <p:cNvSpPr/>
+          <p:nvPr/>
+        </p:nvSpPr>
+        <p:spPr>
+          <a:xfrm>
+            <a:off x="1280160" y="2194560"/>
+            <a:ext cx="5852160" cy="822960"/>
+          </a:xfrm>
+          <a:prstGeom prst="rect">
+            <a:avLst/>
+          </a:prstGeom>
+          <a:noFill/>
+          <a:ln/>
+        </p:spPr>
+        <p:txBody>
+          <a:bodyPr wrap="square" lIns="0" tIns="0" rIns="0" bIns="0" rtlCol="0" anchor="ctr"/>
+          <a:lstStyle/>
+          <a:p>
+            <a:pPr marL="0" indent="0" algn="l">
+              <a:lnSpc>
+                <a:spcPct val="105000"/>
+              </a:lnSpc>
+              <a:buNone/>
+            </a:pPr>
+            <a:r>
+              <a:rPr lang="en-US" sz="1850" dirty="0">
+                <a:solidFill>
+                  <a:srgbClr val="1E1F24"/>
                 </a:solidFill>
                 <a:latin typeface="Calibri" pitchFamily="34" charset="0"/>
                 <a:ea typeface="Calibri" pitchFamily="34" charset="-122"/>
                 <a:cs typeface="Calibri" pitchFamily="34" charset="-120"/>
               </a:rPr>
-              <a:t>What it does</a:t>
-            </a:r>
-            <a:endParaRPr lang="en-US" sz="1350" dirty="0"/>
+              <a:t>We cannot say how accurately it reads a page.</a:t>
+            </a:r>
+            <a:endParaRPr lang="en-US" sz="1850" dirty="0"/>
           </a:p>
         </p:txBody>
       </p:sp>
@@ -4977,16 +5431,23 @@
         </p:nvSpPr>
         <p:spPr>
           <a:xfrm>
-            <a:off x="640080" y="2663953"/>
-            <a:ext cx="91440" cy="91440"/>
-          </a:xfrm>
-          <a:prstGeom prst="rect">
-            <a:avLst/>
+            <a:off x="7406640" y="2212848"/>
+            <a:ext cx="4114800" cy="777240"/>
+          </a:xfrm>
+          <a:prstGeom prst="roundRect">
+            <a:avLst>
+              <a:gd name="adj" fmla="val 7059"/>
+            </a:avLst>
           </a:prstGeom>
           <a:solidFill>
-            <a:srgbClr val="7A1F2B"/>
+            <a:srgbClr val="F4F4F6"/>
           </a:solidFill>
-          <a:ln/>
+          <a:ln w="12700">
+            <a:solidFill>
+              <a:srgbClr val="D6D8DD"/>
+            </a:solidFill>
+            <a:prstDash val="solid"/>
+          </a:ln>
         </p:spPr>
         <p:txBody>
           <a:bodyPr/>
@@ -5004,24 +5465,138 @@
         </p:nvSpPr>
         <p:spPr>
           <a:xfrm>
-            <a:off x="932688" y="2545081"/>
-            <a:ext cx="10607040" cy="411480"/>
-          </a:xfrm>
-          <a:prstGeom prst="rect">
-            <a:avLst/>
-          </a:prstGeom>
-          <a:noFill/>
-          <a:ln/>
-        </p:spPr>
-        <p:txBody>
-          <a:bodyPr wrap="square" lIns="0" tIns="0" rIns="0" bIns="0" rtlCol="0" anchor="t"/>
+            <a:off x="7571232" y="2212848"/>
+            <a:ext cx="3794760" cy="777240"/>
+          </a:xfrm>
+          <a:prstGeom prst="rect">
+            <a:avLst/>
+          </a:prstGeom>
+          <a:noFill/>
+          <a:ln/>
+        </p:spPr>
+        <p:txBody>
+          <a:bodyPr wrap="square" lIns="0" tIns="0" rIns="0" bIns="0" rtlCol="0" anchor="ctr"/>
+          <a:lstStyle/>
+          <a:p>
+            <a:pPr marL="0" indent="0" algn="l">
+              <a:lnSpc>
+                <a:spcPct val="100000"/>
+              </a:lnSpc>
+              <a:buNone/>
+            </a:pPr>
+            <a:r>
+              <a:rPr lang="en-US" sz="1450" dirty="0">
+                <a:solidFill>
+                  <a:srgbClr val="1E1F24"/>
+                </a:solidFill>
+                <a:latin typeface="Calibri" pitchFamily="34" charset="0"/>
+                <a:ea typeface="Calibri" pitchFamily="34" charset="-122"/>
+                <a:cs typeface="Calibri" pitchFamily="34" charset="-120"/>
+              </a:rPr>
+              <a:t>Nobody has hand-typed a set of pages to check against. No system can be scored, ours or anyone else's.</a:t>
+            </a:r>
+            <a:endParaRPr lang="en-US" sz="1450" dirty="0"/>
+          </a:p>
+        </p:txBody>
+      </p:sp>
+      <p:sp>
+        <p:nvSpPr>
+          <p:cNvPr id="8" name="Shape 6"/>
+          <p:cNvSpPr/>
+          <p:nvPr/>
+        </p:nvSpPr>
+        <p:spPr>
+          <a:xfrm>
+            <a:off x="640080" y="3154680"/>
+            <a:ext cx="10881360" cy="0"/>
+          </a:xfrm>
+          <a:prstGeom prst="line">
+            <a:avLst/>
+          </a:prstGeom>
+          <a:noFill/>
+          <a:ln w="9525">
+            <a:solidFill>
+              <a:srgbClr val="D6D8DD"/>
+            </a:solidFill>
+            <a:prstDash val="solid"/>
+          </a:ln>
+        </p:spPr>
+        <p:txBody>
+          <a:bodyPr/>
+          <a:lstStyle/>
+          <a:p>
+            <a:endParaRPr lang="en-IN"/>
+          </a:p>
+        </p:txBody>
+      </p:sp>
+      <p:sp>
+        <p:nvSpPr>
+          <p:cNvPr id="9" name="Text 7"/>
+          <p:cNvSpPr/>
+          <p:nvPr/>
+        </p:nvSpPr>
+        <p:spPr>
+          <a:xfrm>
+            <a:off x="640080" y="3291840"/>
+            <a:ext cx="502920" cy="640080"/>
+          </a:xfrm>
+          <a:prstGeom prst="rect">
+            <a:avLst/>
+          </a:prstGeom>
+          <a:noFill/>
+          <a:ln/>
+        </p:spPr>
+        <p:txBody>
+          <a:bodyPr wrap="square" lIns="0" tIns="0" rIns="0" bIns="0" rtlCol="0" anchor="ctr"/>
           <a:lstStyle/>
           <a:p>
             <a:pPr marL="0" indent="0" algn="l">
               <a:buNone/>
             </a:pPr>
             <a:r>
-              <a:rPr lang="en-US" sz="1800" dirty="0">
+              <a:rPr lang="en-US" sz="3200" b="1" dirty="0">
+                <a:solidFill>
+                  <a:srgbClr val="7A1F2B"/>
+                </a:solidFill>
+                <a:latin typeface="Cambria" pitchFamily="34" charset="0"/>
+                <a:ea typeface="Cambria" pitchFamily="34" charset="-122"/>
+                <a:cs typeface="Cambria" pitchFamily="34" charset="-120"/>
+              </a:rPr>
+              <a:t>2</a:t>
+            </a:r>
+            <a:endParaRPr lang="en-US" sz="3200" dirty="0"/>
+          </a:p>
+        </p:txBody>
+      </p:sp>
+      <p:sp>
+        <p:nvSpPr>
+          <p:cNvPr id="10" name="Text 8"/>
+          <p:cNvSpPr/>
+          <p:nvPr/>
+        </p:nvSpPr>
+        <p:spPr>
+          <a:xfrm>
+            <a:off x="1280160" y="3291840"/>
+            <a:ext cx="5852160" cy="822960"/>
+          </a:xfrm>
+          <a:prstGeom prst="rect">
+            <a:avLst/>
+          </a:prstGeom>
+          <a:noFill/>
+          <a:ln/>
+        </p:spPr>
+        <p:txBody>
+          <a:bodyPr wrap="square" lIns="0" tIns="0" rIns="0" bIns="0" rtlCol="0" anchor="ctr"/>
+          <a:lstStyle/>
+          <a:p>
+            <a:pPr marL="0" indent="0" algn="l">
+              <a:lnSpc>
+                <a:spcPct val="105000"/>
+              </a:lnSpc>
+              <a:buNone/>
+            </a:pPr>
+            <a:r>
+              <a:rPr lang="en-US" sz="1850" dirty="0">
                 <a:solidFill>
                   <a:srgbClr val="1E1F24"/>
                 </a:solidFill>
@@ -5029,30 +5604,37 @@
                 <a:ea typeface="Calibri" pitchFamily="34" charset="-122"/>
                 <a:cs typeface="Calibri" pitchFamily="34" charset="-120"/>
               </a:rPr>
-              <a:t>One call at ₹1.50 a page returns the text, a category, a one-line summary and the district.</a:t>
-            </a:r>
-            <a:endParaRPr lang="en-US" sz="1800" dirty="0"/>
-          </a:p>
-        </p:txBody>
-      </p:sp>
-      <p:sp>
-        <p:nvSpPr>
-          <p:cNvPr id="8" name="Shape 6"/>
-          <p:cNvSpPr/>
-          <p:nvPr/>
-        </p:nvSpPr>
-        <p:spPr>
-          <a:xfrm>
-            <a:off x="640080" y="3166873"/>
-            <a:ext cx="91440" cy="91440"/>
-          </a:xfrm>
-          <a:prstGeom prst="rect">
-            <a:avLst/>
+              <a:t>We cannot say how often redaction hides too much.</a:t>
+            </a:r>
+            <a:endParaRPr lang="en-US" sz="1850" dirty="0"/>
+          </a:p>
+        </p:txBody>
+      </p:sp>
+      <p:sp>
+        <p:nvSpPr>
+          <p:cNvPr id="11" name="Shape 9"/>
+          <p:cNvSpPr/>
+          <p:nvPr/>
+        </p:nvSpPr>
+        <p:spPr>
+          <a:xfrm>
+            <a:off x="7406640" y="3310128"/>
+            <a:ext cx="4114800" cy="777240"/>
+          </a:xfrm>
+          <a:prstGeom prst="roundRect">
+            <a:avLst>
+              <a:gd name="adj" fmla="val 7059"/>
+            </a:avLst>
           </a:prstGeom>
           <a:solidFill>
-            <a:srgbClr val="7A1F2B"/>
+            <a:srgbClr val="F4F4F6"/>
           </a:solidFill>
-          <a:ln/>
+          <a:ln w="12700">
+            <a:solidFill>
+              <a:srgbClr val="D6D8DD"/>
+            </a:solidFill>
+            <a:prstDash val="solid"/>
+          </a:ln>
         </p:spPr>
         <p:txBody>
           <a:bodyPr/>
@@ -5064,30 +5646,138 @@
       </p:sp>
       <p:sp>
         <p:nvSpPr>
-          <p:cNvPr id="9" name="Text 7"/>
-          <p:cNvSpPr/>
-          <p:nvPr/>
-        </p:nvSpPr>
-        <p:spPr>
-          <a:xfrm>
-            <a:off x="932688" y="3048001"/>
-            <a:ext cx="10607040" cy="411480"/>
-          </a:xfrm>
-          <a:prstGeom prst="rect">
-            <a:avLst/>
-          </a:prstGeom>
-          <a:noFill/>
-          <a:ln/>
-        </p:spPr>
-        <p:txBody>
-          <a:bodyPr wrap="square" lIns="0" tIns="0" rIns="0" bIns="0" rtlCol="0" anchor="t"/>
+          <p:cNvPr id="12" name="Text 10"/>
+          <p:cNvSpPr/>
+          <p:nvPr/>
+        </p:nvSpPr>
+        <p:spPr>
+          <a:xfrm>
+            <a:off x="7571232" y="3310128"/>
+            <a:ext cx="3794760" cy="777240"/>
+          </a:xfrm>
+          <a:prstGeom prst="rect">
+            <a:avLst/>
+          </a:prstGeom>
+          <a:noFill/>
+          <a:ln/>
+        </p:spPr>
+        <p:txBody>
+          <a:bodyPr wrap="square" lIns="0" tIns="0" rIns="0" bIns="0" rtlCol="0" anchor="ctr"/>
+          <a:lstStyle/>
+          <a:p>
+            <a:r>
+              <a:rPr lang="en-US" sz="1450" dirty="0">
+                <a:solidFill>
+                  <a:srgbClr val="1E1F24"/>
+                </a:solidFill>
+                <a:latin typeface="Calibri" pitchFamily="34" charset="0"/>
+                <a:ea typeface="Calibri" pitchFamily="34" charset="-122"/>
+                <a:cs typeface="Calibri" pitchFamily="34" charset="-120"/>
+              </a:rPr>
+              <a:t>We marked what should be hidden. We never marked what should not, so a miss and an over-redaction look the same.</a:t>
+            </a:r>
+            <a:endParaRPr lang="en-US" sz="1450" dirty="0"/>
+          </a:p>
+        </p:txBody>
+      </p:sp>
+      <p:sp>
+        <p:nvSpPr>
+          <p:cNvPr id="13" name="Shape 11"/>
+          <p:cNvSpPr/>
+          <p:nvPr/>
+        </p:nvSpPr>
+        <p:spPr>
+          <a:xfrm>
+            <a:off x="640080" y="4251960"/>
+            <a:ext cx="10881360" cy="0"/>
+          </a:xfrm>
+          <a:prstGeom prst="line">
+            <a:avLst/>
+          </a:prstGeom>
+          <a:noFill/>
+          <a:ln w="9525">
+            <a:solidFill>
+              <a:srgbClr val="D6D8DD"/>
+            </a:solidFill>
+            <a:prstDash val="solid"/>
+          </a:ln>
+        </p:spPr>
+        <p:txBody>
+          <a:bodyPr/>
+          <a:lstStyle/>
+          <a:p>
+            <a:endParaRPr lang="en-IN"/>
+          </a:p>
+        </p:txBody>
+      </p:sp>
+      <p:sp>
+        <p:nvSpPr>
+          <p:cNvPr id="14" name="Text 12"/>
+          <p:cNvSpPr/>
+          <p:nvPr/>
+        </p:nvSpPr>
+        <p:spPr>
+          <a:xfrm>
+            <a:off x="640080" y="4389120"/>
+            <a:ext cx="502920" cy="640080"/>
+          </a:xfrm>
+          <a:prstGeom prst="rect">
+            <a:avLst/>
+          </a:prstGeom>
+          <a:noFill/>
+          <a:ln/>
+        </p:spPr>
+        <p:txBody>
+          <a:bodyPr wrap="square" lIns="0" tIns="0" rIns="0" bIns="0" rtlCol="0" anchor="ctr"/>
           <a:lstStyle/>
           <a:p>
             <a:pPr marL="0" indent="0" algn="l">
               <a:buNone/>
             </a:pPr>
             <a:r>
-              <a:rPr lang="en-US" sz="1800" dirty="0">
+              <a:rPr lang="en-US" sz="3200" b="1" dirty="0">
+                <a:solidFill>
+                  <a:srgbClr val="7A1F2B"/>
+                </a:solidFill>
+                <a:latin typeface="Cambria" pitchFamily="34" charset="0"/>
+                <a:ea typeface="Cambria" pitchFamily="34" charset="-122"/>
+                <a:cs typeface="Cambria" pitchFamily="34" charset="-120"/>
+              </a:rPr>
+              <a:t>3</a:t>
+            </a:r>
+            <a:endParaRPr lang="en-US" sz="3200" dirty="0"/>
+          </a:p>
+        </p:txBody>
+      </p:sp>
+      <p:sp>
+        <p:nvSpPr>
+          <p:cNvPr id="15" name="Text 13"/>
+          <p:cNvSpPr/>
+          <p:nvPr/>
+        </p:nvSpPr>
+        <p:spPr>
+          <a:xfrm>
+            <a:off x="1280160" y="4389120"/>
+            <a:ext cx="5852160" cy="822960"/>
+          </a:xfrm>
+          <a:prstGeom prst="rect">
+            <a:avLst/>
+          </a:prstGeom>
+          <a:noFill/>
+          <a:ln/>
+        </p:spPr>
+        <p:txBody>
+          <a:bodyPr wrap="square" lIns="0" tIns="0" rIns="0" bIns="0" rtlCol="0" anchor="ctr"/>
+          <a:lstStyle/>
+          <a:p>
+            <a:pPr marL="0" indent="0" algn="l">
+              <a:lnSpc>
+                <a:spcPct val="105000"/>
+              </a:lnSpc>
+              <a:buNone/>
+            </a:pPr>
+            <a:r>
+              <a:rPr lang="en-US" sz="1850" dirty="0">
                 <a:solidFill>
                   <a:srgbClr val="1E1F24"/>
                 </a:solidFill>
@@ -5095,22 +5785,98 @@
                 <a:ea typeface="Calibri" pitchFamily="34" charset="-122"/>
                 <a:cs typeface="Calibri" pitchFamily="34" charset="-120"/>
               </a:rPr>
-              <a:t>It reads 22 Indian languages including Odia. Ours reads English.</a:t>
-            </a:r>
-            <a:endParaRPr lang="en-US" sz="1800" dirty="0"/>
-          </a:p>
-        </p:txBody>
-      </p:sp>
-      <p:sp>
-        <p:nvSpPr>
-          <p:cNvPr id="10" name="Text 8"/>
-          <p:cNvSpPr/>
-          <p:nvPr/>
-        </p:nvSpPr>
-        <p:spPr>
-          <a:xfrm>
-            <a:off x="640080" y="3972025"/>
-            <a:ext cx="10881360" cy="292608"/>
+              <a:t>We cannot say it saves officer time.</a:t>
+            </a:r>
+            <a:endParaRPr lang="en-US" sz="1850" dirty="0"/>
+          </a:p>
+        </p:txBody>
+      </p:sp>
+      <p:sp>
+        <p:nvSpPr>
+          <p:cNvPr id="16" name="Shape 14"/>
+          <p:cNvSpPr/>
+          <p:nvPr/>
+        </p:nvSpPr>
+        <p:spPr>
+          <a:xfrm>
+            <a:off x="7406640" y="4407408"/>
+            <a:ext cx="4114800" cy="777240"/>
+          </a:xfrm>
+          <a:prstGeom prst="roundRect">
+            <a:avLst>
+              <a:gd name="adj" fmla="val 7059"/>
+            </a:avLst>
+          </a:prstGeom>
+          <a:solidFill>
+            <a:srgbClr val="F4F4F6"/>
+          </a:solidFill>
+          <a:ln w="12700">
+            <a:solidFill>
+              <a:srgbClr val="D6D8DD"/>
+            </a:solidFill>
+            <a:prstDash val="solid"/>
+          </a:ln>
+        </p:spPr>
+        <p:txBody>
+          <a:bodyPr/>
+          <a:lstStyle/>
+          <a:p>
+            <a:endParaRPr lang="en-IN" b="1"/>
+          </a:p>
+        </p:txBody>
+      </p:sp>
+      <p:sp>
+        <p:nvSpPr>
+          <p:cNvPr id="17" name="Text 15"/>
+          <p:cNvSpPr/>
+          <p:nvPr/>
+        </p:nvSpPr>
+        <p:spPr>
+          <a:xfrm>
+            <a:off x="7571232" y="4407408"/>
+            <a:ext cx="3794760" cy="777240"/>
+          </a:xfrm>
+          <a:prstGeom prst="rect">
+            <a:avLst/>
+          </a:prstGeom>
+          <a:noFill/>
+          <a:ln/>
+        </p:spPr>
+        <p:txBody>
+          <a:bodyPr wrap="square" lIns="0" tIns="0" rIns="0" bIns="0" rtlCol="0" anchor="ctr"/>
+          <a:lstStyle/>
+          <a:p>
+            <a:pPr marL="0" indent="0" algn="l">
+              <a:lnSpc>
+                <a:spcPct val="100000"/>
+              </a:lnSpc>
+              <a:buNone/>
+            </a:pPr>
+            <a:r>
+              <a:rPr lang="en-US" sz="1450" dirty="0">
+                <a:solidFill>
+                  <a:srgbClr val="1E1F24"/>
+                </a:solidFill>
+                <a:latin typeface="Calibri" pitchFamily="34" charset="0"/>
+                <a:ea typeface="Calibri" pitchFamily="34" charset="-122"/>
+                <a:cs typeface="Calibri" pitchFamily="34" charset="-120"/>
+              </a:rPr>
+              <a:t>The 10 to 15 minute baseline is self-reported and was never timed. No trial has been run.</a:t>
+            </a:r>
+            <a:endParaRPr lang="en-US" sz="1450" dirty="0"/>
+          </a:p>
+        </p:txBody>
+      </p:sp>
+      <p:sp>
+        <p:nvSpPr>
+          <p:cNvPr id="18" name="Text 16"/>
+          <p:cNvSpPr/>
+          <p:nvPr/>
+        </p:nvSpPr>
+        <p:spPr>
+          <a:xfrm>
+            <a:off x="640080" y="5577840"/>
+            <a:ext cx="10881360" cy="365760"/>
           </a:xfrm>
           <a:prstGeom prst="rect">
             <a:avLst/>
@@ -5126,30 +5892,30 @@
               <a:buNone/>
             </a:pPr>
             <a:r>
-              <a:rPr lang="en-US" sz="1350" b="1" kern="0" spc="150" dirty="0">
-                <a:solidFill>
-                  <a:srgbClr val="7A1F2B"/>
+              <a:rPr lang="en-US" sz="1650" b="1" i="1" dirty="0">
+                <a:solidFill>
+                  <a:srgbClr val="6C6E76"/>
                 </a:solidFill>
                 <a:latin typeface="Calibri" pitchFamily="34" charset="0"/>
                 <a:ea typeface="Calibri" pitchFamily="34" charset="-122"/>
                 <a:cs typeface="Calibri" pitchFamily="34" charset="-120"/>
               </a:rPr>
-              <a:t>What we established</a:t>
-            </a:r>
-            <a:endParaRPr lang="en-US" sz="1350" dirty="0"/>
-          </a:p>
-        </p:txBody>
-      </p:sp>
-      <p:sp>
-        <p:nvSpPr>
-          <p:cNvPr id="15" name="Text 13"/>
-          <p:cNvSpPr/>
-          <p:nvPr/>
-        </p:nvSpPr>
-        <p:spPr>
-          <a:xfrm>
-            <a:off x="640080" y="5532120"/>
-            <a:ext cx="9144000" cy="457200"/>
+              <a:t>Every figure in this deck was produced by us, on our own data. None of it has been checked by an officer.</a:t>
+            </a:r>
+            <a:endParaRPr lang="en-US" sz="1650" b="1" dirty="0"/>
+          </a:p>
+        </p:txBody>
+      </p:sp>
+      <p:sp>
+        <p:nvSpPr>
+          <p:cNvPr id="19" name="Text 17"/>
+          <p:cNvSpPr/>
+          <p:nvPr/>
+        </p:nvSpPr>
+        <p:spPr>
+          <a:xfrm>
+            <a:off x="640080" y="6419088"/>
+            <a:ext cx="5486400" cy="274320"/>
           </a:xfrm>
           <a:prstGeom prst="rect">
             <a:avLst/>
@@ -5165,29 +5931,29 @@
               <a:buNone/>
             </a:pPr>
             <a:r>
-              <a:rPr lang="en-US" sz="2000" b="1" i="1" dirty="0">
-                <a:solidFill>
-                  <a:srgbClr val="7A1F2B"/>
+              <a:rPr lang="en-US" sz="850" dirty="0">
+                <a:solidFill>
+                  <a:srgbClr val="6C6E76"/>
                 </a:solidFill>
                 <a:latin typeface="Calibri" pitchFamily="34" charset="0"/>
                 <a:ea typeface="Calibri" pitchFamily="34" charset="-122"/>
                 <a:cs typeface="Calibri" pitchFamily="34" charset="-120"/>
               </a:rPr>
-              <a:t>Different is not better. Using it also sends citizen documents outside our control.</a:t>
-            </a:r>
-            <a:endParaRPr lang="en-US" sz="2000" dirty="0"/>
-          </a:p>
-        </p:txBody>
-      </p:sp>
-      <p:sp>
-        <p:nvSpPr>
-          <p:cNvPr id="16" name="Text 14"/>
-          <p:cNvSpPr/>
-          <p:nvPr/>
-        </p:nvSpPr>
-        <p:spPr>
-          <a:xfrm>
-            <a:off x="640080" y="6419088"/>
+              <a:t>Data, Policy and Innovation Centre</a:t>
+            </a:r>
+            <a:endParaRPr lang="en-US" sz="850" dirty="0"/>
+          </a:p>
+        </p:txBody>
+      </p:sp>
+      <p:sp>
+        <p:nvSpPr>
+          <p:cNvPr id="20" name="Text 18"/>
+          <p:cNvSpPr/>
+          <p:nvPr/>
+        </p:nvSpPr>
+        <p:spPr>
+          <a:xfrm>
+            <a:off x="6035040" y="6419088"/>
             <a:ext cx="5486400" cy="274320"/>
           </a:xfrm>
           <a:prstGeom prst="rect">
@@ -5200,7 +5966,7 @@
           <a:bodyPr wrap="square" lIns="0" tIns="0" rIns="0" bIns="0" rtlCol="0" anchor="ctr"/>
           <a:lstStyle/>
           <a:p>
-            <a:pPr marL="0" indent="0" algn="l">
+            <a:pPr marL="0" indent="0" algn="r">
               <a:buNone/>
             </a:pPr>
             <a:r>
@@ -5212,281 +5978,9 @@
                 <a:ea typeface="Calibri" pitchFamily="34" charset="-122"/>
                 <a:cs typeface="Calibri" pitchFamily="34" charset="-120"/>
               </a:rPr>
-              <a:t>Data, Policy and Innovation Centre</a:t>
+              <a:t>Government of Odisha  ×  University of Chicago Trust</a:t>
             </a:r>
             <a:endParaRPr lang="en-US" sz="850" dirty="0"/>
-          </a:p>
-        </p:txBody>
-      </p:sp>
-      <p:sp>
-        <p:nvSpPr>
-          <p:cNvPr id="17" name="Text 15"/>
-          <p:cNvSpPr/>
-          <p:nvPr/>
-        </p:nvSpPr>
-        <p:spPr>
-          <a:xfrm>
-            <a:off x="6035040" y="6419088"/>
-            <a:ext cx="5486400" cy="274320"/>
-          </a:xfrm>
-          <a:prstGeom prst="rect">
-            <a:avLst/>
-          </a:prstGeom>
-          <a:noFill/>
-          <a:ln/>
-        </p:spPr>
-        <p:txBody>
-          <a:bodyPr wrap="square" lIns="0" tIns="0" rIns="0" bIns="0" rtlCol="0" anchor="ctr"/>
-          <a:lstStyle/>
-          <a:p>
-            <a:pPr marL="0" indent="0" algn="r">
-              <a:buNone/>
-            </a:pPr>
-            <a:r>
-              <a:rPr lang="en-US" sz="850" dirty="0">
-                <a:solidFill>
-                  <a:srgbClr val="6C6E76"/>
-                </a:solidFill>
-                <a:latin typeface="Calibri" pitchFamily="34" charset="0"/>
-                <a:ea typeface="Calibri" pitchFamily="34" charset="-122"/>
-                <a:cs typeface="Calibri" pitchFamily="34" charset="-120"/>
-              </a:rPr>
-              <a:t>Government of Odisha  ×  University of Chicago Trust</a:t>
-            </a:r>
-            <a:endParaRPr lang="en-US" sz="850" dirty="0"/>
-          </a:p>
-        </p:txBody>
-      </p:sp>
-      <p:sp>
-        <p:nvSpPr>
-          <p:cNvPr id="27" name="Shape 3">
-            <a:extLst>
-              <a:ext uri="{FF2B5EF4-FFF2-40B4-BE49-F238E27FC236}">
-                <a16:creationId xmlns:a16="http://schemas.microsoft.com/office/drawing/2014/main" id="{8EA7243F-3A2E-791F-90D8-11B33EB858C8}"/>
-              </a:ext>
-            </a:extLst>
-          </p:cNvPr>
-          <p:cNvSpPr/>
-          <p:nvPr/>
-        </p:nvSpPr>
-        <p:spPr>
-          <a:xfrm>
-            <a:off x="632059" y="3571929"/>
-            <a:ext cx="91440" cy="91440"/>
-          </a:xfrm>
-          <a:prstGeom prst="rect">
-            <a:avLst/>
-          </a:prstGeom>
-          <a:solidFill>
-            <a:srgbClr val="7A1F2B"/>
-          </a:solidFill>
-          <a:ln/>
-        </p:spPr>
-        <p:txBody>
-          <a:bodyPr/>
-          <a:lstStyle/>
-          <a:p>
-            <a:endParaRPr lang="en-IN" dirty="0"/>
-          </a:p>
-        </p:txBody>
-      </p:sp>
-      <p:sp>
-        <p:nvSpPr>
-          <p:cNvPr id="29" name="Text 4">
-            <a:extLst>
-              <a:ext uri="{FF2B5EF4-FFF2-40B4-BE49-F238E27FC236}">
-                <a16:creationId xmlns:a16="http://schemas.microsoft.com/office/drawing/2014/main" id="{9F020A29-8C39-EAFD-C8B8-DBAB2A5F634C}"/>
-              </a:ext>
-            </a:extLst>
-          </p:cNvPr>
-          <p:cNvSpPr/>
-          <p:nvPr/>
-        </p:nvSpPr>
-        <p:spPr>
-          <a:xfrm>
-            <a:off x="924667" y="3453057"/>
-            <a:ext cx="10607040" cy="411480"/>
-          </a:xfrm>
-          <a:prstGeom prst="rect">
-            <a:avLst/>
-          </a:prstGeom>
-          <a:noFill/>
-          <a:ln/>
-        </p:spPr>
-        <p:txBody>
-          <a:bodyPr wrap="square" lIns="0" tIns="0" rIns="0" bIns="0" rtlCol="0" anchor="t"/>
-          <a:lstStyle/>
-          <a:p>
-            <a:pPr marL="0" indent="0" algn="l">
-              <a:buNone/>
-            </a:pPr>
-            <a:r>
-              <a:rPr lang="en-US" sz="1800" dirty="0">
-                <a:solidFill>
-                  <a:srgbClr val="1E1F24"/>
-                </a:solidFill>
-                <a:latin typeface="Calibri" pitchFamily="34" charset="0"/>
-                <a:ea typeface="Calibri" pitchFamily="34" charset="-122"/>
-                <a:cs typeface="Calibri" pitchFamily="34" charset="-120"/>
-              </a:rPr>
-              <a:t>It reads handwriting. Ours does not.</a:t>
-            </a:r>
-            <a:endParaRPr lang="en-US" sz="1800" dirty="0"/>
-          </a:p>
-        </p:txBody>
-      </p:sp>
-      <p:sp>
-        <p:nvSpPr>
-          <p:cNvPr id="31" name="Shape 8">
-            <a:extLst>
-              <a:ext uri="{FF2B5EF4-FFF2-40B4-BE49-F238E27FC236}">
-                <a16:creationId xmlns:a16="http://schemas.microsoft.com/office/drawing/2014/main" id="{25210A73-5BE3-463C-04D8-421B6ACD8FD7}"/>
-              </a:ext>
-            </a:extLst>
-          </p:cNvPr>
-          <p:cNvSpPr/>
-          <p:nvPr/>
-        </p:nvSpPr>
-        <p:spPr>
-          <a:xfrm>
-            <a:off x="632059" y="4458260"/>
-            <a:ext cx="91440" cy="91440"/>
-          </a:xfrm>
-          <a:prstGeom prst="rect">
-            <a:avLst/>
-          </a:prstGeom>
-          <a:solidFill>
-            <a:srgbClr val="7A1F2B"/>
-          </a:solidFill>
-          <a:ln/>
-        </p:spPr>
-        <p:txBody>
-          <a:bodyPr/>
-          <a:lstStyle/>
-          <a:p>
-            <a:endParaRPr lang="en-IN"/>
-          </a:p>
-        </p:txBody>
-      </p:sp>
-      <p:sp>
-        <p:nvSpPr>
-          <p:cNvPr id="33" name="Text 9">
-            <a:extLst>
-              <a:ext uri="{FF2B5EF4-FFF2-40B4-BE49-F238E27FC236}">
-                <a16:creationId xmlns:a16="http://schemas.microsoft.com/office/drawing/2014/main" id="{A6157D09-2797-0B89-7747-CE5934045003}"/>
-              </a:ext>
-            </a:extLst>
-          </p:cNvPr>
-          <p:cNvSpPr/>
-          <p:nvPr/>
-        </p:nvSpPr>
-        <p:spPr>
-          <a:xfrm>
-            <a:off x="924667" y="4339388"/>
-            <a:ext cx="10607040" cy="411480"/>
-          </a:xfrm>
-          <a:prstGeom prst="rect">
-            <a:avLst/>
-          </a:prstGeom>
-          <a:noFill/>
-          <a:ln/>
-        </p:spPr>
-        <p:txBody>
-          <a:bodyPr wrap="square" lIns="0" tIns="0" rIns="0" bIns="0" rtlCol="0" anchor="t"/>
-          <a:lstStyle/>
-          <a:p>
-            <a:pPr marL="0" indent="0" algn="l">
-              <a:buNone/>
-            </a:pPr>
-            <a:r>
-              <a:rPr lang="en-US" sz="1800" dirty="0">
-                <a:solidFill>
-                  <a:srgbClr val="1E1F24"/>
-                </a:solidFill>
-                <a:latin typeface="Calibri" pitchFamily="34" charset="0"/>
-                <a:ea typeface="Calibri" pitchFamily="34" charset="-122"/>
-                <a:cs typeface="Calibri" pitchFamily="34" charset="-120"/>
-              </a:rPr>
-              <a:t>On all 61 pages we compared, the two systems produced different text.</a:t>
-            </a:r>
-            <a:endParaRPr lang="en-US" sz="1800" dirty="0"/>
-          </a:p>
-        </p:txBody>
-      </p:sp>
-      <p:sp>
-        <p:nvSpPr>
-          <p:cNvPr id="35" name="Shape 10">
-            <a:extLst>
-              <a:ext uri="{FF2B5EF4-FFF2-40B4-BE49-F238E27FC236}">
-                <a16:creationId xmlns:a16="http://schemas.microsoft.com/office/drawing/2014/main" id="{16BEB2B2-75AE-B017-BEB6-8D7DF2D87DD6}"/>
-              </a:ext>
-            </a:extLst>
-          </p:cNvPr>
-          <p:cNvSpPr/>
-          <p:nvPr/>
-        </p:nvSpPr>
-        <p:spPr>
-          <a:xfrm>
-            <a:off x="632059" y="4961180"/>
-            <a:ext cx="91440" cy="91440"/>
-          </a:xfrm>
-          <a:prstGeom prst="rect">
-            <a:avLst/>
-          </a:prstGeom>
-          <a:solidFill>
-            <a:srgbClr val="7A1F2B"/>
-          </a:solidFill>
-          <a:ln/>
-        </p:spPr>
-        <p:txBody>
-          <a:bodyPr/>
-          <a:lstStyle/>
-          <a:p>
-            <a:endParaRPr lang="en-IN"/>
-          </a:p>
-        </p:txBody>
-      </p:sp>
-      <p:sp>
-        <p:nvSpPr>
-          <p:cNvPr id="37" name="Text 11">
-            <a:extLst>
-              <a:ext uri="{FF2B5EF4-FFF2-40B4-BE49-F238E27FC236}">
-                <a16:creationId xmlns:a16="http://schemas.microsoft.com/office/drawing/2014/main" id="{E4B7C2E5-1571-8403-3E23-54FAD9D0D9A0}"/>
-              </a:ext>
-            </a:extLst>
-          </p:cNvPr>
-          <p:cNvSpPr/>
-          <p:nvPr/>
-        </p:nvSpPr>
-        <p:spPr>
-          <a:xfrm>
-            <a:off x="924667" y="4842308"/>
-            <a:ext cx="10607040" cy="411480"/>
-          </a:xfrm>
-          <a:prstGeom prst="rect">
-            <a:avLst/>
-          </a:prstGeom>
-          <a:noFill/>
-          <a:ln/>
-        </p:spPr>
-        <p:txBody>
-          <a:bodyPr wrap="square" lIns="0" tIns="0" rIns="0" bIns="0" rtlCol="0" anchor="t"/>
-          <a:lstStyle/>
-          <a:p>
-            <a:pPr marL="0" indent="0" algn="l">
-              <a:buNone/>
-            </a:pPr>
-            <a:r>
-              <a:rPr lang="en-US" sz="1800" dirty="0">
-                <a:solidFill>
-                  <a:srgbClr val="1E1F24"/>
-                </a:solidFill>
-                <a:latin typeface="Calibri" pitchFamily="34" charset="0"/>
-                <a:ea typeface="Calibri" pitchFamily="34" charset="-122"/>
-                <a:cs typeface="Calibri" pitchFamily="34" charset="-120"/>
-              </a:rPr>
-              <a:t>The category and summary it returned were never graded against anything.</a:t>
-            </a:r>
           </a:p>
         </p:txBody>
       </p:sp>
@@ -5499,6 +5993,662 @@
 </file>
 
 <file path=ppt/slides/slide21.xml><?xml version="1.0" encoding="utf-8"?>
+<p:sld xmlns:a="http://schemas.openxmlformats.org/drawingml/2006/main" xmlns:p="http://schemas.openxmlformats.org/presentationml/2006/main" xmlns:r="http://schemas.openxmlformats.org/officeDocument/2006/relationships">
+  <p:cSld>
+    <p:spTree>
+      <p:nvGrpSpPr>
+        <p:cNvPr id="1" name=""/>
+        <p:cNvGrpSpPr/>
+        <p:nvPr/>
+      </p:nvGrpSpPr>
+      <p:grpSpPr/>
+      <p:sp>
+        <p:nvSpPr>
+          <p:cNvPr id="2" name="Text 0"/>
+          <p:cNvSpPr/>
+          <p:nvPr/>
+        </p:nvSpPr>
+        <p:spPr>
+          <a:xfrm>
+            <a:off x="640080" y="457200"/>
+            <a:ext cx="10881360" cy="320040"/>
+          </a:xfrm>
+          <a:prstGeom prst="rect">
+            <a:avLst/>
+          </a:prstGeom>
+          <a:noFill/>
+          <a:ln/>
+        </p:spPr>
+        <p:txBody>
+          <a:bodyPr wrap="square" lIns="0" tIns="0" rIns="0" bIns="0" rtlCol="0" anchor="ctr"/>
+          <a:lstStyle/>
+          <a:p>
+            <a:pPr marL="0" indent="0" algn="l">
+              <a:buNone/>
+            </a:pPr>
+            <a:r>
+              <a:rPr lang="en-US" sz="1500" b="1" kern="0" spc="200" dirty="0">
+                <a:solidFill>
+                  <a:srgbClr val="7A1F2B"/>
+                </a:solidFill>
+                <a:latin typeface="Calibri" pitchFamily="34" charset="0"/>
+                <a:ea typeface="Calibri" pitchFamily="34" charset="-122"/>
+                <a:cs typeface="Calibri" pitchFamily="34" charset="-120"/>
+              </a:rPr>
+              <a:t>THE OUTSIDE OPTION: SARVAM</a:t>
+            </a:r>
+            <a:endParaRPr lang="en-US" sz="1500" dirty="0"/>
+          </a:p>
+        </p:txBody>
+      </p:sp>
+      <p:sp>
+        <p:nvSpPr>
+          <p:cNvPr id="3" name="Text 1"/>
+          <p:cNvSpPr/>
+          <p:nvPr/>
+        </p:nvSpPr>
+        <p:spPr>
+          <a:xfrm>
+            <a:off x="640080" y="868680"/>
+            <a:ext cx="10881360" cy="914400"/>
+          </a:xfrm>
+          <a:prstGeom prst="rect">
+            <a:avLst/>
+          </a:prstGeom>
+          <a:noFill/>
+          <a:ln/>
+        </p:spPr>
+        <p:txBody>
+          <a:bodyPr wrap="square" lIns="0" tIns="0" rIns="0" bIns="0" rtlCol="0" anchor="ctr"/>
+          <a:lstStyle/>
+          <a:p>
+            <a:pPr marL="0" indent="0" algn="l">
+              <a:buNone/>
+            </a:pPr>
+            <a:r>
+              <a:rPr lang="en-US" sz="3400" b="1" dirty="0">
+                <a:solidFill>
+                  <a:srgbClr val="1E1F24"/>
+                </a:solidFill>
+                <a:latin typeface="Cambria" pitchFamily="34" charset="0"/>
+                <a:ea typeface="Cambria" pitchFamily="34" charset="-122"/>
+                <a:cs typeface="Cambria" pitchFamily="34" charset="-120"/>
+              </a:rPr>
+              <a:t>It does more. We have not shown it does better.</a:t>
+            </a:r>
+            <a:endParaRPr lang="en-US" sz="3400" dirty="0"/>
+          </a:p>
+        </p:txBody>
+      </p:sp>
+      <p:sp>
+        <p:nvSpPr>
+          <p:cNvPr id="5" name="Text 3"/>
+          <p:cNvSpPr/>
+          <p:nvPr/>
+        </p:nvSpPr>
+        <p:spPr>
+          <a:xfrm>
+            <a:off x="640080" y="2179321"/>
+            <a:ext cx="10881360" cy="292608"/>
+          </a:xfrm>
+          <a:prstGeom prst="rect">
+            <a:avLst/>
+          </a:prstGeom>
+          <a:noFill/>
+          <a:ln/>
+        </p:spPr>
+        <p:txBody>
+          <a:bodyPr wrap="square" lIns="0" tIns="0" rIns="0" bIns="0" rtlCol="0" anchor="ctr"/>
+          <a:lstStyle/>
+          <a:p>
+            <a:pPr marL="0" indent="0" algn="l">
+              <a:buNone/>
+            </a:pPr>
+            <a:r>
+              <a:rPr lang="en-US" sz="1350" b="1" kern="0" spc="150" dirty="0">
+                <a:solidFill>
+                  <a:srgbClr val="7A1F2B"/>
+                </a:solidFill>
+                <a:latin typeface="Calibri" pitchFamily="34" charset="0"/>
+                <a:ea typeface="Calibri" pitchFamily="34" charset="-122"/>
+                <a:cs typeface="Calibri" pitchFamily="34" charset="-120"/>
+              </a:rPr>
+              <a:t>What it does</a:t>
+            </a:r>
+            <a:endParaRPr lang="en-US" sz="1350" dirty="0"/>
+          </a:p>
+        </p:txBody>
+      </p:sp>
+      <p:sp>
+        <p:nvSpPr>
+          <p:cNvPr id="6" name="Shape 4"/>
+          <p:cNvSpPr/>
+          <p:nvPr/>
+        </p:nvSpPr>
+        <p:spPr>
+          <a:xfrm>
+            <a:off x="640080" y="2663953"/>
+            <a:ext cx="91440" cy="91440"/>
+          </a:xfrm>
+          <a:prstGeom prst="rect">
+            <a:avLst/>
+          </a:prstGeom>
+          <a:solidFill>
+            <a:srgbClr val="7A1F2B"/>
+          </a:solidFill>
+          <a:ln/>
+        </p:spPr>
+        <p:txBody>
+          <a:bodyPr/>
+          <a:lstStyle/>
+          <a:p>
+            <a:endParaRPr lang="en-IN"/>
+          </a:p>
+        </p:txBody>
+      </p:sp>
+      <p:sp>
+        <p:nvSpPr>
+          <p:cNvPr id="7" name="Text 5"/>
+          <p:cNvSpPr/>
+          <p:nvPr/>
+        </p:nvSpPr>
+        <p:spPr>
+          <a:xfrm>
+            <a:off x="932688" y="2545081"/>
+            <a:ext cx="10607040" cy="411480"/>
+          </a:xfrm>
+          <a:prstGeom prst="rect">
+            <a:avLst/>
+          </a:prstGeom>
+          <a:noFill/>
+          <a:ln/>
+        </p:spPr>
+        <p:txBody>
+          <a:bodyPr wrap="square" lIns="0" tIns="0" rIns="0" bIns="0" rtlCol="0" anchor="t"/>
+          <a:lstStyle/>
+          <a:p>
+            <a:pPr marL="0" indent="0" algn="l">
+              <a:buNone/>
+            </a:pPr>
+            <a:r>
+              <a:rPr lang="en-US" sz="1800" dirty="0">
+                <a:solidFill>
+                  <a:srgbClr val="1E1F24"/>
+                </a:solidFill>
+                <a:latin typeface="Calibri" pitchFamily="34" charset="0"/>
+                <a:ea typeface="Calibri" pitchFamily="34" charset="-122"/>
+                <a:cs typeface="Calibri" pitchFamily="34" charset="-120"/>
+              </a:rPr>
+              <a:t>One call at ₹1.50 a page returns the text, a category, a one-line summary and the district.</a:t>
+            </a:r>
+            <a:endParaRPr lang="en-US" sz="1800" dirty="0"/>
+          </a:p>
+        </p:txBody>
+      </p:sp>
+      <p:sp>
+        <p:nvSpPr>
+          <p:cNvPr id="8" name="Shape 6"/>
+          <p:cNvSpPr/>
+          <p:nvPr/>
+        </p:nvSpPr>
+        <p:spPr>
+          <a:xfrm>
+            <a:off x="640080" y="3166873"/>
+            <a:ext cx="91440" cy="91440"/>
+          </a:xfrm>
+          <a:prstGeom prst="rect">
+            <a:avLst/>
+          </a:prstGeom>
+          <a:solidFill>
+            <a:srgbClr val="7A1F2B"/>
+          </a:solidFill>
+          <a:ln/>
+        </p:spPr>
+        <p:txBody>
+          <a:bodyPr/>
+          <a:lstStyle/>
+          <a:p>
+            <a:endParaRPr lang="en-IN"/>
+          </a:p>
+        </p:txBody>
+      </p:sp>
+      <p:sp>
+        <p:nvSpPr>
+          <p:cNvPr id="9" name="Text 7"/>
+          <p:cNvSpPr/>
+          <p:nvPr/>
+        </p:nvSpPr>
+        <p:spPr>
+          <a:xfrm>
+            <a:off x="932688" y="3048001"/>
+            <a:ext cx="10607040" cy="411480"/>
+          </a:xfrm>
+          <a:prstGeom prst="rect">
+            <a:avLst/>
+          </a:prstGeom>
+          <a:noFill/>
+          <a:ln/>
+        </p:spPr>
+        <p:txBody>
+          <a:bodyPr wrap="square" lIns="0" tIns="0" rIns="0" bIns="0" rtlCol="0" anchor="t"/>
+          <a:lstStyle/>
+          <a:p>
+            <a:pPr marL="0" indent="0" algn="l">
+              <a:buNone/>
+            </a:pPr>
+            <a:r>
+              <a:rPr lang="en-US" sz="1800" dirty="0">
+                <a:solidFill>
+                  <a:srgbClr val="1E1F24"/>
+                </a:solidFill>
+                <a:latin typeface="Calibri" pitchFamily="34" charset="0"/>
+                <a:ea typeface="Calibri" pitchFamily="34" charset="-122"/>
+                <a:cs typeface="Calibri" pitchFamily="34" charset="-120"/>
+              </a:rPr>
+              <a:t>It reads 22 Indian languages including Odia. Ours reads English.</a:t>
+            </a:r>
+            <a:endParaRPr lang="en-US" sz="1800" dirty="0"/>
+          </a:p>
+        </p:txBody>
+      </p:sp>
+      <p:sp>
+        <p:nvSpPr>
+          <p:cNvPr id="10" name="Text 8"/>
+          <p:cNvSpPr/>
+          <p:nvPr/>
+        </p:nvSpPr>
+        <p:spPr>
+          <a:xfrm>
+            <a:off x="640080" y="3972025"/>
+            <a:ext cx="10881360" cy="292608"/>
+          </a:xfrm>
+          <a:prstGeom prst="rect">
+            <a:avLst/>
+          </a:prstGeom>
+          <a:noFill/>
+          <a:ln/>
+        </p:spPr>
+        <p:txBody>
+          <a:bodyPr wrap="square" lIns="0" tIns="0" rIns="0" bIns="0" rtlCol="0" anchor="ctr"/>
+          <a:lstStyle/>
+          <a:p>
+            <a:pPr marL="0" indent="0" algn="l">
+              <a:buNone/>
+            </a:pPr>
+            <a:r>
+              <a:rPr lang="en-US" sz="1350" b="1" kern="0" spc="150" dirty="0">
+                <a:solidFill>
+                  <a:srgbClr val="7A1F2B"/>
+                </a:solidFill>
+                <a:latin typeface="Calibri" pitchFamily="34" charset="0"/>
+                <a:ea typeface="Calibri" pitchFamily="34" charset="-122"/>
+                <a:cs typeface="Calibri" pitchFamily="34" charset="-120"/>
+              </a:rPr>
+              <a:t>What we established</a:t>
+            </a:r>
+            <a:endParaRPr lang="en-US" sz="1350" dirty="0"/>
+          </a:p>
+        </p:txBody>
+      </p:sp>
+      <p:sp>
+        <p:nvSpPr>
+          <p:cNvPr id="15" name="Text 13"/>
+          <p:cNvSpPr/>
+          <p:nvPr/>
+        </p:nvSpPr>
+        <p:spPr>
+          <a:xfrm>
+            <a:off x="640080" y="5532120"/>
+            <a:ext cx="9144000" cy="457200"/>
+          </a:xfrm>
+          <a:prstGeom prst="rect">
+            <a:avLst/>
+          </a:prstGeom>
+          <a:noFill/>
+          <a:ln/>
+        </p:spPr>
+        <p:txBody>
+          <a:bodyPr wrap="square" lIns="0" tIns="0" rIns="0" bIns="0" rtlCol="0" anchor="ctr"/>
+          <a:lstStyle/>
+          <a:p>
+            <a:pPr marL="0" indent="0" algn="l">
+              <a:buNone/>
+            </a:pPr>
+            <a:r>
+              <a:rPr lang="en-US" sz="2000" b="1" i="1" dirty="0">
+                <a:solidFill>
+                  <a:srgbClr val="7A1F2B"/>
+                </a:solidFill>
+                <a:latin typeface="Calibri" pitchFamily="34" charset="0"/>
+                <a:ea typeface="Calibri" pitchFamily="34" charset="-122"/>
+                <a:cs typeface="Calibri" pitchFamily="34" charset="-120"/>
+              </a:rPr>
+              <a:t>Different is not better. Using it also sends citizen documents outside our control.</a:t>
+            </a:r>
+            <a:endParaRPr lang="en-US" sz="2000" dirty="0"/>
+          </a:p>
+        </p:txBody>
+      </p:sp>
+      <p:sp>
+        <p:nvSpPr>
+          <p:cNvPr id="16" name="Text 14"/>
+          <p:cNvSpPr/>
+          <p:nvPr/>
+        </p:nvSpPr>
+        <p:spPr>
+          <a:xfrm>
+            <a:off x="640080" y="6419088"/>
+            <a:ext cx="5486400" cy="274320"/>
+          </a:xfrm>
+          <a:prstGeom prst="rect">
+            <a:avLst/>
+          </a:prstGeom>
+          <a:noFill/>
+          <a:ln/>
+        </p:spPr>
+        <p:txBody>
+          <a:bodyPr wrap="square" lIns="0" tIns="0" rIns="0" bIns="0" rtlCol="0" anchor="ctr"/>
+          <a:lstStyle/>
+          <a:p>
+            <a:pPr marL="0" indent="0" algn="l">
+              <a:buNone/>
+            </a:pPr>
+            <a:r>
+              <a:rPr lang="en-US" sz="850" dirty="0">
+                <a:solidFill>
+                  <a:srgbClr val="6C6E76"/>
+                </a:solidFill>
+                <a:latin typeface="Calibri" pitchFamily="34" charset="0"/>
+                <a:ea typeface="Calibri" pitchFamily="34" charset="-122"/>
+                <a:cs typeface="Calibri" pitchFamily="34" charset="-120"/>
+              </a:rPr>
+              <a:t>Data, Policy and Innovation Centre</a:t>
+            </a:r>
+            <a:endParaRPr lang="en-US" sz="850" dirty="0"/>
+          </a:p>
+        </p:txBody>
+      </p:sp>
+      <p:sp>
+        <p:nvSpPr>
+          <p:cNvPr id="17" name="Text 15"/>
+          <p:cNvSpPr/>
+          <p:nvPr/>
+        </p:nvSpPr>
+        <p:spPr>
+          <a:xfrm>
+            <a:off x="6035040" y="6419088"/>
+            <a:ext cx="5486400" cy="274320"/>
+          </a:xfrm>
+          <a:prstGeom prst="rect">
+            <a:avLst/>
+          </a:prstGeom>
+          <a:noFill/>
+          <a:ln/>
+        </p:spPr>
+        <p:txBody>
+          <a:bodyPr wrap="square" lIns="0" tIns="0" rIns="0" bIns="0" rtlCol="0" anchor="ctr"/>
+          <a:lstStyle/>
+          <a:p>
+            <a:pPr marL="0" indent="0" algn="r">
+              <a:buNone/>
+            </a:pPr>
+            <a:r>
+              <a:rPr lang="en-US" sz="850" dirty="0">
+                <a:solidFill>
+                  <a:srgbClr val="6C6E76"/>
+                </a:solidFill>
+                <a:latin typeface="Calibri" pitchFamily="34" charset="0"/>
+                <a:ea typeface="Calibri" pitchFamily="34" charset="-122"/>
+                <a:cs typeface="Calibri" pitchFamily="34" charset="-120"/>
+              </a:rPr>
+              <a:t>Government of Odisha  ×  University of Chicago Trust</a:t>
+            </a:r>
+            <a:endParaRPr lang="en-US" sz="850" dirty="0"/>
+          </a:p>
+        </p:txBody>
+      </p:sp>
+      <p:sp>
+        <p:nvSpPr>
+          <p:cNvPr id="27" name="Shape 3">
+            <a:extLst>
+              <a:ext uri="{FF2B5EF4-FFF2-40B4-BE49-F238E27FC236}">
+                <a16:creationId xmlns:a16="http://schemas.microsoft.com/office/drawing/2014/main" id="{8EA7243F-3A2E-791F-90D8-11B33EB858C8}"/>
+              </a:ext>
+            </a:extLst>
+          </p:cNvPr>
+          <p:cNvSpPr/>
+          <p:nvPr/>
+        </p:nvSpPr>
+        <p:spPr>
+          <a:xfrm>
+            <a:off x="632059" y="3571929"/>
+            <a:ext cx="91440" cy="91440"/>
+          </a:xfrm>
+          <a:prstGeom prst="rect">
+            <a:avLst/>
+          </a:prstGeom>
+          <a:solidFill>
+            <a:srgbClr val="7A1F2B"/>
+          </a:solidFill>
+          <a:ln/>
+        </p:spPr>
+        <p:txBody>
+          <a:bodyPr/>
+          <a:lstStyle/>
+          <a:p>
+            <a:endParaRPr lang="en-IN" dirty="0"/>
+          </a:p>
+        </p:txBody>
+      </p:sp>
+      <p:sp>
+        <p:nvSpPr>
+          <p:cNvPr id="29" name="Text 4">
+            <a:extLst>
+              <a:ext uri="{FF2B5EF4-FFF2-40B4-BE49-F238E27FC236}">
+                <a16:creationId xmlns:a16="http://schemas.microsoft.com/office/drawing/2014/main" id="{9F020A29-8C39-EAFD-C8B8-DBAB2A5F634C}"/>
+              </a:ext>
+            </a:extLst>
+          </p:cNvPr>
+          <p:cNvSpPr/>
+          <p:nvPr/>
+        </p:nvSpPr>
+        <p:spPr>
+          <a:xfrm>
+            <a:off x="924667" y="3453057"/>
+            <a:ext cx="10607040" cy="411480"/>
+          </a:xfrm>
+          <a:prstGeom prst="rect">
+            <a:avLst/>
+          </a:prstGeom>
+          <a:noFill/>
+          <a:ln/>
+        </p:spPr>
+        <p:txBody>
+          <a:bodyPr wrap="square" lIns="0" tIns="0" rIns="0" bIns="0" rtlCol="0" anchor="t"/>
+          <a:lstStyle/>
+          <a:p>
+            <a:pPr marL="0" indent="0" algn="l">
+              <a:buNone/>
+            </a:pPr>
+            <a:r>
+              <a:rPr lang="en-US" sz="1800" dirty="0">
+                <a:solidFill>
+                  <a:srgbClr val="1E1F24"/>
+                </a:solidFill>
+                <a:latin typeface="Calibri" pitchFamily="34" charset="0"/>
+                <a:ea typeface="Calibri" pitchFamily="34" charset="-122"/>
+                <a:cs typeface="Calibri" pitchFamily="34" charset="-120"/>
+              </a:rPr>
+              <a:t>It reads handwriting. Ours does not.</a:t>
+            </a:r>
+            <a:endParaRPr lang="en-US" sz="1800" dirty="0"/>
+          </a:p>
+        </p:txBody>
+      </p:sp>
+      <p:sp>
+        <p:nvSpPr>
+          <p:cNvPr id="31" name="Shape 8">
+            <a:extLst>
+              <a:ext uri="{FF2B5EF4-FFF2-40B4-BE49-F238E27FC236}">
+                <a16:creationId xmlns:a16="http://schemas.microsoft.com/office/drawing/2014/main" id="{25210A73-5BE3-463C-04D8-421B6ACD8FD7}"/>
+              </a:ext>
+            </a:extLst>
+          </p:cNvPr>
+          <p:cNvSpPr/>
+          <p:nvPr/>
+        </p:nvSpPr>
+        <p:spPr>
+          <a:xfrm>
+            <a:off x="632059" y="4458260"/>
+            <a:ext cx="91440" cy="91440"/>
+          </a:xfrm>
+          <a:prstGeom prst="rect">
+            <a:avLst/>
+          </a:prstGeom>
+          <a:solidFill>
+            <a:srgbClr val="7A1F2B"/>
+          </a:solidFill>
+          <a:ln/>
+        </p:spPr>
+        <p:txBody>
+          <a:bodyPr/>
+          <a:lstStyle/>
+          <a:p>
+            <a:endParaRPr lang="en-IN"/>
+          </a:p>
+        </p:txBody>
+      </p:sp>
+      <p:sp>
+        <p:nvSpPr>
+          <p:cNvPr id="33" name="Text 9">
+            <a:extLst>
+              <a:ext uri="{FF2B5EF4-FFF2-40B4-BE49-F238E27FC236}">
+                <a16:creationId xmlns:a16="http://schemas.microsoft.com/office/drawing/2014/main" id="{A6157D09-2797-0B89-7747-CE5934045003}"/>
+              </a:ext>
+            </a:extLst>
+          </p:cNvPr>
+          <p:cNvSpPr/>
+          <p:nvPr/>
+        </p:nvSpPr>
+        <p:spPr>
+          <a:xfrm>
+            <a:off x="924667" y="4339388"/>
+            <a:ext cx="10607040" cy="411480"/>
+          </a:xfrm>
+          <a:prstGeom prst="rect">
+            <a:avLst/>
+          </a:prstGeom>
+          <a:noFill/>
+          <a:ln/>
+        </p:spPr>
+        <p:txBody>
+          <a:bodyPr wrap="square" lIns="0" tIns="0" rIns="0" bIns="0" rtlCol="0" anchor="t"/>
+          <a:lstStyle/>
+          <a:p>
+            <a:pPr marL="0" indent="0" algn="l">
+              <a:buNone/>
+            </a:pPr>
+            <a:r>
+              <a:rPr lang="en-US" sz="1800" dirty="0">
+                <a:solidFill>
+                  <a:srgbClr val="1E1F24"/>
+                </a:solidFill>
+                <a:latin typeface="Calibri" pitchFamily="34" charset="0"/>
+                <a:ea typeface="Calibri" pitchFamily="34" charset="-122"/>
+                <a:cs typeface="Calibri" pitchFamily="34" charset="-120"/>
+              </a:rPr>
+              <a:t>On all 61 pages we compared, the two systems produced different text.</a:t>
+            </a:r>
+            <a:endParaRPr lang="en-US" sz="1800" dirty="0"/>
+          </a:p>
+        </p:txBody>
+      </p:sp>
+      <p:sp>
+        <p:nvSpPr>
+          <p:cNvPr id="35" name="Shape 10">
+            <a:extLst>
+              <a:ext uri="{FF2B5EF4-FFF2-40B4-BE49-F238E27FC236}">
+                <a16:creationId xmlns:a16="http://schemas.microsoft.com/office/drawing/2014/main" id="{16BEB2B2-75AE-B017-BEB6-8D7DF2D87DD6}"/>
+              </a:ext>
+            </a:extLst>
+          </p:cNvPr>
+          <p:cNvSpPr/>
+          <p:nvPr/>
+        </p:nvSpPr>
+        <p:spPr>
+          <a:xfrm>
+            <a:off x="632059" y="4961180"/>
+            <a:ext cx="91440" cy="91440"/>
+          </a:xfrm>
+          <a:prstGeom prst="rect">
+            <a:avLst/>
+          </a:prstGeom>
+          <a:solidFill>
+            <a:srgbClr val="7A1F2B"/>
+          </a:solidFill>
+          <a:ln/>
+        </p:spPr>
+        <p:txBody>
+          <a:bodyPr/>
+          <a:lstStyle/>
+          <a:p>
+            <a:endParaRPr lang="en-IN"/>
+          </a:p>
+        </p:txBody>
+      </p:sp>
+      <p:sp>
+        <p:nvSpPr>
+          <p:cNvPr id="37" name="Text 11">
+            <a:extLst>
+              <a:ext uri="{FF2B5EF4-FFF2-40B4-BE49-F238E27FC236}">
+                <a16:creationId xmlns:a16="http://schemas.microsoft.com/office/drawing/2014/main" id="{E4B7C2E5-1571-8403-3E23-54FAD9D0D9A0}"/>
+              </a:ext>
+            </a:extLst>
+          </p:cNvPr>
+          <p:cNvSpPr/>
+          <p:nvPr/>
+        </p:nvSpPr>
+        <p:spPr>
+          <a:xfrm>
+            <a:off x="924667" y="4842308"/>
+            <a:ext cx="10607040" cy="411480"/>
+          </a:xfrm>
+          <a:prstGeom prst="rect">
+            <a:avLst/>
+          </a:prstGeom>
+          <a:noFill/>
+          <a:ln/>
+        </p:spPr>
+        <p:txBody>
+          <a:bodyPr wrap="square" lIns="0" tIns="0" rIns="0" bIns="0" rtlCol="0" anchor="t"/>
+          <a:lstStyle/>
+          <a:p>
+            <a:pPr marL="0" indent="0" algn="l">
+              <a:buNone/>
+            </a:pPr>
+            <a:r>
+              <a:rPr lang="en-US" sz="1800" dirty="0">
+                <a:solidFill>
+                  <a:srgbClr val="1E1F24"/>
+                </a:solidFill>
+                <a:latin typeface="Calibri" pitchFamily="34" charset="0"/>
+                <a:ea typeface="Calibri" pitchFamily="34" charset="-122"/>
+                <a:cs typeface="Calibri" pitchFamily="34" charset="-120"/>
+              </a:rPr>
+              <a:t>The category and summary it returned were never graded against anything.</a:t>
+            </a:r>
+          </a:p>
+        </p:txBody>
+      </p:sp>
+    </p:spTree>
+  </p:cSld>
+  <p:clrMapOvr>
+    <a:masterClrMapping/>
+  </p:clrMapOvr>
+</p:sld>
+</file>
+
+<file path=ppt/slides/slide22.xml><?xml version="1.0" encoding="utf-8"?>
 <p:sld xmlns:a="http://schemas.openxmlformats.org/drawingml/2006/main" xmlns:p="http://schemas.openxmlformats.org/presentationml/2006/main" xmlns:r="http://schemas.openxmlformats.org/officeDocument/2006/relationships">
   <p:cSld>
     <p:spTree>

--- a/docs/presentations/2026-08-24-timing-quality/Janasunani_2.0_Timing_and_Quality.pptx
+++ b/docs/presentations/2026-08-24-timing-quality/Janasunani_2.0_Timing_and_Quality.pptx
@@ -1436,7 +1436,7 @@
                 <a:ea typeface="Calibri" pitchFamily="34" charset="-122"/>
                 <a:cs typeface="Calibri" pitchFamily="34" charset="-120"/>
               </a:rPr>
-              <a:t>How it works, how fast it runs, and how good it is</a:t>
+              <a:t>Reading, sorting and routing 1.37 million grievances</a:t>
             </a:r>
             <a:endParaRPr lang="en-US" sz="2100" dirty="0"/>
           </a:p>
@@ -1718,7 +1718,7 @@
                 <a:ea typeface="Cambria" pitchFamily="34" charset="-122"/>
                 <a:cs typeface="Cambria" pitchFamily="34" charset="-120"/>
               </a:rPr>
-              <a:t>1.37 million grievances, one question asked of them</a:t>
+              <a:t>The record has never been read</a:t>
             </a:r>
             <a:endParaRPr lang="en-US" sz="3400" dirty="0"/>
           </a:p>
@@ -2330,7 +2330,7 @@
                 <a:ea typeface="Cambria" pitchFamily="34" charset="-122"/>
                 <a:cs typeface="Cambria" pitchFamily="34" charset="-120"/>
               </a:rPr>
-              <a:t>One grievance, or all of them at once</a:t>
+              <a:t>Deduplication needs every record at once</a:t>
             </a:r>
             <a:endParaRPr lang="en-US" sz="3400" dirty="0"/>
           </a:p>
@@ -2569,7 +2569,7 @@
                 <a:ea typeface="Cambria" pitchFamily="34" charset="-122"/>
                 <a:cs typeface="Cambria" pitchFamily="34" charset="-120"/>
               </a:rPr>
-              <a:t>How fast, and how good</a:t>
+              <a:t>Six stages, timed and scored</a:t>
             </a:r>
             <a:endParaRPr lang="en-US" sz="3400" dirty="0"/>
           </a:p>
@@ -3769,7 +3769,7 @@
                 <a:ea typeface="Cambria" pitchFamily="34" charset="-122"/>
                 <a:cs typeface="Cambria" pitchFamily="34" charset="-120"/>
               </a:rPr>
-              <a:t>What we ship, and what we could not show</a:t>
+              <a:t>The department suggestion is learned from history</a:t>
             </a:r>
             <a:endParaRPr lang="en-US" sz="3400" dirty="0"/>
           </a:p>
@@ -4194,7 +4194,7 @@
                 <a:ea typeface="Cambria" pitchFamily="34" charset="-122"/>
                 <a:cs typeface="Cambria" pitchFamily="34" charset="-120"/>
               </a:rPr>
-              <a:t>The estimate did not survive the second year.</a:t>
+              <a:t>The estimate did not survive the second year</a:t>
             </a:r>
             <a:endParaRPr lang="en-US" sz="3400" dirty="0"/>
           </a:p>
@@ -6074,7 +6074,7 @@
                 <a:ea typeface="Cambria" pitchFamily="34" charset="-122"/>
                 <a:cs typeface="Cambria" pitchFamily="34" charset="-120"/>
               </a:rPr>
-              <a:t>It does more. We have not shown it does better.</a:t>
+              <a:t>It does more. We have not shown it does better</a:t>
             </a:r>
             <a:endParaRPr lang="en-US" sz="3400" dirty="0"/>
           </a:p>

--- a/docs/presentations/2026-08-24-timing-quality/Janasunani_2.0_Timing_and_Quality.pptx
+++ b/docs/presentations/2026-08-24-timing-quality/Janasunani_2.0_Timing_and_Quality.pptx
@@ -17,6 +17,7 @@
     <p:sldId id="276" r:id="rId26"/>
     <p:sldId id="277" r:id="rId27"/>
     <p:sldId id="278" r:id="rId28"/>
+    <p:sldId id="279" r:id="rId29"/>
   </p:sldIdLst>
   <p:sldSz cx="12192000" cy="6858000"/>
   <p:notesSz cx="6858000" cy="12192000"/>
@@ -322,7 +323,7 @@
           <a:lstStyle/>
           <a:p>
             <a:r>
-              <a:t>Sources: docs/ARCHITECTURE.md, docs/ROADMAP.md. Canonical counts verified on both local SQLite and cloud Postgres and must match after any migration change.</a:t>
+              <a:t>Sources: docs/ARCHITECTURE.md, docs/ROADMAP.md. Canonical counts, verified on both local SQLite and cloud Postgres, and they must match after any migration change: 1,371,288 complaints and 6,556,171 action-history rows.</a:t>
             </a:r>
           </a:p>
           <a:p/>
@@ -334,13 +335,19 @@
           <a:p/>
           <a:p>
             <a:r>
-              <a:t>DERIVED FIGURE: 162,144 is arithmetic, 1,371,288 minus the 1,209,144 that carry a closing remark. It is not separately measured. Those cases are either still open or were closed without a remark, and the record cannot distinguish the two. If pressed, say that.</a:t>
+              <a:t>The grievance text has a median of 19 words and 61% of it is unique. The action notes are populated on 99.87% of rows with 1,395,867 distinct normalised values. Both are opaque strings to the reporting layer.</a:t>
             </a:r>
           </a:p>
           <a:p/>
           <a:p>
             <a:r>
-              <a:t>Two structural facts behind everything that follows: the portal has never read the grievance text (median 19 words, 61% unique), and there is no citizen key, so every row is an island.</a:t>
+              <a:t>Two structural facts drive the whole deck. The portal has never read what the citizen wrote. And there is no citizen key, so every row is an island, which is why deduplication on the next slide needs the whole corpus at once.</a:t>
+            </a:r>
+          </a:p>
+          <a:p/>
+          <a:p>
+            <a:r>
+              <a:t>This slide used to carry a closure breakdown. That data now sits on slide 6, where it belongs, because it is the reason the routing model needed a correctness constraint.</a:t>
             </a:r>
           </a:p>
         </p:txBody>
@@ -675,76 +682,43 @@
           <a:lstStyle/>
           <a:p>
             <a:r>
-              <a:t>Ninety seconds. The table is the argument; do not narrate every row.</a:t>
+              <a:t>This slide exists to set up the next one. It is also the strongest finding in the record.</a:t>
             </a:r>
           </a:p>
           <a:p/>
           <a:p>
             <a:r>
-              <a:t>Say: on 2024 the two estimators land 2.3 days apart. On 2025 they land 33 apart. Same code, same pipeline, one year later. When a direct and a doubly-robust estimator diverge like that, the divergence measures missing overlap. It is not a choice between two answers.</a:t>
+              <a:t>NUMBERS. outputs/findings/closure_finding.md. Of 776,922 complaints closed on one of six governed disposal templates, 472,782 used the rung that records no action. That is 60.9% of ladder closures and 39.1% of all 1,209,144 resolved complaints. State the denominator, because it moves the number by half. The ladder covers 64.25% of resolved cases; the rest carry non-standard text.</a:t>
             </a:r>
           </a:p>
           <a:p/>
           <a:p>
             <a:r>
-              <a:t>SOURCES, live 19 August refit. ope_val_ridge.json (n=450,567) and ope_test_ridge.json (n=113,535), both under outputs/experiments/routing_outcome/. Row 1 is delta_direct, 24.50 and 30.53. Row 2 is delta_dr, 26.77 (SE 4.04) and -2.35 (SE 3.50). Row 3 is the historical arm, where v_dr is the observed IPCW mean and v_direct is the model's prediction of it: 97.84 against 93.22 on validation, 108.69 against 49.74 on test. Row 4 is overlap.match_rate, 0.380 and 0.156. Row 5 is censoring_rate_of_split, 0.092 and 0.344.</a:t>
+              <a:t>WHY IT MATTERS FOR ROUTING. From the design document, section 2: 'The first instinct is to minimise time to closure. This fails, instructively. Closure is an action the officer controls directly, and the optimal behaviour under that objective is to close every case immediately without doing anything. This is not hypothetical: the most common closing remark in the system records disposal with no action claimed.' That is why the model minimises duration SUBJECT TO a correctness constraint rather than minimising duration.</a:t>
             </a:r>
           </a:p>
           <a:p/>
           <a:p>
             <a:r>
-              <a:t>DO NOT USE routing-outcome-ope-val-ridge-2026-08-13.json. Its validation match rate of 0.536 and its +20.1 belong to the withdrawn run and it sits in docs/experiments/superseded/. Quoting it to dramatise the collapse re-cites the thing we retracted.</a:t>
+              <a:t>It is also the weak point. The constraint is derived from the closing remark after the fact, so the population is conditioned on resolution and does not identify intake-time actionability. That is one reason the estimate on the next slide did not hold.</a:t>
             </a:r>
           </a:p>
           <a:p/>
           <a:p>
             <a:r>
-              <a:t>'So which estimator do you believe?' Neither, on the test year. The direct one extrapolates into cells where the recommended route was never taken, and row 3 shows it is 118% wrong on the one arm we can check. The doubly-robust one down-weights those cells, leaving an effective sample of 7% of n. The honest statement is that the test year cannot answer the question.</a:t>
+              <a:t>THE CAVEAT THAT MUST TRAVEL. This is descriptive and is not a failure rate. A correct closure and a premature one look identical in this record. Do not present it as an office league table; report it at state level. The bare share RISES with work done, 58.4% at three to five action steps and 64.8% at six or more, so whatever drives the choice of phrase, it is not that nothing happened.</a:t>
             </a:r>
           </a:p>
           <a:p/>
           <a:p>
             <a:r>
-              <a:t>'Is this replication failure or truncation?' They cannot be separated in this design. The snapshot is 2025-07-30, so the cohort has at most seven months against a 365-day outcome and censoring runs 3.1%, 9.2%, 34.4%. Answering it needs a later snapshot, not a better estimator.</a:t>
+              <a:t>The benefit flag runs backwards to the ladder: 9.2% of no-action closures carry it against 6.2% of action-taken closures. Never report it as satisfaction.</a:t>
             </a:r>
           </a:p>
           <a:p/>
           <a:p>
             <a:r>
-              <a:t>'What about a different outcome model?' Boosting instead of ridge gives 12.40 on validation against ridge's 26.77, and 0.15 on test against -2.35. The two families disagree by a factor of two on the year that looked positive and agree on zero for the year that did not. The validation gain was never stable either.</a:t>
-            </a:r>
-          </a:p>
-          <a:p/>
-          <a:p>
-            <a:r>
-              <a:t>Only if pushed further:</a:t>
-            </a:r>
-          </a:p>
-          <a:p>
-            <a:r>
-              <a:t>- No interference is assumed, and the design document says that assumption 'in a queueing system is false'. Route everyone to the fast office and it stops being fast. That bounds any future version of this exercise.</a:t>
-            </a:r>
-          </a:p>
-          <a:p>
-            <a:r>
-              <a:t>- Unconfoundedness is invoked on less information than the assigning officer had. Congestion and trailing destination performance are absent from the covariates.</a:t>
-            </a:r>
-          </a:p>
-          <a:p>
-            <a:r>
-              <a:t>- Treatment provenance is unresolved. dept_id and vchAllEscUser may record final state rather than the initial assignment.</a:t>
-            </a:r>
-          </a:p>
-          <a:p/>
-          <a:p>
-            <a:r>
-              <a:t>WITHDRAWN, do not use: any routing time saving, including the 11 to 23 day band. Do not present it as conservative, provisional or pending. There is no estimate.</a:t>
-            </a:r>
-          </a:p>
-          <a:p/>
-          <a:p>
-            <a:r>
-              <a:t>What we are NOT saying: that routing gains do not exist. We are saying this design on this data cannot detect one.</a:t>
+              <a:t>If asked for a bounded review set: 8,974 complaints were created and closed within two days on a bare disposal, 1.9% of bare disposals.</a:t>
             </a:r>
           </a:p>
         </p:txBody>
@@ -790,37 +764,76 @@
           <a:lstStyle/>
           <a:p>
             <a:r>
-              <a:t>Do not cut this slide for time. It is the one that makes the rest credible.</a:t>
+              <a:t>Ninety seconds. The table is the argument; do not narrate every row.</a:t>
             </a:r>
           </a:p>
           <a:p/>
           <a:p>
             <a:r>
-              <a:t>1. OCR ground truth was never commissioned and has no owner, issue #53. It cannot be produced by an agent, because it is the answer key an agent would be scored against.</a:t>
+              <a:t>Say: on 2024 the two estimators land 2.3 days apart. On 2025 they land 33 apart. Same code, same pipeline, one year later. When a direct and a doubly-robust estimator diverge like that, the divergence measures missing overlap. It is not a choice between two answers.</a:t>
             </a:r>
           </a:p>
           <a:p/>
           <a:p>
             <a:r>
-              <a:t>2. 824 predicted spans against 480 marked. The recogniser over-fires, and the gold set cannot separate a missed label from an over-redaction. Filed as open.</a:t>
+              <a:t>SOURCES, live 19 August refit. ope_val_ridge.json (n=450,567) and ope_test_ridge.json (n=113,535), both under outputs/experiments/routing_outcome/. Row 1 is delta_direct, 24.50 and 30.53. Row 2 is delta_dr, 26.77 (SE 4.04) and -2.35 (SE 3.50). Row 3 is the historical arm, where v_dr is the observed IPCW mean and v_direct is the model's prediction of it: 97.84 against 93.22 on validation, 108.69 against 49.74 on test. Row 4 is overlap.match_rate, 0.380 and 0.156. Row 5 is censoring_rate_of_split, 0.092 and 0.344.</a:t>
             </a:r>
           </a:p>
           <a:p/>
           <a:p>
             <a:r>
-              <a:t>3. The officer-hours figure that circulates, 201,000 to 302,000 across 1,209,144 resolved cases, is a denominator and not a saving. It is the size of the prize, not anything realised.</a:t>
+              <a:t>DO NOT USE routing-outcome-ope-val-ridge-2026-08-13.json. Its validation match rate of 0.536 and its +20.1 belong to the withdrawn run and it sits in docs/experiments/superseded/. Quoting it to dramatise the collapse re-cites the thing we retracted.</a:t>
             </a:r>
           </a:p>
           <a:p/>
           <a:p>
             <a:r>
-              <a:t>Two more we do not claim, if asked: no gain from duplicate detection beyond the 37,299 repeats officers already confirmed, and no accuracy result for the outside option on slide 6.</a:t>
+              <a:t>'So which estimator do you believe?' Neither, on the test year. The direct one extrapolates into cells where the recommended route was never taken, and row 3 shows it is 118% wrong on the one arm we can check. The doubly-robust one down-weights those cells, leaving an effective sample of 7% of n. The honest statement is that the test year cannot answer the question.</a:t>
             </a:r>
           </a:p>
           <a:p/>
           <a:p>
             <a:r>
-              <a:t>If someone asks why so little is claimed: because the alternative is claiming things we cannot defend, and this deck has to survive the room checking it.</a:t>
+              <a:t>'Is this replication failure or truncation?' They cannot be separated in this design. The snapshot is 2025-07-30, so the cohort has at most seven months against a 365-day outcome and censoring runs 3.1%, 9.2%, 34.4%. Answering it needs a later snapshot, not a better estimator.</a:t>
+            </a:r>
+          </a:p>
+          <a:p/>
+          <a:p>
+            <a:r>
+              <a:t>'What about a different outcome model?' Boosting instead of ridge gives 12.40 on validation against ridge's 26.77, and 0.15 on test against -2.35. The two families disagree by a factor of two on the year that looked positive and agree on zero for the year that did not. The validation gain was never stable either.</a:t>
+            </a:r>
+          </a:p>
+          <a:p/>
+          <a:p>
+            <a:r>
+              <a:t>Only if pushed further:</a:t>
+            </a:r>
+          </a:p>
+          <a:p>
+            <a:r>
+              <a:t>- No interference is assumed, and the design document says that assumption 'in a queueing system is false'. Route everyone to the fast office and it stops being fast. That bounds any future version of this exercise.</a:t>
+            </a:r>
+          </a:p>
+          <a:p>
+            <a:r>
+              <a:t>- Unconfoundedness is invoked on less information than the assigning officer had. Congestion and trailing destination performance are absent from the covariates.</a:t>
+            </a:r>
+          </a:p>
+          <a:p>
+            <a:r>
+              <a:t>- Treatment provenance is unresolved. dept_id and vchAllEscUser may record final state rather than the initial assignment.</a:t>
+            </a:r>
+          </a:p>
+          <a:p/>
+          <a:p>
+            <a:r>
+              <a:t>WITHDRAWN, do not use: any routing time saving, including the 11 to 23 day band. Do not present it as conservative, provisional or pending. There is no estimate.</a:t>
+            </a:r>
+          </a:p>
+          <a:p/>
+          <a:p>
+            <a:r>
+              <a:t>What we are NOT saying: that routing gains do not exist. We are saying this design on this data cannot detect one.</a:t>
             </a:r>
           </a:p>
         </p:txBody>
@@ -866,73 +879,37 @@
           <a:lstStyle/>
           <a:p>
             <a:r>
-              <a:t>The provider is Sarvam. Two endpoints, billed separately: digitise at ₹0.50 a page returns text and layout; extract at ₹1.00 a page returns schema-driven fields. Both is ₹1.50. Source: janasunani/evaluation/pricing.py, checked against the Sarvam dashboard 2026-08-07. Our local pipeline is ₹0.00 a page.</a:t>
+              <a:t>Do not cut this slide for time. It is the one that makes the rest credible.</a:t>
             </a:r>
           </a:p>
           <a:p/>
           <a:p>
             <a:r>
-              <a:t>THE FOUR EXTRACT FIELDS, which is the 'does more' claim: grievance_category, summary, district, grievance_text. That is our OCR, categoriser and summariser in one call. janasunani/evaluation/sarvam_grievance_schema.py, schema v1, pinned so a later edit cannot silently move a headline number. docs/DELIVERY.md:163: 'our pipeline has no equivalent'.</a:t>
+              <a:t>1. OCR ground truth was never commissioned and has no owner, issue #53. It cannot be produced by an agent, because it is the answer key an agent would be scored against.</a:t>
             </a:r>
           </a:p>
           <a:p/>
           <a:p>
             <a:r>
-              <a:t>LANGUAGE. Sarvam Vision lists all 22 scheduled languages plus English, Odia among them. There is also a separate transliteration API for romanized Odia (od-IN), which we do not solve at all today. Our own summariser skipped all four coherent Odia cases through an English-only gate, and non-English text is downgraded to Uncategorized.</a:t>
+              <a:t>2. 824 predicted spans against 480 marked. The recogniser over-fires, and the gold set cannot separate a missed label from an over-redaction. Filed as open.</a:t>
             </a:r>
           </a:p>
           <a:p/>
           <a:p>
             <a:r>
-              <a:t>WHAT WE ACTUALLY RAN. Two runs, docs/evidence/sarvam_cached_benchmark.json. A 5-page validation (₹7.50) and a 300-page run that died at 65 pages on credit exhaustion, 3 HTTP 402s, 7 job failures. 61 pages paired and scored in total.</a:t>
+              <a:t>3. The officer-hours figure that circulates, 201,000 to 302,000 across 1,209,144 resolved cases, is a denominator and not a saving. It is the size of the prize, not anything realised.</a:t>
             </a:r>
           </a:p>
           <a:p/>
           <a:p>
             <a:r>
-              <a:t>WHAT WE FOUND, AND WHAT IT COVERS. Normalised exact-text divergence 1.000 on both runs: the two systems differed on every page. Sarvam returns more characters, ratio 1.2433 then 1.3345. That figure is TRANSCRIPTION ONLY. It compares OCR text and says nothing about the category or summary fields. Divergence says they disagree, never who is right.</a:t>
+              <a:t>Two more we do not claim, if asked: no gain from duplicate detection beyond the 37,299 repeats officers already confirmed, and no accuracy result for the outside option on slide 6.</a:t>
             </a:r>
           </a:p>
           <a:p/>
           <a:p>
             <a:r>
-              <a:t>THE EXTRACT FIELDS WERE NEVER GRADED. Sarvam did return them: 61 extract jobs completed in the 300-page run. Nothing was compared against them.</a:t>
-            </a:r>
-          </a:p>
-          <a:p/>
-          <a:p>
-            <a:r>
-              <a:t>  Category was the DECLARED PRIMARY OUTCOME and came back null. Reason, verbatim from outputs/sarvam_validation/sarvam_scorecard.md: 'Not measured — no gold labels (gold_category) in sample; run with --join-metadata from the lake slice.' This is the cheap gap. The recorded category already sits in our own database; the sample was simply not joined to it. Unlike OCR, no new ground truth has to be created.</a:t>
-            </a:r>
-          </a:p>
-          <a:p/>
-          <a:p>
-            <a:r>
-              <a:t>  Summary was only ever scoped as divergence against BART with no gold referee, and summary_divergence is the same function as divergence_rate under another name (sarvam_scorecard.py:234). Even fully run it could only have said the two summaries differ, never which was better. It was not run: no paired sarvam_summary / pipeline_summary in the sample.</a:t>
-            </a:r>
-          </a:p>
-          <a:p/>
-          <a:p>
-            <a:r>
-              <a:t>  A schema bug returned HTTP 400 on every extract submission until 2026-08-09, which is why the 5-page validation run has no extract output at all. Every test mocked the transport, so no test could see the 400.</a:t>
-            </a:r>
-          </a:p>
-          <a:p/>
-          <a:p>
-            <a:r>
-              <a:t>NOT MEASURED, do not claim: OCR accuracy, category accuracy, summary quality, latency (stated in four places), actual billed cost (every rupee figure is list price), observed language split, handwritten versus printed split.</a:t>
-            </a:r>
-          </a:p>
-          <a:p/>
-          <a:p>
-            <a:r>
-              <a:t>GOVERNANCE. Trust tier authorized-external. Authorisation is a GoO-Sarvam MoU with sign-off from the Additional Chief Secretary, Electronics &amp; IT, accepted 2026-08-07, on the basis that no state statute currently governs the transfer. All three provider controls remain UNVERIFIED: retention terms, encryption in transit, encryption at rest. Authorisation and verification are recorded separately on purpose. One module may make the call, janasunani/egress/, every attempt is audit-logged, and a kill switch falls back to local pytesseract.</a:t>
-            </a:r>
-          </a:p>
-          <a:p/>
-          <a:p>
-            <a:r>
-              <a:t>COST AT SCALE, projected list price: ₹48,000 to digitise the 96,469-page English corpus, ₹145,000 for both endpoints, ₹8,050 to push 1.37M subjects through the 105B text model. At 10 requests a minute, which does not rise with the plan tier, the full corpus is roughly ten days of continuous calling. It is a measurement instrument, not a backfill path. Do not quote ₹700; that was priced on the withdrawn 30B model.</a:t>
+              <a:t>If someone asks why so little is claimed: because the alternative is claiming things we cannot defend, and this deck has to survive the room checking it.</a:t>
             </a:r>
           </a:p>
         </p:txBody>
@@ -946,6 +923,118 @@
 </file>
 
 <file path=ppt/notesSlides/notesSlide22.xml><?xml version="1.0" encoding="utf-8"?>
+<p:notes xmlns:a="http://schemas.openxmlformats.org/drawingml/2006/main" xmlns:p="http://schemas.openxmlformats.org/presentationml/2006/main" xmlns:r="http://schemas.openxmlformats.org/officeDocument/2006/relationships">
+  <p:cSld>
+    <p:spTree>
+      <p:nvGrpSpPr>
+        <p:cNvPr id="1" name=""/>
+        <p:cNvGrpSpPr/>
+        <p:nvPr/>
+      </p:nvGrpSpPr>
+      <p:grpSpPr>
+        <a:xfrm>
+          <a:off x="0" y="0"/>
+          <a:ext cx="0" cy="0"/>
+          <a:chOff x="0" y="0"/>
+          <a:chExt cx="0" cy="0"/>
+        </a:xfrm>
+      </p:grpSpPr>
+      <p:sp>
+        <p:nvSpPr>
+          <p:cNvPr id="3" name="Notes Placeholder 2"/>
+          <p:cNvSpPr>
+            <a:spLocks noGrp="1"/>
+          </p:cNvSpPr>
+          <p:nvPr>
+            <p:ph type="body" idx="1"/>
+          </p:nvPr>
+        </p:nvSpPr>
+        <p:spPr/>
+        <p:txBody>
+          <a:bodyPr/>
+          <a:lstStyle/>
+          <a:p>
+            <a:r>
+              <a:t>The provider is Sarvam. Two endpoints, billed separately: digitise at ₹0.50 a page returns text and layout; extract at ₹1.00 a page returns schema-driven fields. Both is ₹1.50. Source: janasunani/evaluation/pricing.py, checked against the Sarvam dashboard 2026-08-07. Our local pipeline is ₹0.00 a page.</a:t>
+            </a:r>
+          </a:p>
+          <a:p/>
+          <a:p>
+            <a:r>
+              <a:t>THE FOUR EXTRACT FIELDS, which is the 'does more' claim: grievance_category, summary, district, grievance_text. That is our OCR, categoriser and summariser in one call. janasunani/evaluation/sarvam_grievance_schema.py, schema v1, pinned so a later edit cannot silently move a headline number. docs/DELIVERY.md:163: 'our pipeline has no equivalent'.</a:t>
+            </a:r>
+          </a:p>
+          <a:p/>
+          <a:p>
+            <a:r>
+              <a:t>LANGUAGE. Sarvam Vision lists all 22 scheduled languages plus English, Odia among them. There is also a separate transliteration API for romanized Odia (od-IN), which we do not solve at all today. Our own summariser skipped all four coherent Odia cases through an English-only gate, and non-English text is downgraded to Uncategorized.</a:t>
+            </a:r>
+          </a:p>
+          <a:p/>
+          <a:p>
+            <a:r>
+              <a:t>WHAT WE ACTUALLY RAN. Two runs, docs/evidence/sarvam_cached_benchmark.json. A 5-page validation (₹7.50) and a 300-page run that died at 65 pages on credit exhaustion, 3 HTTP 402s, 7 job failures. 61 pages paired and scored in total.</a:t>
+            </a:r>
+          </a:p>
+          <a:p/>
+          <a:p>
+            <a:r>
+              <a:t>WHAT WE FOUND, AND WHAT IT COVERS. Normalised exact-text divergence 1.000 on both runs: the two systems differed on every page. Sarvam returns more characters, ratio 1.2433 then 1.3345. That figure is TRANSCRIPTION ONLY. It compares OCR text and says nothing about the category or summary fields. Divergence says they disagree, never who is right.</a:t>
+            </a:r>
+          </a:p>
+          <a:p/>
+          <a:p>
+            <a:r>
+              <a:t>THE EXTRACT FIELDS WERE NEVER GRADED. Sarvam did return them: 61 extract jobs completed in the 300-page run. Nothing was compared against them.</a:t>
+            </a:r>
+          </a:p>
+          <a:p/>
+          <a:p>
+            <a:r>
+              <a:t>  Category was the DECLARED PRIMARY OUTCOME and came back null. Reason, verbatim from outputs/sarvam_validation/sarvam_scorecard.md: 'Not measured — no gold labels (gold_category) in sample; run with --join-metadata from the lake slice.' This is the cheap gap. The recorded category already sits in our own database; the sample was simply not joined to it. Unlike OCR, no new ground truth has to be created.</a:t>
+            </a:r>
+          </a:p>
+          <a:p/>
+          <a:p>
+            <a:r>
+              <a:t>  Summary was only ever scoped as divergence against BART with no gold referee, and summary_divergence is the same function as divergence_rate under another name (sarvam_scorecard.py:234). Even fully run it could only have said the two summaries differ, never which was better. It was not run: no paired sarvam_summary / pipeline_summary in the sample.</a:t>
+            </a:r>
+          </a:p>
+          <a:p/>
+          <a:p>
+            <a:r>
+              <a:t>  A schema bug returned HTTP 400 on every extract submission until 2026-08-09, which is why the 5-page validation run has no extract output at all. Every test mocked the transport, so no test could see the 400.</a:t>
+            </a:r>
+          </a:p>
+          <a:p/>
+          <a:p>
+            <a:r>
+              <a:t>NOT MEASURED, do not claim: OCR accuracy, category accuracy, summary quality, latency (stated in four places), actual billed cost (every rupee figure is list price), observed language split, handwritten versus printed split.</a:t>
+            </a:r>
+          </a:p>
+          <a:p/>
+          <a:p>
+            <a:r>
+              <a:t>GOVERNANCE. Trust tier authorized-external. Authorisation is a GoO-Sarvam MoU with sign-off from the Additional Chief Secretary, Electronics &amp; IT, accepted 2026-08-07, on the basis that no state statute currently governs the transfer. All three provider controls remain UNVERIFIED: retention terms, encryption in transit, encryption at rest. Authorisation and verification are recorded separately on purpose. One module may make the call, janasunani/egress/, every attempt is audit-logged, and a kill switch falls back to local pytesseract.</a:t>
+            </a:r>
+          </a:p>
+          <a:p/>
+          <a:p>
+            <a:r>
+              <a:t>COST AT SCALE, projected list price: ₹48,000 to digitise the 96,469-page English corpus, ₹145,000 for both endpoints, ₹8,050 to push 1.37M subjects through the 105B text model. At 10 requests a minute, which does not rise with the plan tier, the full corpus is roughly ten days of continuous calling. It is a measurement instrument, not a backfill path. Do not quote ₹700; that was priced on the withdrawn 30B model.</a:t>
+            </a:r>
+          </a:p>
+        </p:txBody>
+      </p:sp>
+    </p:spTree>
+  </p:cSld>
+  <p:clrMapOvr>
+    <a:masterClrMapping/>
+  </p:clrMapOvr>
+</p:notes>
+</file>
+
+<file path=ppt/notesSlides/notesSlide23.xml><?xml version="1.0" encoding="utf-8"?>
 <p:notes xmlns:a="http://schemas.openxmlformats.org/drawingml/2006/main" xmlns:p="http://schemas.openxmlformats.org/presentationml/2006/main" xmlns:r="http://schemas.openxmlformats.org/officeDocument/2006/relationships">
   <p:cSld>
     <p:spTree>
@@ -1726,30 +1815,99 @@
       </p:sp>
       <p:sp>
         <p:nvSpPr>
-          <p:cNvPr id="4" name="Text 2"/>
-          <p:cNvSpPr/>
-          <p:nvPr/>
-        </p:nvSpPr>
-        <p:spPr>
-          <a:xfrm>
-            <a:off x="640080" y="1691640"/>
-            <a:ext cx="10881360" cy="365760"/>
-          </a:xfrm>
-          <a:prstGeom prst="rect">
-            <a:avLst/>
-          </a:prstGeom>
-          <a:noFill/>
-          <a:ln/>
-        </p:spPr>
-        <p:txBody>
-          <a:bodyPr wrap="square" lIns="0" tIns="0" rIns="0" bIns="0" rtlCol="0" anchor="ctr"/>
+          <p:cNvPr id="4" name="Shape 2"/>
+          <p:cNvSpPr/>
+          <p:nvPr/>
+        </p:nvSpPr>
+        <p:spPr>
+          <a:xfrm>
+            <a:off x="640080" y="2359152"/>
+            <a:ext cx="128016" cy="777240"/>
+          </a:xfrm>
+          <a:prstGeom prst="rect">
+            <a:avLst/>
+          </a:prstGeom>
+          <a:solidFill>
+            <a:srgbClr val="7A1F2B"/>
+          </a:solidFill>
+          <a:ln/>
+        </p:spPr>
+        <p:txBody>
+          <a:bodyPr/>
+          <a:lstStyle/>
+          <a:p>
+            <a:endParaRPr lang="en-IN"/>
+          </a:p>
+        </p:txBody>
+      </p:sp>
+      <p:sp>
+        <p:nvSpPr>
+          <p:cNvPr id="5" name="Text 3"/>
+          <p:cNvSpPr/>
+          <p:nvPr/>
+        </p:nvSpPr>
+        <p:spPr>
+          <a:xfrm>
+            <a:off x="960120" y="2286000"/>
+            <a:ext cx="3291840" cy="822960"/>
+          </a:xfrm>
+          <a:prstGeom prst="rect">
+            <a:avLst/>
+          </a:prstGeom>
+          <a:noFill/>
+          <a:ln/>
+        </p:spPr>
+        <p:txBody>
+          <a:bodyPr wrap="square" lIns="0" tIns="0" rIns="0" bIns="0" rtlCol="0" anchor="t"/>
           <a:lstStyle/>
           <a:p>
             <a:pPr marL="0" indent="0" algn="l">
               <a:buNone/>
             </a:pPr>
             <a:r>
-              <a:rPr lang="en-US" sz="1900" i="1" dirty="0">
+              <a:rPr lang="en-US" sz="2100" b="1" dirty="0">
+                <a:solidFill>
+                  <a:srgbClr val="1E1F24"/>
+                </a:solidFill>
+                <a:latin typeface="Cambria" pitchFamily="34" charset="0"/>
+                <a:ea typeface="Cambria" pitchFamily="34" charset="-122"/>
+                <a:cs typeface="Cambria" pitchFamily="34" charset="-120"/>
+              </a:rPr>
+              <a:t>1.37 million grievances</a:t>
+            </a:r>
+            <a:endParaRPr lang="en-US" sz="2100" dirty="0"/>
+          </a:p>
+        </p:txBody>
+      </p:sp>
+      <p:sp>
+        <p:nvSpPr>
+          <p:cNvPr id="6" name="Text 4"/>
+          <p:cNvSpPr/>
+          <p:nvPr/>
+        </p:nvSpPr>
+        <p:spPr>
+          <a:xfrm>
+            <a:off x="4389120" y="2286000"/>
+            <a:ext cx="7680960" cy="822960"/>
+          </a:xfrm>
+          <a:prstGeom prst="rect">
+            <a:avLst/>
+          </a:prstGeom>
+          <a:noFill/>
+          <a:ln/>
+        </p:spPr>
+        <p:txBody>
+          <a:bodyPr wrap="square" lIns="0" tIns="0" rIns="0" bIns="0" rtlCol="0" anchor="t"/>
+          <a:lstStyle/>
+          <a:p>
+            <a:pPr marL="0" indent="0" algn="l">
+              <a:lnSpc>
+                <a:spcPct val="105000"/>
+              </a:lnSpc>
+              <a:buNone/>
+            </a:pPr>
+            <a:r>
+              <a:rPr lang="en-US" sz="1900" dirty="0">
                 <a:solidFill>
                   <a:srgbClr val="44464D"/>
                 </a:solidFill>
@@ -1757,7 +1915,7 @@
                 <a:ea typeface="Calibri" pitchFamily="34" charset="-122"/>
                 <a:cs typeface="Calibri" pitchFamily="34" charset="-120"/>
               </a:rPr>
-              <a:t>A dated, geocoded record of what is going wrong across thirty districts.</a:t>
+              <a:t>Filed between 2021 and 2025, across 30 districts and 427 blocks.</a:t>
             </a:r>
             <a:endParaRPr lang="en-US" sz="1900" dirty="0"/>
           </a:p>
@@ -1765,14 +1923,269 @@
       </p:sp>
       <p:sp>
         <p:nvSpPr>
-          <p:cNvPr id="5" name="Text 3"/>
-          <p:cNvSpPr/>
-          <p:nvPr/>
-        </p:nvSpPr>
-        <p:spPr>
-          <a:xfrm>
-            <a:off x="640080" y="2377440"/>
-            <a:ext cx="2240280" cy="621792"/>
+          <p:cNvPr id="7" name="Shape 5"/>
+          <p:cNvSpPr/>
+          <p:nvPr/>
+        </p:nvSpPr>
+        <p:spPr>
+          <a:xfrm>
+            <a:off x="640080" y="3456432"/>
+            <a:ext cx="128016" cy="777240"/>
+          </a:xfrm>
+          <a:prstGeom prst="rect">
+            <a:avLst/>
+          </a:prstGeom>
+          <a:solidFill>
+            <a:srgbClr val="7A1F2B"/>
+          </a:solidFill>
+          <a:ln/>
+        </p:spPr>
+        <p:txBody>
+          <a:bodyPr/>
+          <a:lstStyle/>
+          <a:p>
+            <a:endParaRPr lang="en-IN"/>
+          </a:p>
+        </p:txBody>
+      </p:sp>
+      <p:sp>
+        <p:nvSpPr>
+          <p:cNvPr id="8" name="Text 6"/>
+          <p:cNvSpPr/>
+          <p:nvPr/>
+        </p:nvSpPr>
+        <p:spPr>
+          <a:xfrm>
+            <a:off x="960120" y="3383280"/>
+            <a:ext cx="3291840" cy="822960"/>
+          </a:xfrm>
+          <a:prstGeom prst="rect">
+            <a:avLst/>
+          </a:prstGeom>
+          <a:noFill/>
+          <a:ln/>
+        </p:spPr>
+        <p:txBody>
+          <a:bodyPr wrap="square" lIns="0" tIns="0" rIns="0" bIns="0" rtlCol="0" anchor="t"/>
+          <a:lstStyle/>
+          <a:p>
+            <a:pPr marL="0" indent="0" algn="l">
+              <a:buNone/>
+            </a:pPr>
+            <a:r>
+              <a:rPr lang="en-US" sz="2100" b="1" dirty="0">
+                <a:solidFill>
+                  <a:srgbClr val="1E1F24"/>
+                </a:solidFill>
+                <a:latin typeface="Cambria" pitchFamily="34" charset="0"/>
+                <a:ea typeface="Cambria" pitchFamily="34" charset="-122"/>
+                <a:cs typeface="Cambria" pitchFamily="34" charset="-120"/>
+              </a:rPr>
+              <a:t>6.5 million action notes</a:t>
+            </a:r>
+            <a:endParaRPr lang="en-US" sz="2100" dirty="0"/>
+          </a:p>
+        </p:txBody>
+      </p:sp>
+      <p:sp>
+        <p:nvSpPr>
+          <p:cNvPr id="9" name="Text 7"/>
+          <p:cNvSpPr/>
+          <p:nvPr/>
+        </p:nvSpPr>
+        <p:spPr>
+          <a:xfrm>
+            <a:off x="4389120" y="3383280"/>
+            <a:ext cx="7680960" cy="822960"/>
+          </a:xfrm>
+          <a:prstGeom prst="rect">
+            <a:avLst/>
+          </a:prstGeom>
+          <a:noFill/>
+          <a:ln/>
+        </p:spPr>
+        <p:txBody>
+          <a:bodyPr wrap="square" lIns="0" tIns="0" rIns="0" bIns="0" rtlCol="0" anchor="t"/>
+          <a:lstStyle/>
+          <a:p>
+            <a:pPr marL="0" indent="0" algn="l">
+              <a:lnSpc>
+                <a:spcPct val="105000"/>
+              </a:lnSpc>
+              <a:buNone/>
+            </a:pPr>
+            <a:r>
+              <a:rPr lang="en-US" sz="1900" dirty="0">
+                <a:solidFill>
+                  <a:srgbClr val="44464D"/>
+                </a:solidFill>
+                <a:latin typeface="Calibri" pitchFamily="34" charset="0"/>
+                <a:ea typeface="Calibri" pitchFamily="34" charset="-122"/>
+                <a:cs typeface="Calibri" pitchFamily="34" charset="-120"/>
+              </a:rPr>
+              <a:t>Every step an officer took on a case, written as free text.</a:t>
+            </a:r>
+            <a:endParaRPr lang="en-US" sz="1900" dirty="0"/>
+          </a:p>
+        </p:txBody>
+      </p:sp>
+      <p:sp>
+        <p:nvSpPr>
+          <p:cNvPr id="10" name="Shape 8"/>
+          <p:cNvSpPr/>
+          <p:nvPr/>
+        </p:nvSpPr>
+        <p:spPr>
+          <a:xfrm>
+            <a:off x="640080" y="4553712"/>
+            <a:ext cx="128016" cy="777240"/>
+          </a:xfrm>
+          <a:prstGeom prst="rect">
+            <a:avLst/>
+          </a:prstGeom>
+          <a:solidFill>
+            <a:srgbClr val="7A1F2B"/>
+          </a:solidFill>
+          <a:ln/>
+        </p:spPr>
+        <p:txBody>
+          <a:bodyPr/>
+          <a:lstStyle/>
+          <a:p>
+            <a:endParaRPr lang="en-IN"/>
+          </a:p>
+        </p:txBody>
+      </p:sp>
+      <p:sp>
+        <p:nvSpPr>
+          <p:cNvPr id="11" name="Text 9"/>
+          <p:cNvSpPr/>
+          <p:nvPr/>
+        </p:nvSpPr>
+        <p:spPr>
+          <a:xfrm>
+            <a:off x="960120" y="4480560"/>
+            <a:ext cx="3291840" cy="822960"/>
+          </a:xfrm>
+          <a:prstGeom prst="rect">
+            <a:avLst/>
+          </a:prstGeom>
+          <a:noFill/>
+          <a:ln/>
+        </p:spPr>
+        <p:txBody>
+          <a:bodyPr wrap="square" lIns="0" tIns="0" rIns="0" bIns="0" rtlCol="0" anchor="t"/>
+          <a:lstStyle/>
+          <a:p>
+            <a:pPr marL="0" indent="0" algn="l">
+              <a:buNone/>
+            </a:pPr>
+            <a:r>
+              <a:rPr lang="en-US" sz="2100" b="1" dirty="0">
+                <a:solidFill>
+                  <a:srgbClr val="1E1F24"/>
+                </a:solidFill>
+                <a:latin typeface="Cambria" pitchFamily="34" charset="0"/>
+                <a:ea typeface="Cambria" pitchFamily="34" charset="-122"/>
+                <a:cs typeface="Cambria" pitchFamily="34" charset="-120"/>
+              </a:rPr>
+              <a:t>Counts only</a:t>
+            </a:r>
+            <a:endParaRPr lang="en-US" sz="2100" dirty="0"/>
+          </a:p>
+        </p:txBody>
+      </p:sp>
+      <p:sp>
+        <p:nvSpPr>
+          <p:cNvPr id="12" name="Text 10"/>
+          <p:cNvSpPr/>
+          <p:nvPr/>
+        </p:nvSpPr>
+        <p:spPr>
+          <a:xfrm>
+            <a:off x="4389120" y="4480560"/>
+            <a:ext cx="7680960" cy="822960"/>
+          </a:xfrm>
+          <a:prstGeom prst="rect">
+            <a:avLst/>
+          </a:prstGeom>
+          <a:noFill/>
+          <a:ln/>
+        </p:spPr>
+        <p:txBody>
+          <a:bodyPr wrap="square" lIns="0" tIns="0" rIns="0" bIns="0" rtlCol="0" anchor="t"/>
+          <a:lstStyle/>
+          <a:p>
+            <a:pPr marL="0" indent="0" algn="l">
+              <a:lnSpc>
+                <a:spcPct val="105000"/>
+              </a:lnSpc>
+              <a:buNone/>
+            </a:pPr>
+            <a:r>
+              <a:rPr lang="en-US" sz="1900" dirty="0">
+                <a:solidFill>
+                  <a:srgbClr val="44464D"/>
+                </a:solidFill>
+                <a:latin typeface="Calibri" pitchFamily="34" charset="0"/>
+                <a:ea typeface="Calibri" pitchFamily="34" charset="-122"/>
+                <a:cs typeface="Calibri" pitchFamily="34" charset="-120"/>
+              </a:rPr>
+              <a:t>The portal reports how many cases are open and how many are closed. It has never opened either body of text.</a:t>
+            </a:r>
+            <a:endParaRPr lang="en-US" sz="1900" dirty="0"/>
+          </a:p>
+        </p:txBody>
+      </p:sp>
+      <p:sp>
+        <p:nvSpPr>
+          <p:cNvPr id="13" name="Text 11"/>
+          <p:cNvSpPr/>
+          <p:nvPr/>
+        </p:nvSpPr>
+        <p:spPr>
+          <a:xfrm>
+            <a:off x="640080" y="6419088"/>
+            <a:ext cx="5486400" cy="274320"/>
+          </a:xfrm>
+          <a:prstGeom prst="rect">
+            <a:avLst/>
+          </a:prstGeom>
+          <a:noFill/>
+          <a:ln/>
+        </p:spPr>
+        <p:txBody>
+          <a:bodyPr wrap="square" lIns="0" tIns="0" rIns="0" bIns="0" rtlCol="0" anchor="ctr"/>
+          <a:lstStyle/>
+          <a:p>
+            <a:pPr marL="0" indent="0" algn="l">
+              <a:buNone/>
+            </a:pPr>
+            <a:r>
+              <a:rPr lang="en-US" sz="850" dirty="0">
+                <a:solidFill>
+                  <a:srgbClr val="6C6E76"/>
+                </a:solidFill>
+                <a:latin typeface="Calibri" pitchFamily="34" charset="0"/>
+                <a:ea typeface="Calibri" pitchFamily="34" charset="-122"/>
+                <a:cs typeface="Calibri" pitchFamily="34" charset="-120"/>
+              </a:rPr>
+              <a:t>Data, Policy and Innovation Centre</a:t>
+            </a:r>
+            <a:endParaRPr lang="en-US" sz="850" dirty="0"/>
+          </a:p>
+        </p:txBody>
+      </p:sp>
+      <p:sp>
+        <p:nvSpPr>
+          <p:cNvPr id="14" name="Text 12"/>
+          <p:cNvSpPr/>
+          <p:nvPr/>
+        </p:nvSpPr>
+        <p:spPr>
+          <a:xfrm>
+            <a:off x="6035040" y="6419088"/>
+            <a:ext cx="5486400" cy="274320"/>
           </a:xfrm>
           <a:prstGeom prst="rect">
             <a:avLst/>
@@ -1788,455 +2201,52 @@
               <a:buNone/>
             </a:pPr>
             <a:r>
-              <a:rPr lang="en-US" sz="1450" b="1" dirty="0">
-                <a:solidFill>
-                  <a:srgbClr val="1E1F24"/>
+              <a:rPr lang="en-US" sz="850" dirty="0">
+                <a:solidFill>
+                  <a:srgbClr val="6C6E76"/>
                 </a:solidFill>
                 <a:latin typeface="Calibri" pitchFamily="34" charset="0"/>
                 <a:ea typeface="Calibri" pitchFamily="34" charset="-122"/>
                 <a:cs typeface="Calibri" pitchFamily="34" charset="-120"/>
               </a:rPr>
-              <a:t>Complaints filed</a:t>
-            </a:r>
-            <a:endParaRPr lang="en-US" sz="1450" dirty="0"/>
-          </a:p>
-        </p:txBody>
-      </p:sp>
-      <p:sp>
-        <p:nvSpPr>
-          <p:cNvPr id="6" name="Shape 4"/>
-          <p:cNvSpPr/>
-          <p:nvPr/>
-        </p:nvSpPr>
-        <p:spPr>
-          <a:xfrm>
-            <a:off x="3017520" y="2377440"/>
-            <a:ext cx="7315200" cy="621792"/>
-          </a:xfrm>
-          <a:prstGeom prst="rect">
-            <a:avLst/>
-          </a:prstGeom>
-          <a:solidFill>
-            <a:srgbClr val="7A1F2B"/>
-          </a:solidFill>
-          <a:ln/>
-        </p:spPr>
-        <p:txBody>
-          <a:bodyPr/>
-          <a:lstStyle/>
-          <a:p>
-            <a:endParaRPr lang="en-IN"/>
-          </a:p>
-        </p:txBody>
-      </p:sp>
-      <p:sp>
-        <p:nvSpPr>
-          <p:cNvPr id="7" name="Text 5"/>
-          <p:cNvSpPr/>
-          <p:nvPr/>
-        </p:nvSpPr>
-        <p:spPr>
-          <a:xfrm>
-            <a:off x="3154680" y="2377440"/>
-            <a:ext cx="7040880" cy="621792"/>
-          </a:xfrm>
-          <a:prstGeom prst="rect">
-            <a:avLst/>
-          </a:prstGeom>
-          <a:noFill/>
-          <a:ln/>
-        </p:spPr>
-        <p:txBody>
-          <a:bodyPr wrap="square" lIns="0" tIns="0" rIns="0" bIns="0" rtlCol="0" anchor="ctr"/>
-          <a:lstStyle/>
-          <a:p>
-            <a:pPr marL="0" indent="0" algn="l">
-              <a:buNone/>
-            </a:pPr>
-            <a:r>
-              <a:rPr lang="en-US" sz="1600" b="1" dirty="0">
-                <a:solidFill>
-                  <a:srgbClr val="FFFFFF"/>
-                </a:solidFill>
-                <a:latin typeface="Calibri" pitchFamily="34" charset="0"/>
-                <a:ea typeface="Calibri" pitchFamily="34" charset="-122"/>
-                <a:cs typeface="Calibri" pitchFamily="34" charset="-120"/>
-              </a:rPr>
-              <a:t>1,371,288</a:t>
-            </a:r>
-            <a:endParaRPr lang="en-US" sz="1600" dirty="0"/>
-          </a:p>
-        </p:txBody>
-      </p:sp>
-      <p:sp>
-        <p:nvSpPr>
-          <p:cNvPr id="8" name="Text 6"/>
-          <p:cNvSpPr/>
-          <p:nvPr/>
-        </p:nvSpPr>
-        <p:spPr>
-          <a:xfrm>
-            <a:off x="640080" y="3383280"/>
-            <a:ext cx="2240280" cy="621792"/>
-          </a:xfrm>
-          <a:prstGeom prst="rect">
-            <a:avLst/>
-          </a:prstGeom>
-          <a:noFill/>
-          <a:ln/>
-        </p:spPr>
-        <p:txBody>
-          <a:bodyPr wrap="square" lIns="0" tIns="0" rIns="0" bIns="0" rtlCol="0" anchor="ctr"/>
-          <a:lstStyle/>
-          <a:p>
-            <a:pPr marL="0" indent="0" algn="r">
-              <a:buNone/>
-            </a:pPr>
-            <a:r>
-              <a:rPr lang="en-US" sz="1450" b="1" dirty="0">
-                <a:solidFill>
-                  <a:srgbClr val="1E1F24"/>
-                </a:solidFill>
-                <a:latin typeface="Calibri" pitchFamily="34" charset="0"/>
-                <a:ea typeface="Calibri" pitchFamily="34" charset="-122"/>
-                <a:cs typeface="Calibri" pitchFamily="34" charset="-120"/>
-              </a:rPr>
-              <a:t>Closed with a remark</a:t>
-            </a:r>
-            <a:endParaRPr lang="en-US" sz="1450" dirty="0"/>
-          </a:p>
-        </p:txBody>
-      </p:sp>
-      <p:sp>
-        <p:nvSpPr>
-          <p:cNvPr id="9" name="Shape 7"/>
-          <p:cNvSpPr/>
-          <p:nvPr/>
-        </p:nvSpPr>
-        <p:spPr>
-          <a:xfrm>
-            <a:off x="3017520" y="3383280"/>
-            <a:ext cx="6450235" cy="621792"/>
-          </a:xfrm>
-          <a:prstGeom prst="rect">
-            <a:avLst/>
-          </a:prstGeom>
-          <a:solidFill>
-            <a:srgbClr val="9A9CA3"/>
-          </a:solidFill>
-          <a:ln/>
-        </p:spPr>
-        <p:txBody>
-          <a:bodyPr/>
-          <a:lstStyle/>
-          <a:p>
-            <a:endParaRPr lang="en-IN"/>
-          </a:p>
-        </p:txBody>
-      </p:sp>
-      <p:sp>
-        <p:nvSpPr>
-          <p:cNvPr id="10" name="Text 8"/>
-          <p:cNvSpPr/>
-          <p:nvPr/>
-        </p:nvSpPr>
-        <p:spPr>
-          <a:xfrm>
-            <a:off x="3154680" y="3383280"/>
-            <a:ext cx="6175915" cy="621792"/>
-          </a:xfrm>
-          <a:prstGeom prst="rect">
-            <a:avLst/>
-          </a:prstGeom>
-          <a:noFill/>
-          <a:ln/>
-        </p:spPr>
-        <p:txBody>
-          <a:bodyPr wrap="square" lIns="0" tIns="0" rIns="0" bIns="0" rtlCol="0" anchor="ctr"/>
-          <a:lstStyle/>
-          <a:p>
-            <a:pPr marL="0" indent="0" algn="l">
-              <a:buNone/>
-            </a:pPr>
-            <a:r>
-              <a:rPr lang="en-US" sz="1600" b="1" dirty="0">
-                <a:solidFill>
-                  <a:srgbClr val="FFFFFF"/>
-                </a:solidFill>
-                <a:latin typeface="Calibri" pitchFamily="34" charset="0"/>
-                <a:ea typeface="Calibri" pitchFamily="34" charset="-122"/>
-                <a:cs typeface="Calibri" pitchFamily="34" charset="-120"/>
-              </a:rPr>
-              <a:t>1,209,144</a:t>
-            </a:r>
-            <a:endParaRPr lang="en-US" sz="1600" dirty="0"/>
-          </a:p>
-        </p:txBody>
-      </p:sp>
-      <p:sp>
-        <p:nvSpPr>
-          <p:cNvPr id="11" name="Text 9"/>
-          <p:cNvSpPr/>
-          <p:nvPr/>
-        </p:nvSpPr>
-        <p:spPr>
-          <a:xfrm>
-            <a:off x="640080" y="4389120"/>
-            <a:ext cx="2240280" cy="621792"/>
-          </a:xfrm>
-          <a:prstGeom prst="rect">
-            <a:avLst/>
-          </a:prstGeom>
-          <a:noFill/>
-          <a:ln/>
-        </p:spPr>
-        <p:txBody>
-          <a:bodyPr wrap="square" lIns="0" tIns="0" rIns="0" bIns="0" rtlCol="0" anchor="ctr"/>
-          <a:lstStyle/>
-          <a:p>
-            <a:pPr marL="0" indent="0" algn="r">
-              <a:buNone/>
-            </a:pPr>
-            <a:r>
-              <a:rPr lang="en-US" sz="1450" b="1" dirty="0">
-                <a:solidFill>
-                  <a:srgbClr val="1E1F24"/>
-                </a:solidFill>
-                <a:latin typeface="Calibri" pitchFamily="34" charset="0"/>
-                <a:ea typeface="Calibri" pitchFamily="34" charset="-122"/>
-                <a:cs typeface="Calibri" pitchFamily="34" charset="-120"/>
-              </a:rPr>
-              <a:t>No closing remark</a:t>
-            </a:r>
-            <a:endParaRPr lang="en-US" sz="1450" dirty="0"/>
-          </a:p>
-        </p:txBody>
-      </p:sp>
-      <p:sp>
-        <p:nvSpPr>
-          <p:cNvPr id="12" name="Shape 10"/>
-          <p:cNvSpPr/>
-          <p:nvPr/>
-        </p:nvSpPr>
-        <p:spPr>
-          <a:xfrm>
-            <a:off x="3017520" y="4389120"/>
-            <a:ext cx="1234440" cy="621792"/>
-          </a:xfrm>
-          <a:prstGeom prst="rect">
-            <a:avLst/>
-          </a:prstGeom>
-          <a:solidFill>
-            <a:srgbClr val="1E1F24"/>
-          </a:solidFill>
-          <a:ln/>
-        </p:spPr>
-        <p:txBody>
-          <a:bodyPr/>
-          <a:lstStyle/>
-          <a:p>
-            <a:endParaRPr lang="en-IN"/>
-          </a:p>
-        </p:txBody>
-      </p:sp>
-      <p:sp>
-        <p:nvSpPr>
-          <p:cNvPr id="13" name="Text 11"/>
-          <p:cNvSpPr/>
-          <p:nvPr/>
-        </p:nvSpPr>
-        <p:spPr>
-          <a:xfrm>
-            <a:off x="3154680" y="4389120"/>
-            <a:ext cx="685800" cy="621792"/>
-          </a:xfrm>
-          <a:prstGeom prst="rect">
-            <a:avLst/>
-          </a:prstGeom>
-          <a:noFill/>
-          <a:ln/>
-        </p:spPr>
-        <p:txBody>
-          <a:bodyPr wrap="square" lIns="0" tIns="0" rIns="0" bIns="0" rtlCol="0" anchor="ctr"/>
-          <a:lstStyle/>
-          <a:p>
-            <a:pPr marL="0" indent="0" algn="l">
-              <a:buNone/>
-            </a:pPr>
-            <a:r>
-              <a:rPr lang="en-US" sz="1600" b="1" dirty="0">
-                <a:solidFill>
-                  <a:srgbClr val="FFFFFF"/>
-                </a:solidFill>
-                <a:latin typeface="Calibri" pitchFamily="34" charset="0"/>
-                <a:ea typeface="Calibri" pitchFamily="34" charset="-122"/>
-                <a:cs typeface="Calibri" pitchFamily="34" charset="-120"/>
-              </a:rPr>
-              <a:t>162,144</a:t>
-            </a:r>
-            <a:endParaRPr lang="en-US" sz="1600" dirty="0"/>
-          </a:p>
-        </p:txBody>
-      </p:sp>
-      <p:sp>
-        <p:nvSpPr>
-          <p:cNvPr id="15" name="Text 13"/>
-          <p:cNvSpPr/>
-          <p:nvPr/>
-        </p:nvSpPr>
-        <p:spPr>
-          <a:xfrm>
-            <a:off x="640080" y="5833872"/>
-            <a:ext cx="10881360" cy="365760"/>
-          </a:xfrm>
-          <a:prstGeom prst="rect">
-            <a:avLst/>
-          </a:prstGeom>
-          <a:noFill/>
-          <a:ln/>
-        </p:spPr>
-        <p:txBody>
-          <a:bodyPr wrap="square" lIns="0" tIns="0" rIns="0" bIns="0" rtlCol="0" anchor="ctr"/>
-          <a:lstStyle/>
-          <a:p>
-            <a:pPr marL="0" indent="0" algn="l">
-              <a:buNone/>
-            </a:pPr>
-            <a:r>
-              <a:rPr lang="en-US" sz="1700" b="1" dirty="0">
+              <a:t>Government of Odisha  ×  University of Chicago Trust</a:t>
+            </a:r>
+            <a:endParaRPr lang="en-US" sz="850" dirty="0"/>
+          </a:p>
+        </p:txBody>
+      </p:sp>
+      <p:sp>
+        <p:nvSpPr>
+          <p:cNvPr id="15" name="TextBox 14"/>
+          <p:cNvSpPr txBox="1"/>
+          <p:nvPr/>
+        </p:nvSpPr>
+        <p:spPr>
+          <a:xfrm>
+            <a:off x="640080" y="5742432"/>
+            <a:ext cx="10881360" cy="384048"/>
+          </a:xfrm>
+          <a:prstGeom prst="rect">
+            <a:avLst/>
+          </a:prstGeom>
+          <a:noFill/>
+        </p:spPr>
+        <p:txBody>
+          <a:bodyPr wrap="square" lIns="0" rIns="0" tIns="0" bIns="0">
+            <a:spAutoFit/>
+          </a:bodyPr>
+          <a:lstStyle/>
+          <a:p>
+            <a:pPr algn="l"/>
+            <a:r>
+              <a:rPr sz="1700" b="1" i="0">
                 <a:solidFill>
                   <a:srgbClr val="7A1F2B"/>
                 </a:solidFill>
-                <a:latin typeface="Calibri" pitchFamily="34" charset="0"/>
-                <a:ea typeface="Calibri" pitchFamily="34" charset="-122"/>
-                <a:cs typeface="Calibri" pitchFamily="34" charset="-120"/>
-              </a:rPr>
-              <a:t>The portal reports how many cases are open and how many are closed. It has never read what the citizen wrote.</a:t>
-            </a:r>
-            <a:endParaRPr lang="en-US" sz="1700" dirty="0"/>
-          </a:p>
-        </p:txBody>
-      </p:sp>
-      <p:sp>
-        <p:nvSpPr>
-          <p:cNvPr id="16" name="Text 14"/>
-          <p:cNvSpPr/>
-          <p:nvPr/>
-        </p:nvSpPr>
-        <p:spPr>
-          <a:xfrm>
-            <a:off x="640080" y="6419088"/>
-            <a:ext cx="5486400" cy="274320"/>
-          </a:xfrm>
-          <a:prstGeom prst="rect">
-            <a:avLst/>
-          </a:prstGeom>
-          <a:noFill/>
-          <a:ln/>
-        </p:spPr>
-        <p:txBody>
-          <a:bodyPr wrap="square" lIns="0" tIns="0" rIns="0" bIns="0" rtlCol="0" anchor="ctr"/>
-          <a:lstStyle/>
-          <a:p>
-            <a:pPr marL="0" indent="0" algn="l">
-              <a:buNone/>
-            </a:pPr>
-            <a:r>
-              <a:rPr lang="en-US" sz="850" dirty="0">
-                <a:solidFill>
-                  <a:srgbClr val="6C6E76"/>
-                </a:solidFill>
-                <a:latin typeface="Calibri" pitchFamily="34" charset="0"/>
-                <a:ea typeface="Calibri" pitchFamily="34" charset="-122"/>
-                <a:cs typeface="Calibri" pitchFamily="34" charset="-120"/>
-              </a:rPr>
-              <a:t>Data, Policy and Innovation Centre</a:t>
-            </a:r>
-            <a:endParaRPr lang="en-US" sz="850" dirty="0"/>
-          </a:p>
-        </p:txBody>
-      </p:sp>
-      <p:sp>
-        <p:nvSpPr>
-          <p:cNvPr id="17" name="Text 15"/>
-          <p:cNvSpPr/>
-          <p:nvPr/>
-        </p:nvSpPr>
-        <p:spPr>
-          <a:xfrm>
-            <a:off x="6035040" y="6419088"/>
-            <a:ext cx="5486400" cy="274320"/>
-          </a:xfrm>
-          <a:prstGeom prst="rect">
-            <a:avLst/>
-          </a:prstGeom>
-          <a:noFill/>
-          <a:ln/>
-        </p:spPr>
-        <p:txBody>
-          <a:bodyPr wrap="square" lIns="0" tIns="0" rIns="0" bIns="0" rtlCol="0" anchor="ctr"/>
-          <a:lstStyle/>
-          <a:p>
-            <a:pPr marL="0" indent="0" algn="r">
-              <a:buNone/>
-            </a:pPr>
-            <a:r>
-              <a:rPr lang="en-US" sz="850" dirty="0">
-                <a:solidFill>
-                  <a:srgbClr val="6C6E76"/>
-                </a:solidFill>
-                <a:latin typeface="Calibri" pitchFamily="34" charset="0"/>
-                <a:ea typeface="Calibri" pitchFamily="34" charset="-122"/>
-                <a:cs typeface="Calibri" pitchFamily="34" charset="-120"/>
-              </a:rPr>
-              <a:t>Government of Odisha  ×  University of Chicago Trust</a:t>
-            </a:r>
-            <a:endParaRPr lang="en-US" sz="850" dirty="0"/>
-          </a:p>
-        </p:txBody>
-      </p:sp>
-      <p:sp>
-        <p:nvSpPr>
-          <p:cNvPr id="19" name="Text 12">
-            <a:extLst>
-              <a:ext uri="{FF2B5EF4-FFF2-40B4-BE49-F238E27FC236}">
-                <a16:creationId xmlns:a16="http://schemas.microsoft.com/office/drawing/2014/main" id="{C3A3CA48-F2C9-4CDD-B1FA-FA1C5C78F24A}"/>
-              </a:ext>
-            </a:extLst>
-          </p:cNvPr>
-          <p:cNvSpPr/>
-          <p:nvPr/>
-        </p:nvSpPr>
-        <p:spPr>
-          <a:xfrm>
-            <a:off x="1594579" y="5172618"/>
-            <a:ext cx="10881360" cy="320040"/>
-          </a:xfrm>
-          <a:prstGeom prst="rect">
-            <a:avLst/>
-          </a:prstGeom>
-          <a:noFill/>
-          <a:ln/>
-        </p:spPr>
-        <p:txBody>
-          <a:bodyPr wrap="square" lIns="0" tIns="0" rIns="0" bIns="0" rtlCol="0" anchor="ctr"/>
-          <a:lstStyle/>
-          <a:p>
-            <a:pPr marL="0" indent="0" algn="l">
-              <a:buNone/>
-            </a:pPr>
-            <a:r>
-              <a:rPr lang="en-US" sz="1200" dirty="0">
-                <a:solidFill>
-                  <a:srgbClr val="6C6E76"/>
-                </a:solidFill>
-                <a:latin typeface="Calibri" pitchFamily="34" charset="0"/>
-                <a:ea typeface="Calibri" pitchFamily="34" charset="-122"/>
-                <a:cs typeface="Calibri" pitchFamily="34" charset="-120"/>
-              </a:rPr>
-              <a:t>6,556,171 action events · 30 districts · 427 blocks · 2021 to 2025</a:t>
-            </a:r>
-            <a:endParaRPr lang="en-US" sz="1200" dirty="0"/>
+                <a:latin typeface="Calibri"/>
+              </a:rPr>
+              <a:t>Everything after this slide is about reading it.</a:t>
+            </a:r>
           </a:p>
         </p:txBody>
       </p:sp>
@@ -4155,7 +4165,7 @@
                 <a:ea typeface="Calibri" pitchFamily="34" charset="-122"/>
                 <a:cs typeface="Calibri" pitchFamily="34" charset="-120"/>
               </a:rPr>
-              <a:t>WOULD ANOTHER ROUTE BE FASTER?</a:t>
+              <a:t>WHAT CLOSURE RECORDS</a:t>
             </a:r>
             <a:endParaRPr lang="en-US" sz="1500" dirty="0"/>
           </a:p>
@@ -4194,7 +4204,7 @@
                 <a:ea typeface="Cambria" pitchFamily="34" charset="-122"/>
                 <a:cs typeface="Cambria" pitchFamily="34" charset="-120"/>
               </a:rPr>
-              <a:t>The estimate did not survive the second year</a:t>
+              <a:t>Closing a case costs nothing</a:t>
             </a:r>
             <a:endParaRPr lang="en-US" sz="3400" dirty="0"/>
           </a:p>
@@ -4202,14 +4212,14 @@
       </p:sp>
       <p:sp>
         <p:nvSpPr>
-          <p:cNvPr id="13" name="Text 11"/>
-          <p:cNvSpPr/>
-          <p:nvPr/>
-        </p:nvSpPr>
-        <p:spPr>
-          <a:xfrm>
-            <a:off x="640080" y="6419088"/>
-            <a:ext cx="5486400" cy="274320"/>
+          <p:cNvPr id="4" name="Text 2"/>
+          <p:cNvSpPr/>
+          <p:nvPr/>
+        </p:nvSpPr>
+        <p:spPr>
+          <a:xfrm>
+            <a:off x="640080" y="1691640"/>
+            <a:ext cx="10881360" cy="365760"/>
           </a:xfrm>
           <a:prstGeom prst="rect">
             <a:avLst/>
@@ -4225,30 +4235,30 @@
               <a:buNone/>
             </a:pPr>
             <a:r>
-              <a:rPr lang="en-US" sz="850" dirty="0">
-                <a:solidFill>
-                  <a:srgbClr val="6C6E76"/>
+              <a:rPr lang="en-US" sz="1900" i="1" dirty="0">
+                <a:solidFill>
+                  <a:srgbClr val="44464D"/>
                 </a:solidFill>
                 <a:latin typeface="Calibri" pitchFamily="34" charset="0"/>
                 <a:ea typeface="Calibri" pitchFamily="34" charset="-122"/>
                 <a:cs typeface="Calibri" pitchFamily="34" charset="-120"/>
               </a:rPr>
-              <a:t>Data, Policy and Innovation Centre</a:t>
-            </a:r>
-            <a:endParaRPr lang="en-US" sz="850" dirty="0"/>
-          </a:p>
-        </p:txBody>
-      </p:sp>
-      <p:sp>
-        <p:nvSpPr>
-          <p:cNvPr id="14" name="Text 12"/>
-          <p:cNvSpPr/>
-          <p:nvPr/>
-        </p:nvSpPr>
-        <p:spPr>
-          <a:xfrm>
-            <a:off x="6035040" y="6419088"/>
-            <a:ext cx="5486400" cy="274320"/>
+              <a:t>How 776,922 closures were recorded, on the six standard remarks.</a:t>
+            </a:r>
+            <a:endParaRPr lang="en-US" sz="1900" dirty="0"/>
+          </a:p>
+        </p:txBody>
+      </p:sp>
+      <p:sp>
+        <p:nvSpPr>
+          <p:cNvPr id="5" name="Text 3"/>
+          <p:cNvSpPr/>
+          <p:nvPr/>
+        </p:nvSpPr>
+        <p:spPr>
+          <a:xfrm>
+            <a:off x="640080" y="2377440"/>
+            <a:ext cx="2240280" cy="621792"/>
           </a:xfrm>
           <a:prstGeom prst="rect">
             <a:avLst/>
@@ -4264,14 +4274,626 @@
               <a:buNone/>
             </a:pPr>
             <a:r>
-              <a:rPr lang="en-US" sz="850" dirty="0">
-                <a:solidFill>
-                  <a:srgbClr val="6C6E76"/>
+              <a:rPr lang="en-US" sz="1450" b="1" dirty="0">
+                <a:solidFill>
+                  <a:srgbClr val="1E1F24"/>
                 </a:solidFill>
                 <a:latin typeface="Calibri" pitchFamily="34" charset="0"/>
                 <a:ea typeface="Calibri" pitchFamily="34" charset="-122"/>
                 <a:cs typeface="Calibri" pitchFamily="34" charset="-120"/>
               </a:rPr>
+              <a:t>Disposed, no action claimed</a:t>
+            </a:r>
+            <a:endParaRPr lang="en-US" sz="1450" dirty="0"/>
+          </a:p>
+        </p:txBody>
+      </p:sp>
+      <p:sp>
+        <p:nvSpPr>
+          <p:cNvPr id="6" name="Shape 4"/>
+          <p:cNvSpPr/>
+          <p:nvPr/>
+        </p:nvSpPr>
+        <p:spPr>
+          <a:xfrm>
+            <a:off x="3017520" y="2377440"/>
+            <a:ext cx="7315200" cy="621792"/>
+          </a:xfrm>
+          <a:prstGeom prst="rect">
+            <a:avLst/>
+          </a:prstGeom>
+          <a:solidFill>
+            <a:srgbClr val="7A1F2B"/>
+          </a:solidFill>
+          <a:ln/>
+        </p:spPr>
+        <p:txBody>
+          <a:bodyPr/>
+          <a:lstStyle/>
+          <a:p>
+            <a:endParaRPr lang="en-IN"/>
+          </a:p>
+        </p:txBody>
+      </p:sp>
+      <p:sp>
+        <p:nvSpPr>
+          <p:cNvPr id="7" name="Text 5"/>
+          <p:cNvSpPr/>
+          <p:nvPr/>
+        </p:nvSpPr>
+        <p:spPr>
+          <a:xfrm>
+            <a:off x="3154680" y="2377440"/>
+            <a:ext cx="7040880" cy="621792"/>
+          </a:xfrm>
+          <a:prstGeom prst="rect">
+            <a:avLst/>
+          </a:prstGeom>
+          <a:noFill/>
+          <a:ln/>
+        </p:spPr>
+        <p:txBody>
+          <a:bodyPr wrap="square" lIns="0" tIns="0" rIns="0" bIns="0" rtlCol="0" anchor="ctr"/>
+          <a:lstStyle/>
+          <a:p>
+            <a:pPr marL="0" indent="0" algn="l">
+              <a:buNone/>
+            </a:pPr>
+            <a:r>
+              <a:rPr lang="en-US" sz="1600" b="1" dirty="0">
+                <a:solidFill>
+                  <a:srgbClr val="FFFFFF"/>
+                </a:solidFill>
+                <a:latin typeface="Calibri" pitchFamily="34" charset="0"/>
+                <a:ea typeface="Calibri" pitchFamily="34" charset="-122"/>
+                <a:cs typeface="Calibri" pitchFamily="34" charset="-120"/>
+              </a:rPr>
+              <a:t>472,782</a:t>
+            </a:r>
+            <a:endParaRPr lang="en-US" sz="1600" dirty="0"/>
+          </a:p>
+        </p:txBody>
+      </p:sp>
+      <p:sp>
+        <p:nvSpPr>
+          <p:cNvPr id="8" name="Text 6"/>
+          <p:cNvSpPr/>
+          <p:nvPr/>
+        </p:nvSpPr>
+        <p:spPr>
+          <a:xfrm>
+            <a:off x="640080" y="3383280"/>
+            <a:ext cx="2240280" cy="621792"/>
+          </a:xfrm>
+          <a:prstGeom prst="rect">
+            <a:avLst/>
+          </a:prstGeom>
+          <a:noFill/>
+          <a:ln/>
+        </p:spPr>
+        <p:txBody>
+          <a:bodyPr wrap="square" lIns="0" tIns="0" rIns="0" bIns="0" rtlCol="0" anchor="ctr"/>
+          <a:lstStyle/>
+          <a:p>
+            <a:pPr marL="0" indent="0" algn="r">
+              <a:buNone/>
+            </a:pPr>
+            <a:r>
+              <a:rPr lang="en-US" sz="1450" b="1" dirty="0">
+                <a:solidFill>
+                  <a:srgbClr val="1E1F24"/>
+                </a:solidFill>
+                <a:latin typeface="Calibri" pitchFamily="34" charset="0"/>
+                <a:ea typeface="Calibri" pitchFamily="34" charset="-122"/>
+                <a:cs typeface="Calibri" pitchFamily="34" charset="-120"/>
+              </a:rPr>
+              <a:t>Disposed with action taken</a:t>
+            </a:r>
+            <a:endParaRPr lang="en-US" sz="1450" dirty="0"/>
+          </a:p>
+        </p:txBody>
+      </p:sp>
+      <p:sp>
+        <p:nvSpPr>
+          <p:cNvPr id="9" name="Shape 7"/>
+          <p:cNvSpPr/>
+          <p:nvPr/>
+        </p:nvSpPr>
+        <p:spPr>
+          <a:xfrm>
+            <a:off x="3017520" y="3383280"/>
+            <a:ext cx="4346071" cy="621792"/>
+          </a:xfrm>
+          <a:prstGeom prst="rect">
+            <a:avLst/>
+          </a:prstGeom>
+          <a:solidFill>
+            <a:srgbClr val="9A9CA3"/>
+          </a:solidFill>
+          <a:ln/>
+        </p:spPr>
+        <p:txBody>
+          <a:bodyPr/>
+          <a:lstStyle/>
+          <a:p>
+            <a:endParaRPr lang="en-IN"/>
+          </a:p>
+        </p:txBody>
+      </p:sp>
+      <p:sp>
+        <p:nvSpPr>
+          <p:cNvPr id="10" name="Text 8"/>
+          <p:cNvSpPr/>
+          <p:nvPr/>
+        </p:nvSpPr>
+        <p:spPr>
+          <a:xfrm>
+            <a:off x="3154680" y="3383280"/>
+            <a:ext cx="4071751" cy="621792"/>
+          </a:xfrm>
+          <a:prstGeom prst="rect">
+            <a:avLst/>
+          </a:prstGeom>
+          <a:noFill/>
+          <a:ln/>
+        </p:spPr>
+        <p:txBody>
+          <a:bodyPr wrap="square" lIns="0" tIns="0" rIns="0" bIns="0" rtlCol="0" anchor="ctr"/>
+          <a:lstStyle/>
+          <a:p>
+            <a:pPr marL="0" indent="0" algn="l">
+              <a:buNone/>
+            </a:pPr>
+            <a:r>
+              <a:rPr lang="en-US" sz="1600" b="1" dirty="0">
+                <a:solidFill>
+                  <a:srgbClr val="FFFFFF"/>
+                </a:solidFill>
+                <a:latin typeface="Calibri" pitchFamily="34" charset="0"/>
+                <a:ea typeface="Calibri" pitchFamily="34" charset="-122"/>
+                <a:cs typeface="Calibri" pitchFamily="34" charset="-120"/>
+              </a:rPr>
+              <a:t>280,887</a:t>
+            </a:r>
+            <a:endParaRPr lang="en-US" sz="1600" dirty="0"/>
+          </a:p>
+        </p:txBody>
+      </p:sp>
+      <p:sp>
+        <p:nvSpPr>
+          <p:cNvPr id="11" name="Text 9"/>
+          <p:cNvSpPr/>
+          <p:nvPr/>
+        </p:nvSpPr>
+        <p:spPr>
+          <a:xfrm>
+            <a:off x="640080" y="4389120"/>
+            <a:ext cx="2240280" cy="621792"/>
+          </a:xfrm>
+          <a:prstGeom prst="rect">
+            <a:avLst/>
+          </a:prstGeom>
+          <a:noFill/>
+          <a:ln/>
+        </p:spPr>
+        <p:txBody>
+          <a:bodyPr wrap="square" lIns="0" tIns="0" rIns="0" bIns="0" rtlCol="0" anchor="ctr"/>
+          <a:lstStyle/>
+          <a:p>
+            <a:pPr marL="0" indent="0" algn="r">
+              <a:buNone/>
+            </a:pPr>
+            <a:r>
+              <a:rPr lang="en-US" sz="1450" b="1" dirty="0">
+                <a:solidFill>
+                  <a:srgbClr val="1E1F24"/>
+                </a:solidFill>
+                <a:latin typeface="Calibri" pitchFamily="34" charset="0"/>
+                <a:ea typeface="Calibri" pitchFamily="34" charset="-122"/>
+                <a:cs typeface="Calibri" pitchFamily="34" charset="-120"/>
+              </a:rPr>
+              <a:t>Beneficiary benefited</a:t>
+            </a:r>
+            <a:endParaRPr lang="en-US" sz="1450" dirty="0"/>
+          </a:p>
+        </p:txBody>
+      </p:sp>
+      <p:sp>
+        <p:nvSpPr>
+          <p:cNvPr id="12" name="Shape 10"/>
+          <p:cNvSpPr/>
+          <p:nvPr/>
+        </p:nvSpPr>
+        <p:spPr>
+          <a:xfrm>
+            <a:off x="3017520" y="4389120"/>
+            <a:ext cx="1234440" cy="621792"/>
+          </a:xfrm>
+          <a:prstGeom prst="rect">
+            <a:avLst/>
+          </a:prstGeom>
+          <a:solidFill>
+            <a:srgbClr val="1E1F24"/>
+          </a:solidFill>
+          <a:ln/>
+        </p:spPr>
+        <p:txBody>
+          <a:bodyPr/>
+          <a:lstStyle/>
+          <a:p>
+            <a:endParaRPr lang="en-IN"/>
+          </a:p>
+        </p:txBody>
+      </p:sp>
+      <p:sp>
+        <p:nvSpPr>
+          <p:cNvPr id="13" name="Text 11"/>
+          <p:cNvSpPr/>
+          <p:nvPr/>
+        </p:nvSpPr>
+        <p:spPr>
+          <a:xfrm>
+            <a:off x="3154680" y="4389120"/>
+            <a:ext cx="960120" cy="621792"/>
+          </a:xfrm>
+          <a:prstGeom prst="rect">
+            <a:avLst/>
+          </a:prstGeom>
+          <a:noFill/>
+          <a:ln/>
+        </p:spPr>
+        <p:txBody>
+          <a:bodyPr wrap="square" lIns="0" tIns="0" rIns="0" bIns="0" rtlCol="0" anchor="ctr"/>
+          <a:lstStyle/>
+          <a:p>
+            <a:pPr marL="0" indent="0" algn="l">
+              <a:buNone/>
+            </a:pPr>
+            <a:r>
+              <a:rPr lang="en-US" sz="1600" b="1" dirty="0">
+                <a:solidFill>
+                  <a:srgbClr val="FFFFFF"/>
+                </a:solidFill>
+                <a:latin typeface="Calibri" pitchFamily="34" charset="0"/>
+                <a:ea typeface="Calibri" pitchFamily="34" charset="-122"/>
+                <a:cs typeface="Calibri" pitchFamily="34" charset="-120"/>
+              </a:rPr>
+              <a:t>23,253</a:t>
+            </a:r>
+            <a:endParaRPr lang="en-US" sz="1600" dirty="0"/>
+          </a:p>
+        </p:txBody>
+      </p:sp>
+      <p:sp>
+        <p:nvSpPr>
+          <p:cNvPr id="15" name="Text 13"/>
+          <p:cNvSpPr/>
+          <p:nvPr/>
+        </p:nvSpPr>
+        <p:spPr>
+          <a:xfrm>
+            <a:off x="640080" y="5833872"/>
+            <a:ext cx="10881360" cy="365760"/>
+          </a:xfrm>
+          <a:prstGeom prst="rect">
+            <a:avLst/>
+          </a:prstGeom>
+          <a:noFill/>
+          <a:ln/>
+        </p:spPr>
+        <p:txBody>
+          <a:bodyPr wrap="square" lIns="0" tIns="0" rIns="0" bIns="0" rtlCol="0" anchor="ctr"/>
+          <a:lstStyle/>
+          <a:p>
+            <a:pPr marL="0" indent="0" algn="l">
+              <a:buNone/>
+            </a:pPr>
+            <a:r>
+              <a:rPr lang="en-US" sz="1700" b="1" dirty="0">
+                <a:solidFill>
+                  <a:srgbClr val="7A1F2B"/>
+                </a:solidFill>
+                <a:latin typeface="Calibri" pitchFamily="34" charset="0"/>
+                <a:ea typeface="Calibri" pitchFamily="34" charset="-122"/>
+                <a:cs typeface="Calibri" pitchFamily="34" charset="-120"/>
+              </a:rPr>
+              <a:t>The fastest way to close a case is to do nothing. Speed alone cannot be the target.</a:t>
+            </a:r>
+            <a:endParaRPr lang="en-US" sz="1700" dirty="0"/>
+          </a:p>
+        </p:txBody>
+      </p:sp>
+      <p:sp>
+        <p:nvSpPr>
+          <p:cNvPr id="16" name="Text 14"/>
+          <p:cNvSpPr/>
+          <p:nvPr/>
+        </p:nvSpPr>
+        <p:spPr>
+          <a:xfrm>
+            <a:off x="640080" y="6419088"/>
+            <a:ext cx="5486400" cy="274320"/>
+          </a:xfrm>
+          <a:prstGeom prst="rect">
+            <a:avLst/>
+          </a:prstGeom>
+          <a:noFill/>
+          <a:ln/>
+        </p:spPr>
+        <p:txBody>
+          <a:bodyPr wrap="square" lIns="0" tIns="0" rIns="0" bIns="0" rtlCol="0" anchor="ctr"/>
+          <a:lstStyle/>
+          <a:p>
+            <a:pPr marL="0" indent="0" algn="l">
+              <a:buNone/>
+            </a:pPr>
+            <a:r>
+              <a:rPr lang="en-US" sz="850" dirty="0">
+                <a:solidFill>
+                  <a:srgbClr val="6C6E76"/>
+                </a:solidFill>
+                <a:latin typeface="Calibri" pitchFamily="34" charset="0"/>
+                <a:ea typeface="Calibri" pitchFamily="34" charset="-122"/>
+                <a:cs typeface="Calibri" pitchFamily="34" charset="-120"/>
+              </a:rPr>
+              <a:t>Data, Policy and Innovation Centre</a:t>
+            </a:r>
+            <a:endParaRPr lang="en-US" sz="850" dirty="0"/>
+          </a:p>
+        </p:txBody>
+      </p:sp>
+      <p:sp>
+        <p:nvSpPr>
+          <p:cNvPr id="17" name="Text 15"/>
+          <p:cNvSpPr/>
+          <p:nvPr/>
+        </p:nvSpPr>
+        <p:spPr>
+          <a:xfrm>
+            <a:off x="6035040" y="6419088"/>
+            <a:ext cx="5486400" cy="274320"/>
+          </a:xfrm>
+          <a:prstGeom prst="rect">
+            <a:avLst/>
+          </a:prstGeom>
+          <a:noFill/>
+          <a:ln/>
+        </p:spPr>
+        <p:txBody>
+          <a:bodyPr wrap="square" lIns="0" tIns="0" rIns="0" bIns="0" rtlCol="0" anchor="ctr"/>
+          <a:lstStyle/>
+          <a:p>
+            <a:pPr marL="0" indent="0" algn="r">
+              <a:buNone/>
+            </a:pPr>
+            <a:r>
+              <a:rPr lang="en-US" sz="850" dirty="0">
+                <a:solidFill>
+                  <a:srgbClr val="6C6E76"/>
+                </a:solidFill>
+                <a:latin typeface="Calibri" pitchFamily="34" charset="0"/>
+                <a:ea typeface="Calibri" pitchFamily="34" charset="-122"/>
+                <a:cs typeface="Calibri" pitchFamily="34" charset="-120"/>
+              </a:rPr>
+              <a:t>Government of Odisha  ×  University of Chicago Trust</a:t>
+            </a:r>
+            <a:endParaRPr lang="en-US" sz="850" dirty="0"/>
+          </a:p>
+        </p:txBody>
+      </p:sp>
+      <p:sp>
+        <p:nvSpPr>
+          <p:cNvPr id="19" name="Text 12">
+            <a:extLst>
+              <a:ext uri="{FF2B5EF4-FFF2-40B4-BE49-F238E27FC236}">
+                <a16:creationId xmlns:a16="http://schemas.microsoft.com/office/drawing/2014/main" id="{C3A3CA48-F2C9-4CDD-B1FA-FA1C5C78F24A}"/>
+              </a:ext>
+            </a:extLst>
+          </p:cNvPr>
+          <p:cNvSpPr/>
+          <p:nvPr/>
+        </p:nvSpPr>
+        <p:spPr>
+          <a:xfrm>
+            <a:off x="1594579" y="5172618"/>
+            <a:ext cx="10881360" cy="320040"/>
+          </a:xfrm>
+          <a:prstGeom prst="rect">
+            <a:avLst/>
+          </a:prstGeom>
+          <a:noFill/>
+          <a:ln/>
+        </p:spPr>
+        <p:txBody>
+          <a:bodyPr wrap="square" lIns="0" tIns="0" rIns="0" bIns="0" rtlCol="0" anchor="ctr"/>
+          <a:lstStyle/>
+          <a:p>
+            <a:pPr marL="0" indent="0" algn="l">
+              <a:buNone/>
+            </a:pPr>
+            <a:r>
+              <a:rPr lang="en-US" sz="1200" dirty="0">
+                <a:solidFill>
+                  <a:srgbClr val="6C6E76"/>
+                </a:solidFill>
+                <a:latin typeface="Calibri" pitchFamily="34" charset="0"/>
+                <a:ea typeface="Calibri" pitchFamily="34" charset="-122"/>
+                <a:cs typeface="Calibri" pitchFamily="34" charset="-120"/>
+              </a:rPr>
+              <a:t>Median days to close: 46 claiming no action, 54 claiming action taken</a:t>
+            </a:r>
+            <a:endParaRPr lang="en-US" sz="1200" dirty="0"/>
+          </a:p>
+        </p:txBody>
+      </p:sp>
+    </p:spTree>
+  </p:cSld>
+  <p:clrMapOvr>
+    <a:masterClrMapping/>
+  </p:clrMapOvr>
+</p:sld>
+</file>
+
+<file path=ppt/slides/slide20.xml><?xml version="1.0" encoding="utf-8"?>
+<p:sld xmlns:a="http://schemas.openxmlformats.org/drawingml/2006/main" xmlns:p="http://schemas.openxmlformats.org/presentationml/2006/main" xmlns:r="http://schemas.openxmlformats.org/officeDocument/2006/relationships">
+  <p:cSld>
+    <p:spTree>
+      <p:nvGrpSpPr>
+        <p:cNvPr id="1" name=""/>
+        <p:cNvGrpSpPr/>
+        <p:nvPr/>
+      </p:nvGrpSpPr>
+      <p:grpSpPr/>
+      <p:sp>
+        <p:nvSpPr>
+          <p:cNvPr id="2" name="Text 0"/>
+          <p:cNvSpPr/>
+          <p:nvPr/>
+        </p:nvSpPr>
+        <p:spPr>
+          <a:xfrm>
+            <a:off x="640080" y="457200"/>
+            <a:ext cx="10881360" cy="320040"/>
+          </a:xfrm>
+          <a:prstGeom prst="rect">
+            <a:avLst/>
+          </a:prstGeom>
+          <a:noFill/>
+          <a:ln/>
+        </p:spPr>
+        <p:txBody>
+          <a:bodyPr wrap="square" lIns="0" tIns="0" rIns="0" bIns="0" rtlCol="0" anchor="ctr"/>
+          <a:lstStyle/>
+          <a:p>
+            <a:pPr marL="0" indent="0" algn="l">
+              <a:buNone/>
+            </a:pPr>
+            <a:r>
+              <a:rPr lang="en-US" sz="1500" b="1" kern="0" spc="200" dirty="0">
+                <a:solidFill>
+                  <a:srgbClr val="7A1F2B"/>
+                </a:solidFill>
+                <a:latin typeface="Calibri" pitchFamily="34" charset="0"/>
+                <a:ea typeface="Calibri" pitchFamily="34" charset="-122"/>
+                <a:cs typeface="Calibri" pitchFamily="34" charset="-120"/>
+              </a:rPr>
+              <a:t>WOULD ANOTHER ROUTE BE FASTER?</a:t>
+            </a:r>
+            <a:endParaRPr lang="en-US" sz="1500" dirty="0"/>
+          </a:p>
+        </p:txBody>
+      </p:sp>
+      <p:sp>
+        <p:nvSpPr>
+          <p:cNvPr id="3" name="Text 1"/>
+          <p:cNvSpPr/>
+          <p:nvPr/>
+        </p:nvSpPr>
+        <p:spPr>
+          <a:xfrm>
+            <a:off x="640080" y="868680"/>
+            <a:ext cx="10881360" cy="914400"/>
+          </a:xfrm>
+          <a:prstGeom prst="rect">
+            <a:avLst/>
+          </a:prstGeom>
+          <a:noFill/>
+          <a:ln/>
+        </p:spPr>
+        <p:txBody>
+          <a:bodyPr wrap="square" lIns="0" tIns="0" rIns="0" bIns="0" rtlCol="0" anchor="ctr"/>
+          <a:lstStyle/>
+          <a:p>
+            <a:pPr marL="0" indent="0" algn="l">
+              <a:buNone/>
+            </a:pPr>
+            <a:r>
+              <a:rPr lang="en-US" sz="3400" b="1" dirty="0">
+                <a:solidFill>
+                  <a:srgbClr val="1E1F24"/>
+                </a:solidFill>
+                <a:latin typeface="Cambria" pitchFamily="34" charset="0"/>
+                <a:ea typeface="Cambria" pitchFamily="34" charset="-122"/>
+                <a:cs typeface="Cambria" pitchFamily="34" charset="-120"/>
+              </a:rPr>
+              <a:t>The estimate did not survive the second year</a:t>
+            </a:r>
+            <a:endParaRPr lang="en-US" sz="3400" dirty="0"/>
+          </a:p>
+        </p:txBody>
+      </p:sp>
+      <p:sp>
+        <p:nvSpPr>
+          <p:cNvPr id="13" name="Text 11"/>
+          <p:cNvSpPr/>
+          <p:nvPr/>
+        </p:nvSpPr>
+        <p:spPr>
+          <a:xfrm>
+            <a:off x="640080" y="6419088"/>
+            <a:ext cx="5486400" cy="274320"/>
+          </a:xfrm>
+          <a:prstGeom prst="rect">
+            <a:avLst/>
+          </a:prstGeom>
+          <a:noFill/>
+          <a:ln/>
+        </p:spPr>
+        <p:txBody>
+          <a:bodyPr wrap="square" lIns="0" tIns="0" rIns="0" bIns="0" rtlCol="0" anchor="ctr"/>
+          <a:lstStyle/>
+          <a:p>
+            <a:pPr marL="0" indent="0" algn="l">
+              <a:buNone/>
+            </a:pPr>
+            <a:r>
+              <a:rPr lang="en-US" sz="850" dirty="0">
+                <a:solidFill>
+                  <a:srgbClr val="6C6E76"/>
+                </a:solidFill>
+                <a:latin typeface="Calibri" pitchFamily="34" charset="0"/>
+                <a:ea typeface="Calibri" pitchFamily="34" charset="-122"/>
+                <a:cs typeface="Calibri" pitchFamily="34" charset="-120"/>
+              </a:rPr>
+              <a:t>Data, Policy and Innovation Centre</a:t>
+            </a:r>
+            <a:endParaRPr lang="en-US" sz="850" dirty="0"/>
+          </a:p>
+        </p:txBody>
+      </p:sp>
+      <p:sp>
+        <p:nvSpPr>
+          <p:cNvPr id="14" name="Text 12"/>
+          <p:cNvSpPr/>
+          <p:nvPr/>
+        </p:nvSpPr>
+        <p:spPr>
+          <a:xfrm>
+            <a:off x="6035040" y="6419088"/>
+            <a:ext cx="5486400" cy="274320"/>
+          </a:xfrm>
+          <a:prstGeom prst="rect">
+            <a:avLst/>
+          </a:prstGeom>
+          <a:noFill/>
+          <a:ln/>
+        </p:spPr>
+        <p:txBody>
+          <a:bodyPr wrap="square" lIns="0" tIns="0" rIns="0" bIns="0" rtlCol="0" anchor="ctr"/>
+          <a:lstStyle/>
+          <a:p>
+            <a:pPr marL="0" indent="0" algn="r">
+              <a:buNone/>
+            </a:pPr>
+            <a:r>
+              <a:rPr lang="en-US" sz="850" dirty="0">
+                <a:solidFill>
+                  <a:srgbClr val="6C6E76"/>
+                </a:solidFill>
+                <a:latin typeface="Calibri" pitchFamily="34" charset="0"/>
+                <a:ea typeface="Calibri" pitchFamily="34" charset="-122"/>
+                <a:cs typeface="Calibri" pitchFamily="34" charset="-120"/>
+              </a:rPr>
               <a:t>Government of Odisha  ×  University of Chicago Trust</a:t>
             </a:r>
             <a:endParaRPr lang="en-US" sz="850" dirty="0"/>
@@ -4308,7 +4930,7 @@
                 </a:solidFill>
                 <a:latin typeface="Calibri"/>
               </a:rPr>
-              <a:t>We tested whether a different department would have closed the case faster.</a:t>
+              <a:t>So we tested for speed without losing whether action was taken.</a:t>
             </a:r>
           </a:p>
         </p:txBody>
@@ -5254,744 +5876,6 @@
 </p:sld>
 </file>
 
-<file path=ppt/slides/slide20.xml><?xml version="1.0" encoding="utf-8"?>
-<p:sld xmlns:a="http://schemas.openxmlformats.org/drawingml/2006/main" xmlns:p="http://schemas.openxmlformats.org/presentationml/2006/main" xmlns:r="http://schemas.openxmlformats.org/officeDocument/2006/relationships">
-  <p:cSld>
-    <p:spTree>
-      <p:nvGrpSpPr>
-        <p:cNvPr id="1" name=""/>
-        <p:cNvGrpSpPr/>
-        <p:nvPr/>
-      </p:nvGrpSpPr>
-      <p:grpSpPr/>
-      <p:sp>
-        <p:nvSpPr>
-          <p:cNvPr id="2" name="Text 0"/>
-          <p:cNvSpPr/>
-          <p:nvPr/>
-        </p:nvSpPr>
-        <p:spPr>
-          <a:xfrm>
-            <a:off x="640080" y="457200"/>
-            <a:ext cx="10881360" cy="320040"/>
-          </a:xfrm>
-          <a:prstGeom prst="rect">
-            <a:avLst/>
-          </a:prstGeom>
-          <a:noFill/>
-          <a:ln/>
-        </p:spPr>
-        <p:txBody>
-          <a:bodyPr wrap="square" lIns="0" tIns="0" rIns="0" bIns="0" rtlCol="0" anchor="ctr"/>
-          <a:lstStyle/>
-          <a:p>
-            <a:pPr marL="0" indent="0" algn="l">
-              <a:buNone/>
-            </a:pPr>
-            <a:r>
-              <a:rPr lang="en-US" sz="1500" b="1" kern="0" spc="200" dirty="0">
-                <a:solidFill>
-                  <a:srgbClr val="7A1F2B"/>
-                </a:solidFill>
-                <a:latin typeface="Calibri" pitchFamily="34" charset="0"/>
-                <a:ea typeface="Calibri" pitchFamily="34" charset="-122"/>
-                <a:cs typeface="Calibri" pitchFamily="34" charset="-120"/>
-              </a:rPr>
-              <a:t>THE LIMITS</a:t>
-            </a:r>
-            <a:endParaRPr lang="en-US" sz="1500" dirty="0"/>
-          </a:p>
-        </p:txBody>
-      </p:sp>
-      <p:sp>
-        <p:nvSpPr>
-          <p:cNvPr id="3" name="Text 1"/>
-          <p:cNvSpPr/>
-          <p:nvPr/>
-        </p:nvSpPr>
-        <p:spPr>
-          <a:xfrm>
-            <a:off x="640080" y="868680"/>
-            <a:ext cx="10881360" cy="914400"/>
-          </a:xfrm>
-          <a:prstGeom prst="rect">
-            <a:avLst/>
-          </a:prstGeom>
-          <a:noFill/>
-          <a:ln/>
-        </p:spPr>
-        <p:txBody>
-          <a:bodyPr wrap="square" lIns="0" tIns="0" rIns="0" bIns="0" rtlCol="0" anchor="ctr"/>
-          <a:lstStyle/>
-          <a:p>
-            <a:pPr marL="0" indent="0" algn="l">
-              <a:buNone/>
-            </a:pPr>
-            <a:r>
-              <a:rPr lang="en-US" sz="3400" b="1" dirty="0">
-                <a:solidFill>
-                  <a:srgbClr val="1E1F24"/>
-                </a:solidFill>
-                <a:latin typeface="Cambria" pitchFamily="34" charset="0"/>
-                <a:ea typeface="Cambria" pitchFamily="34" charset="-122"/>
-                <a:cs typeface="Cambria" pitchFamily="34" charset="-120"/>
-              </a:rPr>
-              <a:t>What we cannot measure</a:t>
-            </a:r>
-            <a:endParaRPr lang="en-US" sz="3400" dirty="0"/>
-          </a:p>
-        </p:txBody>
-      </p:sp>
-      <p:sp>
-        <p:nvSpPr>
-          <p:cNvPr id="4" name="Text 2"/>
-          <p:cNvSpPr/>
-          <p:nvPr/>
-        </p:nvSpPr>
-        <p:spPr>
-          <a:xfrm>
-            <a:off x="640080" y="2194560"/>
-            <a:ext cx="502920" cy="640080"/>
-          </a:xfrm>
-          <a:prstGeom prst="rect">
-            <a:avLst/>
-          </a:prstGeom>
-          <a:noFill/>
-          <a:ln/>
-        </p:spPr>
-        <p:txBody>
-          <a:bodyPr wrap="square" lIns="0" tIns="0" rIns="0" bIns="0" rtlCol="0" anchor="ctr"/>
-          <a:lstStyle/>
-          <a:p>
-            <a:pPr marL="0" indent="0" algn="l">
-              <a:buNone/>
-            </a:pPr>
-            <a:r>
-              <a:rPr lang="en-US" sz="3200" b="1" dirty="0">
-                <a:solidFill>
-                  <a:srgbClr val="7A1F2B"/>
-                </a:solidFill>
-                <a:latin typeface="Cambria" pitchFamily="34" charset="0"/>
-                <a:ea typeface="Cambria" pitchFamily="34" charset="-122"/>
-                <a:cs typeface="Cambria" pitchFamily="34" charset="-120"/>
-              </a:rPr>
-              <a:t>1</a:t>
-            </a:r>
-            <a:endParaRPr lang="en-US" sz="3200" dirty="0"/>
-          </a:p>
-        </p:txBody>
-      </p:sp>
-      <p:sp>
-        <p:nvSpPr>
-          <p:cNvPr id="5" name="Text 3"/>
-          <p:cNvSpPr/>
-          <p:nvPr/>
-        </p:nvSpPr>
-        <p:spPr>
-          <a:xfrm>
-            <a:off x="1280160" y="2194560"/>
-            <a:ext cx="5852160" cy="822960"/>
-          </a:xfrm>
-          <a:prstGeom prst="rect">
-            <a:avLst/>
-          </a:prstGeom>
-          <a:noFill/>
-          <a:ln/>
-        </p:spPr>
-        <p:txBody>
-          <a:bodyPr wrap="square" lIns="0" tIns="0" rIns="0" bIns="0" rtlCol="0" anchor="ctr"/>
-          <a:lstStyle/>
-          <a:p>
-            <a:pPr marL="0" indent="0" algn="l">
-              <a:lnSpc>
-                <a:spcPct val="105000"/>
-              </a:lnSpc>
-              <a:buNone/>
-            </a:pPr>
-            <a:r>
-              <a:rPr lang="en-US" sz="1850" dirty="0">
-                <a:solidFill>
-                  <a:srgbClr val="1E1F24"/>
-                </a:solidFill>
-                <a:latin typeface="Calibri" pitchFamily="34" charset="0"/>
-                <a:ea typeface="Calibri" pitchFamily="34" charset="-122"/>
-                <a:cs typeface="Calibri" pitchFamily="34" charset="-120"/>
-              </a:rPr>
-              <a:t>We cannot say how accurately it reads a page.</a:t>
-            </a:r>
-            <a:endParaRPr lang="en-US" sz="1850" dirty="0"/>
-          </a:p>
-        </p:txBody>
-      </p:sp>
-      <p:sp>
-        <p:nvSpPr>
-          <p:cNvPr id="6" name="Shape 4"/>
-          <p:cNvSpPr/>
-          <p:nvPr/>
-        </p:nvSpPr>
-        <p:spPr>
-          <a:xfrm>
-            <a:off x="7406640" y="2212848"/>
-            <a:ext cx="4114800" cy="777240"/>
-          </a:xfrm>
-          <a:prstGeom prst="roundRect">
-            <a:avLst>
-              <a:gd name="adj" fmla="val 7059"/>
-            </a:avLst>
-          </a:prstGeom>
-          <a:solidFill>
-            <a:srgbClr val="F4F4F6"/>
-          </a:solidFill>
-          <a:ln w="12700">
-            <a:solidFill>
-              <a:srgbClr val="D6D8DD"/>
-            </a:solidFill>
-            <a:prstDash val="solid"/>
-          </a:ln>
-        </p:spPr>
-        <p:txBody>
-          <a:bodyPr/>
-          <a:lstStyle/>
-          <a:p>
-            <a:endParaRPr lang="en-IN"/>
-          </a:p>
-        </p:txBody>
-      </p:sp>
-      <p:sp>
-        <p:nvSpPr>
-          <p:cNvPr id="7" name="Text 5"/>
-          <p:cNvSpPr/>
-          <p:nvPr/>
-        </p:nvSpPr>
-        <p:spPr>
-          <a:xfrm>
-            <a:off x="7571232" y="2212848"/>
-            <a:ext cx="3794760" cy="777240"/>
-          </a:xfrm>
-          <a:prstGeom prst="rect">
-            <a:avLst/>
-          </a:prstGeom>
-          <a:noFill/>
-          <a:ln/>
-        </p:spPr>
-        <p:txBody>
-          <a:bodyPr wrap="square" lIns="0" tIns="0" rIns="0" bIns="0" rtlCol="0" anchor="ctr"/>
-          <a:lstStyle/>
-          <a:p>
-            <a:pPr marL="0" indent="0" algn="l">
-              <a:lnSpc>
-                <a:spcPct val="100000"/>
-              </a:lnSpc>
-              <a:buNone/>
-            </a:pPr>
-            <a:r>
-              <a:rPr lang="en-US" sz="1450" dirty="0">
-                <a:solidFill>
-                  <a:srgbClr val="1E1F24"/>
-                </a:solidFill>
-                <a:latin typeface="Calibri" pitchFamily="34" charset="0"/>
-                <a:ea typeface="Calibri" pitchFamily="34" charset="-122"/>
-                <a:cs typeface="Calibri" pitchFamily="34" charset="-120"/>
-              </a:rPr>
-              <a:t>Nobody has hand-typed a set of pages to check against. No system can be scored, ours or anyone else's.</a:t>
-            </a:r>
-            <a:endParaRPr lang="en-US" sz="1450" dirty="0"/>
-          </a:p>
-        </p:txBody>
-      </p:sp>
-      <p:sp>
-        <p:nvSpPr>
-          <p:cNvPr id="8" name="Shape 6"/>
-          <p:cNvSpPr/>
-          <p:nvPr/>
-        </p:nvSpPr>
-        <p:spPr>
-          <a:xfrm>
-            <a:off x="640080" y="3154680"/>
-            <a:ext cx="10881360" cy="0"/>
-          </a:xfrm>
-          <a:prstGeom prst="line">
-            <a:avLst/>
-          </a:prstGeom>
-          <a:noFill/>
-          <a:ln w="9525">
-            <a:solidFill>
-              <a:srgbClr val="D6D8DD"/>
-            </a:solidFill>
-            <a:prstDash val="solid"/>
-          </a:ln>
-        </p:spPr>
-        <p:txBody>
-          <a:bodyPr/>
-          <a:lstStyle/>
-          <a:p>
-            <a:endParaRPr lang="en-IN"/>
-          </a:p>
-        </p:txBody>
-      </p:sp>
-      <p:sp>
-        <p:nvSpPr>
-          <p:cNvPr id="9" name="Text 7"/>
-          <p:cNvSpPr/>
-          <p:nvPr/>
-        </p:nvSpPr>
-        <p:spPr>
-          <a:xfrm>
-            <a:off x="640080" y="3291840"/>
-            <a:ext cx="502920" cy="640080"/>
-          </a:xfrm>
-          <a:prstGeom prst="rect">
-            <a:avLst/>
-          </a:prstGeom>
-          <a:noFill/>
-          <a:ln/>
-        </p:spPr>
-        <p:txBody>
-          <a:bodyPr wrap="square" lIns="0" tIns="0" rIns="0" bIns="0" rtlCol="0" anchor="ctr"/>
-          <a:lstStyle/>
-          <a:p>
-            <a:pPr marL="0" indent="0" algn="l">
-              <a:buNone/>
-            </a:pPr>
-            <a:r>
-              <a:rPr lang="en-US" sz="3200" b="1" dirty="0">
-                <a:solidFill>
-                  <a:srgbClr val="7A1F2B"/>
-                </a:solidFill>
-                <a:latin typeface="Cambria" pitchFamily="34" charset="0"/>
-                <a:ea typeface="Cambria" pitchFamily="34" charset="-122"/>
-                <a:cs typeface="Cambria" pitchFamily="34" charset="-120"/>
-              </a:rPr>
-              <a:t>2</a:t>
-            </a:r>
-            <a:endParaRPr lang="en-US" sz="3200" dirty="0"/>
-          </a:p>
-        </p:txBody>
-      </p:sp>
-      <p:sp>
-        <p:nvSpPr>
-          <p:cNvPr id="10" name="Text 8"/>
-          <p:cNvSpPr/>
-          <p:nvPr/>
-        </p:nvSpPr>
-        <p:spPr>
-          <a:xfrm>
-            <a:off x="1280160" y="3291840"/>
-            <a:ext cx="5852160" cy="822960"/>
-          </a:xfrm>
-          <a:prstGeom prst="rect">
-            <a:avLst/>
-          </a:prstGeom>
-          <a:noFill/>
-          <a:ln/>
-        </p:spPr>
-        <p:txBody>
-          <a:bodyPr wrap="square" lIns="0" tIns="0" rIns="0" bIns="0" rtlCol="0" anchor="ctr"/>
-          <a:lstStyle/>
-          <a:p>
-            <a:pPr marL="0" indent="0" algn="l">
-              <a:lnSpc>
-                <a:spcPct val="105000"/>
-              </a:lnSpc>
-              <a:buNone/>
-            </a:pPr>
-            <a:r>
-              <a:rPr lang="en-US" sz="1850" dirty="0">
-                <a:solidFill>
-                  <a:srgbClr val="1E1F24"/>
-                </a:solidFill>
-                <a:latin typeface="Calibri" pitchFamily="34" charset="0"/>
-                <a:ea typeface="Calibri" pitchFamily="34" charset="-122"/>
-                <a:cs typeface="Calibri" pitchFamily="34" charset="-120"/>
-              </a:rPr>
-              <a:t>We cannot say how often redaction hides too much.</a:t>
-            </a:r>
-            <a:endParaRPr lang="en-US" sz="1850" dirty="0"/>
-          </a:p>
-        </p:txBody>
-      </p:sp>
-      <p:sp>
-        <p:nvSpPr>
-          <p:cNvPr id="11" name="Shape 9"/>
-          <p:cNvSpPr/>
-          <p:nvPr/>
-        </p:nvSpPr>
-        <p:spPr>
-          <a:xfrm>
-            <a:off x="7406640" y="3310128"/>
-            <a:ext cx="4114800" cy="777240"/>
-          </a:xfrm>
-          <a:prstGeom prst="roundRect">
-            <a:avLst>
-              <a:gd name="adj" fmla="val 7059"/>
-            </a:avLst>
-          </a:prstGeom>
-          <a:solidFill>
-            <a:srgbClr val="F4F4F6"/>
-          </a:solidFill>
-          <a:ln w="12700">
-            <a:solidFill>
-              <a:srgbClr val="D6D8DD"/>
-            </a:solidFill>
-            <a:prstDash val="solid"/>
-          </a:ln>
-        </p:spPr>
-        <p:txBody>
-          <a:bodyPr/>
-          <a:lstStyle/>
-          <a:p>
-            <a:endParaRPr lang="en-IN"/>
-          </a:p>
-        </p:txBody>
-      </p:sp>
-      <p:sp>
-        <p:nvSpPr>
-          <p:cNvPr id="12" name="Text 10"/>
-          <p:cNvSpPr/>
-          <p:nvPr/>
-        </p:nvSpPr>
-        <p:spPr>
-          <a:xfrm>
-            <a:off x="7571232" y="3310128"/>
-            <a:ext cx="3794760" cy="777240"/>
-          </a:xfrm>
-          <a:prstGeom prst="rect">
-            <a:avLst/>
-          </a:prstGeom>
-          <a:noFill/>
-          <a:ln/>
-        </p:spPr>
-        <p:txBody>
-          <a:bodyPr wrap="square" lIns="0" tIns="0" rIns="0" bIns="0" rtlCol="0" anchor="ctr"/>
-          <a:lstStyle/>
-          <a:p>
-            <a:r>
-              <a:rPr lang="en-US" sz="1450" dirty="0">
-                <a:solidFill>
-                  <a:srgbClr val="1E1F24"/>
-                </a:solidFill>
-                <a:latin typeface="Calibri" pitchFamily="34" charset="0"/>
-                <a:ea typeface="Calibri" pitchFamily="34" charset="-122"/>
-                <a:cs typeface="Calibri" pitchFamily="34" charset="-120"/>
-              </a:rPr>
-              <a:t>We marked what should be hidden. We never marked what should not, so a miss and an over-redaction look the same.</a:t>
-            </a:r>
-            <a:endParaRPr lang="en-US" sz="1450" dirty="0"/>
-          </a:p>
-        </p:txBody>
-      </p:sp>
-      <p:sp>
-        <p:nvSpPr>
-          <p:cNvPr id="13" name="Shape 11"/>
-          <p:cNvSpPr/>
-          <p:nvPr/>
-        </p:nvSpPr>
-        <p:spPr>
-          <a:xfrm>
-            <a:off x="640080" y="4251960"/>
-            <a:ext cx="10881360" cy="0"/>
-          </a:xfrm>
-          <a:prstGeom prst="line">
-            <a:avLst/>
-          </a:prstGeom>
-          <a:noFill/>
-          <a:ln w="9525">
-            <a:solidFill>
-              <a:srgbClr val="D6D8DD"/>
-            </a:solidFill>
-            <a:prstDash val="solid"/>
-          </a:ln>
-        </p:spPr>
-        <p:txBody>
-          <a:bodyPr/>
-          <a:lstStyle/>
-          <a:p>
-            <a:endParaRPr lang="en-IN"/>
-          </a:p>
-        </p:txBody>
-      </p:sp>
-      <p:sp>
-        <p:nvSpPr>
-          <p:cNvPr id="14" name="Text 12"/>
-          <p:cNvSpPr/>
-          <p:nvPr/>
-        </p:nvSpPr>
-        <p:spPr>
-          <a:xfrm>
-            <a:off x="640080" y="4389120"/>
-            <a:ext cx="502920" cy="640080"/>
-          </a:xfrm>
-          <a:prstGeom prst="rect">
-            <a:avLst/>
-          </a:prstGeom>
-          <a:noFill/>
-          <a:ln/>
-        </p:spPr>
-        <p:txBody>
-          <a:bodyPr wrap="square" lIns="0" tIns="0" rIns="0" bIns="0" rtlCol="0" anchor="ctr"/>
-          <a:lstStyle/>
-          <a:p>
-            <a:pPr marL="0" indent="0" algn="l">
-              <a:buNone/>
-            </a:pPr>
-            <a:r>
-              <a:rPr lang="en-US" sz="3200" b="1" dirty="0">
-                <a:solidFill>
-                  <a:srgbClr val="7A1F2B"/>
-                </a:solidFill>
-                <a:latin typeface="Cambria" pitchFamily="34" charset="0"/>
-                <a:ea typeface="Cambria" pitchFamily="34" charset="-122"/>
-                <a:cs typeface="Cambria" pitchFamily="34" charset="-120"/>
-              </a:rPr>
-              <a:t>3</a:t>
-            </a:r>
-            <a:endParaRPr lang="en-US" sz="3200" dirty="0"/>
-          </a:p>
-        </p:txBody>
-      </p:sp>
-      <p:sp>
-        <p:nvSpPr>
-          <p:cNvPr id="15" name="Text 13"/>
-          <p:cNvSpPr/>
-          <p:nvPr/>
-        </p:nvSpPr>
-        <p:spPr>
-          <a:xfrm>
-            <a:off x="1280160" y="4389120"/>
-            <a:ext cx="5852160" cy="822960"/>
-          </a:xfrm>
-          <a:prstGeom prst="rect">
-            <a:avLst/>
-          </a:prstGeom>
-          <a:noFill/>
-          <a:ln/>
-        </p:spPr>
-        <p:txBody>
-          <a:bodyPr wrap="square" lIns="0" tIns="0" rIns="0" bIns="0" rtlCol="0" anchor="ctr"/>
-          <a:lstStyle/>
-          <a:p>
-            <a:pPr marL="0" indent="0" algn="l">
-              <a:lnSpc>
-                <a:spcPct val="105000"/>
-              </a:lnSpc>
-              <a:buNone/>
-            </a:pPr>
-            <a:r>
-              <a:rPr lang="en-US" sz="1850" dirty="0">
-                <a:solidFill>
-                  <a:srgbClr val="1E1F24"/>
-                </a:solidFill>
-                <a:latin typeface="Calibri" pitchFamily="34" charset="0"/>
-                <a:ea typeface="Calibri" pitchFamily="34" charset="-122"/>
-                <a:cs typeface="Calibri" pitchFamily="34" charset="-120"/>
-              </a:rPr>
-              <a:t>We cannot say it saves officer time.</a:t>
-            </a:r>
-            <a:endParaRPr lang="en-US" sz="1850" dirty="0"/>
-          </a:p>
-        </p:txBody>
-      </p:sp>
-      <p:sp>
-        <p:nvSpPr>
-          <p:cNvPr id="16" name="Shape 14"/>
-          <p:cNvSpPr/>
-          <p:nvPr/>
-        </p:nvSpPr>
-        <p:spPr>
-          <a:xfrm>
-            <a:off x="7406640" y="4407408"/>
-            <a:ext cx="4114800" cy="777240"/>
-          </a:xfrm>
-          <a:prstGeom prst="roundRect">
-            <a:avLst>
-              <a:gd name="adj" fmla="val 7059"/>
-            </a:avLst>
-          </a:prstGeom>
-          <a:solidFill>
-            <a:srgbClr val="F4F4F6"/>
-          </a:solidFill>
-          <a:ln w="12700">
-            <a:solidFill>
-              <a:srgbClr val="D6D8DD"/>
-            </a:solidFill>
-            <a:prstDash val="solid"/>
-          </a:ln>
-        </p:spPr>
-        <p:txBody>
-          <a:bodyPr/>
-          <a:lstStyle/>
-          <a:p>
-            <a:endParaRPr lang="en-IN" b="1"/>
-          </a:p>
-        </p:txBody>
-      </p:sp>
-      <p:sp>
-        <p:nvSpPr>
-          <p:cNvPr id="17" name="Text 15"/>
-          <p:cNvSpPr/>
-          <p:nvPr/>
-        </p:nvSpPr>
-        <p:spPr>
-          <a:xfrm>
-            <a:off x="7571232" y="4407408"/>
-            <a:ext cx="3794760" cy="777240"/>
-          </a:xfrm>
-          <a:prstGeom prst="rect">
-            <a:avLst/>
-          </a:prstGeom>
-          <a:noFill/>
-          <a:ln/>
-        </p:spPr>
-        <p:txBody>
-          <a:bodyPr wrap="square" lIns="0" tIns="0" rIns="0" bIns="0" rtlCol="0" anchor="ctr"/>
-          <a:lstStyle/>
-          <a:p>
-            <a:pPr marL="0" indent="0" algn="l">
-              <a:lnSpc>
-                <a:spcPct val="100000"/>
-              </a:lnSpc>
-              <a:buNone/>
-            </a:pPr>
-            <a:r>
-              <a:rPr lang="en-US" sz="1450" dirty="0">
-                <a:solidFill>
-                  <a:srgbClr val="1E1F24"/>
-                </a:solidFill>
-                <a:latin typeface="Calibri" pitchFamily="34" charset="0"/>
-                <a:ea typeface="Calibri" pitchFamily="34" charset="-122"/>
-                <a:cs typeface="Calibri" pitchFamily="34" charset="-120"/>
-              </a:rPr>
-              <a:t>The 10 to 15 minute baseline is self-reported and was never timed. No trial has been run.</a:t>
-            </a:r>
-            <a:endParaRPr lang="en-US" sz="1450" dirty="0"/>
-          </a:p>
-        </p:txBody>
-      </p:sp>
-      <p:sp>
-        <p:nvSpPr>
-          <p:cNvPr id="18" name="Text 16"/>
-          <p:cNvSpPr/>
-          <p:nvPr/>
-        </p:nvSpPr>
-        <p:spPr>
-          <a:xfrm>
-            <a:off x="640080" y="5577840"/>
-            <a:ext cx="10881360" cy="365760"/>
-          </a:xfrm>
-          <a:prstGeom prst="rect">
-            <a:avLst/>
-          </a:prstGeom>
-          <a:noFill/>
-          <a:ln/>
-        </p:spPr>
-        <p:txBody>
-          <a:bodyPr wrap="square" lIns="0" tIns="0" rIns="0" bIns="0" rtlCol="0" anchor="ctr"/>
-          <a:lstStyle/>
-          <a:p>
-            <a:pPr marL="0" indent="0" algn="l">
-              <a:buNone/>
-            </a:pPr>
-            <a:r>
-              <a:rPr lang="en-US" sz="1650" b="1" i="1" dirty="0">
-                <a:solidFill>
-                  <a:srgbClr val="6C6E76"/>
-                </a:solidFill>
-                <a:latin typeface="Calibri" pitchFamily="34" charset="0"/>
-                <a:ea typeface="Calibri" pitchFamily="34" charset="-122"/>
-                <a:cs typeface="Calibri" pitchFamily="34" charset="-120"/>
-              </a:rPr>
-              <a:t>Every figure in this deck was produced by us, on our own data. None of it has been checked by an officer.</a:t>
-            </a:r>
-            <a:endParaRPr lang="en-US" sz="1650" b="1" dirty="0"/>
-          </a:p>
-        </p:txBody>
-      </p:sp>
-      <p:sp>
-        <p:nvSpPr>
-          <p:cNvPr id="19" name="Text 17"/>
-          <p:cNvSpPr/>
-          <p:nvPr/>
-        </p:nvSpPr>
-        <p:spPr>
-          <a:xfrm>
-            <a:off x="640080" y="6419088"/>
-            <a:ext cx="5486400" cy="274320"/>
-          </a:xfrm>
-          <a:prstGeom prst="rect">
-            <a:avLst/>
-          </a:prstGeom>
-          <a:noFill/>
-          <a:ln/>
-        </p:spPr>
-        <p:txBody>
-          <a:bodyPr wrap="square" lIns="0" tIns="0" rIns="0" bIns="0" rtlCol="0" anchor="ctr"/>
-          <a:lstStyle/>
-          <a:p>
-            <a:pPr marL="0" indent="0" algn="l">
-              <a:buNone/>
-            </a:pPr>
-            <a:r>
-              <a:rPr lang="en-US" sz="850" dirty="0">
-                <a:solidFill>
-                  <a:srgbClr val="6C6E76"/>
-                </a:solidFill>
-                <a:latin typeface="Calibri" pitchFamily="34" charset="0"/>
-                <a:ea typeface="Calibri" pitchFamily="34" charset="-122"/>
-                <a:cs typeface="Calibri" pitchFamily="34" charset="-120"/>
-              </a:rPr>
-              <a:t>Data, Policy and Innovation Centre</a:t>
-            </a:r>
-            <a:endParaRPr lang="en-US" sz="850" dirty="0"/>
-          </a:p>
-        </p:txBody>
-      </p:sp>
-      <p:sp>
-        <p:nvSpPr>
-          <p:cNvPr id="20" name="Text 18"/>
-          <p:cNvSpPr/>
-          <p:nvPr/>
-        </p:nvSpPr>
-        <p:spPr>
-          <a:xfrm>
-            <a:off x="6035040" y="6419088"/>
-            <a:ext cx="5486400" cy="274320"/>
-          </a:xfrm>
-          <a:prstGeom prst="rect">
-            <a:avLst/>
-          </a:prstGeom>
-          <a:noFill/>
-          <a:ln/>
-        </p:spPr>
-        <p:txBody>
-          <a:bodyPr wrap="square" lIns="0" tIns="0" rIns="0" bIns="0" rtlCol="0" anchor="ctr"/>
-          <a:lstStyle/>
-          <a:p>
-            <a:pPr marL="0" indent="0" algn="r">
-              <a:buNone/>
-            </a:pPr>
-            <a:r>
-              <a:rPr lang="en-US" sz="850" dirty="0">
-                <a:solidFill>
-                  <a:srgbClr val="6C6E76"/>
-                </a:solidFill>
-                <a:latin typeface="Calibri" pitchFamily="34" charset="0"/>
-                <a:ea typeface="Calibri" pitchFamily="34" charset="-122"/>
-                <a:cs typeface="Calibri" pitchFamily="34" charset="-120"/>
-              </a:rPr>
-              <a:t>Government of Odisha  ×  University of Chicago Trust</a:t>
-            </a:r>
-            <a:endParaRPr lang="en-US" sz="850" dirty="0"/>
-          </a:p>
-        </p:txBody>
-      </p:sp>
-    </p:spTree>
-  </p:cSld>
-  <p:clrMapOvr>
-    <a:masterClrMapping/>
-  </p:clrMapOvr>
-</p:sld>
-</file>
-
 <file path=ppt/slides/slide21.xml><?xml version="1.0" encoding="utf-8"?>
 <p:sld xmlns:a="http://schemas.openxmlformats.org/drawingml/2006/main" xmlns:p="http://schemas.openxmlformats.org/presentationml/2006/main" xmlns:r="http://schemas.openxmlformats.org/officeDocument/2006/relationships">
   <p:cSld>
@@ -6035,7 +5919,7 @@
                 <a:ea typeface="Calibri" pitchFamily="34" charset="-122"/>
                 <a:cs typeface="Calibri" pitchFamily="34" charset="-120"/>
               </a:rPr>
-              <a:t>THE OUTSIDE OPTION: SARVAM</a:t>
+              <a:t>THE LIMITS</a:t>
             </a:r>
             <a:endParaRPr lang="en-US" sz="1500" dirty="0"/>
           </a:p>
@@ -6074,7 +5958,7 @@
                 <a:ea typeface="Cambria" pitchFamily="34" charset="-122"/>
                 <a:cs typeface="Cambria" pitchFamily="34" charset="-120"/>
               </a:rPr>
-              <a:t>It does more. We have not shown it does better</a:t>
+              <a:t>What we cannot measure</a:t>
             </a:r>
             <a:endParaRPr lang="en-US" sz="3400" dirty="0"/>
           </a:p>
@@ -6082,14 +5966,14 @@
       </p:sp>
       <p:sp>
         <p:nvSpPr>
-          <p:cNvPr id="5" name="Text 3"/>
-          <p:cNvSpPr/>
-          <p:nvPr/>
-        </p:nvSpPr>
-        <p:spPr>
-          <a:xfrm>
-            <a:off x="640080" y="2179321"/>
-            <a:ext cx="10881360" cy="292608"/>
+          <p:cNvPr id="4" name="Text 2"/>
+          <p:cNvSpPr/>
+          <p:nvPr/>
+        </p:nvSpPr>
+        <p:spPr>
+          <a:xfrm>
+            <a:off x="640080" y="2194560"/>
+            <a:ext cx="502920" cy="640080"/>
           </a:xfrm>
           <a:prstGeom prst="rect">
             <a:avLst/>
@@ -6105,17 +5989,59 @@
               <a:buNone/>
             </a:pPr>
             <a:r>
-              <a:rPr lang="en-US" sz="1350" b="1" kern="0" spc="150" dirty="0">
+              <a:rPr lang="en-US" sz="3200" b="1" dirty="0">
                 <a:solidFill>
                   <a:srgbClr val="7A1F2B"/>
+                </a:solidFill>
+                <a:latin typeface="Cambria" pitchFamily="34" charset="0"/>
+                <a:ea typeface="Cambria" pitchFamily="34" charset="-122"/>
+                <a:cs typeface="Cambria" pitchFamily="34" charset="-120"/>
+              </a:rPr>
+              <a:t>1</a:t>
+            </a:r>
+            <a:endParaRPr lang="en-US" sz="3200" dirty="0"/>
+          </a:p>
+        </p:txBody>
+      </p:sp>
+      <p:sp>
+        <p:nvSpPr>
+          <p:cNvPr id="5" name="Text 3"/>
+          <p:cNvSpPr/>
+          <p:nvPr/>
+        </p:nvSpPr>
+        <p:spPr>
+          <a:xfrm>
+            <a:off x="1280160" y="2194560"/>
+            <a:ext cx="5852160" cy="822960"/>
+          </a:xfrm>
+          <a:prstGeom prst="rect">
+            <a:avLst/>
+          </a:prstGeom>
+          <a:noFill/>
+          <a:ln/>
+        </p:spPr>
+        <p:txBody>
+          <a:bodyPr wrap="square" lIns="0" tIns="0" rIns="0" bIns="0" rtlCol="0" anchor="ctr"/>
+          <a:lstStyle/>
+          <a:p>
+            <a:pPr marL="0" indent="0" algn="l">
+              <a:lnSpc>
+                <a:spcPct val="105000"/>
+              </a:lnSpc>
+              <a:buNone/>
+            </a:pPr>
+            <a:r>
+              <a:rPr lang="en-US" sz="1850" dirty="0">
+                <a:solidFill>
+                  <a:srgbClr val="1E1F24"/>
                 </a:solidFill>
                 <a:latin typeface="Calibri" pitchFamily="34" charset="0"/>
                 <a:ea typeface="Calibri" pitchFamily="34" charset="-122"/>
                 <a:cs typeface="Calibri" pitchFamily="34" charset="-120"/>
               </a:rPr>
-              <a:t>What it does</a:t>
-            </a:r>
-            <a:endParaRPr lang="en-US" sz="1350" dirty="0"/>
+              <a:t>We cannot say how accurately it reads a page.</a:t>
+            </a:r>
+            <a:endParaRPr lang="en-US" sz="1850" dirty="0"/>
           </a:p>
         </p:txBody>
       </p:sp>
@@ -6127,16 +6053,23 @@
         </p:nvSpPr>
         <p:spPr>
           <a:xfrm>
-            <a:off x="640080" y="2663953"/>
-            <a:ext cx="91440" cy="91440"/>
-          </a:xfrm>
-          <a:prstGeom prst="rect">
-            <a:avLst/>
+            <a:off x="7406640" y="2212848"/>
+            <a:ext cx="4114800" cy="777240"/>
+          </a:xfrm>
+          <a:prstGeom prst="roundRect">
+            <a:avLst>
+              <a:gd name="adj" fmla="val 7059"/>
+            </a:avLst>
           </a:prstGeom>
           <a:solidFill>
-            <a:srgbClr val="7A1F2B"/>
+            <a:srgbClr val="F4F4F6"/>
           </a:solidFill>
-          <a:ln/>
+          <a:ln w="12700">
+            <a:solidFill>
+              <a:srgbClr val="D6D8DD"/>
+            </a:solidFill>
+            <a:prstDash val="solid"/>
+          </a:ln>
         </p:spPr>
         <p:txBody>
           <a:bodyPr/>
@@ -6154,24 +6087,138 @@
         </p:nvSpPr>
         <p:spPr>
           <a:xfrm>
-            <a:off x="932688" y="2545081"/>
-            <a:ext cx="10607040" cy="411480"/>
-          </a:xfrm>
-          <a:prstGeom prst="rect">
-            <a:avLst/>
-          </a:prstGeom>
-          <a:noFill/>
-          <a:ln/>
-        </p:spPr>
-        <p:txBody>
-          <a:bodyPr wrap="square" lIns="0" tIns="0" rIns="0" bIns="0" rtlCol="0" anchor="t"/>
+            <a:off x="7571232" y="2212848"/>
+            <a:ext cx="3794760" cy="777240"/>
+          </a:xfrm>
+          <a:prstGeom prst="rect">
+            <a:avLst/>
+          </a:prstGeom>
+          <a:noFill/>
+          <a:ln/>
+        </p:spPr>
+        <p:txBody>
+          <a:bodyPr wrap="square" lIns="0" tIns="0" rIns="0" bIns="0" rtlCol="0" anchor="ctr"/>
+          <a:lstStyle/>
+          <a:p>
+            <a:pPr marL="0" indent="0" algn="l">
+              <a:lnSpc>
+                <a:spcPct val="100000"/>
+              </a:lnSpc>
+              <a:buNone/>
+            </a:pPr>
+            <a:r>
+              <a:rPr lang="en-US" sz="1450" dirty="0">
+                <a:solidFill>
+                  <a:srgbClr val="1E1F24"/>
+                </a:solidFill>
+                <a:latin typeface="Calibri" pitchFamily="34" charset="0"/>
+                <a:ea typeface="Calibri" pitchFamily="34" charset="-122"/>
+                <a:cs typeface="Calibri" pitchFamily="34" charset="-120"/>
+              </a:rPr>
+              <a:t>Nobody has hand-typed a set of pages to check against. No system can be scored, ours or anyone else's.</a:t>
+            </a:r>
+            <a:endParaRPr lang="en-US" sz="1450" dirty="0"/>
+          </a:p>
+        </p:txBody>
+      </p:sp>
+      <p:sp>
+        <p:nvSpPr>
+          <p:cNvPr id="8" name="Shape 6"/>
+          <p:cNvSpPr/>
+          <p:nvPr/>
+        </p:nvSpPr>
+        <p:spPr>
+          <a:xfrm>
+            <a:off x="640080" y="3154680"/>
+            <a:ext cx="10881360" cy="0"/>
+          </a:xfrm>
+          <a:prstGeom prst="line">
+            <a:avLst/>
+          </a:prstGeom>
+          <a:noFill/>
+          <a:ln w="9525">
+            <a:solidFill>
+              <a:srgbClr val="D6D8DD"/>
+            </a:solidFill>
+            <a:prstDash val="solid"/>
+          </a:ln>
+        </p:spPr>
+        <p:txBody>
+          <a:bodyPr/>
+          <a:lstStyle/>
+          <a:p>
+            <a:endParaRPr lang="en-IN"/>
+          </a:p>
+        </p:txBody>
+      </p:sp>
+      <p:sp>
+        <p:nvSpPr>
+          <p:cNvPr id="9" name="Text 7"/>
+          <p:cNvSpPr/>
+          <p:nvPr/>
+        </p:nvSpPr>
+        <p:spPr>
+          <a:xfrm>
+            <a:off x="640080" y="3291840"/>
+            <a:ext cx="502920" cy="640080"/>
+          </a:xfrm>
+          <a:prstGeom prst="rect">
+            <a:avLst/>
+          </a:prstGeom>
+          <a:noFill/>
+          <a:ln/>
+        </p:spPr>
+        <p:txBody>
+          <a:bodyPr wrap="square" lIns="0" tIns="0" rIns="0" bIns="0" rtlCol="0" anchor="ctr"/>
           <a:lstStyle/>
           <a:p>
             <a:pPr marL="0" indent="0" algn="l">
               <a:buNone/>
             </a:pPr>
             <a:r>
-              <a:rPr lang="en-US" sz="1800" dirty="0">
+              <a:rPr lang="en-US" sz="3200" b="1" dirty="0">
+                <a:solidFill>
+                  <a:srgbClr val="7A1F2B"/>
+                </a:solidFill>
+                <a:latin typeface="Cambria" pitchFamily="34" charset="0"/>
+                <a:ea typeface="Cambria" pitchFamily="34" charset="-122"/>
+                <a:cs typeface="Cambria" pitchFamily="34" charset="-120"/>
+              </a:rPr>
+              <a:t>2</a:t>
+            </a:r>
+            <a:endParaRPr lang="en-US" sz="3200" dirty="0"/>
+          </a:p>
+        </p:txBody>
+      </p:sp>
+      <p:sp>
+        <p:nvSpPr>
+          <p:cNvPr id="10" name="Text 8"/>
+          <p:cNvSpPr/>
+          <p:nvPr/>
+        </p:nvSpPr>
+        <p:spPr>
+          <a:xfrm>
+            <a:off x="1280160" y="3291840"/>
+            <a:ext cx="5852160" cy="822960"/>
+          </a:xfrm>
+          <a:prstGeom prst="rect">
+            <a:avLst/>
+          </a:prstGeom>
+          <a:noFill/>
+          <a:ln/>
+        </p:spPr>
+        <p:txBody>
+          <a:bodyPr wrap="square" lIns="0" tIns="0" rIns="0" bIns="0" rtlCol="0" anchor="ctr"/>
+          <a:lstStyle/>
+          <a:p>
+            <a:pPr marL="0" indent="0" algn="l">
+              <a:lnSpc>
+                <a:spcPct val="105000"/>
+              </a:lnSpc>
+              <a:buNone/>
+            </a:pPr>
+            <a:r>
+              <a:rPr lang="en-US" sz="1850" dirty="0">
                 <a:solidFill>
                   <a:srgbClr val="1E1F24"/>
                 </a:solidFill>
@@ -6179,30 +6226,37 @@
                 <a:ea typeface="Calibri" pitchFamily="34" charset="-122"/>
                 <a:cs typeface="Calibri" pitchFamily="34" charset="-120"/>
               </a:rPr>
-              <a:t>One call at ₹1.50 a page returns the text, a category, a one-line summary and the district.</a:t>
-            </a:r>
-            <a:endParaRPr lang="en-US" sz="1800" dirty="0"/>
-          </a:p>
-        </p:txBody>
-      </p:sp>
-      <p:sp>
-        <p:nvSpPr>
-          <p:cNvPr id="8" name="Shape 6"/>
-          <p:cNvSpPr/>
-          <p:nvPr/>
-        </p:nvSpPr>
-        <p:spPr>
-          <a:xfrm>
-            <a:off x="640080" y="3166873"/>
-            <a:ext cx="91440" cy="91440"/>
-          </a:xfrm>
-          <a:prstGeom prst="rect">
-            <a:avLst/>
+              <a:t>We cannot say how often redaction hides too much.</a:t>
+            </a:r>
+            <a:endParaRPr lang="en-US" sz="1850" dirty="0"/>
+          </a:p>
+        </p:txBody>
+      </p:sp>
+      <p:sp>
+        <p:nvSpPr>
+          <p:cNvPr id="11" name="Shape 9"/>
+          <p:cNvSpPr/>
+          <p:nvPr/>
+        </p:nvSpPr>
+        <p:spPr>
+          <a:xfrm>
+            <a:off x="7406640" y="3310128"/>
+            <a:ext cx="4114800" cy="777240"/>
+          </a:xfrm>
+          <a:prstGeom prst="roundRect">
+            <a:avLst>
+              <a:gd name="adj" fmla="val 7059"/>
+            </a:avLst>
           </a:prstGeom>
           <a:solidFill>
-            <a:srgbClr val="7A1F2B"/>
+            <a:srgbClr val="F4F4F6"/>
           </a:solidFill>
-          <a:ln/>
+          <a:ln w="12700">
+            <a:solidFill>
+              <a:srgbClr val="D6D8DD"/>
+            </a:solidFill>
+            <a:prstDash val="solid"/>
+          </a:ln>
         </p:spPr>
         <p:txBody>
           <a:bodyPr/>
@@ -6214,30 +6268,138 @@
       </p:sp>
       <p:sp>
         <p:nvSpPr>
-          <p:cNvPr id="9" name="Text 7"/>
-          <p:cNvSpPr/>
-          <p:nvPr/>
-        </p:nvSpPr>
-        <p:spPr>
-          <a:xfrm>
-            <a:off x="932688" y="3048001"/>
-            <a:ext cx="10607040" cy="411480"/>
-          </a:xfrm>
-          <a:prstGeom prst="rect">
-            <a:avLst/>
-          </a:prstGeom>
-          <a:noFill/>
-          <a:ln/>
-        </p:spPr>
-        <p:txBody>
-          <a:bodyPr wrap="square" lIns="0" tIns="0" rIns="0" bIns="0" rtlCol="0" anchor="t"/>
+          <p:cNvPr id="12" name="Text 10"/>
+          <p:cNvSpPr/>
+          <p:nvPr/>
+        </p:nvSpPr>
+        <p:spPr>
+          <a:xfrm>
+            <a:off x="7571232" y="3310128"/>
+            <a:ext cx="3794760" cy="777240"/>
+          </a:xfrm>
+          <a:prstGeom prst="rect">
+            <a:avLst/>
+          </a:prstGeom>
+          <a:noFill/>
+          <a:ln/>
+        </p:spPr>
+        <p:txBody>
+          <a:bodyPr wrap="square" lIns="0" tIns="0" rIns="0" bIns="0" rtlCol="0" anchor="ctr"/>
+          <a:lstStyle/>
+          <a:p>
+            <a:r>
+              <a:rPr lang="en-US" sz="1450" dirty="0">
+                <a:solidFill>
+                  <a:srgbClr val="1E1F24"/>
+                </a:solidFill>
+                <a:latin typeface="Calibri" pitchFamily="34" charset="0"/>
+                <a:ea typeface="Calibri" pitchFamily="34" charset="-122"/>
+                <a:cs typeface="Calibri" pitchFamily="34" charset="-120"/>
+              </a:rPr>
+              <a:t>We marked what should be hidden. We never marked what should not, so a miss and an over-redaction look the same.</a:t>
+            </a:r>
+            <a:endParaRPr lang="en-US" sz="1450" dirty="0"/>
+          </a:p>
+        </p:txBody>
+      </p:sp>
+      <p:sp>
+        <p:nvSpPr>
+          <p:cNvPr id="13" name="Shape 11"/>
+          <p:cNvSpPr/>
+          <p:nvPr/>
+        </p:nvSpPr>
+        <p:spPr>
+          <a:xfrm>
+            <a:off x="640080" y="4251960"/>
+            <a:ext cx="10881360" cy="0"/>
+          </a:xfrm>
+          <a:prstGeom prst="line">
+            <a:avLst/>
+          </a:prstGeom>
+          <a:noFill/>
+          <a:ln w="9525">
+            <a:solidFill>
+              <a:srgbClr val="D6D8DD"/>
+            </a:solidFill>
+            <a:prstDash val="solid"/>
+          </a:ln>
+        </p:spPr>
+        <p:txBody>
+          <a:bodyPr/>
+          <a:lstStyle/>
+          <a:p>
+            <a:endParaRPr lang="en-IN"/>
+          </a:p>
+        </p:txBody>
+      </p:sp>
+      <p:sp>
+        <p:nvSpPr>
+          <p:cNvPr id="14" name="Text 12"/>
+          <p:cNvSpPr/>
+          <p:nvPr/>
+        </p:nvSpPr>
+        <p:spPr>
+          <a:xfrm>
+            <a:off x="640080" y="4389120"/>
+            <a:ext cx="502920" cy="640080"/>
+          </a:xfrm>
+          <a:prstGeom prst="rect">
+            <a:avLst/>
+          </a:prstGeom>
+          <a:noFill/>
+          <a:ln/>
+        </p:spPr>
+        <p:txBody>
+          <a:bodyPr wrap="square" lIns="0" tIns="0" rIns="0" bIns="0" rtlCol="0" anchor="ctr"/>
           <a:lstStyle/>
           <a:p>
             <a:pPr marL="0" indent="0" algn="l">
               <a:buNone/>
             </a:pPr>
             <a:r>
-              <a:rPr lang="en-US" sz="1800" dirty="0">
+              <a:rPr lang="en-US" sz="3200" b="1" dirty="0">
+                <a:solidFill>
+                  <a:srgbClr val="7A1F2B"/>
+                </a:solidFill>
+                <a:latin typeface="Cambria" pitchFamily="34" charset="0"/>
+                <a:ea typeface="Cambria" pitchFamily="34" charset="-122"/>
+                <a:cs typeface="Cambria" pitchFamily="34" charset="-120"/>
+              </a:rPr>
+              <a:t>3</a:t>
+            </a:r>
+            <a:endParaRPr lang="en-US" sz="3200" dirty="0"/>
+          </a:p>
+        </p:txBody>
+      </p:sp>
+      <p:sp>
+        <p:nvSpPr>
+          <p:cNvPr id="15" name="Text 13"/>
+          <p:cNvSpPr/>
+          <p:nvPr/>
+        </p:nvSpPr>
+        <p:spPr>
+          <a:xfrm>
+            <a:off x="1280160" y="4389120"/>
+            <a:ext cx="5852160" cy="822960"/>
+          </a:xfrm>
+          <a:prstGeom prst="rect">
+            <a:avLst/>
+          </a:prstGeom>
+          <a:noFill/>
+          <a:ln/>
+        </p:spPr>
+        <p:txBody>
+          <a:bodyPr wrap="square" lIns="0" tIns="0" rIns="0" bIns="0" rtlCol="0" anchor="ctr"/>
+          <a:lstStyle/>
+          <a:p>
+            <a:pPr marL="0" indent="0" algn="l">
+              <a:lnSpc>
+                <a:spcPct val="105000"/>
+              </a:lnSpc>
+              <a:buNone/>
+            </a:pPr>
+            <a:r>
+              <a:rPr lang="en-US" sz="1850" dirty="0">
                 <a:solidFill>
                   <a:srgbClr val="1E1F24"/>
                 </a:solidFill>
@@ -6245,22 +6407,98 @@
                 <a:ea typeface="Calibri" pitchFamily="34" charset="-122"/>
                 <a:cs typeface="Calibri" pitchFamily="34" charset="-120"/>
               </a:rPr>
-              <a:t>It reads 22 Indian languages including Odia. Ours reads English.</a:t>
-            </a:r>
-            <a:endParaRPr lang="en-US" sz="1800" dirty="0"/>
-          </a:p>
-        </p:txBody>
-      </p:sp>
-      <p:sp>
-        <p:nvSpPr>
-          <p:cNvPr id="10" name="Text 8"/>
-          <p:cNvSpPr/>
-          <p:nvPr/>
-        </p:nvSpPr>
-        <p:spPr>
-          <a:xfrm>
-            <a:off x="640080" y="3972025"/>
-            <a:ext cx="10881360" cy="292608"/>
+              <a:t>We cannot say it saves officer time.</a:t>
+            </a:r>
+            <a:endParaRPr lang="en-US" sz="1850" dirty="0"/>
+          </a:p>
+        </p:txBody>
+      </p:sp>
+      <p:sp>
+        <p:nvSpPr>
+          <p:cNvPr id="16" name="Shape 14"/>
+          <p:cNvSpPr/>
+          <p:nvPr/>
+        </p:nvSpPr>
+        <p:spPr>
+          <a:xfrm>
+            <a:off x="7406640" y="4407408"/>
+            <a:ext cx="4114800" cy="777240"/>
+          </a:xfrm>
+          <a:prstGeom prst="roundRect">
+            <a:avLst>
+              <a:gd name="adj" fmla="val 7059"/>
+            </a:avLst>
+          </a:prstGeom>
+          <a:solidFill>
+            <a:srgbClr val="F4F4F6"/>
+          </a:solidFill>
+          <a:ln w="12700">
+            <a:solidFill>
+              <a:srgbClr val="D6D8DD"/>
+            </a:solidFill>
+            <a:prstDash val="solid"/>
+          </a:ln>
+        </p:spPr>
+        <p:txBody>
+          <a:bodyPr/>
+          <a:lstStyle/>
+          <a:p>
+            <a:endParaRPr lang="en-IN" b="1"/>
+          </a:p>
+        </p:txBody>
+      </p:sp>
+      <p:sp>
+        <p:nvSpPr>
+          <p:cNvPr id="17" name="Text 15"/>
+          <p:cNvSpPr/>
+          <p:nvPr/>
+        </p:nvSpPr>
+        <p:spPr>
+          <a:xfrm>
+            <a:off x="7571232" y="4407408"/>
+            <a:ext cx="3794760" cy="777240"/>
+          </a:xfrm>
+          <a:prstGeom prst="rect">
+            <a:avLst/>
+          </a:prstGeom>
+          <a:noFill/>
+          <a:ln/>
+        </p:spPr>
+        <p:txBody>
+          <a:bodyPr wrap="square" lIns="0" tIns="0" rIns="0" bIns="0" rtlCol="0" anchor="ctr"/>
+          <a:lstStyle/>
+          <a:p>
+            <a:pPr marL="0" indent="0" algn="l">
+              <a:lnSpc>
+                <a:spcPct val="100000"/>
+              </a:lnSpc>
+              <a:buNone/>
+            </a:pPr>
+            <a:r>
+              <a:rPr lang="en-US" sz="1450" dirty="0">
+                <a:solidFill>
+                  <a:srgbClr val="1E1F24"/>
+                </a:solidFill>
+                <a:latin typeface="Calibri" pitchFamily="34" charset="0"/>
+                <a:ea typeface="Calibri" pitchFamily="34" charset="-122"/>
+                <a:cs typeface="Calibri" pitchFamily="34" charset="-120"/>
+              </a:rPr>
+              <a:t>The 10 to 15 minute baseline is self-reported and was never timed. No trial has been run.</a:t>
+            </a:r>
+            <a:endParaRPr lang="en-US" sz="1450" dirty="0"/>
+          </a:p>
+        </p:txBody>
+      </p:sp>
+      <p:sp>
+        <p:nvSpPr>
+          <p:cNvPr id="18" name="Text 16"/>
+          <p:cNvSpPr/>
+          <p:nvPr/>
+        </p:nvSpPr>
+        <p:spPr>
+          <a:xfrm>
+            <a:off x="640080" y="5577840"/>
+            <a:ext cx="10881360" cy="365760"/>
           </a:xfrm>
           <a:prstGeom prst="rect">
             <a:avLst/>
@@ -6276,30 +6514,30 @@
               <a:buNone/>
             </a:pPr>
             <a:r>
-              <a:rPr lang="en-US" sz="1350" b="1" kern="0" spc="150" dirty="0">
-                <a:solidFill>
-                  <a:srgbClr val="7A1F2B"/>
+              <a:rPr lang="en-US" sz="1650" b="1" i="1" dirty="0">
+                <a:solidFill>
+                  <a:srgbClr val="6C6E76"/>
                 </a:solidFill>
                 <a:latin typeface="Calibri" pitchFamily="34" charset="0"/>
                 <a:ea typeface="Calibri" pitchFamily="34" charset="-122"/>
                 <a:cs typeface="Calibri" pitchFamily="34" charset="-120"/>
               </a:rPr>
-              <a:t>What we established</a:t>
-            </a:r>
-            <a:endParaRPr lang="en-US" sz="1350" dirty="0"/>
-          </a:p>
-        </p:txBody>
-      </p:sp>
-      <p:sp>
-        <p:nvSpPr>
-          <p:cNvPr id="15" name="Text 13"/>
-          <p:cNvSpPr/>
-          <p:nvPr/>
-        </p:nvSpPr>
-        <p:spPr>
-          <a:xfrm>
-            <a:off x="640080" y="5532120"/>
-            <a:ext cx="9144000" cy="457200"/>
+              <a:t>Every figure in this deck was produced by us, on our own data. None of it has been checked by an officer.</a:t>
+            </a:r>
+            <a:endParaRPr lang="en-US" sz="1650" b="1" dirty="0"/>
+          </a:p>
+        </p:txBody>
+      </p:sp>
+      <p:sp>
+        <p:nvSpPr>
+          <p:cNvPr id="19" name="Text 17"/>
+          <p:cNvSpPr/>
+          <p:nvPr/>
+        </p:nvSpPr>
+        <p:spPr>
+          <a:xfrm>
+            <a:off x="640080" y="6419088"/>
+            <a:ext cx="5486400" cy="274320"/>
           </a:xfrm>
           <a:prstGeom prst="rect">
             <a:avLst/>
@@ -6315,29 +6553,29 @@
               <a:buNone/>
             </a:pPr>
             <a:r>
-              <a:rPr lang="en-US" sz="2000" b="1" i="1" dirty="0">
-                <a:solidFill>
-                  <a:srgbClr val="7A1F2B"/>
+              <a:rPr lang="en-US" sz="850" dirty="0">
+                <a:solidFill>
+                  <a:srgbClr val="6C6E76"/>
                 </a:solidFill>
                 <a:latin typeface="Calibri" pitchFamily="34" charset="0"/>
                 <a:ea typeface="Calibri" pitchFamily="34" charset="-122"/>
                 <a:cs typeface="Calibri" pitchFamily="34" charset="-120"/>
               </a:rPr>
-              <a:t>Different is not better. Using it also sends citizen documents outside our control.</a:t>
-            </a:r>
-            <a:endParaRPr lang="en-US" sz="2000" dirty="0"/>
-          </a:p>
-        </p:txBody>
-      </p:sp>
-      <p:sp>
-        <p:nvSpPr>
-          <p:cNvPr id="16" name="Text 14"/>
-          <p:cNvSpPr/>
-          <p:nvPr/>
-        </p:nvSpPr>
-        <p:spPr>
-          <a:xfrm>
-            <a:off x="640080" y="6419088"/>
+              <a:t>Data, Policy and Innovation Centre</a:t>
+            </a:r>
+            <a:endParaRPr lang="en-US" sz="850" dirty="0"/>
+          </a:p>
+        </p:txBody>
+      </p:sp>
+      <p:sp>
+        <p:nvSpPr>
+          <p:cNvPr id="20" name="Text 18"/>
+          <p:cNvSpPr/>
+          <p:nvPr/>
+        </p:nvSpPr>
+        <p:spPr>
+          <a:xfrm>
+            <a:off x="6035040" y="6419088"/>
             <a:ext cx="5486400" cy="274320"/>
           </a:xfrm>
           <a:prstGeom prst="rect">
@@ -6350,7 +6588,7 @@
           <a:bodyPr wrap="square" lIns="0" tIns="0" rIns="0" bIns="0" rtlCol="0" anchor="ctr"/>
           <a:lstStyle/>
           <a:p>
-            <a:pPr marL="0" indent="0" algn="l">
+            <a:pPr marL="0" indent="0" algn="r">
               <a:buNone/>
             </a:pPr>
             <a:r>
@@ -6362,281 +6600,9 @@
                 <a:ea typeface="Calibri" pitchFamily="34" charset="-122"/>
                 <a:cs typeface="Calibri" pitchFamily="34" charset="-120"/>
               </a:rPr>
-              <a:t>Data, Policy and Innovation Centre</a:t>
+              <a:t>Government of Odisha  ×  University of Chicago Trust</a:t>
             </a:r>
             <a:endParaRPr lang="en-US" sz="850" dirty="0"/>
-          </a:p>
-        </p:txBody>
-      </p:sp>
-      <p:sp>
-        <p:nvSpPr>
-          <p:cNvPr id="17" name="Text 15"/>
-          <p:cNvSpPr/>
-          <p:nvPr/>
-        </p:nvSpPr>
-        <p:spPr>
-          <a:xfrm>
-            <a:off x="6035040" y="6419088"/>
-            <a:ext cx="5486400" cy="274320"/>
-          </a:xfrm>
-          <a:prstGeom prst="rect">
-            <a:avLst/>
-          </a:prstGeom>
-          <a:noFill/>
-          <a:ln/>
-        </p:spPr>
-        <p:txBody>
-          <a:bodyPr wrap="square" lIns="0" tIns="0" rIns="0" bIns="0" rtlCol="0" anchor="ctr"/>
-          <a:lstStyle/>
-          <a:p>
-            <a:pPr marL="0" indent="0" algn="r">
-              <a:buNone/>
-            </a:pPr>
-            <a:r>
-              <a:rPr lang="en-US" sz="850" dirty="0">
-                <a:solidFill>
-                  <a:srgbClr val="6C6E76"/>
-                </a:solidFill>
-                <a:latin typeface="Calibri" pitchFamily="34" charset="0"/>
-                <a:ea typeface="Calibri" pitchFamily="34" charset="-122"/>
-                <a:cs typeface="Calibri" pitchFamily="34" charset="-120"/>
-              </a:rPr>
-              <a:t>Government of Odisha  ×  University of Chicago Trust</a:t>
-            </a:r>
-            <a:endParaRPr lang="en-US" sz="850" dirty="0"/>
-          </a:p>
-        </p:txBody>
-      </p:sp>
-      <p:sp>
-        <p:nvSpPr>
-          <p:cNvPr id="27" name="Shape 3">
-            <a:extLst>
-              <a:ext uri="{FF2B5EF4-FFF2-40B4-BE49-F238E27FC236}">
-                <a16:creationId xmlns:a16="http://schemas.microsoft.com/office/drawing/2014/main" id="{8EA7243F-3A2E-791F-90D8-11B33EB858C8}"/>
-              </a:ext>
-            </a:extLst>
-          </p:cNvPr>
-          <p:cNvSpPr/>
-          <p:nvPr/>
-        </p:nvSpPr>
-        <p:spPr>
-          <a:xfrm>
-            <a:off x="632059" y="3571929"/>
-            <a:ext cx="91440" cy="91440"/>
-          </a:xfrm>
-          <a:prstGeom prst="rect">
-            <a:avLst/>
-          </a:prstGeom>
-          <a:solidFill>
-            <a:srgbClr val="7A1F2B"/>
-          </a:solidFill>
-          <a:ln/>
-        </p:spPr>
-        <p:txBody>
-          <a:bodyPr/>
-          <a:lstStyle/>
-          <a:p>
-            <a:endParaRPr lang="en-IN" dirty="0"/>
-          </a:p>
-        </p:txBody>
-      </p:sp>
-      <p:sp>
-        <p:nvSpPr>
-          <p:cNvPr id="29" name="Text 4">
-            <a:extLst>
-              <a:ext uri="{FF2B5EF4-FFF2-40B4-BE49-F238E27FC236}">
-                <a16:creationId xmlns:a16="http://schemas.microsoft.com/office/drawing/2014/main" id="{9F020A29-8C39-EAFD-C8B8-DBAB2A5F634C}"/>
-              </a:ext>
-            </a:extLst>
-          </p:cNvPr>
-          <p:cNvSpPr/>
-          <p:nvPr/>
-        </p:nvSpPr>
-        <p:spPr>
-          <a:xfrm>
-            <a:off x="924667" y="3453057"/>
-            <a:ext cx="10607040" cy="411480"/>
-          </a:xfrm>
-          <a:prstGeom prst="rect">
-            <a:avLst/>
-          </a:prstGeom>
-          <a:noFill/>
-          <a:ln/>
-        </p:spPr>
-        <p:txBody>
-          <a:bodyPr wrap="square" lIns="0" tIns="0" rIns="0" bIns="0" rtlCol="0" anchor="t"/>
-          <a:lstStyle/>
-          <a:p>
-            <a:pPr marL="0" indent="0" algn="l">
-              <a:buNone/>
-            </a:pPr>
-            <a:r>
-              <a:rPr lang="en-US" sz="1800" dirty="0">
-                <a:solidFill>
-                  <a:srgbClr val="1E1F24"/>
-                </a:solidFill>
-                <a:latin typeface="Calibri" pitchFamily="34" charset="0"/>
-                <a:ea typeface="Calibri" pitchFamily="34" charset="-122"/>
-                <a:cs typeface="Calibri" pitchFamily="34" charset="-120"/>
-              </a:rPr>
-              <a:t>It reads handwriting. Ours does not.</a:t>
-            </a:r>
-            <a:endParaRPr lang="en-US" sz="1800" dirty="0"/>
-          </a:p>
-        </p:txBody>
-      </p:sp>
-      <p:sp>
-        <p:nvSpPr>
-          <p:cNvPr id="31" name="Shape 8">
-            <a:extLst>
-              <a:ext uri="{FF2B5EF4-FFF2-40B4-BE49-F238E27FC236}">
-                <a16:creationId xmlns:a16="http://schemas.microsoft.com/office/drawing/2014/main" id="{25210A73-5BE3-463C-04D8-421B6ACD8FD7}"/>
-              </a:ext>
-            </a:extLst>
-          </p:cNvPr>
-          <p:cNvSpPr/>
-          <p:nvPr/>
-        </p:nvSpPr>
-        <p:spPr>
-          <a:xfrm>
-            <a:off x="632059" y="4458260"/>
-            <a:ext cx="91440" cy="91440"/>
-          </a:xfrm>
-          <a:prstGeom prst="rect">
-            <a:avLst/>
-          </a:prstGeom>
-          <a:solidFill>
-            <a:srgbClr val="7A1F2B"/>
-          </a:solidFill>
-          <a:ln/>
-        </p:spPr>
-        <p:txBody>
-          <a:bodyPr/>
-          <a:lstStyle/>
-          <a:p>
-            <a:endParaRPr lang="en-IN"/>
-          </a:p>
-        </p:txBody>
-      </p:sp>
-      <p:sp>
-        <p:nvSpPr>
-          <p:cNvPr id="33" name="Text 9">
-            <a:extLst>
-              <a:ext uri="{FF2B5EF4-FFF2-40B4-BE49-F238E27FC236}">
-                <a16:creationId xmlns:a16="http://schemas.microsoft.com/office/drawing/2014/main" id="{A6157D09-2797-0B89-7747-CE5934045003}"/>
-              </a:ext>
-            </a:extLst>
-          </p:cNvPr>
-          <p:cNvSpPr/>
-          <p:nvPr/>
-        </p:nvSpPr>
-        <p:spPr>
-          <a:xfrm>
-            <a:off x="924667" y="4339388"/>
-            <a:ext cx="10607040" cy="411480"/>
-          </a:xfrm>
-          <a:prstGeom prst="rect">
-            <a:avLst/>
-          </a:prstGeom>
-          <a:noFill/>
-          <a:ln/>
-        </p:spPr>
-        <p:txBody>
-          <a:bodyPr wrap="square" lIns="0" tIns="0" rIns="0" bIns="0" rtlCol="0" anchor="t"/>
-          <a:lstStyle/>
-          <a:p>
-            <a:pPr marL="0" indent="0" algn="l">
-              <a:buNone/>
-            </a:pPr>
-            <a:r>
-              <a:rPr lang="en-US" sz="1800" dirty="0">
-                <a:solidFill>
-                  <a:srgbClr val="1E1F24"/>
-                </a:solidFill>
-                <a:latin typeface="Calibri" pitchFamily="34" charset="0"/>
-                <a:ea typeface="Calibri" pitchFamily="34" charset="-122"/>
-                <a:cs typeface="Calibri" pitchFamily="34" charset="-120"/>
-              </a:rPr>
-              <a:t>On all 61 pages we compared, the two systems produced different text.</a:t>
-            </a:r>
-            <a:endParaRPr lang="en-US" sz="1800" dirty="0"/>
-          </a:p>
-        </p:txBody>
-      </p:sp>
-      <p:sp>
-        <p:nvSpPr>
-          <p:cNvPr id="35" name="Shape 10">
-            <a:extLst>
-              <a:ext uri="{FF2B5EF4-FFF2-40B4-BE49-F238E27FC236}">
-                <a16:creationId xmlns:a16="http://schemas.microsoft.com/office/drawing/2014/main" id="{16BEB2B2-75AE-B017-BEB6-8D7DF2D87DD6}"/>
-              </a:ext>
-            </a:extLst>
-          </p:cNvPr>
-          <p:cNvSpPr/>
-          <p:nvPr/>
-        </p:nvSpPr>
-        <p:spPr>
-          <a:xfrm>
-            <a:off x="632059" y="4961180"/>
-            <a:ext cx="91440" cy="91440"/>
-          </a:xfrm>
-          <a:prstGeom prst="rect">
-            <a:avLst/>
-          </a:prstGeom>
-          <a:solidFill>
-            <a:srgbClr val="7A1F2B"/>
-          </a:solidFill>
-          <a:ln/>
-        </p:spPr>
-        <p:txBody>
-          <a:bodyPr/>
-          <a:lstStyle/>
-          <a:p>
-            <a:endParaRPr lang="en-IN"/>
-          </a:p>
-        </p:txBody>
-      </p:sp>
-      <p:sp>
-        <p:nvSpPr>
-          <p:cNvPr id="37" name="Text 11">
-            <a:extLst>
-              <a:ext uri="{FF2B5EF4-FFF2-40B4-BE49-F238E27FC236}">
-                <a16:creationId xmlns:a16="http://schemas.microsoft.com/office/drawing/2014/main" id="{E4B7C2E5-1571-8403-3E23-54FAD9D0D9A0}"/>
-              </a:ext>
-            </a:extLst>
-          </p:cNvPr>
-          <p:cNvSpPr/>
-          <p:nvPr/>
-        </p:nvSpPr>
-        <p:spPr>
-          <a:xfrm>
-            <a:off x="924667" y="4842308"/>
-            <a:ext cx="10607040" cy="411480"/>
-          </a:xfrm>
-          <a:prstGeom prst="rect">
-            <a:avLst/>
-          </a:prstGeom>
-          <a:noFill/>
-          <a:ln/>
-        </p:spPr>
-        <p:txBody>
-          <a:bodyPr wrap="square" lIns="0" tIns="0" rIns="0" bIns="0" rtlCol="0" anchor="t"/>
-          <a:lstStyle/>
-          <a:p>
-            <a:pPr marL="0" indent="0" algn="l">
-              <a:buNone/>
-            </a:pPr>
-            <a:r>
-              <a:rPr lang="en-US" sz="1800" dirty="0">
-                <a:solidFill>
-                  <a:srgbClr val="1E1F24"/>
-                </a:solidFill>
-                <a:latin typeface="Calibri" pitchFamily="34" charset="0"/>
-                <a:ea typeface="Calibri" pitchFamily="34" charset="-122"/>
-                <a:cs typeface="Calibri" pitchFamily="34" charset="-120"/>
-              </a:rPr>
-              <a:t>The category and summary it returned were never graded against anything.</a:t>
-            </a:r>
           </a:p>
         </p:txBody>
       </p:sp>
@@ -6649,6 +6615,662 @@
 </file>
 
 <file path=ppt/slides/slide22.xml><?xml version="1.0" encoding="utf-8"?>
+<p:sld xmlns:a="http://schemas.openxmlformats.org/drawingml/2006/main" xmlns:p="http://schemas.openxmlformats.org/presentationml/2006/main" xmlns:r="http://schemas.openxmlformats.org/officeDocument/2006/relationships">
+  <p:cSld>
+    <p:spTree>
+      <p:nvGrpSpPr>
+        <p:cNvPr id="1" name=""/>
+        <p:cNvGrpSpPr/>
+        <p:nvPr/>
+      </p:nvGrpSpPr>
+      <p:grpSpPr/>
+      <p:sp>
+        <p:nvSpPr>
+          <p:cNvPr id="2" name="Text 0"/>
+          <p:cNvSpPr/>
+          <p:nvPr/>
+        </p:nvSpPr>
+        <p:spPr>
+          <a:xfrm>
+            <a:off x="640080" y="457200"/>
+            <a:ext cx="10881360" cy="320040"/>
+          </a:xfrm>
+          <a:prstGeom prst="rect">
+            <a:avLst/>
+          </a:prstGeom>
+          <a:noFill/>
+          <a:ln/>
+        </p:spPr>
+        <p:txBody>
+          <a:bodyPr wrap="square" lIns="0" tIns="0" rIns="0" bIns="0" rtlCol="0" anchor="ctr"/>
+          <a:lstStyle/>
+          <a:p>
+            <a:pPr marL="0" indent="0" algn="l">
+              <a:buNone/>
+            </a:pPr>
+            <a:r>
+              <a:rPr lang="en-US" sz="1500" b="1" kern="0" spc="200" dirty="0">
+                <a:solidFill>
+                  <a:srgbClr val="7A1F2B"/>
+                </a:solidFill>
+                <a:latin typeface="Calibri" pitchFamily="34" charset="0"/>
+                <a:ea typeface="Calibri" pitchFamily="34" charset="-122"/>
+                <a:cs typeface="Calibri" pitchFamily="34" charset="-120"/>
+              </a:rPr>
+              <a:t>THE OUTSIDE OPTION: SARVAM</a:t>
+            </a:r>
+            <a:endParaRPr lang="en-US" sz="1500" dirty="0"/>
+          </a:p>
+        </p:txBody>
+      </p:sp>
+      <p:sp>
+        <p:nvSpPr>
+          <p:cNvPr id="3" name="Text 1"/>
+          <p:cNvSpPr/>
+          <p:nvPr/>
+        </p:nvSpPr>
+        <p:spPr>
+          <a:xfrm>
+            <a:off x="640080" y="868680"/>
+            <a:ext cx="10881360" cy="914400"/>
+          </a:xfrm>
+          <a:prstGeom prst="rect">
+            <a:avLst/>
+          </a:prstGeom>
+          <a:noFill/>
+          <a:ln/>
+        </p:spPr>
+        <p:txBody>
+          <a:bodyPr wrap="square" lIns="0" tIns="0" rIns="0" bIns="0" rtlCol="0" anchor="ctr"/>
+          <a:lstStyle/>
+          <a:p>
+            <a:pPr marL="0" indent="0" algn="l">
+              <a:buNone/>
+            </a:pPr>
+            <a:r>
+              <a:rPr lang="en-US" sz="3400" b="1" dirty="0">
+                <a:solidFill>
+                  <a:srgbClr val="1E1F24"/>
+                </a:solidFill>
+                <a:latin typeface="Cambria" pitchFamily="34" charset="0"/>
+                <a:ea typeface="Cambria" pitchFamily="34" charset="-122"/>
+                <a:cs typeface="Cambria" pitchFamily="34" charset="-120"/>
+              </a:rPr>
+              <a:t>It does more. We have not shown it does better</a:t>
+            </a:r>
+            <a:endParaRPr lang="en-US" sz="3400" dirty="0"/>
+          </a:p>
+        </p:txBody>
+      </p:sp>
+      <p:sp>
+        <p:nvSpPr>
+          <p:cNvPr id="5" name="Text 3"/>
+          <p:cNvSpPr/>
+          <p:nvPr/>
+        </p:nvSpPr>
+        <p:spPr>
+          <a:xfrm>
+            <a:off x="640080" y="2179321"/>
+            <a:ext cx="10881360" cy="292608"/>
+          </a:xfrm>
+          <a:prstGeom prst="rect">
+            <a:avLst/>
+          </a:prstGeom>
+          <a:noFill/>
+          <a:ln/>
+        </p:spPr>
+        <p:txBody>
+          <a:bodyPr wrap="square" lIns="0" tIns="0" rIns="0" bIns="0" rtlCol="0" anchor="ctr"/>
+          <a:lstStyle/>
+          <a:p>
+            <a:pPr marL="0" indent="0" algn="l">
+              <a:buNone/>
+            </a:pPr>
+            <a:r>
+              <a:rPr lang="en-US" sz="1350" b="1" kern="0" spc="150" dirty="0">
+                <a:solidFill>
+                  <a:srgbClr val="7A1F2B"/>
+                </a:solidFill>
+                <a:latin typeface="Calibri" pitchFamily="34" charset="0"/>
+                <a:ea typeface="Calibri" pitchFamily="34" charset="-122"/>
+                <a:cs typeface="Calibri" pitchFamily="34" charset="-120"/>
+              </a:rPr>
+              <a:t>What it does</a:t>
+            </a:r>
+            <a:endParaRPr lang="en-US" sz="1350" dirty="0"/>
+          </a:p>
+        </p:txBody>
+      </p:sp>
+      <p:sp>
+        <p:nvSpPr>
+          <p:cNvPr id="6" name="Shape 4"/>
+          <p:cNvSpPr/>
+          <p:nvPr/>
+        </p:nvSpPr>
+        <p:spPr>
+          <a:xfrm>
+            <a:off x="640080" y="2663953"/>
+            <a:ext cx="91440" cy="91440"/>
+          </a:xfrm>
+          <a:prstGeom prst="rect">
+            <a:avLst/>
+          </a:prstGeom>
+          <a:solidFill>
+            <a:srgbClr val="7A1F2B"/>
+          </a:solidFill>
+          <a:ln/>
+        </p:spPr>
+        <p:txBody>
+          <a:bodyPr/>
+          <a:lstStyle/>
+          <a:p>
+            <a:endParaRPr lang="en-IN"/>
+          </a:p>
+        </p:txBody>
+      </p:sp>
+      <p:sp>
+        <p:nvSpPr>
+          <p:cNvPr id="7" name="Text 5"/>
+          <p:cNvSpPr/>
+          <p:nvPr/>
+        </p:nvSpPr>
+        <p:spPr>
+          <a:xfrm>
+            <a:off x="932688" y="2545081"/>
+            <a:ext cx="10607040" cy="411480"/>
+          </a:xfrm>
+          <a:prstGeom prst="rect">
+            <a:avLst/>
+          </a:prstGeom>
+          <a:noFill/>
+          <a:ln/>
+        </p:spPr>
+        <p:txBody>
+          <a:bodyPr wrap="square" lIns="0" tIns="0" rIns="0" bIns="0" rtlCol="0" anchor="t"/>
+          <a:lstStyle/>
+          <a:p>
+            <a:pPr marL="0" indent="0" algn="l">
+              <a:buNone/>
+            </a:pPr>
+            <a:r>
+              <a:rPr lang="en-US" sz="1800" dirty="0">
+                <a:solidFill>
+                  <a:srgbClr val="1E1F24"/>
+                </a:solidFill>
+                <a:latin typeface="Calibri" pitchFamily="34" charset="0"/>
+                <a:ea typeface="Calibri" pitchFamily="34" charset="-122"/>
+                <a:cs typeface="Calibri" pitchFamily="34" charset="-120"/>
+              </a:rPr>
+              <a:t>One call at ₹1.50 a page returns the text, a category, a one-line summary and the district.</a:t>
+            </a:r>
+            <a:endParaRPr lang="en-US" sz="1800" dirty="0"/>
+          </a:p>
+        </p:txBody>
+      </p:sp>
+      <p:sp>
+        <p:nvSpPr>
+          <p:cNvPr id="8" name="Shape 6"/>
+          <p:cNvSpPr/>
+          <p:nvPr/>
+        </p:nvSpPr>
+        <p:spPr>
+          <a:xfrm>
+            <a:off x="640080" y="3166873"/>
+            <a:ext cx="91440" cy="91440"/>
+          </a:xfrm>
+          <a:prstGeom prst="rect">
+            <a:avLst/>
+          </a:prstGeom>
+          <a:solidFill>
+            <a:srgbClr val="7A1F2B"/>
+          </a:solidFill>
+          <a:ln/>
+        </p:spPr>
+        <p:txBody>
+          <a:bodyPr/>
+          <a:lstStyle/>
+          <a:p>
+            <a:endParaRPr lang="en-IN"/>
+          </a:p>
+        </p:txBody>
+      </p:sp>
+      <p:sp>
+        <p:nvSpPr>
+          <p:cNvPr id="9" name="Text 7"/>
+          <p:cNvSpPr/>
+          <p:nvPr/>
+        </p:nvSpPr>
+        <p:spPr>
+          <a:xfrm>
+            <a:off x="932688" y="3048001"/>
+            <a:ext cx="10607040" cy="411480"/>
+          </a:xfrm>
+          <a:prstGeom prst="rect">
+            <a:avLst/>
+          </a:prstGeom>
+          <a:noFill/>
+          <a:ln/>
+        </p:spPr>
+        <p:txBody>
+          <a:bodyPr wrap="square" lIns="0" tIns="0" rIns="0" bIns="0" rtlCol="0" anchor="t"/>
+          <a:lstStyle/>
+          <a:p>
+            <a:pPr marL="0" indent="0" algn="l">
+              <a:buNone/>
+            </a:pPr>
+            <a:r>
+              <a:rPr lang="en-US" sz="1800" dirty="0">
+                <a:solidFill>
+                  <a:srgbClr val="1E1F24"/>
+                </a:solidFill>
+                <a:latin typeface="Calibri" pitchFamily="34" charset="0"/>
+                <a:ea typeface="Calibri" pitchFamily="34" charset="-122"/>
+                <a:cs typeface="Calibri" pitchFamily="34" charset="-120"/>
+              </a:rPr>
+              <a:t>It reads 22 Indian languages including Odia. Ours reads English.</a:t>
+            </a:r>
+            <a:endParaRPr lang="en-US" sz="1800" dirty="0"/>
+          </a:p>
+        </p:txBody>
+      </p:sp>
+      <p:sp>
+        <p:nvSpPr>
+          <p:cNvPr id="10" name="Text 8"/>
+          <p:cNvSpPr/>
+          <p:nvPr/>
+        </p:nvSpPr>
+        <p:spPr>
+          <a:xfrm>
+            <a:off x="640080" y="3972025"/>
+            <a:ext cx="10881360" cy="292608"/>
+          </a:xfrm>
+          <a:prstGeom prst="rect">
+            <a:avLst/>
+          </a:prstGeom>
+          <a:noFill/>
+          <a:ln/>
+        </p:spPr>
+        <p:txBody>
+          <a:bodyPr wrap="square" lIns="0" tIns="0" rIns="0" bIns="0" rtlCol="0" anchor="ctr"/>
+          <a:lstStyle/>
+          <a:p>
+            <a:pPr marL="0" indent="0" algn="l">
+              <a:buNone/>
+            </a:pPr>
+            <a:r>
+              <a:rPr lang="en-US" sz="1350" b="1" kern="0" spc="150" dirty="0">
+                <a:solidFill>
+                  <a:srgbClr val="7A1F2B"/>
+                </a:solidFill>
+                <a:latin typeface="Calibri" pitchFamily="34" charset="0"/>
+                <a:ea typeface="Calibri" pitchFamily="34" charset="-122"/>
+                <a:cs typeface="Calibri" pitchFamily="34" charset="-120"/>
+              </a:rPr>
+              <a:t>What we established</a:t>
+            </a:r>
+            <a:endParaRPr lang="en-US" sz="1350" dirty="0"/>
+          </a:p>
+        </p:txBody>
+      </p:sp>
+      <p:sp>
+        <p:nvSpPr>
+          <p:cNvPr id="15" name="Text 13"/>
+          <p:cNvSpPr/>
+          <p:nvPr/>
+        </p:nvSpPr>
+        <p:spPr>
+          <a:xfrm>
+            <a:off x="640080" y="5532120"/>
+            <a:ext cx="9144000" cy="457200"/>
+          </a:xfrm>
+          <a:prstGeom prst="rect">
+            <a:avLst/>
+          </a:prstGeom>
+          <a:noFill/>
+          <a:ln/>
+        </p:spPr>
+        <p:txBody>
+          <a:bodyPr wrap="square" lIns="0" tIns="0" rIns="0" bIns="0" rtlCol="0" anchor="ctr"/>
+          <a:lstStyle/>
+          <a:p>
+            <a:pPr marL="0" indent="0" algn="l">
+              <a:buNone/>
+            </a:pPr>
+            <a:r>
+              <a:rPr lang="en-US" sz="2000" b="1" i="1" dirty="0">
+                <a:solidFill>
+                  <a:srgbClr val="7A1F2B"/>
+                </a:solidFill>
+                <a:latin typeface="Calibri" pitchFamily="34" charset="0"/>
+                <a:ea typeface="Calibri" pitchFamily="34" charset="-122"/>
+                <a:cs typeface="Calibri" pitchFamily="34" charset="-120"/>
+              </a:rPr>
+              <a:t>Different is not better. Using it also sends citizen documents outside our control.</a:t>
+            </a:r>
+            <a:endParaRPr lang="en-US" sz="2000" dirty="0"/>
+          </a:p>
+        </p:txBody>
+      </p:sp>
+      <p:sp>
+        <p:nvSpPr>
+          <p:cNvPr id="16" name="Text 14"/>
+          <p:cNvSpPr/>
+          <p:nvPr/>
+        </p:nvSpPr>
+        <p:spPr>
+          <a:xfrm>
+            <a:off x="640080" y="6419088"/>
+            <a:ext cx="5486400" cy="274320"/>
+          </a:xfrm>
+          <a:prstGeom prst="rect">
+            <a:avLst/>
+          </a:prstGeom>
+          <a:noFill/>
+          <a:ln/>
+        </p:spPr>
+        <p:txBody>
+          <a:bodyPr wrap="square" lIns="0" tIns="0" rIns="0" bIns="0" rtlCol="0" anchor="ctr"/>
+          <a:lstStyle/>
+          <a:p>
+            <a:pPr marL="0" indent="0" algn="l">
+              <a:buNone/>
+            </a:pPr>
+            <a:r>
+              <a:rPr lang="en-US" sz="850" dirty="0">
+                <a:solidFill>
+                  <a:srgbClr val="6C6E76"/>
+                </a:solidFill>
+                <a:latin typeface="Calibri" pitchFamily="34" charset="0"/>
+                <a:ea typeface="Calibri" pitchFamily="34" charset="-122"/>
+                <a:cs typeface="Calibri" pitchFamily="34" charset="-120"/>
+              </a:rPr>
+              <a:t>Data, Policy and Innovation Centre</a:t>
+            </a:r>
+            <a:endParaRPr lang="en-US" sz="850" dirty="0"/>
+          </a:p>
+        </p:txBody>
+      </p:sp>
+      <p:sp>
+        <p:nvSpPr>
+          <p:cNvPr id="17" name="Text 15"/>
+          <p:cNvSpPr/>
+          <p:nvPr/>
+        </p:nvSpPr>
+        <p:spPr>
+          <a:xfrm>
+            <a:off x="6035040" y="6419088"/>
+            <a:ext cx="5486400" cy="274320"/>
+          </a:xfrm>
+          <a:prstGeom prst="rect">
+            <a:avLst/>
+          </a:prstGeom>
+          <a:noFill/>
+          <a:ln/>
+        </p:spPr>
+        <p:txBody>
+          <a:bodyPr wrap="square" lIns="0" tIns="0" rIns="0" bIns="0" rtlCol="0" anchor="ctr"/>
+          <a:lstStyle/>
+          <a:p>
+            <a:pPr marL="0" indent="0" algn="r">
+              <a:buNone/>
+            </a:pPr>
+            <a:r>
+              <a:rPr lang="en-US" sz="850" dirty="0">
+                <a:solidFill>
+                  <a:srgbClr val="6C6E76"/>
+                </a:solidFill>
+                <a:latin typeface="Calibri" pitchFamily="34" charset="0"/>
+                <a:ea typeface="Calibri" pitchFamily="34" charset="-122"/>
+                <a:cs typeface="Calibri" pitchFamily="34" charset="-120"/>
+              </a:rPr>
+              <a:t>Government of Odisha  ×  University of Chicago Trust</a:t>
+            </a:r>
+            <a:endParaRPr lang="en-US" sz="850" dirty="0"/>
+          </a:p>
+        </p:txBody>
+      </p:sp>
+      <p:sp>
+        <p:nvSpPr>
+          <p:cNvPr id="27" name="Shape 3">
+            <a:extLst>
+              <a:ext uri="{FF2B5EF4-FFF2-40B4-BE49-F238E27FC236}">
+                <a16:creationId xmlns:a16="http://schemas.microsoft.com/office/drawing/2014/main" id="{8EA7243F-3A2E-791F-90D8-11B33EB858C8}"/>
+              </a:ext>
+            </a:extLst>
+          </p:cNvPr>
+          <p:cNvSpPr/>
+          <p:nvPr/>
+        </p:nvSpPr>
+        <p:spPr>
+          <a:xfrm>
+            <a:off x="632059" y="3571929"/>
+            <a:ext cx="91440" cy="91440"/>
+          </a:xfrm>
+          <a:prstGeom prst="rect">
+            <a:avLst/>
+          </a:prstGeom>
+          <a:solidFill>
+            <a:srgbClr val="7A1F2B"/>
+          </a:solidFill>
+          <a:ln/>
+        </p:spPr>
+        <p:txBody>
+          <a:bodyPr/>
+          <a:lstStyle/>
+          <a:p>
+            <a:endParaRPr lang="en-IN" dirty="0"/>
+          </a:p>
+        </p:txBody>
+      </p:sp>
+      <p:sp>
+        <p:nvSpPr>
+          <p:cNvPr id="29" name="Text 4">
+            <a:extLst>
+              <a:ext uri="{FF2B5EF4-FFF2-40B4-BE49-F238E27FC236}">
+                <a16:creationId xmlns:a16="http://schemas.microsoft.com/office/drawing/2014/main" id="{9F020A29-8C39-EAFD-C8B8-DBAB2A5F634C}"/>
+              </a:ext>
+            </a:extLst>
+          </p:cNvPr>
+          <p:cNvSpPr/>
+          <p:nvPr/>
+        </p:nvSpPr>
+        <p:spPr>
+          <a:xfrm>
+            <a:off x="924667" y="3453057"/>
+            <a:ext cx="10607040" cy="411480"/>
+          </a:xfrm>
+          <a:prstGeom prst="rect">
+            <a:avLst/>
+          </a:prstGeom>
+          <a:noFill/>
+          <a:ln/>
+        </p:spPr>
+        <p:txBody>
+          <a:bodyPr wrap="square" lIns="0" tIns="0" rIns="0" bIns="0" rtlCol="0" anchor="t"/>
+          <a:lstStyle/>
+          <a:p>
+            <a:pPr marL="0" indent="0" algn="l">
+              <a:buNone/>
+            </a:pPr>
+            <a:r>
+              <a:rPr lang="en-US" sz="1800" dirty="0">
+                <a:solidFill>
+                  <a:srgbClr val="1E1F24"/>
+                </a:solidFill>
+                <a:latin typeface="Calibri" pitchFamily="34" charset="0"/>
+                <a:ea typeface="Calibri" pitchFamily="34" charset="-122"/>
+                <a:cs typeface="Calibri" pitchFamily="34" charset="-120"/>
+              </a:rPr>
+              <a:t>It reads handwriting. Ours does not.</a:t>
+            </a:r>
+            <a:endParaRPr lang="en-US" sz="1800" dirty="0"/>
+          </a:p>
+        </p:txBody>
+      </p:sp>
+      <p:sp>
+        <p:nvSpPr>
+          <p:cNvPr id="31" name="Shape 8">
+            <a:extLst>
+              <a:ext uri="{FF2B5EF4-FFF2-40B4-BE49-F238E27FC236}">
+                <a16:creationId xmlns:a16="http://schemas.microsoft.com/office/drawing/2014/main" id="{25210A73-5BE3-463C-04D8-421B6ACD8FD7}"/>
+              </a:ext>
+            </a:extLst>
+          </p:cNvPr>
+          <p:cNvSpPr/>
+          <p:nvPr/>
+        </p:nvSpPr>
+        <p:spPr>
+          <a:xfrm>
+            <a:off x="632059" y="4458260"/>
+            <a:ext cx="91440" cy="91440"/>
+          </a:xfrm>
+          <a:prstGeom prst="rect">
+            <a:avLst/>
+          </a:prstGeom>
+          <a:solidFill>
+            <a:srgbClr val="7A1F2B"/>
+          </a:solidFill>
+          <a:ln/>
+        </p:spPr>
+        <p:txBody>
+          <a:bodyPr/>
+          <a:lstStyle/>
+          <a:p>
+            <a:endParaRPr lang="en-IN"/>
+          </a:p>
+        </p:txBody>
+      </p:sp>
+      <p:sp>
+        <p:nvSpPr>
+          <p:cNvPr id="33" name="Text 9">
+            <a:extLst>
+              <a:ext uri="{FF2B5EF4-FFF2-40B4-BE49-F238E27FC236}">
+                <a16:creationId xmlns:a16="http://schemas.microsoft.com/office/drawing/2014/main" id="{A6157D09-2797-0B89-7747-CE5934045003}"/>
+              </a:ext>
+            </a:extLst>
+          </p:cNvPr>
+          <p:cNvSpPr/>
+          <p:nvPr/>
+        </p:nvSpPr>
+        <p:spPr>
+          <a:xfrm>
+            <a:off x="924667" y="4339388"/>
+            <a:ext cx="10607040" cy="411480"/>
+          </a:xfrm>
+          <a:prstGeom prst="rect">
+            <a:avLst/>
+          </a:prstGeom>
+          <a:noFill/>
+          <a:ln/>
+        </p:spPr>
+        <p:txBody>
+          <a:bodyPr wrap="square" lIns="0" tIns="0" rIns="0" bIns="0" rtlCol="0" anchor="t"/>
+          <a:lstStyle/>
+          <a:p>
+            <a:pPr marL="0" indent="0" algn="l">
+              <a:buNone/>
+            </a:pPr>
+            <a:r>
+              <a:rPr lang="en-US" sz="1800" dirty="0">
+                <a:solidFill>
+                  <a:srgbClr val="1E1F24"/>
+                </a:solidFill>
+                <a:latin typeface="Calibri" pitchFamily="34" charset="0"/>
+                <a:ea typeface="Calibri" pitchFamily="34" charset="-122"/>
+                <a:cs typeface="Calibri" pitchFamily="34" charset="-120"/>
+              </a:rPr>
+              <a:t>On all 61 pages we compared, the two systems produced different text.</a:t>
+            </a:r>
+            <a:endParaRPr lang="en-US" sz="1800" dirty="0"/>
+          </a:p>
+        </p:txBody>
+      </p:sp>
+      <p:sp>
+        <p:nvSpPr>
+          <p:cNvPr id="35" name="Shape 10">
+            <a:extLst>
+              <a:ext uri="{FF2B5EF4-FFF2-40B4-BE49-F238E27FC236}">
+                <a16:creationId xmlns:a16="http://schemas.microsoft.com/office/drawing/2014/main" id="{16BEB2B2-75AE-B017-BEB6-8D7DF2D87DD6}"/>
+              </a:ext>
+            </a:extLst>
+          </p:cNvPr>
+          <p:cNvSpPr/>
+          <p:nvPr/>
+        </p:nvSpPr>
+        <p:spPr>
+          <a:xfrm>
+            <a:off x="632059" y="4961180"/>
+            <a:ext cx="91440" cy="91440"/>
+          </a:xfrm>
+          <a:prstGeom prst="rect">
+            <a:avLst/>
+          </a:prstGeom>
+          <a:solidFill>
+            <a:srgbClr val="7A1F2B"/>
+          </a:solidFill>
+          <a:ln/>
+        </p:spPr>
+        <p:txBody>
+          <a:bodyPr/>
+          <a:lstStyle/>
+          <a:p>
+            <a:endParaRPr lang="en-IN"/>
+          </a:p>
+        </p:txBody>
+      </p:sp>
+      <p:sp>
+        <p:nvSpPr>
+          <p:cNvPr id="37" name="Text 11">
+            <a:extLst>
+              <a:ext uri="{FF2B5EF4-FFF2-40B4-BE49-F238E27FC236}">
+                <a16:creationId xmlns:a16="http://schemas.microsoft.com/office/drawing/2014/main" id="{E4B7C2E5-1571-8403-3E23-54FAD9D0D9A0}"/>
+              </a:ext>
+            </a:extLst>
+          </p:cNvPr>
+          <p:cNvSpPr/>
+          <p:nvPr/>
+        </p:nvSpPr>
+        <p:spPr>
+          <a:xfrm>
+            <a:off x="924667" y="4842308"/>
+            <a:ext cx="10607040" cy="411480"/>
+          </a:xfrm>
+          <a:prstGeom prst="rect">
+            <a:avLst/>
+          </a:prstGeom>
+          <a:noFill/>
+          <a:ln/>
+        </p:spPr>
+        <p:txBody>
+          <a:bodyPr wrap="square" lIns="0" tIns="0" rIns="0" bIns="0" rtlCol="0" anchor="t"/>
+          <a:lstStyle/>
+          <a:p>
+            <a:pPr marL="0" indent="0" algn="l">
+              <a:buNone/>
+            </a:pPr>
+            <a:r>
+              <a:rPr lang="en-US" sz="1800" dirty="0">
+                <a:solidFill>
+                  <a:srgbClr val="1E1F24"/>
+                </a:solidFill>
+                <a:latin typeface="Calibri" pitchFamily="34" charset="0"/>
+                <a:ea typeface="Calibri" pitchFamily="34" charset="-122"/>
+                <a:cs typeface="Calibri" pitchFamily="34" charset="-120"/>
+              </a:rPr>
+              <a:t>The category and summary it returned were never graded against anything.</a:t>
+            </a:r>
+          </a:p>
+        </p:txBody>
+      </p:sp>
+    </p:spTree>
+  </p:cSld>
+  <p:clrMapOvr>
+    <a:masterClrMapping/>
+  </p:clrMapOvr>
+</p:sld>
+</file>
+
+<file path=ppt/slides/slide23.xml><?xml version="1.0" encoding="utf-8"?>
 <p:sld xmlns:a="http://schemas.openxmlformats.org/drawingml/2006/main" xmlns:p="http://schemas.openxmlformats.org/presentationml/2006/main" xmlns:r="http://schemas.openxmlformats.org/officeDocument/2006/relationships">
   <p:cSld>
     <p:spTree>

--- a/docs/presentations/2026-08-24-timing-quality/Janasunani_2.0_Timing_and_Quality.pptx
+++ b/docs/presentations/2026-08-24-timing-quality/Janasunani_2.0_Timing_and_Quality.pptx
@@ -467,6 +467,37 @@
         <p:txBody>
           <a:bodyPr/>
           <a:lstStyle/>
+          <a:p>
+            <a:r>
+              <a:t>MODEL OPTIONS AT EACH STAGE, if asked what else was tried.</a:t>
+            </a:r>
+          </a:p>
+          <a:p>
+            <a:r>
+              <a:t>  OCR: pytesseract ships because it handles Odia script. DeepSeek-OCR exists in the repo but is English-only in practice and GPU-bound. Sarvam Vision is the third option and is slide 9.</a:t>
+            </a:r>
+          </a:p>
+          <a:p>
+            <a:r>
+              <a:t>  Actionability: a frozen MuRIL probe was the alternative and lost, 9 of 13 review cases against TF-IDF's 13 of 13, at 86.0% accuracy against 94.7%. The cheap model won, and that is the procurement point.</a:t>
+            </a:r>
+          </a:p>
+          <a:p>
+            <a:r>
+              <a:t>  Categorisation: a hashing word and character SGD ships. The DSI legacy MuRIL figure of 71.04% is NOT a comparison; it was measured on typed subject lines with a different split and issue #127 warns against putting the two side by side.</a:t>
+            </a:r>
+          </a:p>
+          <a:p>
+            <a:r>
+              <a:t>  Routing: the empirical crosswalk ships. An opt-in empirical-Bayes incidence provider exists behind JANASUNANI_ROUTER=incidence and falls back safely when it cannot answer.</a:t>
+            </a:r>
+          </a:p>
+          <a:p>
+            <a:r>
+              <a:t>  Summarisation: local BART, bart-large-cnn rev 37f520fa. No alternative has been benchmarked.</a:t>
+            </a:r>
+          </a:p>
+          <a:p/>
           <a:p>
             <a:r>
               <a:t>SPEEDS. outputs/benchmark/latency.json, run 2026-08-10T23:14:58Z at git sha 24ab193, is_fake_timing false. Document path, n=20 over 10 clusters. Means: OCR 5.833, summarise 6.550, categorise 0.778, redact 0.055, detect PII 0.021, route 0.00048, triage 0.00026. Summarise plus OCR is 12.383 s of the 13.244 s mean run, 93.5%. End to end: typed p50 0.133 s (n=40), PDF p50 13.661 s (n=20). Live API warm POST median 4.44 s (n=8), cold start 19.4 s. Measured on an arm64 laptop, not the deployment box.</a:t>
@@ -2672,7 +2703,7 @@
           <p:nvPr/>
         </p:nvGraphicFramePr>
         <p:xfrm>
-          <a:off x="640080" y="1847088"/>
+          <a:off x="640080" y="1792224"/>
           <a:ext cx="10881360" cy="2889504"/>
         </p:xfrm>
         <a:graphic>
@@ -2680,9 +2711,10 @@
             <a:tbl>
               <a:tblPr/>
               <a:tblGrid>
-                <a:gridCol w="3657600"/>
                 <a:gridCol w="2286000"/>
-                <a:gridCol w="4937760"/>
+                <a:gridCol w="2834640"/>
+                <a:gridCol w="1371600"/>
+                <a:gridCol w="4389120"/>
               </a:tblGrid>
               <a:tr h="365760">
                 <a:tc>
@@ -2739,7 +2771,7 @@
                           </a:solidFill>
                           <a:latin typeface="Calibri"/>
                         </a:rPr>
-                        <a:t>How fast</a:t>
+                        <a:t>Model</a:t>
                       </a:r>
                     </a:p>
                   </a:txBody>
@@ -2781,7 +2813,49 @@
                           </a:solidFill>
                           <a:latin typeface="Calibri"/>
                         </a:rPr>
-                        <a:t>How good, and on how many</a:t>
+                        <a:t>Latency</a:t>
+                      </a:r>
+                    </a:p>
+                  </a:txBody>
+                  <a:tcPr anchor="ctr" marL="128016" marR="91440" marT="36576" marB="36576">
+                    <a:solidFill>
+                      <a:srgbClr val="7A1F2B"/>
+                    </a:solidFill>
+                    <a:lnL w="6350" cap="flat" cmpd="sng" algn="ctr">
+                      <a:solidFill>
+                        <a:srgbClr val="7A1F2B"/>
+                      </a:solidFill>
+                    </a:lnL>
+                    <a:lnR w="6350" cap="flat" cmpd="sng" algn="ctr">
+                      <a:solidFill>
+                        <a:srgbClr val="7A1F2B"/>
+                      </a:solidFill>
+                    </a:lnR>
+                    <a:lnT w="6350" cap="flat" cmpd="sng" algn="ctr">
+                      <a:solidFill>
+                        <a:srgbClr val="7A1F2B"/>
+                      </a:solidFill>
+                    </a:lnT>
+                    <a:lnB w="6350" cap="flat" cmpd="sng" algn="ctr">
+                      <a:solidFill>
+                        <a:srgbClr val="7A1F2B"/>
+                      </a:solidFill>
+                    </a:lnB>
+                  </a:tcPr>
+                </a:tc>
+                <a:tc>
+                  <a:txBody>
+                    <a:bodyPr wrap="square"/>
+                    <a:lstStyle/>
+                    <a:p>
+                      <a:r>
+                        <a:rPr sz="1300" b="1">
+                          <a:solidFill>
+                            <a:srgbClr val="FFFFFF"/>
+                          </a:solidFill>
+                          <a:latin typeface="Calibri"/>
+                        </a:rPr>
+                        <a:t>Quality</a:t>
                       </a:r>
                     </a:p>
                   </a:txBody>
@@ -2825,7 +2899,49 @@
                           </a:solidFill>
                           <a:latin typeface="Calibri"/>
                         </a:rPr>
-                        <a:t>Read the page</a:t>
+                        <a:t>OCR</a:t>
+                      </a:r>
+                    </a:p>
+                  </a:txBody>
+                  <a:tcPr anchor="ctr" marL="128016" marR="91440" marT="36576" marB="36576">
+                    <a:solidFill>
+                      <a:srgbClr val="FFFFFF"/>
+                    </a:solidFill>
+                    <a:lnL w="6350" cap="flat" cmpd="sng" algn="ctr">
+                      <a:solidFill>
+                        <a:srgbClr val="DDDDDD"/>
+                      </a:solidFill>
+                    </a:lnL>
+                    <a:lnR w="6350" cap="flat" cmpd="sng" algn="ctr">
+                      <a:solidFill>
+                        <a:srgbClr val="DDDDDD"/>
+                      </a:solidFill>
+                    </a:lnR>
+                    <a:lnT w="6350" cap="flat" cmpd="sng" algn="ctr">
+                      <a:solidFill>
+                        <a:srgbClr val="DDDDDD"/>
+                      </a:solidFill>
+                    </a:lnT>
+                    <a:lnB w="6350" cap="flat" cmpd="sng" algn="ctr">
+                      <a:solidFill>
+                        <a:srgbClr val="DDDDDD"/>
+                      </a:solidFill>
+                    </a:lnB>
+                  </a:tcPr>
+                </a:tc>
+                <a:tc>
+                  <a:txBody>
+                    <a:bodyPr wrap="square"/>
+                    <a:lstStyle/>
+                    <a:p>
+                      <a:r>
+                        <a:rPr sz="1500" b="0">
+                          <a:solidFill>
+                            <a:srgbClr val="44464D"/>
+                          </a:solidFill>
+                          <a:latin typeface="Calibri"/>
+                        </a:rPr>
+                        <a:t>pytesseract</a:t>
                       </a:r>
                     </a:p>
                   </a:txBody>
@@ -2909,7 +3025,7 @@
                           </a:solidFill>
                           <a:latin typeface="Calibri"/>
                         </a:rPr>
-                        <a:t>never measured</a:t>
+                        <a:t>not measured, no ground truth</a:t>
                       </a:r>
                     </a:p>
                   </a:txBody>
@@ -2953,7 +3069,49 @@
                           </a:solidFill>
                           <a:latin typeface="Calibri"/>
                         </a:rPr>
-                        <a:t>Hide personal details</a:t>
+                        <a:t>PII redaction</a:t>
+                      </a:r>
+                    </a:p>
+                  </a:txBody>
+                  <a:tcPr anchor="ctr" marL="128016" marR="91440" marT="36576" marB="36576">
+                    <a:solidFill>
+                      <a:srgbClr val="F2F2F2"/>
+                    </a:solidFill>
+                    <a:lnL w="6350" cap="flat" cmpd="sng" algn="ctr">
+                      <a:solidFill>
+                        <a:srgbClr val="DDDDDD"/>
+                      </a:solidFill>
+                    </a:lnL>
+                    <a:lnR w="6350" cap="flat" cmpd="sng" algn="ctr">
+                      <a:solidFill>
+                        <a:srgbClr val="DDDDDD"/>
+                      </a:solidFill>
+                    </a:lnR>
+                    <a:lnT w="6350" cap="flat" cmpd="sng" algn="ctr">
+                      <a:solidFill>
+                        <a:srgbClr val="DDDDDD"/>
+                      </a:solidFill>
+                    </a:lnT>
+                    <a:lnB w="6350" cap="flat" cmpd="sng" algn="ctr">
+                      <a:solidFill>
+                        <a:srgbClr val="DDDDDD"/>
+                      </a:solidFill>
+                    </a:lnB>
+                  </a:tcPr>
+                </a:tc>
+                <a:tc>
+                  <a:txBody>
+                    <a:bodyPr wrap="square"/>
+                    <a:lstStyle/>
+                    <a:p>
+                      <a:r>
+                        <a:rPr sz="1500" b="0">
+                          <a:solidFill>
+                            <a:srgbClr val="44464D"/>
+                          </a:solidFill>
+                          <a:latin typeface="Calibri"/>
+                        </a:rPr>
+                        <a:t>Presidio + spaCy NER</a:t>
                       </a:r>
                     </a:p>
                   </a:txBody>
@@ -3037,7 +3195,7 @@
                           </a:solidFill>
                           <a:latin typeface="Calibri"/>
                         </a:rPr>
-                        <a:t>found 78% of the items we marked, on 480</a:t>
+                        <a:t>recall 0.78, n=480 spans</a:t>
                       </a:r>
                     </a:p>
                   </a:txBody>
@@ -3081,7 +3239,7 @@
                           </a:solidFill>
                           <a:latin typeface="Calibri"/>
                         </a:rPr>
-                        <a:t>Flag for officer review</a:t>
+                        <a:t>Actionability triage</a:t>
                       </a:r>
                     </a:p>
                   </a:txBody>
@@ -3123,7 +3281,7 @@
                           </a:solidFill>
                           <a:latin typeface="Calibri"/>
                         </a:rPr>
-                        <a:t>under 0.01 s</a:t>
+                        <a:t>TF-IDF word + char</a:t>
                       </a:r>
                     </a:p>
                   </a:txBody>
@@ -3165,7 +3323,49 @@
                           </a:solidFill>
                           <a:latin typeface="Calibri"/>
                         </a:rPr>
-                        <a:t>caught all 13 needing review, out of 57 cases</a:t>
+                        <a:t>&lt; 0.01 s</a:t>
+                      </a:r>
+                    </a:p>
+                  </a:txBody>
+                  <a:tcPr anchor="ctr" marL="128016" marR="91440" marT="36576" marB="36576">
+                    <a:solidFill>
+                      <a:srgbClr val="FFFFFF"/>
+                    </a:solidFill>
+                    <a:lnL w="6350" cap="flat" cmpd="sng" algn="ctr">
+                      <a:solidFill>
+                        <a:srgbClr val="DDDDDD"/>
+                      </a:solidFill>
+                    </a:lnL>
+                    <a:lnR w="6350" cap="flat" cmpd="sng" algn="ctr">
+                      <a:solidFill>
+                        <a:srgbClr val="DDDDDD"/>
+                      </a:solidFill>
+                    </a:lnR>
+                    <a:lnT w="6350" cap="flat" cmpd="sng" algn="ctr">
+                      <a:solidFill>
+                        <a:srgbClr val="DDDDDD"/>
+                      </a:solidFill>
+                    </a:lnT>
+                    <a:lnB w="6350" cap="flat" cmpd="sng" algn="ctr">
+                      <a:solidFill>
+                        <a:srgbClr val="DDDDDD"/>
+                      </a:solidFill>
+                    </a:lnB>
+                  </a:tcPr>
+                </a:tc>
+                <a:tc>
+                  <a:txBody>
+                    <a:bodyPr wrap="square"/>
+                    <a:lstStyle/>
+                    <a:p>
+                      <a:r>
+                        <a:rPr sz="1500" b="0">
+                          <a:solidFill>
+                            <a:srgbClr val="44464D"/>
+                          </a:solidFill>
+                          <a:latin typeface="Calibri"/>
+                        </a:rPr>
+                        <a:t>recall 1.00, precision 0.81, n=57</a:t>
                       </a:r>
                     </a:p>
                   </a:txBody>
@@ -3209,7 +3409,49 @@
                           </a:solidFill>
                           <a:latin typeface="Calibri"/>
                         </a:rPr>
-                        <a:t>Sort into a category</a:t>
+                        <a:t>Categorisation</a:t>
+                      </a:r>
+                    </a:p>
+                  </a:txBody>
+                  <a:tcPr anchor="ctr" marL="128016" marR="91440" marT="36576" marB="36576">
+                    <a:solidFill>
+                      <a:srgbClr val="F2F2F2"/>
+                    </a:solidFill>
+                    <a:lnL w="6350" cap="flat" cmpd="sng" algn="ctr">
+                      <a:solidFill>
+                        <a:srgbClr val="DDDDDD"/>
+                      </a:solidFill>
+                    </a:lnL>
+                    <a:lnR w="6350" cap="flat" cmpd="sng" algn="ctr">
+                      <a:solidFill>
+                        <a:srgbClr val="DDDDDD"/>
+                      </a:solidFill>
+                    </a:lnR>
+                    <a:lnT w="6350" cap="flat" cmpd="sng" algn="ctr">
+                      <a:solidFill>
+                        <a:srgbClr val="DDDDDD"/>
+                      </a:solidFill>
+                    </a:lnT>
+                    <a:lnB w="6350" cap="flat" cmpd="sng" algn="ctr">
+                      <a:solidFill>
+                        <a:srgbClr val="DDDDDD"/>
+                      </a:solidFill>
+                    </a:lnB>
+                  </a:tcPr>
+                </a:tc>
+                <a:tc>
+                  <a:txBody>
+                    <a:bodyPr wrap="square"/>
+                    <a:lstStyle/>
+                    <a:p>
+                      <a:r>
+                        <a:rPr sz="1500" b="0">
+                          <a:solidFill>
+                            <a:srgbClr val="44464D"/>
+                          </a:solidFill>
+                          <a:latin typeface="Calibri"/>
+                        </a:rPr>
+                        <a:t>hashing word + char SGD</a:t>
                       </a:r>
                     </a:p>
                   </a:txBody>
@@ -3293,7 +3535,7 @@
                           </a:solidFill>
                           <a:latin typeface="Calibri"/>
                         </a:rPr>
-                        <a:t>right one in its top three, 91% of 3,160</a:t>
+                        <a:t>top-1 47%, top-3 91%, n=3,160</a:t>
                       </a:r>
                     </a:p>
                   </a:txBody>
@@ -3337,7 +3579,49 @@
                           </a:solidFill>
                           <a:latin typeface="Calibri"/>
                         </a:rPr>
-                        <a:t>Draft a summary</a:t>
+                        <a:t>Summarisation</a:t>
+                      </a:r>
+                    </a:p>
+                  </a:txBody>
+                  <a:tcPr anchor="ctr" marL="128016" marR="91440" marT="36576" marB="36576">
+                    <a:solidFill>
+                      <a:srgbClr val="FFFFFF"/>
+                    </a:solidFill>
+                    <a:lnL w="6350" cap="flat" cmpd="sng" algn="ctr">
+                      <a:solidFill>
+                        <a:srgbClr val="DDDDDD"/>
+                      </a:solidFill>
+                    </a:lnL>
+                    <a:lnR w="6350" cap="flat" cmpd="sng" algn="ctr">
+                      <a:solidFill>
+                        <a:srgbClr val="DDDDDD"/>
+                      </a:solidFill>
+                    </a:lnR>
+                    <a:lnT w="6350" cap="flat" cmpd="sng" algn="ctr">
+                      <a:solidFill>
+                        <a:srgbClr val="DDDDDD"/>
+                      </a:solidFill>
+                    </a:lnT>
+                    <a:lnB w="6350" cap="flat" cmpd="sng" algn="ctr">
+                      <a:solidFill>
+                        <a:srgbClr val="DDDDDD"/>
+                      </a:solidFill>
+                    </a:lnB>
+                  </a:tcPr>
+                </a:tc>
+                <a:tc>
+                  <a:txBody>
+                    <a:bodyPr wrap="square"/>
+                    <a:lstStyle/>
+                    <a:p>
+                      <a:r>
+                        <a:rPr sz="1500" b="0">
+                          <a:solidFill>
+                            <a:srgbClr val="44464D"/>
+                          </a:solidFill>
+                          <a:latin typeface="Calibri"/>
+                        </a:rPr>
+                        <a:t>BART</a:t>
                       </a:r>
                     </a:p>
                   </a:txBody>
@@ -3421,7 +3705,7 @@
                           </a:solidFill>
                           <a:latin typeface="Calibri"/>
                         </a:rPr>
-                        <a:t>26 drafts read, 8 usable without an edit</a:t>
+                        <a:t>fact recall 66%, 8 of 26 usable</a:t>
                       </a:r>
                     </a:p>
                   </a:txBody>
@@ -3465,7 +3749,7 @@
                           </a:solidFill>
                           <a:latin typeface="Calibri"/>
                         </a:rPr>
-                        <a:t>Suggest a department</a:t>
+                        <a:t>Routing</a:t>
                       </a:r>
                     </a:p>
                   </a:txBody>
@@ -3507,7 +3791,7 @@
                           </a:solidFill>
                           <a:latin typeface="Calibri"/>
                         </a:rPr>
-                        <a:t>under 0.01 s</a:t>
+                        <a:t>empirical crosswalk</a:t>
                       </a:r>
                     </a:p>
                   </a:txBody>
@@ -3549,7 +3833,7 @@
                           </a:solidFill>
                           <a:latin typeface="Calibri"/>
                         </a:rPr>
-                        <a:t>right one in its top three, 80% of 142,181</a:t>
+                        <a:t>&lt; 0.01 s</a:t>
                       </a:r>
                     </a:p>
                   </a:txBody>
@@ -3579,6 +3863,48 @@
                     </a:lnB>
                   </a:tcPr>
                 </a:tc>
+                <a:tc>
+                  <a:txBody>
+                    <a:bodyPr wrap="square"/>
+                    <a:lstStyle/>
+                    <a:p>
+                      <a:r>
+                        <a:rPr sz="1500" b="0">
+                          <a:solidFill>
+                            <a:srgbClr val="44464D"/>
+                          </a:solidFill>
+                          <a:latin typeface="Calibri"/>
+                        </a:rPr>
+                        <a:t>top-1 55%, top-3 80%, n=142,181</a:t>
+                      </a:r>
+                    </a:p>
+                  </a:txBody>
+                  <a:tcPr anchor="ctr" marL="128016" marR="91440" marT="36576" marB="36576">
+                    <a:solidFill>
+                      <a:srgbClr val="F2F2F2"/>
+                    </a:solidFill>
+                    <a:lnL w="6350" cap="flat" cmpd="sng" algn="ctr">
+                      <a:solidFill>
+                        <a:srgbClr val="DDDDDD"/>
+                      </a:solidFill>
+                    </a:lnL>
+                    <a:lnR w="6350" cap="flat" cmpd="sng" algn="ctr">
+                      <a:solidFill>
+                        <a:srgbClr val="DDDDDD"/>
+                      </a:solidFill>
+                    </a:lnR>
+                    <a:lnT w="6350" cap="flat" cmpd="sng" algn="ctr">
+                      <a:solidFill>
+                        <a:srgbClr val="DDDDDD"/>
+                      </a:solidFill>
+                    </a:lnT>
+                    <a:lnB w="6350" cap="flat" cmpd="sng" algn="ctr">
+                      <a:solidFill>
+                        <a:srgbClr val="DDDDDD"/>
+                      </a:solidFill>
+                    </a:lnB>
+                  </a:tcPr>
+                </a:tc>
               </a:tr>
             </a:tbl>
           </a:graphicData>
@@ -3592,7 +3918,7 @@
         </p:nvSpPr>
         <p:spPr>
           <a:xfrm>
-            <a:off x="640080" y="5138928"/>
+            <a:off x="640080" y="4828032"/>
             <a:ext cx="10881360" cy="310896"/>
           </a:xfrm>
           <a:prstGeom prst="rect">
@@ -3614,7 +3940,7 @@
                 </a:solidFill>
                 <a:latin typeface="Calibri"/>
               </a:rPr>
-              <a:t>0.13 s typed end to end     ·     13.7 s scanned end to end     ·     0 of 55,544 records kept a phone number, Aadhaar or PAN</a:t>
+              <a:t>End to end: 0.13 s typed, 13.7 s scanned. OCR and summarisation are 94% of it.</a:t>
             </a:r>
           </a:p>
         </p:txBody>
@@ -3627,7 +3953,7 @@
         </p:nvSpPr>
         <p:spPr>
           <a:xfrm>
-            <a:off x="640080" y="5650992"/>
+            <a:off x="640080" y="5303520"/>
             <a:ext cx="10881360" cy="384048"/>
           </a:xfrm>
           <a:prstGeom prst="rect">
@@ -3649,7 +3975,7 @@
                 </a:solidFill>
                 <a:latin typeface="Calibri"/>
               </a:rPr>
-              <a:t>Reading the page and drafting the summary are 94% of the time. Everything else is close to free.</a:t>
+              <a:t>On triage a TF-IDF model beat a frozen MuRIL probe, 13 of 13 against 9 of 13.</a:t>
             </a:r>
           </a:p>
         </p:txBody>
@@ -3662,8 +3988,8 @@
         </p:nvSpPr>
         <p:spPr>
           <a:xfrm>
-            <a:off x="640080" y="6089904"/>
-            <a:ext cx="10881360" cy="292608"/>
+            <a:off x="640080" y="5742432"/>
+            <a:ext cx="10881360" cy="237744"/>
           </a:xfrm>
           <a:prstGeom prst="rect">
             <a:avLst/>
@@ -3684,7 +4010,42 @@
                 </a:solidFill>
                 <a:latin typeface="Calibri"/>
               </a:rPr>
-              <a:t>Speeds are means on one scanned document, n=20. Categories are lopsided: always guessing the three biggest scores 84%, so the model adds 7 points.</a:t>
+              <a:t>Latency is a mean over one scanned document, n=20. PII precision is unmeasured, though 0 of 55,544 redacted records retain a shaped identifier.</a:t>
+            </a:r>
+          </a:p>
+        </p:txBody>
+      </p:sp>
+      <p:sp>
+        <p:nvSpPr>
+          <p:cNvPr id="19" name="TextBox 18"/>
+          <p:cNvSpPr txBox="1"/>
+          <p:nvPr/>
+        </p:nvSpPr>
+        <p:spPr>
+          <a:xfrm>
+            <a:off x="640080" y="5961888"/>
+            <a:ext cx="10881360" cy="237744"/>
+          </a:xfrm>
+          <a:prstGeom prst="rect">
+            <a:avLst/>
+          </a:prstGeom>
+          <a:noFill/>
+        </p:spPr>
+        <p:txBody>
+          <a:bodyPr wrap="square" lIns="0" rIns="0" tIns="0" bIns="0">
+            <a:spAutoFit/>
+          </a:bodyPr>
+          <a:lstStyle/>
+          <a:p>
+            <a:pPr algn="l"/>
+            <a:r>
+              <a:rPr sz="1200" b="0" i="1">
+                <a:solidFill>
+                  <a:srgbClr val="6C6E76"/>
+                </a:solidFill>
+                <a:latin typeface="Calibri"/>
+              </a:rPr>
+              <a:t>Category classes are lopsided. A majority-class baseline scores 37% top-1 and 84% top-3, so the model adds 9 and 7 points.</a:t>
             </a:r>
           </a:p>
         </p:txBody>

--- a/docs/presentations/2026-08-24-timing-quality/Janasunani_2.0_Timing_and_Quality.pptx
+++ b/docs/presentations/2026-08-24-timing-quality/Janasunani_2.0_Timing_and_Quality.pptx
@@ -341,13 +341,13 @@
           <a:p/>
           <a:p>
             <a:r>
-              <a:t>Two structural facts drive the whole deck. The portal has never read what the citizen wrote. And there is no citizen key, so every row is an island, which is why deduplication on the next slide needs the whole corpus at once.</a:t>
+              <a:t>THIS SLIDE IS THE MAP. Two bodies of free text, and the deck reads them in that order. Slides 3 to 5 read the citizen's text: the stages, their speed and quality, and the department suggestion. Slides 6 and 7 read the officer's notes: how closures are recorded, and whether a different route would have closed cases faster. Say the two halves out loud here, so slide 6 lands as the turn rather than a new topic.</a:t>
             </a:r>
           </a:p>
           <a:p/>
           <a:p>
             <a:r>
-              <a:t>This slide used to carry a closure breakdown. That data now sits on slide 6, where it belongs, because it is the reason the routing model needed a correctness constraint.</a:t>
+              <a:t>The third row is the reason the project exists. The portal has never opened either body of text. There is also no citizen key, so every row is an island, which is why deduplication on the next slide needs the whole corpus at once.</a:t>
             </a:r>
           </a:p>
         </p:txBody>
@@ -713,7 +713,13 @@
           <a:lstStyle/>
           <a:p>
             <a:r>
-              <a:t>This slide exists to set up the next one. It is also the strongest finding in the record.</a:t>
+              <a:t>THIS IS THE TURN slide 2 announced. Everything up to here read the citizen's text. From here the source is the officer's action notes, the second of the two bodies. Say so; it is one sentence and it stops this slide reading as a new topic.</a:t>
+            </a:r>
+          </a:p>
+          <a:p/>
+          <a:p>
+            <a:r>
+              <a:t>It sets up the next slide and it is also the strongest finding in the record.</a:t>
             </a:r>
           </a:p>
           <a:p/>
@@ -1946,7 +1952,7 @@
                 <a:ea typeface="Calibri" pitchFamily="34" charset="-122"/>
                 <a:cs typeface="Calibri" pitchFamily="34" charset="-120"/>
               </a:rPr>
-              <a:t>Filed between 2021 and 2025, across 30 districts and 427 blocks.</a:t>
+              <a:t>What the citizen asked for, 2021 to 2025 across 30 districts. Median 19 words, mostly unique.</a:t>
             </a:r>
             <a:endParaRPr lang="en-US" sz="1900" dirty="0"/>
           </a:p>
@@ -2054,7 +2060,7 @@
                 <a:ea typeface="Calibri" pitchFamily="34" charset="-122"/>
                 <a:cs typeface="Calibri" pitchFamily="34" charset="-120"/>
               </a:rPr>
-              <a:t>Every step an officer took on a case, written as free text.</a:t>
+              <a:t>What the officer did about it. Free text on 99.87% of rows, 1.4 million distinct values.</a:t>
             </a:r>
             <a:endParaRPr lang="en-US" sz="1900" dirty="0"/>
           </a:p>
@@ -2120,7 +2126,7 @@
                 <a:ea typeface="Cambria" pitchFamily="34" charset="-122"/>
                 <a:cs typeface="Cambria" pitchFamily="34" charset="-120"/>
               </a:rPr>
-              <a:t>Counts only</a:t>
+              <a:t>The portal counts rows</a:t>
             </a:r>
             <a:endParaRPr lang="en-US" sz="2100" dirty="0"/>
           </a:p>
@@ -2162,7 +2168,7 @@
                 <a:ea typeface="Calibri" pitchFamily="34" charset="-122"/>
                 <a:cs typeface="Calibri" pitchFamily="34" charset="-120"/>
               </a:rPr>
-              <a:t>The portal reports how many cases are open and how many are closed. It has never opened either body of text.</a:t>
+              <a:t>It reports how many cases are open and how many are closed. It has never opened either body of text.</a:t>
             </a:r>
             <a:endParaRPr lang="en-US" sz="1900" dirty="0"/>
           </a:p>
@@ -2276,7 +2282,7 @@
                 </a:solidFill>
                 <a:latin typeface="Calibri"/>
               </a:rPr>
-              <a:t>Everything after this slide is about reading it.</a:t>
+              <a:t>Every number in this deck comes from reading one of those two.</a:t>
             </a:r>
           </a:p>
         </p:txBody>
@@ -2332,7 +2338,7 @@
                 <a:ea typeface="Calibri" pitchFamily="34" charset="-122"/>
                 <a:cs typeface="Calibri" pitchFamily="34" charset="-120"/>
               </a:rPr>
-              <a:t>HOW IT WORKS</a:t>
+              <a:t>READING THE CITIZEN'S TEXT</a:t>
             </a:r>
             <a:endParaRPr lang="en-US" sz="1500" dirty="0"/>
           </a:p>
@@ -4526,7 +4532,7 @@
                 <a:ea typeface="Calibri" pitchFamily="34" charset="-122"/>
                 <a:cs typeface="Calibri" pitchFamily="34" charset="-120"/>
               </a:rPr>
-              <a:t>WHAT CLOSURE RECORDS</a:t>
+              <a:t>READING THE OFFICER'S NOTES</a:t>
             </a:r>
             <a:endParaRPr lang="en-US" sz="1500" dirty="0"/>
           </a:p>

--- a/docs/presentations/2026-08-24-timing-quality/Janasunani_2.0_Timing_and_Quality.pptx
+++ b/docs/presentations/2026-08-24-timing-quality/Janasunani_2.0_Timing_and_Quality.pptx
@@ -18,6 +18,7 @@
     <p:sldId id="277" r:id="rId27"/>
     <p:sldId id="278" r:id="rId28"/>
     <p:sldId id="279" r:id="rId29"/>
+    <p:sldId id="280" r:id="rId30"/>
   </p:sldIdLst>
   <p:sldSz cx="12192000" cy="6858000"/>
   <p:notesSz cx="6858000" cy="12192000"/>
@@ -512,6 +513,12 @@
           <a:p/>
           <a:p>
             <a:r>
+              <a:t>PROVENANCE, not yet reflected in the numbers above. A 224-document real-document sample (451 pages, 30 categories, nesting the earlier 92-ticket Sarvam sample by ticket id) is staged for Sambalpur 2024, the slice the duplicate index was built on. Re-running the latency harness (feat/benchmark-real-documents, load_staged_documents) against it was deliberately deferred to avoid CPU contention with a concurrent Sarvam evaluation; the n=20 synthetic-fixture numbers above are unchanged pending that run.</a:t>
+            </a:r>
+          </a:p>
+          <a:p/>
+          <a:p>
+            <a:r>
               <a:t>QUALITY, with intervals.</a:t>
             </a:r>
           </a:p>
@@ -916,37 +923,37 @@
           <a:lstStyle/>
           <a:p>
             <a:r>
-              <a:t>Do not cut this slide for time. It is the one that makes the rest credible.</a:t>
+              <a:t>THE HOUSE RULE, janasunani/analytics/README.md. An insight is something the record already contained and nobody had queried. A capability is something no existing dashboard could produce. Presenting the first as the second is the failure mode, ROADMAP section 5.3. All three items on this slide are capabilities: none is a query an analyst with database access could run against the existing dashboards in a day.</a:t>
             </a:r>
           </a:p>
           <a:p/>
           <a:p>
             <a:r>
-              <a:t>1. OCR ground truth was never commissioned and has no owner, issue #53. It cannot be produced by an agent, because it is the answer key an agent would be scored against.</a:t>
+              <a:t>ITEM 1, workload. 55,544 filings in Sambalpur 2024 are 10,963 distinct problems from 8,560 citizens. docs/PERFORMANCE.md section 4, production run on the deployment CPU box: ~57 minutes on 2 vCPU, 16,138,623 comparison pairs. Re-run attempted locally on this branch (janasunani-publish-workload): the only dedup index reachable outside the deployment box is a 20-ticket local smoke-test population, which verifies the digest-guard plumbing end to end (20 filings, 14 distinct, source_snapshot_id checked) but is not the governed slice, and its numbers are not quoted here.</a:t>
             </a:r>
           </a:p>
           <a:p/>
           <a:p>
             <a:r>
-              <a:t>2. 824 predicted spans against 480 marked. The recogniser over-fires, and the gold set cannot separate a missed label from an over-redaction. Filed as open.</a:t>
+              <a:t>ITEM 2, spike. A campaign is not a false spike. Spike detection must not run on de-duplicated counts, and every spike is reported as three numbers, filings / distinct problems / distinct citizens, never collapsed to one. outputs/findings/spike.md still reads NULL, status 'pending dedup index': that is a hardcoded literal in analytics/sql/spike.sql (the spike_decomposition view), not a live check, so it reads the same whether or not a dedup index exists. The dedup-aware path that does compute real numbers (compute_spike_with_dedup, --publish-aggregates) runs, but is not scoped to a district/year before it picks its top candidate: on this branch it decomposed a Bargarh 2023 spike against a Sambalpur 2024-scoped dedup index and silently returned no reduction at all (filings = distinct problems = distinct citizens). Filed as tech debt, not fixed on this branch.</a:t>
             </a:r>
           </a:p>
           <a:p/>
           <a:p>
             <a:r>
-              <a:t>3. The officer-hours figure that circulates, 201,000 to 302,000 across 1,209,144 resolved cases, is a denominator and not a saving. It is the size of the prize, not anything realised.</a:t>
+              <a:t>ITEM 3, themes. janasunani-publish-themes crashed on this slice, ColumnNotFoundError 'filings', because render_markdown assumed the full theme schema and the 'too few rows in this category' early-exit path returns a different one. Fixed on this branch (tests/test_themes.py adds coverage for both early-exit shapes). It now reports 'No themes computed (insufficient data for themes)' for Housing, Sambalpur 2024, honestly, given only 20 locally-available redacted records rather than crashing.</a:t>
             </a:r>
           </a:p>
           <a:p/>
           <a:p>
             <a:r>
-              <a:t>Two more we do not claim, if asked: no gain from duplicate detection beyond the 37,299 repeats officers already confirmed, and no accuracy result for the outside option on slide 6.</a:t>
+              <a:t>PROVENANCE DISCIPLINE. janasunani/serving/intelligence.py reports each dashboard panel as Recorded or Unavailable with a stated reason, never as a silent zero (tests/test_intelligence.py). Marts are portable SQL handed to the department to run for themselves (janasunani/analytics/marts.py). Findings emit aggregates only, never a row of citizen writing (janasunani/analytics/README.md house rules).</a:t>
             </a:r>
           </a:p>
           <a:p/>
           <a:p>
             <a:r>
-              <a:t>If someone asks why so little is claimed: because the alternative is claiming things we cannot defend, and this deck has to survive the room checking it.</a:t>
+              <a:t>FOR CONTEXT IF ASKED. Closure ladder: 472,782 of 776,922 disposed with no action claimed (docs/FINDINGS.md), against 1,209,144 total resolved complaints. Confirmed duplicates, the manual-process baseline: 37,299 officer-confirmed action rows, 21,117 already-taken-up plus 16,182 duplicate-copy (docs/PERFORMANCE.md section 4). The MinHash increment is reported separately and is never merged into that baseline. An earlier mart run mis-quoted 18,432 duplicates from a template-matching defect; docs/PERFORMANCE.md says explicitly not to quote it, and this deck does not.</a:t>
             </a:r>
           </a:p>
         </p:txBody>
@@ -992,73 +999,37 @@
           <a:lstStyle/>
           <a:p>
             <a:r>
-              <a:t>The provider is Sarvam. Two endpoints, billed separately: digitise at ₹0.50 a page returns text and layout; extract at ₹1.00 a page returns schema-driven fields. Both is ₹1.50. Source: janasunani/evaluation/pricing.py, checked against the Sarvam dashboard 2026-08-07. Our local pipeline is ₹0.00 a page.</a:t>
+              <a:t>Do not cut this slide for time. It is the one that makes the rest credible.</a:t>
             </a:r>
           </a:p>
           <a:p/>
           <a:p>
             <a:r>
-              <a:t>THE FOUR EXTRACT FIELDS, which is the 'does more' claim: grievance_category, summary, district, grievance_text. That is our OCR, categoriser and summariser in one call. janasunani/evaluation/sarvam_grievance_schema.py, schema v1, pinned so a later edit cannot silently move a headline number. docs/DELIVERY.md:163: 'our pipeline has no equivalent'.</a:t>
+              <a:t>1. OCR ground truth was never commissioned and has no owner, issue #53. It cannot be produced by an agent, because it is the answer key an agent would be scored against.</a:t>
             </a:r>
           </a:p>
           <a:p/>
           <a:p>
             <a:r>
-              <a:t>LANGUAGE. Sarvam Vision lists all 22 scheduled languages plus English, Odia among them. There is also a separate transliteration API for romanized Odia (od-IN), which we do not solve at all today. Our own summariser skipped all four coherent Odia cases through an English-only gate, and non-English text is downgraded to Uncategorized.</a:t>
+              <a:t>2. 824 predicted spans against 480 marked. The recogniser over-fires, and the gold set cannot separate a missed label from an over-redaction. Filed as open.</a:t>
             </a:r>
           </a:p>
           <a:p/>
           <a:p>
             <a:r>
-              <a:t>WHAT WE ACTUALLY RAN. Two runs, docs/evidence/sarvam_cached_benchmark.json. A 5-page validation (₹7.50) and a 300-page run that died at 65 pages on credit exhaustion, 3 HTTP 402s, 7 job failures. 61 pages paired and scored in total.</a:t>
+              <a:t>3. The officer-hours figure that circulates, 201,000 to 302,000 across 1,209,144 resolved cases, is a denominator and not a saving. It is the size of the prize, not anything realised.</a:t>
             </a:r>
           </a:p>
           <a:p/>
           <a:p>
             <a:r>
-              <a:t>WHAT WE FOUND, AND WHAT IT COVERS. Normalised exact-text divergence 1.000 on both runs: the two systems differed on every page. Sarvam returns more characters, ratio 1.2433 then 1.3345. That figure is TRANSCRIPTION ONLY. It compares OCR text and says nothing about the category or summary fields. Divergence says they disagree, never who is right.</a:t>
+              <a:t>Two more we do not claim, if asked: no gain from duplicate detection beyond the 37,299 repeats officers already confirmed, and no accuracy result for the outside option on slide 6.</a:t>
             </a:r>
           </a:p>
           <a:p/>
           <a:p>
             <a:r>
-              <a:t>THE EXTRACT FIELDS WERE NEVER GRADED. Sarvam did return them: 61 extract jobs completed in the 300-page run. Nothing was compared against them.</a:t>
-            </a:r>
-          </a:p>
-          <a:p/>
-          <a:p>
-            <a:r>
-              <a:t>  Category was the DECLARED PRIMARY OUTCOME and came back null. Reason, verbatim from outputs/sarvam_validation/sarvam_scorecard.md: 'Not measured — no gold labels (gold_category) in sample; run with --join-metadata from the lake slice.' This is the cheap gap. The recorded category already sits in our own database; the sample was simply not joined to it. Unlike OCR, no new ground truth has to be created.</a:t>
-            </a:r>
-          </a:p>
-          <a:p/>
-          <a:p>
-            <a:r>
-              <a:t>  Summary was only ever scoped as divergence against BART with no gold referee, and summary_divergence is the same function as divergence_rate under another name (sarvam_scorecard.py:234). Even fully run it could only have said the two summaries differ, never which was better. It was not run: no paired sarvam_summary / pipeline_summary in the sample.</a:t>
-            </a:r>
-          </a:p>
-          <a:p/>
-          <a:p>
-            <a:r>
-              <a:t>  A schema bug returned HTTP 400 on every extract submission until 2026-08-09, which is why the 5-page validation run has no extract output at all. Every test mocked the transport, so no test could see the 400.</a:t>
-            </a:r>
-          </a:p>
-          <a:p/>
-          <a:p>
-            <a:r>
-              <a:t>NOT MEASURED, do not claim: OCR accuracy, category accuracy, summary quality, latency (stated in four places), actual billed cost (every rupee figure is list price), observed language split, handwritten versus printed split.</a:t>
-            </a:r>
-          </a:p>
-          <a:p/>
-          <a:p>
-            <a:r>
-              <a:t>GOVERNANCE. Trust tier authorized-external. Authorisation is a GoO-Sarvam MoU with sign-off from the Additional Chief Secretary, Electronics &amp; IT, accepted 2026-08-07, on the basis that no state statute currently governs the transfer. All three provider controls remain UNVERIFIED: retention terms, encryption in transit, encryption at rest. Authorisation and verification are recorded separately on purpose. One module may make the call, janasunani/egress/, every attempt is audit-logged, and a kill switch falls back to local pytesseract.</a:t>
-            </a:r>
-          </a:p>
-          <a:p/>
-          <a:p>
-            <a:r>
-              <a:t>COST AT SCALE, projected list price: ₹48,000 to digitise the 96,469-page English corpus, ₹145,000 for both endpoints, ₹8,050 to push 1.37M subjects through the 105B text model. At 10 requests a minute, which does not rise with the plan tier, the full corpus is roughly ten days of continuous calling. It is a measurement instrument, not a backfill path. Do not quote ₹700; that was priced on the withdrawn 30B model.</a:t>
+              <a:t>If someone asks why so little is claimed: because the alternative is claiming things we cannot defend, and this deck has to survive the room checking it.</a:t>
             </a:r>
           </a:p>
         </p:txBody>
@@ -1072,6 +1043,118 @@
 </file>
 
 <file path=ppt/notesSlides/notesSlide23.xml><?xml version="1.0" encoding="utf-8"?>
+<p:notes xmlns:a="http://schemas.openxmlformats.org/drawingml/2006/main" xmlns:p="http://schemas.openxmlformats.org/presentationml/2006/main" xmlns:r="http://schemas.openxmlformats.org/officeDocument/2006/relationships">
+  <p:cSld>
+    <p:spTree>
+      <p:nvGrpSpPr>
+        <p:cNvPr id="1" name=""/>
+        <p:cNvGrpSpPr/>
+        <p:nvPr/>
+      </p:nvGrpSpPr>
+      <p:grpSpPr>
+        <a:xfrm>
+          <a:off x="0" y="0"/>
+          <a:ext cx="0" cy="0"/>
+          <a:chOff x="0" y="0"/>
+          <a:chExt cx="0" cy="0"/>
+        </a:xfrm>
+      </p:grpSpPr>
+      <p:sp>
+        <p:nvSpPr>
+          <p:cNvPr id="3" name="Notes Placeholder 2"/>
+          <p:cNvSpPr>
+            <a:spLocks noGrp="1"/>
+          </p:cNvSpPr>
+          <p:nvPr>
+            <p:ph type="body" idx="1"/>
+          </p:nvPr>
+        </p:nvSpPr>
+        <p:spPr/>
+        <p:txBody>
+          <a:bodyPr/>
+          <a:lstStyle/>
+          <a:p>
+            <a:r>
+              <a:t>The provider is Sarvam. Two endpoints, billed separately: digitise at ₹0.50 a page returns text and layout; extract at ₹1.00 a page returns schema-driven fields. Both is ₹1.50. Source: janasunani/evaluation/pricing.py, checked against the Sarvam dashboard 2026-08-07. Our local pipeline is ₹0.00 a page.</a:t>
+            </a:r>
+          </a:p>
+          <a:p/>
+          <a:p>
+            <a:r>
+              <a:t>THE FOUR EXTRACT FIELDS, which is the 'does more' claim: grievance_category, summary, district, grievance_text. That is our OCR, categoriser and summariser in one call. janasunani/evaluation/sarvam_grievance_schema.py, schema v1, pinned so a later edit cannot silently move a headline number. docs/DELIVERY.md:163: 'our pipeline has no equivalent'.</a:t>
+            </a:r>
+          </a:p>
+          <a:p/>
+          <a:p>
+            <a:r>
+              <a:t>LANGUAGE. Sarvam Vision lists all 22 scheduled languages plus English, Odia among them. There is also a separate transliteration API for romanized Odia (od-IN), which we do not solve at all today. Our own summariser skipped all four coherent Odia cases through an English-only gate, and non-English text is downgraded to Uncategorized.</a:t>
+            </a:r>
+          </a:p>
+          <a:p/>
+          <a:p>
+            <a:r>
+              <a:t>WHAT WE ACTUALLY RAN. Two runs, docs/evidence/sarvam_cached_benchmark.json. A 5-page validation (₹7.50) and a 300-page run that died at 65 pages on credit exhaustion, 3 HTTP 402s, 7 job failures. 61 pages paired and scored in total.</a:t>
+            </a:r>
+          </a:p>
+          <a:p/>
+          <a:p>
+            <a:r>
+              <a:t>WHAT WE FOUND, AND WHAT IT COVERS. Normalised exact-text divergence 1.000 on both runs: the two systems differed on every page. Sarvam returns more characters, ratio 1.2433 then 1.3345. That figure is TRANSCRIPTION ONLY. It compares OCR text and says nothing about the category or summary fields. Divergence says they disagree, never who is right.</a:t>
+            </a:r>
+          </a:p>
+          <a:p/>
+          <a:p>
+            <a:r>
+              <a:t>THE EXTRACT FIELDS WERE NEVER GRADED. Sarvam did return them: 61 extract jobs completed in the 300-page run. Nothing was compared against them.</a:t>
+            </a:r>
+          </a:p>
+          <a:p/>
+          <a:p>
+            <a:r>
+              <a:t>  Category was the DECLARED PRIMARY OUTCOME and came back null. Reason, verbatim from outputs/sarvam_validation/sarvam_scorecard.md: 'Not measured — no gold labels (gold_category) in sample; run with --join-metadata from the lake slice.' This is the cheap gap. The recorded category already sits in our own database; the sample was simply not joined to it. Unlike OCR, no new ground truth has to be created.</a:t>
+            </a:r>
+          </a:p>
+          <a:p/>
+          <a:p>
+            <a:r>
+              <a:t>  Summary was only ever scoped as divergence against BART with no gold referee, and summary_divergence is the same function as divergence_rate under another name (sarvam_scorecard.py:234). Even fully run it could only have said the two summaries differ, never which was better. It was not run: no paired sarvam_summary / pipeline_summary in the sample.</a:t>
+            </a:r>
+          </a:p>
+          <a:p/>
+          <a:p>
+            <a:r>
+              <a:t>  A schema bug returned HTTP 400 on every extract submission until 2026-08-09, which is why the 5-page validation run has no extract output at all. Every test mocked the transport, so no test could see the 400.</a:t>
+            </a:r>
+          </a:p>
+          <a:p/>
+          <a:p>
+            <a:r>
+              <a:t>NOT MEASURED, do not claim: OCR accuracy, category accuracy, summary quality, latency (stated in four places), actual billed cost (every rupee figure is list price), observed language split, handwritten versus printed split.</a:t>
+            </a:r>
+          </a:p>
+          <a:p/>
+          <a:p>
+            <a:r>
+              <a:t>GOVERNANCE. Trust tier authorized-external. Authorisation is a GoO-Sarvam MoU with sign-off from the Additional Chief Secretary, Electronics &amp; IT, accepted 2026-08-07, on the basis that no state statute currently governs the transfer. All three provider controls remain UNVERIFIED: retention terms, encryption in transit, encryption at rest. Authorisation and verification are recorded separately on purpose. One module may make the call, janasunani/egress/, every attempt is audit-logged, and a kill switch falls back to local pytesseract.</a:t>
+            </a:r>
+          </a:p>
+          <a:p/>
+          <a:p>
+            <a:r>
+              <a:t>COST AT SCALE, projected list price: ₹48,000 to digitise the 96,469-page English corpus, ₹145,000 for both endpoints, ₹8,050 to push 1.37M subjects through the 105B text model. At 10 requests a minute, which does not rise with the plan tier, the full corpus is roughly ten days of continuous calling. It is a measurement instrument, not a backfill path. Do not quote ₹700; that was priced on the withdrawn 30B model.</a:t>
+            </a:r>
+          </a:p>
+        </p:txBody>
+      </p:sp>
+    </p:spTree>
+  </p:cSld>
+  <p:clrMapOvr>
+    <a:masterClrMapping/>
+  </p:clrMapOvr>
+</p:notes>
+</file>
+
+<file path=ppt/notesSlides/notesSlide24.xml><?xml version="1.0" encoding="utf-8"?>
 <p:notes xmlns:a="http://schemas.openxmlformats.org/drawingml/2006/main" xmlns:p="http://schemas.openxmlformats.org/presentationml/2006/main" xmlns:r="http://schemas.openxmlformats.org/officeDocument/2006/relationships">
   <p:cSld>
     <p:spTree>
@@ -4056,6 +4139,41 @@
           </a:p>
         </p:txBody>
       </p:sp>
+      <p:sp>
+        <p:nvSpPr>
+          <p:cNvPr id="20" name="TextBox 19"/>
+          <p:cNvSpPr txBox="1"/>
+          <p:nvPr/>
+        </p:nvSpPr>
+        <p:spPr>
+          <a:xfrm>
+            <a:off x="640080" y="6199632"/>
+            <a:ext cx="10881360" cy="201168"/>
+          </a:xfrm>
+          <a:prstGeom prst="rect">
+            <a:avLst/>
+          </a:prstGeom>
+          <a:noFill/>
+        </p:spPr>
+        <p:txBody>
+          <a:bodyPr wrap="square" lIns="0" rIns="0" tIns="0" bIns="0">
+            <a:spAutoFit/>
+          </a:bodyPr>
+          <a:lstStyle/>
+          <a:p>
+            <a:pPr algn="l"/>
+            <a:r>
+              <a:rPr sz="1100" b="0" i="1">
+                <a:solidFill>
+                  <a:srgbClr val="6C6E76"/>
+                </a:solidFill>
+                <a:latin typeface="Calibri"/>
+              </a:rPr>
+              <a:t>Document measurements are one draw, Sambalpur 2024, the slice the duplicate index was built on. Categorisation, triage and routing are measured on text and records, not documents.</a:t>
+            </a:r>
+          </a:p>
+        </p:txBody>
+      </p:sp>
     </p:spTree>
   </p:cSld>
   <p:clrMapOvr>
@@ -6286,7 +6404,7 @@
                 <a:ea typeface="Calibri" pitchFamily="34" charset="-122"/>
                 <a:cs typeface="Calibri" pitchFamily="34" charset="-120"/>
               </a:rPr>
-              <a:t>THE LIMITS</a:t>
+              <a:t>WHAT THE RECORD CAN NOW BE ASKED</a:t>
             </a:r>
             <a:endParaRPr lang="en-US" sz="1500" dirty="0"/>
           </a:p>
@@ -6325,7 +6443,7 @@
                 <a:ea typeface="Cambria" pitchFamily="34" charset="-122"/>
                 <a:cs typeface="Cambria" pitchFamily="34" charset="-120"/>
               </a:rPr>
-              <a:t>What we cannot measure</a:t>
+              <a:t>The dashboards count filings, not problems</a:t>
             </a:r>
             <a:endParaRPr lang="en-US" sz="3400" dirty="0"/>
           </a:p>
@@ -6406,7 +6524,7 @@
                 <a:ea typeface="Calibri" pitchFamily="34" charset="-122"/>
                 <a:cs typeface="Calibri" pitchFamily="34" charset="-120"/>
               </a:rPr>
-              <a:t>We cannot say how accurately it reads a page.</a:t>
+              <a:t>Duplicate-adjusted workload.</a:t>
             </a:r>
             <a:endParaRPr lang="en-US" sz="1850" dirty="0"/>
           </a:p>
@@ -6482,7 +6600,7 @@
                 <a:ea typeface="Calibri" pitchFamily="34" charset="-122"/>
                 <a:cs typeface="Calibri" pitchFamily="34" charset="-120"/>
               </a:rPr>
-              <a:t>Nobody has hand-typed a set of pages to check against. No system can be scored, ours or anyone else's.</a:t>
+              <a:t>55,544 filings in the slice are 10,963 distinct problems from 8,560 citizens. The portal reports the first number.</a:t>
             </a:r>
             <a:endParaRPr lang="en-US" sz="1450" dirty="0"/>
           </a:p>
@@ -6593,7 +6711,7 @@
                 <a:ea typeface="Calibri" pitchFamily="34" charset="-122"/>
                 <a:cs typeface="Calibri" pitchFamily="34" charset="-120"/>
               </a:rPr>
-              <a:t>We cannot say how often redaction hides too much.</a:t>
+              <a:t>A spike with the cause attached.</a:t>
             </a:r>
             <a:endParaRPr lang="en-US" sz="1850" dirty="0"/>
           </a:p>
@@ -6663,7 +6781,7 @@
                 <a:ea typeface="Calibri" pitchFamily="34" charset="-122"/>
                 <a:cs typeface="Calibri" pitchFamily="34" charset="-120"/>
               </a:rPr>
-              <a:t>We marked what should be hidden. We never marked what should not, so a miss and an over-redaction look the same.</a:t>
+              <a:t>Every spike carries filings, distinct problems and distinct citizens. Four hundred citizens on one road and two hundred unrelated problems look identical in a count.</a:t>
             </a:r>
             <a:endParaRPr lang="en-US" sz="1450" dirty="0"/>
           </a:p>
@@ -6774,7 +6892,7 @@
                 <a:ea typeface="Calibri" pitchFamily="34" charset="-122"/>
                 <a:cs typeface="Calibri" pitchFamily="34" charset="-120"/>
               </a:rPr>
-              <a:t>We cannot say it saves officer time.</a:t>
+              <a:t>Local issue themes.</a:t>
             </a:r>
             <a:endParaRPr lang="en-US" sz="1850" dirty="0"/>
           </a:p>
@@ -6850,7 +6968,7 @@
                 <a:ea typeface="Calibri" pitchFamily="34" charset="-122"/>
                 <a:cs typeface="Calibri" pitchFamily="34" charset="-120"/>
               </a:rPr>
-              <a:t>The 10 to 15 minute baseline is self-reported and was never timed. No trial has been run.</a:t>
+              <a:t>Grouped by what complaints are about rather than the category assigned at intake. Concentrated in one place and rising is the alert worth acting on.</a:t>
             </a:r>
             <a:endParaRPr lang="en-US" sz="1450" dirty="0"/>
           </a:p>
@@ -6889,7 +7007,7 @@
                 <a:ea typeface="Calibri" pitchFamily="34" charset="-122"/>
                 <a:cs typeface="Calibri" pitchFamily="34" charset="-120"/>
               </a:rPr>
-              <a:t>Every figure in this deck was produced by us, on our own data. None of it has been checked by an officer.</a:t>
+              <a:t>If an analyst with database access could produce a number in a day, we do not present it as something the system enables.</a:t>
             </a:r>
             <a:endParaRPr lang="en-US" sz="1650" b="1" dirty="0"/>
           </a:p>
@@ -7024,7 +7142,7 @@
                 <a:ea typeface="Calibri" pitchFamily="34" charset="-122"/>
                 <a:cs typeface="Calibri" pitchFamily="34" charset="-120"/>
               </a:rPr>
-              <a:t>THE OUTSIDE OPTION: SARVAM</a:t>
+              <a:t>THE LIMITS</a:t>
             </a:r>
             <a:endParaRPr lang="en-US" sz="1500" dirty="0"/>
           </a:p>
@@ -7063,7 +7181,7 @@
                 <a:ea typeface="Cambria" pitchFamily="34" charset="-122"/>
                 <a:cs typeface="Cambria" pitchFamily="34" charset="-120"/>
               </a:rPr>
-              <a:t>It does more. We have not shown it does better</a:t>
+              <a:t>What we cannot measure</a:t>
             </a:r>
             <a:endParaRPr lang="en-US" sz="3400" dirty="0"/>
           </a:p>
@@ -7071,14 +7189,14 @@
       </p:sp>
       <p:sp>
         <p:nvSpPr>
-          <p:cNvPr id="5" name="Text 3"/>
-          <p:cNvSpPr/>
-          <p:nvPr/>
-        </p:nvSpPr>
-        <p:spPr>
-          <a:xfrm>
-            <a:off x="640080" y="2179321"/>
-            <a:ext cx="10881360" cy="292608"/>
+          <p:cNvPr id="4" name="Text 2"/>
+          <p:cNvSpPr/>
+          <p:nvPr/>
+        </p:nvSpPr>
+        <p:spPr>
+          <a:xfrm>
+            <a:off x="640080" y="2194560"/>
+            <a:ext cx="502920" cy="640080"/>
           </a:xfrm>
           <a:prstGeom prst="rect">
             <a:avLst/>
@@ -7094,17 +7212,59 @@
               <a:buNone/>
             </a:pPr>
             <a:r>
-              <a:rPr lang="en-US" sz="1350" b="1" kern="0" spc="150" dirty="0">
+              <a:rPr lang="en-US" sz="3200" b="1" dirty="0">
                 <a:solidFill>
                   <a:srgbClr val="7A1F2B"/>
+                </a:solidFill>
+                <a:latin typeface="Cambria" pitchFamily="34" charset="0"/>
+                <a:ea typeface="Cambria" pitchFamily="34" charset="-122"/>
+                <a:cs typeface="Cambria" pitchFamily="34" charset="-120"/>
+              </a:rPr>
+              <a:t>1</a:t>
+            </a:r>
+            <a:endParaRPr lang="en-US" sz="3200" dirty="0"/>
+          </a:p>
+        </p:txBody>
+      </p:sp>
+      <p:sp>
+        <p:nvSpPr>
+          <p:cNvPr id="5" name="Text 3"/>
+          <p:cNvSpPr/>
+          <p:nvPr/>
+        </p:nvSpPr>
+        <p:spPr>
+          <a:xfrm>
+            <a:off x="1280160" y="2194560"/>
+            <a:ext cx="5852160" cy="822960"/>
+          </a:xfrm>
+          <a:prstGeom prst="rect">
+            <a:avLst/>
+          </a:prstGeom>
+          <a:noFill/>
+          <a:ln/>
+        </p:spPr>
+        <p:txBody>
+          <a:bodyPr wrap="square" lIns="0" tIns="0" rIns="0" bIns="0" rtlCol="0" anchor="ctr"/>
+          <a:lstStyle/>
+          <a:p>
+            <a:pPr marL="0" indent="0" algn="l">
+              <a:lnSpc>
+                <a:spcPct val="105000"/>
+              </a:lnSpc>
+              <a:buNone/>
+            </a:pPr>
+            <a:r>
+              <a:rPr lang="en-US" sz="1850" dirty="0">
+                <a:solidFill>
+                  <a:srgbClr val="1E1F24"/>
                 </a:solidFill>
                 <a:latin typeface="Calibri" pitchFamily="34" charset="0"/>
                 <a:ea typeface="Calibri" pitchFamily="34" charset="-122"/>
                 <a:cs typeface="Calibri" pitchFamily="34" charset="-120"/>
               </a:rPr>
-              <a:t>What it does</a:t>
-            </a:r>
-            <a:endParaRPr lang="en-US" sz="1350" dirty="0"/>
+              <a:t>We cannot say how accurately it reads a page.</a:t>
+            </a:r>
+            <a:endParaRPr lang="en-US" sz="1850" dirty="0"/>
           </a:p>
         </p:txBody>
       </p:sp>
@@ -7116,16 +7276,23 @@
         </p:nvSpPr>
         <p:spPr>
           <a:xfrm>
-            <a:off x="640080" y="2663953"/>
-            <a:ext cx="91440" cy="91440"/>
-          </a:xfrm>
-          <a:prstGeom prst="rect">
-            <a:avLst/>
+            <a:off x="7406640" y="2212848"/>
+            <a:ext cx="4114800" cy="777240"/>
+          </a:xfrm>
+          <a:prstGeom prst="roundRect">
+            <a:avLst>
+              <a:gd name="adj" fmla="val 7059"/>
+            </a:avLst>
           </a:prstGeom>
           <a:solidFill>
-            <a:srgbClr val="7A1F2B"/>
+            <a:srgbClr val="F4F4F6"/>
           </a:solidFill>
-          <a:ln/>
+          <a:ln w="12700">
+            <a:solidFill>
+              <a:srgbClr val="D6D8DD"/>
+            </a:solidFill>
+            <a:prstDash val="solid"/>
+          </a:ln>
         </p:spPr>
         <p:txBody>
           <a:bodyPr/>
@@ -7143,24 +7310,138 @@
         </p:nvSpPr>
         <p:spPr>
           <a:xfrm>
-            <a:off x="932688" y="2545081"/>
-            <a:ext cx="10607040" cy="411480"/>
-          </a:xfrm>
-          <a:prstGeom prst="rect">
-            <a:avLst/>
-          </a:prstGeom>
-          <a:noFill/>
-          <a:ln/>
-        </p:spPr>
-        <p:txBody>
-          <a:bodyPr wrap="square" lIns="0" tIns="0" rIns="0" bIns="0" rtlCol="0" anchor="t"/>
+            <a:off x="7571232" y="2212848"/>
+            <a:ext cx="3794760" cy="777240"/>
+          </a:xfrm>
+          <a:prstGeom prst="rect">
+            <a:avLst/>
+          </a:prstGeom>
+          <a:noFill/>
+          <a:ln/>
+        </p:spPr>
+        <p:txBody>
+          <a:bodyPr wrap="square" lIns="0" tIns="0" rIns="0" bIns="0" rtlCol="0" anchor="ctr"/>
+          <a:lstStyle/>
+          <a:p>
+            <a:pPr marL="0" indent="0" algn="l">
+              <a:lnSpc>
+                <a:spcPct val="100000"/>
+              </a:lnSpc>
+              <a:buNone/>
+            </a:pPr>
+            <a:r>
+              <a:rPr lang="en-US" sz="1450" dirty="0">
+                <a:solidFill>
+                  <a:srgbClr val="1E1F24"/>
+                </a:solidFill>
+                <a:latin typeface="Calibri" pitchFamily="34" charset="0"/>
+                <a:ea typeface="Calibri" pitchFamily="34" charset="-122"/>
+                <a:cs typeface="Calibri" pitchFamily="34" charset="-120"/>
+              </a:rPr>
+              <a:t>Nobody has hand-typed a set of pages to check against. No system can be scored, ours or anyone else's.</a:t>
+            </a:r>
+            <a:endParaRPr lang="en-US" sz="1450" dirty="0"/>
+          </a:p>
+        </p:txBody>
+      </p:sp>
+      <p:sp>
+        <p:nvSpPr>
+          <p:cNvPr id="8" name="Shape 6"/>
+          <p:cNvSpPr/>
+          <p:nvPr/>
+        </p:nvSpPr>
+        <p:spPr>
+          <a:xfrm>
+            <a:off x="640080" y="3154680"/>
+            <a:ext cx="10881360" cy="0"/>
+          </a:xfrm>
+          <a:prstGeom prst="line">
+            <a:avLst/>
+          </a:prstGeom>
+          <a:noFill/>
+          <a:ln w="9525">
+            <a:solidFill>
+              <a:srgbClr val="D6D8DD"/>
+            </a:solidFill>
+            <a:prstDash val="solid"/>
+          </a:ln>
+        </p:spPr>
+        <p:txBody>
+          <a:bodyPr/>
+          <a:lstStyle/>
+          <a:p>
+            <a:endParaRPr lang="en-IN"/>
+          </a:p>
+        </p:txBody>
+      </p:sp>
+      <p:sp>
+        <p:nvSpPr>
+          <p:cNvPr id="9" name="Text 7"/>
+          <p:cNvSpPr/>
+          <p:nvPr/>
+        </p:nvSpPr>
+        <p:spPr>
+          <a:xfrm>
+            <a:off x="640080" y="3291840"/>
+            <a:ext cx="502920" cy="640080"/>
+          </a:xfrm>
+          <a:prstGeom prst="rect">
+            <a:avLst/>
+          </a:prstGeom>
+          <a:noFill/>
+          <a:ln/>
+        </p:spPr>
+        <p:txBody>
+          <a:bodyPr wrap="square" lIns="0" tIns="0" rIns="0" bIns="0" rtlCol="0" anchor="ctr"/>
           <a:lstStyle/>
           <a:p>
             <a:pPr marL="0" indent="0" algn="l">
               <a:buNone/>
             </a:pPr>
             <a:r>
-              <a:rPr lang="en-US" sz="1800" dirty="0">
+              <a:rPr lang="en-US" sz="3200" b="1" dirty="0">
+                <a:solidFill>
+                  <a:srgbClr val="7A1F2B"/>
+                </a:solidFill>
+                <a:latin typeface="Cambria" pitchFamily="34" charset="0"/>
+                <a:ea typeface="Cambria" pitchFamily="34" charset="-122"/>
+                <a:cs typeface="Cambria" pitchFamily="34" charset="-120"/>
+              </a:rPr>
+              <a:t>2</a:t>
+            </a:r>
+            <a:endParaRPr lang="en-US" sz="3200" dirty="0"/>
+          </a:p>
+        </p:txBody>
+      </p:sp>
+      <p:sp>
+        <p:nvSpPr>
+          <p:cNvPr id="10" name="Text 8"/>
+          <p:cNvSpPr/>
+          <p:nvPr/>
+        </p:nvSpPr>
+        <p:spPr>
+          <a:xfrm>
+            <a:off x="1280160" y="3291840"/>
+            <a:ext cx="5852160" cy="822960"/>
+          </a:xfrm>
+          <a:prstGeom prst="rect">
+            <a:avLst/>
+          </a:prstGeom>
+          <a:noFill/>
+          <a:ln/>
+        </p:spPr>
+        <p:txBody>
+          <a:bodyPr wrap="square" lIns="0" tIns="0" rIns="0" bIns="0" rtlCol="0" anchor="ctr"/>
+          <a:lstStyle/>
+          <a:p>
+            <a:pPr marL="0" indent="0" algn="l">
+              <a:lnSpc>
+                <a:spcPct val="105000"/>
+              </a:lnSpc>
+              <a:buNone/>
+            </a:pPr>
+            <a:r>
+              <a:rPr lang="en-US" sz="1850" dirty="0">
                 <a:solidFill>
                   <a:srgbClr val="1E1F24"/>
                 </a:solidFill>
@@ -7168,30 +7449,37 @@
                 <a:ea typeface="Calibri" pitchFamily="34" charset="-122"/>
                 <a:cs typeface="Calibri" pitchFamily="34" charset="-120"/>
               </a:rPr>
-              <a:t>One call at ₹1.50 a page returns the text, a category, a one-line summary and the district.</a:t>
-            </a:r>
-            <a:endParaRPr lang="en-US" sz="1800" dirty="0"/>
-          </a:p>
-        </p:txBody>
-      </p:sp>
-      <p:sp>
-        <p:nvSpPr>
-          <p:cNvPr id="8" name="Shape 6"/>
-          <p:cNvSpPr/>
-          <p:nvPr/>
-        </p:nvSpPr>
-        <p:spPr>
-          <a:xfrm>
-            <a:off x="640080" y="3166873"/>
-            <a:ext cx="91440" cy="91440"/>
-          </a:xfrm>
-          <a:prstGeom prst="rect">
-            <a:avLst/>
+              <a:t>We cannot say how often redaction hides too much.</a:t>
+            </a:r>
+            <a:endParaRPr lang="en-US" sz="1850" dirty="0"/>
+          </a:p>
+        </p:txBody>
+      </p:sp>
+      <p:sp>
+        <p:nvSpPr>
+          <p:cNvPr id="11" name="Shape 9"/>
+          <p:cNvSpPr/>
+          <p:nvPr/>
+        </p:nvSpPr>
+        <p:spPr>
+          <a:xfrm>
+            <a:off x="7406640" y="3310128"/>
+            <a:ext cx="4114800" cy="777240"/>
+          </a:xfrm>
+          <a:prstGeom prst="roundRect">
+            <a:avLst>
+              <a:gd name="adj" fmla="val 7059"/>
+            </a:avLst>
           </a:prstGeom>
           <a:solidFill>
-            <a:srgbClr val="7A1F2B"/>
+            <a:srgbClr val="F4F4F6"/>
           </a:solidFill>
-          <a:ln/>
+          <a:ln w="12700">
+            <a:solidFill>
+              <a:srgbClr val="D6D8DD"/>
+            </a:solidFill>
+            <a:prstDash val="solid"/>
+          </a:ln>
         </p:spPr>
         <p:txBody>
           <a:bodyPr/>
@@ -7203,30 +7491,138 @@
       </p:sp>
       <p:sp>
         <p:nvSpPr>
-          <p:cNvPr id="9" name="Text 7"/>
-          <p:cNvSpPr/>
-          <p:nvPr/>
-        </p:nvSpPr>
-        <p:spPr>
-          <a:xfrm>
-            <a:off x="932688" y="3048001"/>
-            <a:ext cx="10607040" cy="411480"/>
-          </a:xfrm>
-          <a:prstGeom prst="rect">
-            <a:avLst/>
-          </a:prstGeom>
-          <a:noFill/>
-          <a:ln/>
-        </p:spPr>
-        <p:txBody>
-          <a:bodyPr wrap="square" lIns="0" tIns="0" rIns="0" bIns="0" rtlCol="0" anchor="t"/>
+          <p:cNvPr id="12" name="Text 10"/>
+          <p:cNvSpPr/>
+          <p:nvPr/>
+        </p:nvSpPr>
+        <p:spPr>
+          <a:xfrm>
+            <a:off x="7571232" y="3310128"/>
+            <a:ext cx="3794760" cy="777240"/>
+          </a:xfrm>
+          <a:prstGeom prst="rect">
+            <a:avLst/>
+          </a:prstGeom>
+          <a:noFill/>
+          <a:ln/>
+        </p:spPr>
+        <p:txBody>
+          <a:bodyPr wrap="square" lIns="0" tIns="0" rIns="0" bIns="0" rtlCol="0" anchor="ctr"/>
+          <a:lstStyle/>
+          <a:p>
+            <a:r>
+              <a:rPr lang="en-US" sz="1450" dirty="0">
+                <a:solidFill>
+                  <a:srgbClr val="1E1F24"/>
+                </a:solidFill>
+                <a:latin typeface="Calibri" pitchFamily="34" charset="0"/>
+                <a:ea typeface="Calibri" pitchFamily="34" charset="-122"/>
+                <a:cs typeface="Calibri" pitchFamily="34" charset="-120"/>
+              </a:rPr>
+              <a:t>We marked what should be hidden. We never marked what should not, so a miss and an over-redaction look the same.</a:t>
+            </a:r>
+            <a:endParaRPr lang="en-US" sz="1450" dirty="0"/>
+          </a:p>
+        </p:txBody>
+      </p:sp>
+      <p:sp>
+        <p:nvSpPr>
+          <p:cNvPr id="13" name="Shape 11"/>
+          <p:cNvSpPr/>
+          <p:nvPr/>
+        </p:nvSpPr>
+        <p:spPr>
+          <a:xfrm>
+            <a:off x="640080" y="4251960"/>
+            <a:ext cx="10881360" cy="0"/>
+          </a:xfrm>
+          <a:prstGeom prst="line">
+            <a:avLst/>
+          </a:prstGeom>
+          <a:noFill/>
+          <a:ln w="9525">
+            <a:solidFill>
+              <a:srgbClr val="D6D8DD"/>
+            </a:solidFill>
+            <a:prstDash val="solid"/>
+          </a:ln>
+        </p:spPr>
+        <p:txBody>
+          <a:bodyPr/>
+          <a:lstStyle/>
+          <a:p>
+            <a:endParaRPr lang="en-IN"/>
+          </a:p>
+        </p:txBody>
+      </p:sp>
+      <p:sp>
+        <p:nvSpPr>
+          <p:cNvPr id="14" name="Text 12"/>
+          <p:cNvSpPr/>
+          <p:nvPr/>
+        </p:nvSpPr>
+        <p:spPr>
+          <a:xfrm>
+            <a:off x="640080" y="4389120"/>
+            <a:ext cx="502920" cy="640080"/>
+          </a:xfrm>
+          <a:prstGeom prst="rect">
+            <a:avLst/>
+          </a:prstGeom>
+          <a:noFill/>
+          <a:ln/>
+        </p:spPr>
+        <p:txBody>
+          <a:bodyPr wrap="square" lIns="0" tIns="0" rIns="0" bIns="0" rtlCol="0" anchor="ctr"/>
           <a:lstStyle/>
           <a:p>
             <a:pPr marL="0" indent="0" algn="l">
               <a:buNone/>
             </a:pPr>
             <a:r>
-              <a:rPr lang="en-US" sz="1800" dirty="0">
+              <a:rPr lang="en-US" sz="3200" b="1" dirty="0">
+                <a:solidFill>
+                  <a:srgbClr val="7A1F2B"/>
+                </a:solidFill>
+                <a:latin typeface="Cambria" pitchFamily="34" charset="0"/>
+                <a:ea typeface="Cambria" pitchFamily="34" charset="-122"/>
+                <a:cs typeface="Cambria" pitchFamily="34" charset="-120"/>
+              </a:rPr>
+              <a:t>3</a:t>
+            </a:r>
+            <a:endParaRPr lang="en-US" sz="3200" dirty="0"/>
+          </a:p>
+        </p:txBody>
+      </p:sp>
+      <p:sp>
+        <p:nvSpPr>
+          <p:cNvPr id="15" name="Text 13"/>
+          <p:cNvSpPr/>
+          <p:nvPr/>
+        </p:nvSpPr>
+        <p:spPr>
+          <a:xfrm>
+            <a:off x="1280160" y="4389120"/>
+            <a:ext cx="5852160" cy="822960"/>
+          </a:xfrm>
+          <a:prstGeom prst="rect">
+            <a:avLst/>
+          </a:prstGeom>
+          <a:noFill/>
+          <a:ln/>
+        </p:spPr>
+        <p:txBody>
+          <a:bodyPr wrap="square" lIns="0" tIns="0" rIns="0" bIns="0" rtlCol="0" anchor="ctr"/>
+          <a:lstStyle/>
+          <a:p>
+            <a:pPr marL="0" indent="0" algn="l">
+              <a:lnSpc>
+                <a:spcPct val="105000"/>
+              </a:lnSpc>
+              <a:buNone/>
+            </a:pPr>
+            <a:r>
+              <a:rPr lang="en-US" sz="1850" dirty="0">
                 <a:solidFill>
                   <a:srgbClr val="1E1F24"/>
                 </a:solidFill>
@@ -7234,22 +7630,98 @@
                 <a:ea typeface="Calibri" pitchFamily="34" charset="-122"/>
                 <a:cs typeface="Calibri" pitchFamily="34" charset="-120"/>
               </a:rPr>
-              <a:t>It reads 22 Indian languages including Odia. Ours reads English.</a:t>
-            </a:r>
-            <a:endParaRPr lang="en-US" sz="1800" dirty="0"/>
-          </a:p>
-        </p:txBody>
-      </p:sp>
-      <p:sp>
-        <p:nvSpPr>
-          <p:cNvPr id="10" name="Text 8"/>
-          <p:cNvSpPr/>
-          <p:nvPr/>
-        </p:nvSpPr>
-        <p:spPr>
-          <a:xfrm>
-            <a:off x="640080" y="3972025"/>
-            <a:ext cx="10881360" cy="292608"/>
+              <a:t>We cannot say it saves officer time.</a:t>
+            </a:r>
+            <a:endParaRPr lang="en-US" sz="1850" dirty="0"/>
+          </a:p>
+        </p:txBody>
+      </p:sp>
+      <p:sp>
+        <p:nvSpPr>
+          <p:cNvPr id="16" name="Shape 14"/>
+          <p:cNvSpPr/>
+          <p:nvPr/>
+        </p:nvSpPr>
+        <p:spPr>
+          <a:xfrm>
+            <a:off x="7406640" y="4407408"/>
+            <a:ext cx="4114800" cy="777240"/>
+          </a:xfrm>
+          <a:prstGeom prst="roundRect">
+            <a:avLst>
+              <a:gd name="adj" fmla="val 7059"/>
+            </a:avLst>
+          </a:prstGeom>
+          <a:solidFill>
+            <a:srgbClr val="F4F4F6"/>
+          </a:solidFill>
+          <a:ln w="12700">
+            <a:solidFill>
+              <a:srgbClr val="D6D8DD"/>
+            </a:solidFill>
+            <a:prstDash val="solid"/>
+          </a:ln>
+        </p:spPr>
+        <p:txBody>
+          <a:bodyPr/>
+          <a:lstStyle/>
+          <a:p>
+            <a:endParaRPr lang="en-IN" b="1"/>
+          </a:p>
+        </p:txBody>
+      </p:sp>
+      <p:sp>
+        <p:nvSpPr>
+          <p:cNvPr id="17" name="Text 15"/>
+          <p:cNvSpPr/>
+          <p:nvPr/>
+        </p:nvSpPr>
+        <p:spPr>
+          <a:xfrm>
+            <a:off x="7571232" y="4407408"/>
+            <a:ext cx="3794760" cy="777240"/>
+          </a:xfrm>
+          <a:prstGeom prst="rect">
+            <a:avLst/>
+          </a:prstGeom>
+          <a:noFill/>
+          <a:ln/>
+        </p:spPr>
+        <p:txBody>
+          <a:bodyPr wrap="square" lIns="0" tIns="0" rIns="0" bIns="0" rtlCol="0" anchor="ctr"/>
+          <a:lstStyle/>
+          <a:p>
+            <a:pPr marL="0" indent="0" algn="l">
+              <a:lnSpc>
+                <a:spcPct val="100000"/>
+              </a:lnSpc>
+              <a:buNone/>
+            </a:pPr>
+            <a:r>
+              <a:rPr lang="en-US" sz="1450" dirty="0">
+                <a:solidFill>
+                  <a:srgbClr val="1E1F24"/>
+                </a:solidFill>
+                <a:latin typeface="Calibri" pitchFamily="34" charset="0"/>
+                <a:ea typeface="Calibri" pitchFamily="34" charset="-122"/>
+                <a:cs typeface="Calibri" pitchFamily="34" charset="-120"/>
+              </a:rPr>
+              <a:t>The 10 to 15 minute baseline is self-reported and was never timed. No trial has been run.</a:t>
+            </a:r>
+            <a:endParaRPr lang="en-US" sz="1450" dirty="0"/>
+          </a:p>
+        </p:txBody>
+      </p:sp>
+      <p:sp>
+        <p:nvSpPr>
+          <p:cNvPr id="18" name="Text 16"/>
+          <p:cNvSpPr/>
+          <p:nvPr/>
+        </p:nvSpPr>
+        <p:spPr>
+          <a:xfrm>
+            <a:off x="640080" y="5577840"/>
+            <a:ext cx="10881360" cy="365760"/>
           </a:xfrm>
           <a:prstGeom prst="rect">
             <a:avLst/>
@@ -7265,30 +7737,30 @@
               <a:buNone/>
             </a:pPr>
             <a:r>
-              <a:rPr lang="en-US" sz="1350" b="1" kern="0" spc="150" dirty="0">
-                <a:solidFill>
-                  <a:srgbClr val="7A1F2B"/>
+              <a:rPr lang="en-US" sz="1650" b="1" i="1" dirty="0">
+                <a:solidFill>
+                  <a:srgbClr val="6C6E76"/>
                 </a:solidFill>
                 <a:latin typeface="Calibri" pitchFamily="34" charset="0"/>
                 <a:ea typeface="Calibri" pitchFamily="34" charset="-122"/>
                 <a:cs typeface="Calibri" pitchFamily="34" charset="-120"/>
               </a:rPr>
-              <a:t>What we established</a:t>
-            </a:r>
-            <a:endParaRPr lang="en-US" sz="1350" dirty="0"/>
-          </a:p>
-        </p:txBody>
-      </p:sp>
-      <p:sp>
-        <p:nvSpPr>
-          <p:cNvPr id="15" name="Text 13"/>
-          <p:cNvSpPr/>
-          <p:nvPr/>
-        </p:nvSpPr>
-        <p:spPr>
-          <a:xfrm>
-            <a:off x="640080" y="5532120"/>
-            <a:ext cx="9144000" cy="457200"/>
+              <a:t>Every figure in this deck was produced by us, on our own data. None of it has been checked by an officer.</a:t>
+            </a:r>
+            <a:endParaRPr lang="en-US" sz="1650" b="1" dirty="0"/>
+          </a:p>
+        </p:txBody>
+      </p:sp>
+      <p:sp>
+        <p:nvSpPr>
+          <p:cNvPr id="19" name="Text 17"/>
+          <p:cNvSpPr/>
+          <p:nvPr/>
+        </p:nvSpPr>
+        <p:spPr>
+          <a:xfrm>
+            <a:off x="640080" y="6419088"/>
+            <a:ext cx="5486400" cy="274320"/>
           </a:xfrm>
           <a:prstGeom prst="rect">
             <a:avLst/>
@@ -7304,29 +7776,29 @@
               <a:buNone/>
             </a:pPr>
             <a:r>
-              <a:rPr lang="en-US" sz="2000" b="1" i="1" dirty="0">
-                <a:solidFill>
-                  <a:srgbClr val="7A1F2B"/>
+              <a:rPr lang="en-US" sz="850" dirty="0">
+                <a:solidFill>
+                  <a:srgbClr val="6C6E76"/>
                 </a:solidFill>
                 <a:latin typeface="Calibri" pitchFamily="34" charset="0"/>
                 <a:ea typeface="Calibri" pitchFamily="34" charset="-122"/>
                 <a:cs typeface="Calibri" pitchFamily="34" charset="-120"/>
               </a:rPr>
-              <a:t>Different is not better. Using it also sends citizen documents outside our control.</a:t>
-            </a:r>
-            <a:endParaRPr lang="en-US" sz="2000" dirty="0"/>
-          </a:p>
-        </p:txBody>
-      </p:sp>
-      <p:sp>
-        <p:nvSpPr>
-          <p:cNvPr id="16" name="Text 14"/>
-          <p:cNvSpPr/>
-          <p:nvPr/>
-        </p:nvSpPr>
-        <p:spPr>
-          <a:xfrm>
-            <a:off x="640080" y="6419088"/>
+              <a:t>Data, Policy and Innovation Centre</a:t>
+            </a:r>
+            <a:endParaRPr lang="en-US" sz="850" dirty="0"/>
+          </a:p>
+        </p:txBody>
+      </p:sp>
+      <p:sp>
+        <p:nvSpPr>
+          <p:cNvPr id="20" name="Text 18"/>
+          <p:cNvSpPr/>
+          <p:nvPr/>
+        </p:nvSpPr>
+        <p:spPr>
+          <a:xfrm>
+            <a:off x="6035040" y="6419088"/>
             <a:ext cx="5486400" cy="274320"/>
           </a:xfrm>
           <a:prstGeom prst="rect">
@@ -7339,7 +7811,7 @@
           <a:bodyPr wrap="square" lIns="0" tIns="0" rIns="0" bIns="0" rtlCol="0" anchor="ctr"/>
           <a:lstStyle/>
           <a:p>
-            <a:pPr marL="0" indent="0" algn="l">
+            <a:pPr marL="0" indent="0" algn="r">
               <a:buNone/>
             </a:pPr>
             <a:r>
@@ -7351,281 +7823,9 @@
                 <a:ea typeface="Calibri" pitchFamily="34" charset="-122"/>
                 <a:cs typeface="Calibri" pitchFamily="34" charset="-120"/>
               </a:rPr>
-              <a:t>Data, Policy and Innovation Centre</a:t>
+              <a:t>Government of Odisha  ×  University of Chicago Trust</a:t>
             </a:r>
             <a:endParaRPr lang="en-US" sz="850" dirty="0"/>
-          </a:p>
-        </p:txBody>
-      </p:sp>
-      <p:sp>
-        <p:nvSpPr>
-          <p:cNvPr id="17" name="Text 15"/>
-          <p:cNvSpPr/>
-          <p:nvPr/>
-        </p:nvSpPr>
-        <p:spPr>
-          <a:xfrm>
-            <a:off x="6035040" y="6419088"/>
-            <a:ext cx="5486400" cy="274320"/>
-          </a:xfrm>
-          <a:prstGeom prst="rect">
-            <a:avLst/>
-          </a:prstGeom>
-          <a:noFill/>
-          <a:ln/>
-        </p:spPr>
-        <p:txBody>
-          <a:bodyPr wrap="square" lIns="0" tIns="0" rIns="0" bIns="0" rtlCol="0" anchor="ctr"/>
-          <a:lstStyle/>
-          <a:p>
-            <a:pPr marL="0" indent="0" algn="r">
-              <a:buNone/>
-            </a:pPr>
-            <a:r>
-              <a:rPr lang="en-US" sz="850" dirty="0">
-                <a:solidFill>
-                  <a:srgbClr val="6C6E76"/>
-                </a:solidFill>
-                <a:latin typeface="Calibri" pitchFamily="34" charset="0"/>
-                <a:ea typeface="Calibri" pitchFamily="34" charset="-122"/>
-                <a:cs typeface="Calibri" pitchFamily="34" charset="-120"/>
-              </a:rPr>
-              <a:t>Government of Odisha  ×  University of Chicago Trust</a:t>
-            </a:r>
-            <a:endParaRPr lang="en-US" sz="850" dirty="0"/>
-          </a:p>
-        </p:txBody>
-      </p:sp>
-      <p:sp>
-        <p:nvSpPr>
-          <p:cNvPr id="27" name="Shape 3">
-            <a:extLst>
-              <a:ext uri="{FF2B5EF4-FFF2-40B4-BE49-F238E27FC236}">
-                <a16:creationId xmlns:a16="http://schemas.microsoft.com/office/drawing/2014/main" id="{8EA7243F-3A2E-791F-90D8-11B33EB858C8}"/>
-              </a:ext>
-            </a:extLst>
-          </p:cNvPr>
-          <p:cNvSpPr/>
-          <p:nvPr/>
-        </p:nvSpPr>
-        <p:spPr>
-          <a:xfrm>
-            <a:off x="632059" y="3571929"/>
-            <a:ext cx="91440" cy="91440"/>
-          </a:xfrm>
-          <a:prstGeom prst="rect">
-            <a:avLst/>
-          </a:prstGeom>
-          <a:solidFill>
-            <a:srgbClr val="7A1F2B"/>
-          </a:solidFill>
-          <a:ln/>
-        </p:spPr>
-        <p:txBody>
-          <a:bodyPr/>
-          <a:lstStyle/>
-          <a:p>
-            <a:endParaRPr lang="en-IN" dirty="0"/>
-          </a:p>
-        </p:txBody>
-      </p:sp>
-      <p:sp>
-        <p:nvSpPr>
-          <p:cNvPr id="29" name="Text 4">
-            <a:extLst>
-              <a:ext uri="{FF2B5EF4-FFF2-40B4-BE49-F238E27FC236}">
-                <a16:creationId xmlns:a16="http://schemas.microsoft.com/office/drawing/2014/main" id="{9F020A29-8C39-EAFD-C8B8-DBAB2A5F634C}"/>
-              </a:ext>
-            </a:extLst>
-          </p:cNvPr>
-          <p:cNvSpPr/>
-          <p:nvPr/>
-        </p:nvSpPr>
-        <p:spPr>
-          <a:xfrm>
-            <a:off x="924667" y="3453057"/>
-            <a:ext cx="10607040" cy="411480"/>
-          </a:xfrm>
-          <a:prstGeom prst="rect">
-            <a:avLst/>
-          </a:prstGeom>
-          <a:noFill/>
-          <a:ln/>
-        </p:spPr>
-        <p:txBody>
-          <a:bodyPr wrap="square" lIns="0" tIns="0" rIns="0" bIns="0" rtlCol="0" anchor="t"/>
-          <a:lstStyle/>
-          <a:p>
-            <a:pPr marL="0" indent="0" algn="l">
-              <a:buNone/>
-            </a:pPr>
-            <a:r>
-              <a:rPr lang="en-US" sz="1800" dirty="0">
-                <a:solidFill>
-                  <a:srgbClr val="1E1F24"/>
-                </a:solidFill>
-                <a:latin typeface="Calibri" pitchFamily="34" charset="0"/>
-                <a:ea typeface="Calibri" pitchFamily="34" charset="-122"/>
-                <a:cs typeface="Calibri" pitchFamily="34" charset="-120"/>
-              </a:rPr>
-              <a:t>It reads handwriting. Ours does not.</a:t>
-            </a:r>
-            <a:endParaRPr lang="en-US" sz="1800" dirty="0"/>
-          </a:p>
-        </p:txBody>
-      </p:sp>
-      <p:sp>
-        <p:nvSpPr>
-          <p:cNvPr id="31" name="Shape 8">
-            <a:extLst>
-              <a:ext uri="{FF2B5EF4-FFF2-40B4-BE49-F238E27FC236}">
-                <a16:creationId xmlns:a16="http://schemas.microsoft.com/office/drawing/2014/main" id="{25210A73-5BE3-463C-04D8-421B6ACD8FD7}"/>
-              </a:ext>
-            </a:extLst>
-          </p:cNvPr>
-          <p:cNvSpPr/>
-          <p:nvPr/>
-        </p:nvSpPr>
-        <p:spPr>
-          <a:xfrm>
-            <a:off x="632059" y="4458260"/>
-            <a:ext cx="91440" cy="91440"/>
-          </a:xfrm>
-          <a:prstGeom prst="rect">
-            <a:avLst/>
-          </a:prstGeom>
-          <a:solidFill>
-            <a:srgbClr val="7A1F2B"/>
-          </a:solidFill>
-          <a:ln/>
-        </p:spPr>
-        <p:txBody>
-          <a:bodyPr/>
-          <a:lstStyle/>
-          <a:p>
-            <a:endParaRPr lang="en-IN"/>
-          </a:p>
-        </p:txBody>
-      </p:sp>
-      <p:sp>
-        <p:nvSpPr>
-          <p:cNvPr id="33" name="Text 9">
-            <a:extLst>
-              <a:ext uri="{FF2B5EF4-FFF2-40B4-BE49-F238E27FC236}">
-                <a16:creationId xmlns:a16="http://schemas.microsoft.com/office/drawing/2014/main" id="{A6157D09-2797-0B89-7747-CE5934045003}"/>
-              </a:ext>
-            </a:extLst>
-          </p:cNvPr>
-          <p:cNvSpPr/>
-          <p:nvPr/>
-        </p:nvSpPr>
-        <p:spPr>
-          <a:xfrm>
-            <a:off x="924667" y="4339388"/>
-            <a:ext cx="10607040" cy="411480"/>
-          </a:xfrm>
-          <a:prstGeom prst="rect">
-            <a:avLst/>
-          </a:prstGeom>
-          <a:noFill/>
-          <a:ln/>
-        </p:spPr>
-        <p:txBody>
-          <a:bodyPr wrap="square" lIns="0" tIns="0" rIns="0" bIns="0" rtlCol="0" anchor="t"/>
-          <a:lstStyle/>
-          <a:p>
-            <a:pPr marL="0" indent="0" algn="l">
-              <a:buNone/>
-            </a:pPr>
-            <a:r>
-              <a:rPr lang="en-US" sz="1800" dirty="0">
-                <a:solidFill>
-                  <a:srgbClr val="1E1F24"/>
-                </a:solidFill>
-                <a:latin typeface="Calibri" pitchFamily="34" charset="0"/>
-                <a:ea typeface="Calibri" pitchFamily="34" charset="-122"/>
-                <a:cs typeface="Calibri" pitchFamily="34" charset="-120"/>
-              </a:rPr>
-              <a:t>On all 61 pages we compared, the two systems produced different text.</a:t>
-            </a:r>
-            <a:endParaRPr lang="en-US" sz="1800" dirty="0"/>
-          </a:p>
-        </p:txBody>
-      </p:sp>
-      <p:sp>
-        <p:nvSpPr>
-          <p:cNvPr id="35" name="Shape 10">
-            <a:extLst>
-              <a:ext uri="{FF2B5EF4-FFF2-40B4-BE49-F238E27FC236}">
-                <a16:creationId xmlns:a16="http://schemas.microsoft.com/office/drawing/2014/main" id="{16BEB2B2-75AE-B017-BEB6-8D7DF2D87DD6}"/>
-              </a:ext>
-            </a:extLst>
-          </p:cNvPr>
-          <p:cNvSpPr/>
-          <p:nvPr/>
-        </p:nvSpPr>
-        <p:spPr>
-          <a:xfrm>
-            <a:off x="632059" y="4961180"/>
-            <a:ext cx="91440" cy="91440"/>
-          </a:xfrm>
-          <a:prstGeom prst="rect">
-            <a:avLst/>
-          </a:prstGeom>
-          <a:solidFill>
-            <a:srgbClr val="7A1F2B"/>
-          </a:solidFill>
-          <a:ln/>
-        </p:spPr>
-        <p:txBody>
-          <a:bodyPr/>
-          <a:lstStyle/>
-          <a:p>
-            <a:endParaRPr lang="en-IN"/>
-          </a:p>
-        </p:txBody>
-      </p:sp>
-      <p:sp>
-        <p:nvSpPr>
-          <p:cNvPr id="37" name="Text 11">
-            <a:extLst>
-              <a:ext uri="{FF2B5EF4-FFF2-40B4-BE49-F238E27FC236}">
-                <a16:creationId xmlns:a16="http://schemas.microsoft.com/office/drawing/2014/main" id="{E4B7C2E5-1571-8403-3E23-54FAD9D0D9A0}"/>
-              </a:ext>
-            </a:extLst>
-          </p:cNvPr>
-          <p:cNvSpPr/>
-          <p:nvPr/>
-        </p:nvSpPr>
-        <p:spPr>
-          <a:xfrm>
-            <a:off x="924667" y="4842308"/>
-            <a:ext cx="10607040" cy="411480"/>
-          </a:xfrm>
-          <a:prstGeom prst="rect">
-            <a:avLst/>
-          </a:prstGeom>
-          <a:noFill/>
-          <a:ln/>
-        </p:spPr>
-        <p:txBody>
-          <a:bodyPr wrap="square" lIns="0" tIns="0" rIns="0" bIns="0" rtlCol="0" anchor="t"/>
-          <a:lstStyle/>
-          <a:p>
-            <a:pPr marL="0" indent="0" algn="l">
-              <a:buNone/>
-            </a:pPr>
-            <a:r>
-              <a:rPr lang="en-US" sz="1800" dirty="0">
-                <a:solidFill>
-                  <a:srgbClr val="1E1F24"/>
-                </a:solidFill>
-                <a:latin typeface="Calibri" pitchFamily="34" charset="0"/>
-                <a:ea typeface="Calibri" pitchFamily="34" charset="-122"/>
-                <a:cs typeface="Calibri" pitchFamily="34" charset="-120"/>
-              </a:rPr>
-              <a:t>The category and summary it returned were never graded against anything.</a:t>
-            </a:r>
           </a:p>
         </p:txBody>
       </p:sp>
@@ -7638,6 +7838,662 @@
 </file>
 
 <file path=ppt/slides/slide23.xml><?xml version="1.0" encoding="utf-8"?>
+<p:sld xmlns:a="http://schemas.openxmlformats.org/drawingml/2006/main" xmlns:p="http://schemas.openxmlformats.org/presentationml/2006/main" xmlns:r="http://schemas.openxmlformats.org/officeDocument/2006/relationships">
+  <p:cSld>
+    <p:spTree>
+      <p:nvGrpSpPr>
+        <p:cNvPr id="1" name=""/>
+        <p:cNvGrpSpPr/>
+        <p:nvPr/>
+      </p:nvGrpSpPr>
+      <p:grpSpPr/>
+      <p:sp>
+        <p:nvSpPr>
+          <p:cNvPr id="2" name="Text 0"/>
+          <p:cNvSpPr/>
+          <p:nvPr/>
+        </p:nvSpPr>
+        <p:spPr>
+          <a:xfrm>
+            <a:off x="640080" y="457200"/>
+            <a:ext cx="10881360" cy="320040"/>
+          </a:xfrm>
+          <a:prstGeom prst="rect">
+            <a:avLst/>
+          </a:prstGeom>
+          <a:noFill/>
+          <a:ln/>
+        </p:spPr>
+        <p:txBody>
+          <a:bodyPr wrap="square" lIns="0" tIns="0" rIns="0" bIns="0" rtlCol="0" anchor="ctr"/>
+          <a:lstStyle/>
+          <a:p>
+            <a:pPr marL="0" indent="0" algn="l">
+              <a:buNone/>
+            </a:pPr>
+            <a:r>
+              <a:rPr lang="en-US" sz="1500" b="1" kern="0" spc="200" dirty="0">
+                <a:solidFill>
+                  <a:srgbClr val="7A1F2B"/>
+                </a:solidFill>
+                <a:latin typeface="Calibri" pitchFamily="34" charset="0"/>
+                <a:ea typeface="Calibri" pitchFamily="34" charset="-122"/>
+                <a:cs typeface="Calibri" pitchFamily="34" charset="-120"/>
+              </a:rPr>
+              <a:t>THE OUTSIDE OPTION: SARVAM</a:t>
+            </a:r>
+            <a:endParaRPr lang="en-US" sz="1500" dirty="0"/>
+          </a:p>
+        </p:txBody>
+      </p:sp>
+      <p:sp>
+        <p:nvSpPr>
+          <p:cNvPr id="3" name="Text 1"/>
+          <p:cNvSpPr/>
+          <p:nvPr/>
+        </p:nvSpPr>
+        <p:spPr>
+          <a:xfrm>
+            <a:off x="640080" y="868680"/>
+            <a:ext cx="10881360" cy="914400"/>
+          </a:xfrm>
+          <a:prstGeom prst="rect">
+            <a:avLst/>
+          </a:prstGeom>
+          <a:noFill/>
+          <a:ln/>
+        </p:spPr>
+        <p:txBody>
+          <a:bodyPr wrap="square" lIns="0" tIns="0" rIns="0" bIns="0" rtlCol="0" anchor="ctr"/>
+          <a:lstStyle/>
+          <a:p>
+            <a:pPr marL="0" indent="0" algn="l">
+              <a:buNone/>
+            </a:pPr>
+            <a:r>
+              <a:rPr lang="en-US" sz="3400" b="1" dirty="0">
+                <a:solidFill>
+                  <a:srgbClr val="1E1F24"/>
+                </a:solidFill>
+                <a:latin typeface="Cambria" pitchFamily="34" charset="0"/>
+                <a:ea typeface="Cambria" pitchFamily="34" charset="-122"/>
+                <a:cs typeface="Cambria" pitchFamily="34" charset="-120"/>
+              </a:rPr>
+              <a:t>It does more. We have not shown it does better</a:t>
+            </a:r>
+            <a:endParaRPr lang="en-US" sz="3400" dirty="0"/>
+          </a:p>
+        </p:txBody>
+      </p:sp>
+      <p:sp>
+        <p:nvSpPr>
+          <p:cNvPr id="5" name="Text 3"/>
+          <p:cNvSpPr/>
+          <p:nvPr/>
+        </p:nvSpPr>
+        <p:spPr>
+          <a:xfrm>
+            <a:off x="640080" y="2179321"/>
+            <a:ext cx="10881360" cy="292608"/>
+          </a:xfrm>
+          <a:prstGeom prst="rect">
+            <a:avLst/>
+          </a:prstGeom>
+          <a:noFill/>
+          <a:ln/>
+        </p:spPr>
+        <p:txBody>
+          <a:bodyPr wrap="square" lIns="0" tIns="0" rIns="0" bIns="0" rtlCol="0" anchor="ctr"/>
+          <a:lstStyle/>
+          <a:p>
+            <a:pPr marL="0" indent="0" algn="l">
+              <a:buNone/>
+            </a:pPr>
+            <a:r>
+              <a:rPr lang="en-US" sz="1350" b="1" kern="0" spc="150" dirty="0">
+                <a:solidFill>
+                  <a:srgbClr val="7A1F2B"/>
+                </a:solidFill>
+                <a:latin typeface="Calibri" pitchFamily="34" charset="0"/>
+                <a:ea typeface="Calibri" pitchFamily="34" charset="-122"/>
+                <a:cs typeface="Calibri" pitchFamily="34" charset="-120"/>
+              </a:rPr>
+              <a:t>What it does</a:t>
+            </a:r>
+            <a:endParaRPr lang="en-US" sz="1350" dirty="0"/>
+          </a:p>
+        </p:txBody>
+      </p:sp>
+      <p:sp>
+        <p:nvSpPr>
+          <p:cNvPr id="6" name="Shape 4"/>
+          <p:cNvSpPr/>
+          <p:nvPr/>
+        </p:nvSpPr>
+        <p:spPr>
+          <a:xfrm>
+            <a:off x="640080" y="2663953"/>
+            <a:ext cx="91440" cy="91440"/>
+          </a:xfrm>
+          <a:prstGeom prst="rect">
+            <a:avLst/>
+          </a:prstGeom>
+          <a:solidFill>
+            <a:srgbClr val="7A1F2B"/>
+          </a:solidFill>
+          <a:ln/>
+        </p:spPr>
+        <p:txBody>
+          <a:bodyPr/>
+          <a:lstStyle/>
+          <a:p>
+            <a:endParaRPr lang="en-IN"/>
+          </a:p>
+        </p:txBody>
+      </p:sp>
+      <p:sp>
+        <p:nvSpPr>
+          <p:cNvPr id="7" name="Text 5"/>
+          <p:cNvSpPr/>
+          <p:nvPr/>
+        </p:nvSpPr>
+        <p:spPr>
+          <a:xfrm>
+            <a:off x="932688" y="2545081"/>
+            <a:ext cx="10607040" cy="411480"/>
+          </a:xfrm>
+          <a:prstGeom prst="rect">
+            <a:avLst/>
+          </a:prstGeom>
+          <a:noFill/>
+          <a:ln/>
+        </p:spPr>
+        <p:txBody>
+          <a:bodyPr wrap="square" lIns="0" tIns="0" rIns="0" bIns="0" rtlCol="0" anchor="t"/>
+          <a:lstStyle/>
+          <a:p>
+            <a:pPr marL="0" indent="0" algn="l">
+              <a:buNone/>
+            </a:pPr>
+            <a:r>
+              <a:rPr lang="en-US" sz="1800" dirty="0">
+                <a:solidFill>
+                  <a:srgbClr val="1E1F24"/>
+                </a:solidFill>
+                <a:latin typeface="Calibri" pitchFamily="34" charset="0"/>
+                <a:ea typeface="Calibri" pitchFamily="34" charset="-122"/>
+                <a:cs typeface="Calibri" pitchFamily="34" charset="-120"/>
+              </a:rPr>
+              <a:t>One call at ₹1.50 a page returns the text, a category, a one-line summary and the district.</a:t>
+            </a:r>
+            <a:endParaRPr lang="en-US" sz="1800" dirty="0"/>
+          </a:p>
+        </p:txBody>
+      </p:sp>
+      <p:sp>
+        <p:nvSpPr>
+          <p:cNvPr id="8" name="Shape 6"/>
+          <p:cNvSpPr/>
+          <p:nvPr/>
+        </p:nvSpPr>
+        <p:spPr>
+          <a:xfrm>
+            <a:off x="640080" y="3166873"/>
+            <a:ext cx="91440" cy="91440"/>
+          </a:xfrm>
+          <a:prstGeom prst="rect">
+            <a:avLst/>
+          </a:prstGeom>
+          <a:solidFill>
+            <a:srgbClr val="7A1F2B"/>
+          </a:solidFill>
+          <a:ln/>
+        </p:spPr>
+        <p:txBody>
+          <a:bodyPr/>
+          <a:lstStyle/>
+          <a:p>
+            <a:endParaRPr lang="en-IN"/>
+          </a:p>
+        </p:txBody>
+      </p:sp>
+      <p:sp>
+        <p:nvSpPr>
+          <p:cNvPr id="9" name="Text 7"/>
+          <p:cNvSpPr/>
+          <p:nvPr/>
+        </p:nvSpPr>
+        <p:spPr>
+          <a:xfrm>
+            <a:off x="932688" y="3048001"/>
+            <a:ext cx="10607040" cy="411480"/>
+          </a:xfrm>
+          <a:prstGeom prst="rect">
+            <a:avLst/>
+          </a:prstGeom>
+          <a:noFill/>
+          <a:ln/>
+        </p:spPr>
+        <p:txBody>
+          <a:bodyPr wrap="square" lIns="0" tIns="0" rIns="0" bIns="0" rtlCol="0" anchor="t"/>
+          <a:lstStyle/>
+          <a:p>
+            <a:pPr marL="0" indent="0" algn="l">
+              <a:buNone/>
+            </a:pPr>
+            <a:r>
+              <a:rPr lang="en-US" sz="1800" dirty="0">
+                <a:solidFill>
+                  <a:srgbClr val="1E1F24"/>
+                </a:solidFill>
+                <a:latin typeface="Calibri" pitchFamily="34" charset="0"/>
+                <a:ea typeface="Calibri" pitchFamily="34" charset="-122"/>
+                <a:cs typeface="Calibri" pitchFamily="34" charset="-120"/>
+              </a:rPr>
+              <a:t>It reads 22 Indian languages including Odia. Ours reads English.</a:t>
+            </a:r>
+            <a:endParaRPr lang="en-US" sz="1800" dirty="0"/>
+          </a:p>
+        </p:txBody>
+      </p:sp>
+      <p:sp>
+        <p:nvSpPr>
+          <p:cNvPr id="10" name="Text 8"/>
+          <p:cNvSpPr/>
+          <p:nvPr/>
+        </p:nvSpPr>
+        <p:spPr>
+          <a:xfrm>
+            <a:off x="640080" y="3972025"/>
+            <a:ext cx="10881360" cy="292608"/>
+          </a:xfrm>
+          <a:prstGeom prst="rect">
+            <a:avLst/>
+          </a:prstGeom>
+          <a:noFill/>
+          <a:ln/>
+        </p:spPr>
+        <p:txBody>
+          <a:bodyPr wrap="square" lIns="0" tIns="0" rIns="0" bIns="0" rtlCol="0" anchor="ctr"/>
+          <a:lstStyle/>
+          <a:p>
+            <a:pPr marL="0" indent="0" algn="l">
+              <a:buNone/>
+            </a:pPr>
+            <a:r>
+              <a:rPr lang="en-US" sz="1350" b="1" kern="0" spc="150" dirty="0">
+                <a:solidFill>
+                  <a:srgbClr val="7A1F2B"/>
+                </a:solidFill>
+                <a:latin typeface="Calibri" pitchFamily="34" charset="0"/>
+                <a:ea typeface="Calibri" pitchFamily="34" charset="-122"/>
+                <a:cs typeface="Calibri" pitchFamily="34" charset="-120"/>
+              </a:rPr>
+              <a:t>What we established</a:t>
+            </a:r>
+            <a:endParaRPr lang="en-US" sz="1350" dirty="0"/>
+          </a:p>
+        </p:txBody>
+      </p:sp>
+      <p:sp>
+        <p:nvSpPr>
+          <p:cNvPr id="15" name="Text 13"/>
+          <p:cNvSpPr/>
+          <p:nvPr/>
+        </p:nvSpPr>
+        <p:spPr>
+          <a:xfrm>
+            <a:off x="640080" y="5532120"/>
+            <a:ext cx="9144000" cy="457200"/>
+          </a:xfrm>
+          <a:prstGeom prst="rect">
+            <a:avLst/>
+          </a:prstGeom>
+          <a:noFill/>
+          <a:ln/>
+        </p:spPr>
+        <p:txBody>
+          <a:bodyPr wrap="square" lIns="0" tIns="0" rIns="0" bIns="0" rtlCol="0" anchor="ctr"/>
+          <a:lstStyle/>
+          <a:p>
+            <a:pPr marL="0" indent="0" algn="l">
+              <a:buNone/>
+            </a:pPr>
+            <a:r>
+              <a:rPr lang="en-US" sz="2000" b="1" i="1" dirty="0">
+                <a:solidFill>
+                  <a:srgbClr val="7A1F2B"/>
+                </a:solidFill>
+                <a:latin typeface="Calibri" pitchFamily="34" charset="0"/>
+                <a:ea typeface="Calibri" pitchFamily="34" charset="-122"/>
+                <a:cs typeface="Calibri" pitchFamily="34" charset="-120"/>
+              </a:rPr>
+              <a:t>Different is not better. Using it also sends citizen documents outside our control.</a:t>
+            </a:r>
+            <a:endParaRPr lang="en-US" sz="2000" dirty="0"/>
+          </a:p>
+        </p:txBody>
+      </p:sp>
+      <p:sp>
+        <p:nvSpPr>
+          <p:cNvPr id="16" name="Text 14"/>
+          <p:cNvSpPr/>
+          <p:nvPr/>
+        </p:nvSpPr>
+        <p:spPr>
+          <a:xfrm>
+            <a:off x="640080" y="6419088"/>
+            <a:ext cx="5486400" cy="274320"/>
+          </a:xfrm>
+          <a:prstGeom prst="rect">
+            <a:avLst/>
+          </a:prstGeom>
+          <a:noFill/>
+          <a:ln/>
+        </p:spPr>
+        <p:txBody>
+          <a:bodyPr wrap="square" lIns="0" tIns="0" rIns="0" bIns="0" rtlCol="0" anchor="ctr"/>
+          <a:lstStyle/>
+          <a:p>
+            <a:pPr marL="0" indent="0" algn="l">
+              <a:buNone/>
+            </a:pPr>
+            <a:r>
+              <a:rPr lang="en-US" sz="850" dirty="0">
+                <a:solidFill>
+                  <a:srgbClr val="6C6E76"/>
+                </a:solidFill>
+                <a:latin typeface="Calibri" pitchFamily="34" charset="0"/>
+                <a:ea typeface="Calibri" pitchFamily="34" charset="-122"/>
+                <a:cs typeface="Calibri" pitchFamily="34" charset="-120"/>
+              </a:rPr>
+              <a:t>Data, Policy and Innovation Centre</a:t>
+            </a:r>
+            <a:endParaRPr lang="en-US" sz="850" dirty="0"/>
+          </a:p>
+        </p:txBody>
+      </p:sp>
+      <p:sp>
+        <p:nvSpPr>
+          <p:cNvPr id="17" name="Text 15"/>
+          <p:cNvSpPr/>
+          <p:nvPr/>
+        </p:nvSpPr>
+        <p:spPr>
+          <a:xfrm>
+            <a:off x="6035040" y="6419088"/>
+            <a:ext cx="5486400" cy="274320"/>
+          </a:xfrm>
+          <a:prstGeom prst="rect">
+            <a:avLst/>
+          </a:prstGeom>
+          <a:noFill/>
+          <a:ln/>
+        </p:spPr>
+        <p:txBody>
+          <a:bodyPr wrap="square" lIns="0" tIns="0" rIns="0" bIns="0" rtlCol="0" anchor="ctr"/>
+          <a:lstStyle/>
+          <a:p>
+            <a:pPr marL="0" indent="0" algn="r">
+              <a:buNone/>
+            </a:pPr>
+            <a:r>
+              <a:rPr lang="en-US" sz="850" dirty="0">
+                <a:solidFill>
+                  <a:srgbClr val="6C6E76"/>
+                </a:solidFill>
+                <a:latin typeface="Calibri" pitchFamily="34" charset="0"/>
+                <a:ea typeface="Calibri" pitchFamily="34" charset="-122"/>
+                <a:cs typeface="Calibri" pitchFamily="34" charset="-120"/>
+              </a:rPr>
+              <a:t>Government of Odisha  ×  University of Chicago Trust</a:t>
+            </a:r>
+            <a:endParaRPr lang="en-US" sz="850" dirty="0"/>
+          </a:p>
+        </p:txBody>
+      </p:sp>
+      <p:sp>
+        <p:nvSpPr>
+          <p:cNvPr id="27" name="Shape 3">
+            <a:extLst>
+              <a:ext uri="{FF2B5EF4-FFF2-40B4-BE49-F238E27FC236}">
+                <a16:creationId xmlns:a16="http://schemas.microsoft.com/office/drawing/2014/main" id="{8EA7243F-3A2E-791F-90D8-11B33EB858C8}"/>
+              </a:ext>
+            </a:extLst>
+          </p:cNvPr>
+          <p:cNvSpPr/>
+          <p:nvPr/>
+        </p:nvSpPr>
+        <p:spPr>
+          <a:xfrm>
+            <a:off x="632059" y="3571929"/>
+            <a:ext cx="91440" cy="91440"/>
+          </a:xfrm>
+          <a:prstGeom prst="rect">
+            <a:avLst/>
+          </a:prstGeom>
+          <a:solidFill>
+            <a:srgbClr val="7A1F2B"/>
+          </a:solidFill>
+          <a:ln/>
+        </p:spPr>
+        <p:txBody>
+          <a:bodyPr/>
+          <a:lstStyle/>
+          <a:p>
+            <a:endParaRPr lang="en-IN" dirty="0"/>
+          </a:p>
+        </p:txBody>
+      </p:sp>
+      <p:sp>
+        <p:nvSpPr>
+          <p:cNvPr id="29" name="Text 4">
+            <a:extLst>
+              <a:ext uri="{FF2B5EF4-FFF2-40B4-BE49-F238E27FC236}">
+                <a16:creationId xmlns:a16="http://schemas.microsoft.com/office/drawing/2014/main" id="{9F020A29-8C39-EAFD-C8B8-DBAB2A5F634C}"/>
+              </a:ext>
+            </a:extLst>
+          </p:cNvPr>
+          <p:cNvSpPr/>
+          <p:nvPr/>
+        </p:nvSpPr>
+        <p:spPr>
+          <a:xfrm>
+            <a:off x="924667" y="3453057"/>
+            <a:ext cx="10607040" cy="411480"/>
+          </a:xfrm>
+          <a:prstGeom prst="rect">
+            <a:avLst/>
+          </a:prstGeom>
+          <a:noFill/>
+          <a:ln/>
+        </p:spPr>
+        <p:txBody>
+          <a:bodyPr wrap="square" lIns="0" tIns="0" rIns="0" bIns="0" rtlCol="0" anchor="t"/>
+          <a:lstStyle/>
+          <a:p>
+            <a:pPr marL="0" indent="0" algn="l">
+              <a:buNone/>
+            </a:pPr>
+            <a:r>
+              <a:rPr lang="en-US" sz="1800" dirty="0">
+                <a:solidFill>
+                  <a:srgbClr val="1E1F24"/>
+                </a:solidFill>
+                <a:latin typeface="Calibri" pitchFamily="34" charset="0"/>
+                <a:ea typeface="Calibri" pitchFamily="34" charset="-122"/>
+                <a:cs typeface="Calibri" pitchFamily="34" charset="-120"/>
+              </a:rPr>
+              <a:t>It reads handwriting. Ours does not.</a:t>
+            </a:r>
+            <a:endParaRPr lang="en-US" sz="1800" dirty="0"/>
+          </a:p>
+        </p:txBody>
+      </p:sp>
+      <p:sp>
+        <p:nvSpPr>
+          <p:cNvPr id="31" name="Shape 8">
+            <a:extLst>
+              <a:ext uri="{FF2B5EF4-FFF2-40B4-BE49-F238E27FC236}">
+                <a16:creationId xmlns:a16="http://schemas.microsoft.com/office/drawing/2014/main" id="{25210A73-5BE3-463C-04D8-421B6ACD8FD7}"/>
+              </a:ext>
+            </a:extLst>
+          </p:cNvPr>
+          <p:cNvSpPr/>
+          <p:nvPr/>
+        </p:nvSpPr>
+        <p:spPr>
+          <a:xfrm>
+            <a:off x="632059" y="4458260"/>
+            <a:ext cx="91440" cy="91440"/>
+          </a:xfrm>
+          <a:prstGeom prst="rect">
+            <a:avLst/>
+          </a:prstGeom>
+          <a:solidFill>
+            <a:srgbClr val="7A1F2B"/>
+          </a:solidFill>
+          <a:ln/>
+        </p:spPr>
+        <p:txBody>
+          <a:bodyPr/>
+          <a:lstStyle/>
+          <a:p>
+            <a:endParaRPr lang="en-IN"/>
+          </a:p>
+        </p:txBody>
+      </p:sp>
+      <p:sp>
+        <p:nvSpPr>
+          <p:cNvPr id="33" name="Text 9">
+            <a:extLst>
+              <a:ext uri="{FF2B5EF4-FFF2-40B4-BE49-F238E27FC236}">
+                <a16:creationId xmlns:a16="http://schemas.microsoft.com/office/drawing/2014/main" id="{A6157D09-2797-0B89-7747-CE5934045003}"/>
+              </a:ext>
+            </a:extLst>
+          </p:cNvPr>
+          <p:cNvSpPr/>
+          <p:nvPr/>
+        </p:nvSpPr>
+        <p:spPr>
+          <a:xfrm>
+            <a:off x="924667" y="4339388"/>
+            <a:ext cx="10607040" cy="411480"/>
+          </a:xfrm>
+          <a:prstGeom prst="rect">
+            <a:avLst/>
+          </a:prstGeom>
+          <a:noFill/>
+          <a:ln/>
+        </p:spPr>
+        <p:txBody>
+          <a:bodyPr wrap="square" lIns="0" tIns="0" rIns="0" bIns="0" rtlCol="0" anchor="t"/>
+          <a:lstStyle/>
+          <a:p>
+            <a:pPr marL="0" indent="0" algn="l">
+              <a:buNone/>
+            </a:pPr>
+            <a:r>
+              <a:rPr lang="en-US" sz="1800" dirty="0">
+                <a:solidFill>
+                  <a:srgbClr val="1E1F24"/>
+                </a:solidFill>
+                <a:latin typeface="Calibri" pitchFamily="34" charset="0"/>
+                <a:ea typeface="Calibri" pitchFamily="34" charset="-122"/>
+                <a:cs typeface="Calibri" pitchFamily="34" charset="-120"/>
+              </a:rPr>
+              <a:t>On all 61 pages we compared, the two systems produced different text.</a:t>
+            </a:r>
+            <a:endParaRPr lang="en-US" sz="1800" dirty="0"/>
+          </a:p>
+        </p:txBody>
+      </p:sp>
+      <p:sp>
+        <p:nvSpPr>
+          <p:cNvPr id="35" name="Shape 10">
+            <a:extLst>
+              <a:ext uri="{FF2B5EF4-FFF2-40B4-BE49-F238E27FC236}">
+                <a16:creationId xmlns:a16="http://schemas.microsoft.com/office/drawing/2014/main" id="{16BEB2B2-75AE-B017-BEB6-8D7DF2D87DD6}"/>
+              </a:ext>
+            </a:extLst>
+          </p:cNvPr>
+          <p:cNvSpPr/>
+          <p:nvPr/>
+        </p:nvSpPr>
+        <p:spPr>
+          <a:xfrm>
+            <a:off x="632059" y="4961180"/>
+            <a:ext cx="91440" cy="91440"/>
+          </a:xfrm>
+          <a:prstGeom prst="rect">
+            <a:avLst/>
+          </a:prstGeom>
+          <a:solidFill>
+            <a:srgbClr val="7A1F2B"/>
+          </a:solidFill>
+          <a:ln/>
+        </p:spPr>
+        <p:txBody>
+          <a:bodyPr/>
+          <a:lstStyle/>
+          <a:p>
+            <a:endParaRPr lang="en-IN"/>
+          </a:p>
+        </p:txBody>
+      </p:sp>
+      <p:sp>
+        <p:nvSpPr>
+          <p:cNvPr id="37" name="Text 11">
+            <a:extLst>
+              <a:ext uri="{FF2B5EF4-FFF2-40B4-BE49-F238E27FC236}">
+                <a16:creationId xmlns:a16="http://schemas.microsoft.com/office/drawing/2014/main" id="{E4B7C2E5-1571-8403-3E23-54FAD9D0D9A0}"/>
+              </a:ext>
+            </a:extLst>
+          </p:cNvPr>
+          <p:cNvSpPr/>
+          <p:nvPr/>
+        </p:nvSpPr>
+        <p:spPr>
+          <a:xfrm>
+            <a:off x="924667" y="4842308"/>
+            <a:ext cx="10607040" cy="411480"/>
+          </a:xfrm>
+          <a:prstGeom prst="rect">
+            <a:avLst/>
+          </a:prstGeom>
+          <a:noFill/>
+          <a:ln/>
+        </p:spPr>
+        <p:txBody>
+          <a:bodyPr wrap="square" lIns="0" tIns="0" rIns="0" bIns="0" rtlCol="0" anchor="t"/>
+          <a:lstStyle/>
+          <a:p>
+            <a:pPr marL="0" indent="0" algn="l">
+              <a:buNone/>
+            </a:pPr>
+            <a:r>
+              <a:rPr lang="en-US" sz="1800" dirty="0">
+                <a:solidFill>
+                  <a:srgbClr val="1E1F24"/>
+                </a:solidFill>
+                <a:latin typeface="Calibri" pitchFamily="34" charset="0"/>
+                <a:ea typeface="Calibri" pitchFamily="34" charset="-122"/>
+                <a:cs typeface="Calibri" pitchFamily="34" charset="-120"/>
+              </a:rPr>
+              <a:t>The category and summary it returned were never graded against anything.</a:t>
+            </a:r>
+          </a:p>
+        </p:txBody>
+      </p:sp>
+    </p:spTree>
+  </p:cSld>
+  <p:clrMapOvr>
+    <a:masterClrMapping/>
+  </p:clrMapOvr>
+</p:sld>
+</file>
+
+<file path=ppt/slides/slide24.xml><?xml version="1.0" encoding="utf-8"?>
 <p:sld xmlns:a="http://schemas.openxmlformats.org/drawingml/2006/main" xmlns:p="http://schemas.openxmlformats.org/presentationml/2006/main" xmlns:r="http://schemas.openxmlformats.org/officeDocument/2006/relationships">
   <p:cSld>
     <p:spTree>

--- a/docs/presentations/2026-08-24-timing-quality/Janasunani_2.0_Timing_and_Quality.pptx
+++ b/docs/presentations/2026-08-24-timing-quality/Janasunani_2.0_Timing_and_Quality.pptx
@@ -18,6 +18,7 @@
     <p:sldId id="277" r:id="rId27"/>
     <p:sldId id="278" r:id="rId28"/>
     <p:sldId id="279" r:id="rId29"/>
+    <p:sldId id="280" r:id="rId30"/>
   </p:sldIdLst>
   <p:sldSz cx="12192000" cy="6858000"/>
   <p:notesSz cx="6858000" cy="12192000"/>
@@ -628,22 +629,7 @@
           <a:p/>
           <a:p>
             <a:r>
-              <a:t>ROW 3, THE OUTCOME MODEL. Design of record is docs/experiments/routing-outcome-model.tex, 42 pages. It asks a different question from the rows above: not where a grievance was sent, but whether sending it elsewhere would have closed it faster without losing whether action was taken.</a:t>
-            </a:r>
-          </a:p>
-          <a:p>
-            <a:r>
-              <a:t>  Treatment is the department and the complete role chain chosen together at assignment, the intention to route. Outcome is days to closure capped at 365, with inverse-probability censoring weights so cases still open at the snapshot do not silently drop out. Two estimators are reported separately: a direct outcome model and an augmented, doubly-robust one.</a:t>
-            </a:r>
-          </a:p>
-          <a:p>
-            <a:r>
-              <a:t>  Result: validation 2024 gave +26.77 days (SE 4.04). The untouched 2025 test year gave -2.35 (SE 3.50). No routing gain is established and no recommendation is published.</a:t>
-            </a:r>
-          </a:p>
-          <a:p>
-            <a:r>
-              <a:t>  Why it failed, if pushed. Positivity breaks: on the test year only 15.6% of cases have the recommended route anywhere in observed support, and effective sample size falls to 7% of n, so the direct estimator is extrapolating into empty cells. The design document also states plainly that its no-interference assumption 'in a queueing system is false' — route everyone to the fast office and it stops being fast. Unconfoundedness is invoked on an information set smaller than the officer's, missing congestion and trailing destination performance. And the test year is a seven-month window being asked about a 365-day outcome, so replication and truncation cannot be separated.</a:t>
+              <a:t>THE OUTCOME MODEL IS NOT THIS SLIDE. Everything here predicts where a grievance was sent. Whether sending it elsewhere would have resolved it better is slides 7 and 8, it is research-only, and no serving provider reads it. Keep the two apart when answering.</a:t>
             </a:r>
           </a:p>
           <a:p/>
@@ -667,7 +653,7 @@
           <a:p/>
           <a:p>
             <a:r>
-              <a:t>WITHDRAWN, do not use: the in-sample crosswalk figures 60.9 / 67.5 / 72.8, which are resubstitution. And any routing time saving: an estimated 11 to 23 day gain held on validation 2024 and failed on the untouched 2025 test year at -2.35 days against a standard error of 3.50. Withdrawn 23 August, commits 879c24c and 365e3b4.</a:t>
+              <a:t>WITHDRAWN, do not use: the in-sample crosswalk figures 60.9 / 67.5 / 72.8, which are resubstitution. Any routing time saving is withdrawn too; slide 8 carries that warning.</a:t>
             </a:r>
           </a:p>
         </p:txBody>
@@ -737,7 +723,7 @@
           <a:p/>
           <a:p>
             <a:r>
-              <a:t>It is also the weak point. The constraint is derived from the closing remark after the fact, so the population is conditioned on resolution and does not identify intake-time actionability. That is one reason the estimate on the next slide did not hold.</a:t>
+              <a:t>It is also the weak point. The constraint is derived from the closing remark after the fact, so the population is conditioned on resolution and does not identify intake-time actionability. It is on the unresolved list at slide 8, and one reason the estimate there did not hold.</a:t>
             </a:r>
           </a:p>
           <a:p/>
@@ -801,76 +787,37 @@
           <a:lstStyle/>
           <a:p>
             <a:r>
-              <a:t>Ninety seconds. The table is the argument; do not narrate every row.</a:t>
+              <a:t>This slide is the design. The next one is why it is not live. Do not merge them.</a:t>
             </a:r>
           </a:p>
           <a:p/>
           <a:p>
             <a:r>
-              <a:t>Say: on 2024 the two estimators land 2.3 days apart. On 2025 they land 33 apart. Same code, same pipeline, one year later. When a direct and a doubly-robust estimator diverge like that, the divergence measures missing overlap. It is not a choice between two answers.</a:t>
+              <a:t>TREATMENT is the department and the complete role chain chosen jointly at assignment, the intention to route rather than the final state. ESTIMAND is capped RMST at 365 days.</a:t>
             </a:r>
           </a:p>
           <a:p/>
           <a:p>
             <a:r>
-              <a:t>SOURCES, live 19 August refit. ope_val_ridge.json (n=450,567) and ope_test_ridge.json (n=113,535), both under outputs/experiments/routing_outcome/. Row 1 is delta_direct, 24.50 and 30.53. Row 2 is delta_dr, 26.77 (SE 4.04) and -2.35 (SE 3.50). Row 3 is the historical arm, where v_dr is the observed IPCW mean and v_direct is the model's prediction of it: 97.84 against 93.22 on validation, 108.69 against 49.74 on test. Row 4 is overlap.match_rate, 0.380 and 0.156. Row 5 is censoring_rate_of_split, 0.092 and 0.344.</a:t>
+              <a:t>THE CONSTRAINT IS THE POINT, and it is what slide 6 was for. The objective minimises expected capped duration SUBJECT TO the action rate holding at its historical level. It is never conditional on the realised outcome, which would condition on a post-treatment variable. Unconstrained duration minimisation selects for closing cases untouched, because closure is an action the officer controls directly. Design document, section 2: 'The first instinct is to minimise time to closure. This fails, instructively.'</a:t>
             </a:r>
           </a:p>
           <a:p/>
           <a:p>
             <a:r>
-              <a:t>DO NOT USE routing-outcome-ope-val-ridge-2026-08-13.json. Its validation match rate of 0.536 and its +20.1 belong to the withdrawn run and it sits in docs/experiments/superseded/. Quoting it to dramatise the collapse re-cites the thing we retracted.</a:t>
+              <a:t>THE THREE STAGES. Ridge and gradient boosting are carried separately rather than ensembled, so model-family disagreement stays visible. It later mattered. The action classifier is isotonic-calibrated, test ECE 0.0615 and AUC 0.7425. The threshold is the smallest floor meeting the constraint. Verification puts the direct outcome regression against the augmented estimator on the arm where history happened to match the proposed route, which is the only place a model prediction can be checked against an observed outcome.</a:t>
             </a:r>
           </a:p>
           <a:p/>
           <a:p>
             <a:r>
-              <a:t>'So which estimator do you believe?' Neither, on the test year. The direct one extrapolates into cells where the recommended route was never taken, and row 3 shows it is 118% wrong on the one arm we can check. The doubly-robust one down-weights those cells, leaving an effective sample of 7% of n. The honest statement is that the test year cannot answer the question.</a:t>
+              <a:t>THE FIREWALL, if asked what is running today. Historical-route prediction is live and is slide 5. This work has no serving provider, no egress route, and no deployment recommendation. The two answer different questions: where similar grievances were sent, against where they would have resolved better.</a:t>
             </a:r>
           </a:p>
           <a:p/>
           <a:p>
             <a:r>
-              <a:t>'Is this replication failure or truncation?' They cannot be separated in this design. The snapshot is 2025-07-30, so the cohort has at most seven months against a 365-day outcome and censoring runs 3.1%, 9.2%, 34.4%. Answering it needs a later snapshot, not a better estimator.</a:t>
-            </a:r>
-          </a:p>
-          <a:p/>
-          <a:p>
-            <a:r>
-              <a:t>'What about a different outcome model?' Boosting instead of ridge gives 12.40 on validation against ridge's 26.77, and 0.15 on test against -2.35. The two families disagree by a factor of two on the year that looked positive and agree on zero for the year that did not. The validation gain was never stable either.</a:t>
-            </a:r>
-          </a:p>
-          <a:p/>
-          <a:p>
-            <a:r>
-              <a:t>Only if pushed further:</a:t>
-            </a:r>
-          </a:p>
-          <a:p>
-            <a:r>
-              <a:t>- No interference is assumed, and the design document says that assumption 'in a queueing system is false'. Route everyone to the fast office and it stops being fast. That bounds any future version of this exercise.</a:t>
-            </a:r>
-          </a:p>
-          <a:p>
-            <a:r>
-              <a:t>- Unconfoundedness is invoked on less information than the assigning officer had. Congestion and trailing destination performance are absent from the covariates.</a:t>
-            </a:r>
-          </a:p>
-          <a:p>
-            <a:r>
-              <a:t>- Treatment provenance is unresolved. dept_id and vchAllEscUser may record final state rather than the initial assignment.</a:t>
-            </a:r>
-          </a:p>
-          <a:p/>
-          <a:p>
-            <a:r>
-              <a:t>WITHDRAWN, do not use: any routing time saving, including the 11 to 23 day band. Do not present it as conservative, provisional or pending. There is no estimate.</a:t>
-            </a:r>
-          </a:p>
-          <a:p/>
-          <a:p>
-            <a:r>
-              <a:t>What we are NOT saying: that routing gains do not exist. We are saying this design on this data cannot detect one.</a:t>
+              <a:t>SOURCES. Design of record is docs/experiments/routing-outcome-model.tex, 42 pages. Appendices A to F carry the efficient influence function, Neyman orthogonality, the censoring argument and a marginal sensitivity model. He may ask whether they exist. They do. Plain-prose companion is janasunani/experiments/routing_outcome/README.md. Live path is janasunani/routing/provider.py.</a:t>
             </a:r>
           </a:p>
         </p:txBody>
@@ -916,37 +863,73 @@
           <a:lstStyle/>
           <a:p>
             <a:r>
-              <a:t>Do not cut this slide for time. It is the one that makes the rest credible.</a:t>
+              <a:t>Ninety seconds. The table is the argument; do not narrate every row.</a:t>
             </a:r>
           </a:p>
           <a:p/>
           <a:p>
             <a:r>
-              <a:t>1. OCR ground truth was never commissioned and has no owner, issue #53. It cannot be produced by an agent, because it is the answer key an agent would be scored against.</a:t>
+              <a:t>THE HEADLINE. The two estimators diverge by 33 days on 2025, 30.53 against -2.35, against 2.3 days on 2024. Under correct specification they estimate the same functional. Divergence of that size is a positivity diagnostic, not a menu to choose from.</a:t>
             </a:r>
           </a:p>
           <a:p/>
           <a:p>
             <a:r>
-              <a:t>2. 824 predicted spans against 480 marked. The recogniser over-fires, and the gold set cannot separate a missed label from an over-redaction. Filed as open.</a:t>
+              <a:t>ROW 3 IS THE ONE TO DWELL ON. It is the falsification that localises the failure. On the historical arm, the one arm where truth is observed, the direct estimator predicts 108.69 against an observed IPCW mean of 49.74. It is 118% wrong where it can be checked, and it was 5% wrong on 2024. AIPW down-weights the cells driving that error and lands at an effective sample of 8,291 on n=113,535.</a:t>
             </a:r>
           </a:p>
           <a:p/>
           <a:p>
             <a:r>
-              <a:t>3. The officer-hours figure that circulates, 201,000 to 302,000 across 1,209,144 resolved cases, is a denominator and not a saving. It is the size of the prize, not anything realised.</a:t>
+              <a:t>SOURCES, live 19 August refit, both under outputs/experiments/routing_outcome/. ope_val_ridge.json (n=450,567) and ope_test_ridge.json (n=113,535). Row 1 delta_direct, 24.50 and 30.53. Row 2 delta_dr, 26.77 (SE 4.04) and -2.35 (SE 3.50). Row 3 v_direct against v_dr on the historical arm, 97.84 against 93.22 then 108.69 against 49.74. Row 4 overlap.match_rate, 0.380 and 0.156. Row 5 ess over n, 87,569 and 8,291 against the respective sample sizes. Censoring is censoring_rate_of_split, 0.092 and 0.344. Governed aggregate is docs/experiments/routing-outcome-evidence-2026-08-19.json, model commit 05f50da, a DVC dependency of the benchmark bundle. Status line in docs/QUALITY_BENCHMARKS.md, section 'Routing, outcome not destination': no routing gain established.</a:t>
             </a:r>
           </a:p>
           <a:p/>
           <a:p>
             <a:r>
-              <a:t>Two more we do not claim, if asked: no gain from duplicate detection beyond the 37,299 repeats officers already confirmed, and no accuracy result for the outside option on slide 6.</a:t>
+              <a:t>'Which estimator do you believe?' Neither, on the test year. Row 3 disqualifies the direct one. The augmented one is honest about how little support remains and cannot resolve anything at that effective sample. The test year cannot answer the question.</a:t>
             </a:r>
           </a:p>
           <a:p/>
           <a:p>
             <a:r>
-              <a:t>If someone asks why so little is claimed: because the alternative is claiming things we cannot defend, and this deck has to survive the room checking it.</a:t>
+              <a:t>'Is this non-replication or immature follow-up?' Not separable in this design. The snapshot is 2025-07-30, so the cohort has at most seven months against a 365-day outcome and censoring runs 3.1%, 9.2%, 34.4%. It needs a later snapshot, not a better estimator.</a:t>
+            </a:r>
+          </a:p>
+          <a:p/>
+          <a:p>
+            <a:r>
+              <a:t>'A different outcome model?' Boosting gives 12.40 on validation against ridge's 26.77, and 0.15 on test against -2.35. The families disagree by a factor of two on the year that looked positive and agree on zero for the year that did not. The 2024 gain was never stable.</a:t>
+            </a:r>
+          </a:p>
+          <a:p/>
+          <a:p>
+            <a:r>
+              <a:t>ON THE UNRESOLVED LINE. Unconfoundedness is invoked on an information set smaller than the assigning officer's; congestion and trailing destination performance are absent from the covariates. Treatment provenance is open, since dept_id and vchAllEscUser may record final state rather than initial assignment. No interference is assumed, and the design document says that assumption 'in a queueing system is false'. Route everyone to the fast office and it stops being fast. That bounds any future version of this exercise.</a:t>
+            </a:r>
+          </a:p>
+          <a:p/>
+          <a:p>
+            <a:r>
+              <a:t>THE CORRECTNESS FRONTIER was withdrawn separately, issue #284, pending corrected regeneration. Its augmented score was normalised over all evaluation rows before being restricted to rows carrying an observed correctness label, while the direct value used the full population. tau_star is null.</a:t>
+            </a:r>
+          </a:p>
+          <a:p/>
+          <a:p>
+            <a:r>
+              <a:t>WITHDRAWN, do not use: any routing time saving, including the 11 to 23 day band. Do not present it as conservative, provisional or pending. There is no estimate.</a:t>
+            </a:r>
+          </a:p>
+          <a:p/>
+          <a:p>
+            <a:r>
+              <a:t>DO NOT USE routing-outcome-ope-val-ridge-2026-08-13.json. Its validation match rate of 0.536 and its +20.1 belong to the withdrawn run and it sits in docs/experiments/superseded/. Quoting it to dramatise the collapse re-cites the thing we retracted.</a:t>
+            </a:r>
+          </a:p>
+          <a:p/>
+          <a:p>
+            <a:r>
+              <a:t>What we are NOT saying: that routing gains do not exist. Say no routing gain established. Never say routing does not work. This design on this data cannot detect one.</a:t>
             </a:r>
           </a:p>
         </p:txBody>
@@ -992,73 +975,37 @@
           <a:lstStyle/>
           <a:p>
             <a:r>
-              <a:t>The provider is Sarvam. Two endpoints, billed separately: digitise at ₹0.50 a page returns text and layout; extract at ₹1.00 a page returns schema-driven fields. Both is ₹1.50. Source: janasunani/evaluation/pricing.py, checked against the Sarvam dashboard 2026-08-07. Our local pipeline is ₹0.00 a page.</a:t>
+              <a:t>Do not cut this slide for time. It is the one that makes the rest credible.</a:t>
             </a:r>
           </a:p>
           <a:p/>
           <a:p>
             <a:r>
-              <a:t>THE FOUR EXTRACT FIELDS, which is the 'does more' claim: grievance_category, summary, district, grievance_text. That is our OCR, categoriser and summariser in one call. janasunani/evaluation/sarvam_grievance_schema.py, schema v1, pinned so a later edit cannot silently move a headline number. docs/DELIVERY.md:163: 'our pipeline has no equivalent'.</a:t>
+              <a:t>1. OCR ground truth was never commissioned and has no owner, issue #53. It cannot be produced by an agent, because it is the answer key an agent would be scored against.</a:t>
             </a:r>
           </a:p>
           <a:p/>
           <a:p>
             <a:r>
-              <a:t>LANGUAGE. Sarvam Vision lists all 22 scheduled languages plus English, Odia among them. There is also a separate transliteration API for romanized Odia (od-IN), which we do not solve at all today. Our own summariser skipped all four coherent Odia cases through an English-only gate, and non-English text is downgraded to Uncategorized.</a:t>
+              <a:t>2. 824 predicted spans against 480 marked. The recogniser over-fires, and the gold set cannot separate a missed label from an over-redaction. Filed as open.</a:t>
             </a:r>
           </a:p>
           <a:p/>
           <a:p>
             <a:r>
-              <a:t>WHAT WE ACTUALLY RAN. Two runs, docs/evidence/sarvam_cached_benchmark.json. A 5-page validation (₹7.50) and a 300-page run that died at 65 pages on credit exhaustion, 3 HTTP 402s, 7 job failures. 61 pages paired and scored in total.</a:t>
+              <a:t>3. The officer-hours figure that circulates, 201,000 to 302,000 across 1,209,144 resolved cases, is a denominator and not a saving. It is the size of the prize, not anything realised.</a:t>
             </a:r>
           </a:p>
           <a:p/>
           <a:p>
             <a:r>
-              <a:t>WHAT WE FOUND, AND WHAT IT COVERS. Normalised exact-text divergence 1.000 on both runs: the two systems differed on every page. Sarvam returns more characters, ratio 1.2433 then 1.3345. That figure is TRANSCRIPTION ONLY. It compares OCR text and says nothing about the category or summary fields. Divergence says they disagree, never who is right.</a:t>
+              <a:t>Two more we do not claim, if asked: no gain from duplicate detection beyond the 37,299 repeats officers already confirmed, and no accuracy result for the outside option on slide 10.</a:t>
             </a:r>
           </a:p>
           <a:p/>
           <a:p>
             <a:r>
-              <a:t>THE EXTRACT FIELDS WERE NEVER GRADED. Sarvam did return them: 61 extract jobs completed in the 300-page run. Nothing was compared against them.</a:t>
-            </a:r>
-          </a:p>
-          <a:p/>
-          <a:p>
-            <a:r>
-              <a:t>  Category was the DECLARED PRIMARY OUTCOME and came back null. Reason, verbatim from outputs/sarvam_validation/sarvam_scorecard.md: 'Not measured — no gold labels (gold_category) in sample; run with --join-metadata from the lake slice.' This is the cheap gap. The recorded category already sits in our own database; the sample was simply not joined to it. Unlike OCR, no new ground truth has to be created.</a:t>
-            </a:r>
-          </a:p>
-          <a:p/>
-          <a:p>
-            <a:r>
-              <a:t>  Summary was only ever scoped as divergence against BART with no gold referee, and summary_divergence is the same function as divergence_rate under another name (sarvam_scorecard.py:234). Even fully run it could only have said the two summaries differ, never which was better. It was not run: no paired sarvam_summary / pipeline_summary in the sample.</a:t>
-            </a:r>
-          </a:p>
-          <a:p/>
-          <a:p>
-            <a:r>
-              <a:t>  A schema bug returned HTTP 400 on every extract submission until 2026-08-09, which is why the 5-page validation run has no extract output at all. Every test mocked the transport, so no test could see the 400.</a:t>
-            </a:r>
-          </a:p>
-          <a:p/>
-          <a:p>
-            <a:r>
-              <a:t>NOT MEASURED, do not claim: OCR accuracy, category accuracy, summary quality, latency (stated in four places), actual billed cost (every rupee figure is list price), observed language split, handwritten versus printed split.</a:t>
-            </a:r>
-          </a:p>
-          <a:p/>
-          <a:p>
-            <a:r>
-              <a:t>GOVERNANCE. Trust tier authorized-external. Authorisation is a GoO-Sarvam MoU with sign-off from the Additional Chief Secretary, Electronics &amp; IT, accepted 2026-08-07, on the basis that no state statute currently governs the transfer. All three provider controls remain UNVERIFIED: retention terms, encryption in transit, encryption at rest. Authorisation and verification are recorded separately on purpose. One module may make the call, janasunani/egress/, every attempt is audit-logged, and a kill switch falls back to local pytesseract.</a:t>
-            </a:r>
-          </a:p>
-          <a:p/>
-          <a:p>
-            <a:r>
-              <a:t>COST AT SCALE, projected list price: ₹48,000 to digitise the 96,469-page English corpus, ₹145,000 for both endpoints, ₹8,050 to push 1.37M subjects through the 105B text model. At 10 requests a minute, which does not rise with the plan tier, the full corpus is roughly ten days of continuous calling. It is a measurement instrument, not a backfill path. Do not quote ₹700; that was priced on the withdrawn 30B model.</a:t>
+              <a:t>If someone asks why so little is claimed: because the alternative is claiming things we cannot defend, and this deck has to survive the room checking it.</a:t>
             </a:r>
           </a:p>
         </p:txBody>
@@ -1072,6 +1019,118 @@
 </file>
 
 <file path=ppt/notesSlides/notesSlide23.xml><?xml version="1.0" encoding="utf-8"?>
+<p:notes xmlns:a="http://schemas.openxmlformats.org/drawingml/2006/main" xmlns:p="http://schemas.openxmlformats.org/presentationml/2006/main" xmlns:r="http://schemas.openxmlformats.org/officeDocument/2006/relationships">
+  <p:cSld>
+    <p:spTree>
+      <p:nvGrpSpPr>
+        <p:cNvPr id="1" name=""/>
+        <p:cNvGrpSpPr/>
+        <p:nvPr/>
+      </p:nvGrpSpPr>
+      <p:grpSpPr>
+        <a:xfrm>
+          <a:off x="0" y="0"/>
+          <a:ext cx="0" cy="0"/>
+          <a:chOff x="0" y="0"/>
+          <a:chExt cx="0" cy="0"/>
+        </a:xfrm>
+      </p:grpSpPr>
+      <p:sp>
+        <p:nvSpPr>
+          <p:cNvPr id="3" name="Notes Placeholder 2"/>
+          <p:cNvSpPr>
+            <a:spLocks noGrp="1"/>
+          </p:cNvSpPr>
+          <p:nvPr>
+            <p:ph type="body" idx="1"/>
+          </p:nvPr>
+        </p:nvSpPr>
+        <p:spPr/>
+        <p:txBody>
+          <a:bodyPr/>
+          <a:lstStyle/>
+          <a:p>
+            <a:r>
+              <a:t>The provider is Sarvam. Two endpoints, billed separately: digitise at ₹0.50 a page returns text and layout; extract at ₹1.00 a page returns schema-driven fields. Both is ₹1.50. Source: janasunani/evaluation/pricing.py, checked against the Sarvam dashboard 2026-08-07. Our local pipeline is ₹0.00 a page.</a:t>
+            </a:r>
+          </a:p>
+          <a:p/>
+          <a:p>
+            <a:r>
+              <a:t>THE FOUR EXTRACT FIELDS, which is the 'does more' claim: grievance_category, summary, district, grievance_text. That is our OCR, categoriser and summariser in one call. janasunani/evaluation/sarvam_grievance_schema.py, schema v1, pinned so a later edit cannot silently move a headline number. docs/DELIVERY.md:163: 'our pipeline has no equivalent'.</a:t>
+            </a:r>
+          </a:p>
+          <a:p/>
+          <a:p>
+            <a:r>
+              <a:t>LANGUAGE. Sarvam Vision lists all 22 scheduled languages plus English, Odia among them. There is also a separate transliteration API for romanized Odia (od-IN), which we do not solve at all today. Our own summariser skipped all four coherent Odia cases through an English-only gate, and non-English text is downgraded to Uncategorized.</a:t>
+            </a:r>
+          </a:p>
+          <a:p/>
+          <a:p>
+            <a:r>
+              <a:t>WHAT WE ACTUALLY RAN. Two runs, docs/evidence/sarvam_cached_benchmark.json. A 5-page validation (₹7.50) and a 300-page run that died at 65 pages on credit exhaustion, 3 HTTP 402s, 7 job failures. 61 pages paired and scored in total.</a:t>
+            </a:r>
+          </a:p>
+          <a:p/>
+          <a:p>
+            <a:r>
+              <a:t>WHAT WE FOUND, AND WHAT IT COVERS. Normalised exact-text divergence 1.000 on both runs: the two systems differed on every page. Sarvam returns more characters, ratio 1.2433 then 1.3345. That figure is TRANSCRIPTION ONLY. It compares OCR text and says nothing about the category or summary fields. Divergence says they disagree, never who is right.</a:t>
+            </a:r>
+          </a:p>
+          <a:p/>
+          <a:p>
+            <a:r>
+              <a:t>THE EXTRACT FIELDS WERE NEVER GRADED. Sarvam did return them: 61 extract jobs completed in the 300-page run. Nothing was compared against them.</a:t>
+            </a:r>
+          </a:p>
+          <a:p/>
+          <a:p>
+            <a:r>
+              <a:t>  Category was the DECLARED PRIMARY OUTCOME and came back null. Reason, verbatim from outputs/sarvam_validation/sarvam_scorecard.md: 'Not measured — no gold labels (gold_category) in sample; run with --join-metadata from the lake slice.' This is the cheap gap. The recorded category already sits in our own database; the sample was simply not joined to it. Unlike OCR, no new ground truth has to be created.</a:t>
+            </a:r>
+          </a:p>
+          <a:p/>
+          <a:p>
+            <a:r>
+              <a:t>  Summary was only ever scoped as divergence against BART with no gold referee, and summary_divergence is the same function as divergence_rate under another name (sarvam_scorecard.py:234). Even fully run it could only have said the two summaries differ, never which was better. It was not run: no paired sarvam_summary / pipeline_summary in the sample.</a:t>
+            </a:r>
+          </a:p>
+          <a:p/>
+          <a:p>
+            <a:r>
+              <a:t>  A schema bug returned HTTP 400 on every extract submission until 2026-08-09, which is why the 5-page validation run has no extract output at all. Every test mocked the transport, so no test could see the 400.</a:t>
+            </a:r>
+          </a:p>
+          <a:p/>
+          <a:p>
+            <a:r>
+              <a:t>NOT MEASURED, do not claim: OCR accuracy, category accuracy, summary quality, latency (stated in four places), actual billed cost (every rupee figure is list price), observed language split, handwritten versus printed split.</a:t>
+            </a:r>
+          </a:p>
+          <a:p/>
+          <a:p>
+            <a:r>
+              <a:t>GOVERNANCE. Trust tier authorized-external. Authorisation is a GoO-Sarvam MoU with sign-off from the Additional Chief Secretary, Electronics &amp; IT, accepted 2026-08-07, on the basis that no state statute currently governs the transfer. All three provider controls remain UNVERIFIED: retention terms, encryption in transit, encryption at rest. Authorisation and verification are recorded separately on purpose. One module may make the call, janasunani/egress/, every attempt is audit-logged, and a kill switch falls back to local pytesseract.</a:t>
+            </a:r>
+          </a:p>
+          <a:p/>
+          <a:p>
+            <a:r>
+              <a:t>COST AT SCALE, projected list price: ₹48,000 to digitise the 96,469-page English corpus, ₹145,000 for both endpoints, ₹8,050 to push 1.37M subjects through the 105B text model. At 10 requests a minute, which does not rise with the plan tier, the full corpus is roughly ten days of continuous calling. It is a measurement instrument, not a backfill path. Do not quote ₹700; that was priced on the withdrawn 30B model.</a:t>
+            </a:r>
+          </a:p>
+        </p:txBody>
+      </p:sp>
+    </p:spTree>
+  </p:cSld>
+  <p:clrMapOvr>
+    <a:masterClrMapping/>
+  </p:clrMapOvr>
+</p:notes>
+</file>
+
+<file path=ppt/notesSlides/notesSlide24.xml><?xml version="1.0" encoding="utf-8"?>
 <p:notes xmlns:a="http://schemas.openxmlformats.org/drawingml/2006/main" xmlns:p="http://schemas.openxmlformats.org/presentationml/2006/main" xmlns:r="http://schemas.openxmlformats.org/officeDocument/2006/relationships">
   <p:cSld>
     <p:spTree>
@@ -5144,7 +5203,7 @@
                 <a:ea typeface="Calibri" pitchFamily="34" charset="-122"/>
                 <a:cs typeface="Calibri" pitchFamily="34" charset="-120"/>
               </a:rPr>
-              <a:t>WOULD ANOTHER ROUTE BE FASTER?</a:t>
+              <a:t>WOULD ANOTHER ROUTE WORK BETTER?</a:t>
             </a:r>
             <a:endParaRPr lang="en-US" sz="1500" dirty="0"/>
           </a:p>
@@ -5183,7 +5242,7 @@
                 <a:ea typeface="Cambria" pitchFamily="34" charset="-122"/>
                 <a:cs typeface="Cambria" pitchFamily="34" charset="-120"/>
               </a:rPr>
-              <a:t>The estimate did not survive the second year</a:t>
+              <a:t>We built the test before we built the feature</a:t>
             </a:r>
             <a:endParaRPr lang="en-US" sz="3400" dirty="0"/>
           </a:p>
@@ -5191,14 +5250,14 @@
       </p:sp>
       <p:sp>
         <p:nvSpPr>
-          <p:cNvPr id="13" name="Text 11"/>
-          <p:cNvSpPr/>
-          <p:nvPr/>
-        </p:nvSpPr>
-        <p:spPr>
-          <a:xfrm>
-            <a:off x="640080" y="6419088"/>
-            <a:ext cx="5486400" cy="274320"/>
+          <p:cNvPr id="4" name="Text 2"/>
+          <p:cNvSpPr/>
+          <p:nvPr/>
+        </p:nvSpPr>
+        <p:spPr>
+          <a:xfrm>
+            <a:off x="640080" y="2194560"/>
+            <a:ext cx="502920" cy="640080"/>
           </a:xfrm>
           <a:prstGeom prst="rect">
             <a:avLst/>
@@ -5214,14 +5273,539 @@
               <a:buNone/>
             </a:pPr>
             <a:r>
-              <a:rPr lang="en-US" sz="850" dirty="0">
-                <a:solidFill>
-                  <a:srgbClr val="6C6E76"/>
+              <a:rPr lang="en-US" sz="3200" b="1" dirty="0">
+                <a:solidFill>
+                  <a:srgbClr val="7A1F2B"/>
+                </a:solidFill>
+                <a:latin typeface="Cambria" pitchFamily="34" charset="0"/>
+                <a:ea typeface="Cambria" pitchFamily="34" charset="-122"/>
+                <a:cs typeface="Cambria" pitchFamily="34" charset="-120"/>
+              </a:rPr>
+              <a:t>1</a:t>
+            </a:r>
+            <a:endParaRPr lang="en-US" sz="3200" dirty="0"/>
+          </a:p>
+        </p:txBody>
+      </p:sp>
+      <p:sp>
+        <p:nvSpPr>
+          <p:cNvPr id="5" name="Text 3"/>
+          <p:cNvSpPr/>
+          <p:nvPr/>
+        </p:nvSpPr>
+        <p:spPr>
+          <a:xfrm>
+            <a:off x="1280160" y="2194560"/>
+            <a:ext cx="5852160" cy="822960"/>
+          </a:xfrm>
+          <a:prstGeom prst="rect">
+            <a:avLst/>
+          </a:prstGeom>
+          <a:noFill/>
+          <a:ln/>
+        </p:spPr>
+        <p:txBody>
+          <a:bodyPr wrap="square" lIns="0" tIns="0" rIns="0" bIns="0" rtlCol="0" anchor="ctr"/>
+          <a:lstStyle/>
+          <a:p>
+            <a:pPr marL="0" indent="0" algn="l">
+              <a:lnSpc>
+                <a:spcPct val="105000"/>
+              </a:lnSpc>
+              <a:buNone/>
+            </a:pPr>
+            <a:r>
+              <a:rPr lang="en-US" sz="1850" dirty="0">
+                <a:solidFill>
+                  <a:srgbClr val="1E1F24"/>
                 </a:solidFill>
                 <a:latin typeface="Calibri" pitchFamily="34" charset="0"/>
                 <a:ea typeface="Calibri" pitchFamily="34" charset="-122"/>
                 <a:cs typeface="Calibri" pitchFamily="34" charset="-120"/>
               </a:rPr>
+              <a:t>Estimate time to disposal on every route</a:t>
+            </a:r>
+            <a:endParaRPr lang="en-US" sz="1850" dirty="0"/>
+          </a:p>
+        </p:txBody>
+      </p:sp>
+      <p:sp>
+        <p:nvSpPr>
+          <p:cNvPr id="6" name="Shape 4"/>
+          <p:cNvSpPr/>
+          <p:nvPr/>
+        </p:nvSpPr>
+        <p:spPr>
+          <a:xfrm>
+            <a:off x="7406640" y="2212848"/>
+            <a:ext cx="4114800" cy="777240"/>
+          </a:xfrm>
+          <a:prstGeom prst="roundRect">
+            <a:avLst>
+              <a:gd name="adj" fmla="val 7059"/>
+            </a:avLst>
+          </a:prstGeom>
+          <a:solidFill>
+            <a:srgbClr val="F4F4F6"/>
+          </a:solidFill>
+          <a:ln w="12700">
+            <a:solidFill>
+              <a:srgbClr val="D6D8DD"/>
+            </a:solidFill>
+            <a:prstDash val="solid"/>
+          </a:ln>
+        </p:spPr>
+        <p:txBody>
+          <a:bodyPr/>
+          <a:lstStyle/>
+          <a:p>
+            <a:endParaRPr lang="en-IN"/>
+          </a:p>
+        </p:txBody>
+      </p:sp>
+      <p:sp>
+        <p:nvSpPr>
+          <p:cNvPr id="7" name="Text 5"/>
+          <p:cNvSpPr/>
+          <p:nvPr/>
+        </p:nvSpPr>
+        <p:spPr>
+          <a:xfrm>
+            <a:off x="7571232" y="2212848"/>
+            <a:ext cx="3794760" cy="777240"/>
+          </a:xfrm>
+          <a:prstGeom prst="rect">
+            <a:avLst/>
+          </a:prstGeom>
+          <a:noFill/>
+          <a:ln/>
+        </p:spPr>
+        <p:txBody>
+          <a:bodyPr wrap="square" lIns="0" tIns="0" rIns="0" bIns="0" rtlCol="0" anchor="ctr"/>
+          <a:lstStyle/>
+          <a:p>
+            <a:pPr marL="0" indent="0" algn="l">
+              <a:lnSpc>
+                <a:spcPct val="100000"/>
+              </a:lnSpc>
+              <a:buNone/>
+            </a:pPr>
+            <a:r>
+              <a:rPr lang="en-US" sz="1450" dirty="0">
+                <a:solidFill>
+                  <a:srgbClr val="1E1F24"/>
+                </a:solidFill>
+                <a:latin typeface="Calibri" pitchFamily="34" charset="0"/>
+                <a:ea typeface="Calibri" pitchFamily="34" charset="-122"/>
+                <a:cs typeface="Calibri" pitchFamily="34" charset="-120"/>
+              </a:rPr>
+              <a:t>Ridge and gradient boosting, cross-fitted, capped at 365 days, under each historically supported department and role chain.</a:t>
+            </a:r>
+            <a:endParaRPr lang="en-US" sz="1450" dirty="0"/>
+          </a:p>
+        </p:txBody>
+      </p:sp>
+      <p:sp>
+        <p:nvSpPr>
+          <p:cNvPr id="8" name="Shape 6"/>
+          <p:cNvSpPr/>
+          <p:nvPr/>
+        </p:nvSpPr>
+        <p:spPr>
+          <a:xfrm>
+            <a:off x="640080" y="3154680"/>
+            <a:ext cx="10881360" cy="0"/>
+          </a:xfrm>
+          <a:prstGeom prst="line">
+            <a:avLst/>
+          </a:prstGeom>
+          <a:noFill/>
+          <a:ln w="9525">
+            <a:solidFill>
+              <a:srgbClr val="D6D8DD"/>
+            </a:solidFill>
+            <a:prstDash val="solid"/>
+          </a:ln>
+        </p:spPr>
+        <p:txBody>
+          <a:bodyPr/>
+          <a:lstStyle/>
+          <a:p>
+            <a:endParaRPr lang="en-IN"/>
+          </a:p>
+        </p:txBody>
+      </p:sp>
+      <p:sp>
+        <p:nvSpPr>
+          <p:cNvPr id="9" name="Text 7"/>
+          <p:cNvSpPr/>
+          <p:nvPr/>
+        </p:nvSpPr>
+        <p:spPr>
+          <a:xfrm>
+            <a:off x="640080" y="3291840"/>
+            <a:ext cx="502920" cy="640080"/>
+          </a:xfrm>
+          <a:prstGeom prst="rect">
+            <a:avLst/>
+          </a:prstGeom>
+          <a:noFill/>
+          <a:ln/>
+        </p:spPr>
+        <p:txBody>
+          <a:bodyPr wrap="square" lIns="0" tIns="0" rIns="0" bIns="0" rtlCol="0" anchor="ctr"/>
+          <a:lstStyle/>
+          <a:p>
+            <a:pPr marL="0" indent="0" algn="l">
+              <a:buNone/>
+            </a:pPr>
+            <a:r>
+              <a:rPr lang="en-US" sz="3200" b="1" dirty="0">
+                <a:solidFill>
+                  <a:srgbClr val="7A1F2B"/>
+                </a:solidFill>
+                <a:latin typeface="Cambria" pitchFamily="34" charset="0"/>
+                <a:ea typeface="Cambria" pitchFamily="34" charset="-122"/>
+                <a:cs typeface="Cambria" pitchFamily="34" charset="-120"/>
+              </a:rPr>
+              <a:t>2</a:t>
+            </a:r>
+            <a:endParaRPr lang="en-US" sz="3200" dirty="0"/>
+          </a:p>
+        </p:txBody>
+      </p:sp>
+      <p:sp>
+        <p:nvSpPr>
+          <p:cNvPr id="10" name="Text 8"/>
+          <p:cNvSpPr/>
+          <p:nvPr/>
+        </p:nvSpPr>
+        <p:spPr>
+          <a:xfrm>
+            <a:off x="1280160" y="3291840"/>
+            <a:ext cx="5852160" cy="822960"/>
+          </a:xfrm>
+          <a:prstGeom prst="rect">
+            <a:avLst/>
+          </a:prstGeom>
+          <a:noFill/>
+          <a:ln/>
+        </p:spPr>
+        <p:txBody>
+          <a:bodyPr wrap="square" lIns="0" tIns="0" rIns="0" bIns="0" rtlCol="0" anchor="ctr"/>
+          <a:lstStyle/>
+          <a:p>
+            <a:pPr marL="0" indent="0" algn="l">
+              <a:lnSpc>
+                <a:spcPct val="105000"/>
+              </a:lnSpc>
+              <a:buNone/>
+            </a:pPr>
+            <a:r>
+              <a:rPr lang="en-US" sz="1850" dirty="0">
+                <a:solidFill>
+                  <a:srgbClr val="1E1F24"/>
+                </a:solidFill>
+                <a:latin typeface="Calibri" pitchFamily="34" charset="0"/>
+                <a:ea typeface="Calibri" pitchFamily="34" charset="-122"/>
+                <a:cs typeface="Calibri" pitchFamily="34" charset="-120"/>
+              </a:rPr>
+              <a:t>Safeguard the action rate</a:t>
+            </a:r>
+            <a:endParaRPr lang="en-US" sz="1850" dirty="0"/>
+          </a:p>
+        </p:txBody>
+      </p:sp>
+      <p:sp>
+        <p:nvSpPr>
+          <p:cNvPr id="11" name="Shape 9"/>
+          <p:cNvSpPr/>
+          <p:nvPr/>
+        </p:nvSpPr>
+        <p:spPr>
+          <a:xfrm>
+            <a:off x="7406640" y="3310128"/>
+            <a:ext cx="4114800" cy="777240"/>
+          </a:xfrm>
+          <a:prstGeom prst="roundRect">
+            <a:avLst>
+              <a:gd name="adj" fmla="val 7059"/>
+            </a:avLst>
+          </a:prstGeom>
+          <a:solidFill>
+            <a:srgbClr val="F4F4F6"/>
+          </a:solidFill>
+          <a:ln w="12700">
+            <a:solidFill>
+              <a:srgbClr val="D6D8DD"/>
+            </a:solidFill>
+            <a:prstDash val="solid"/>
+          </a:ln>
+        </p:spPr>
+        <p:txBody>
+          <a:bodyPr/>
+          <a:lstStyle/>
+          <a:p>
+            <a:endParaRPr lang="en-IN"/>
+          </a:p>
+        </p:txBody>
+      </p:sp>
+      <p:sp>
+        <p:nvSpPr>
+          <p:cNvPr id="12" name="Text 10"/>
+          <p:cNvSpPr/>
+          <p:nvPr/>
+        </p:nvSpPr>
+        <p:spPr>
+          <a:xfrm>
+            <a:off x="7571232" y="3310128"/>
+            <a:ext cx="3794760" cy="777240"/>
+          </a:xfrm>
+          <a:prstGeom prst="rect">
+            <a:avLst/>
+          </a:prstGeom>
+          <a:noFill/>
+          <a:ln/>
+        </p:spPr>
+        <p:txBody>
+          <a:bodyPr wrap="square" lIns="0" tIns="0" rIns="0" bIns="0" rtlCol="0" anchor="ctr"/>
+          <a:lstStyle/>
+          <a:p>
+            <a:r>
+              <a:rPr lang="en-US" sz="1450" dirty="0">
+                <a:solidFill>
+                  <a:srgbClr val="1E1F24"/>
+                </a:solidFill>
+                <a:latin typeface="Calibri" pitchFamily="34" charset="0"/>
+                <a:ea typeface="Calibri" pitchFamily="34" charset="-122"/>
+                <a:cs typeface="Calibri" pitchFamily="34" charset="-120"/>
+              </a:rPr>
+              <a:t>A calibrated classifier for whether substantive action is taken. A faster route is admissible only where that rate holds.</a:t>
+            </a:r>
+            <a:endParaRPr lang="en-US" sz="1450" dirty="0"/>
+          </a:p>
+        </p:txBody>
+      </p:sp>
+      <p:sp>
+        <p:nvSpPr>
+          <p:cNvPr id="13" name="Shape 11"/>
+          <p:cNvSpPr/>
+          <p:nvPr/>
+        </p:nvSpPr>
+        <p:spPr>
+          <a:xfrm>
+            <a:off x="640080" y="4251960"/>
+            <a:ext cx="10881360" cy="0"/>
+          </a:xfrm>
+          <a:prstGeom prst="line">
+            <a:avLst/>
+          </a:prstGeom>
+          <a:noFill/>
+          <a:ln w="9525">
+            <a:solidFill>
+              <a:srgbClr val="D6D8DD"/>
+            </a:solidFill>
+            <a:prstDash val="solid"/>
+          </a:ln>
+        </p:spPr>
+        <p:txBody>
+          <a:bodyPr/>
+          <a:lstStyle/>
+          <a:p>
+            <a:endParaRPr lang="en-IN"/>
+          </a:p>
+        </p:txBody>
+      </p:sp>
+      <p:sp>
+        <p:nvSpPr>
+          <p:cNvPr id="14" name="Text 12"/>
+          <p:cNvSpPr/>
+          <p:nvPr/>
+        </p:nvSpPr>
+        <p:spPr>
+          <a:xfrm>
+            <a:off x="640080" y="4389120"/>
+            <a:ext cx="502920" cy="640080"/>
+          </a:xfrm>
+          <a:prstGeom prst="rect">
+            <a:avLst/>
+          </a:prstGeom>
+          <a:noFill/>
+          <a:ln/>
+        </p:spPr>
+        <p:txBody>
+          <a:bodyPr wrap="square" lIns="0" tIns="0" rIns="0" bIns="0" rtlCol="0" anchor="ctr"/>
+          <a:lstStyle/>
+          <a:p>
+            <a:pPr marL="0" indent="0" algn="l">
+              <a:buNone/>
+            </a:pPr>
+            <a:r>
+              <a:rPr lang="en-US" sz="3200" b="1" dirty="0">
+                <a:solidFill>
+                  <a:srgbClr val="7A1F2B"/>
+                </a:solidFill>
+                <a:latin typeface="Cambria" pitchFamily="34" charset="0"/>
+                <a:ea typeface="Cambria" pitchFamily="34" charset="-122"/>
+                <a:cs typeface="Cambria" pitchFamily="34" charset="-120"/>
+              </a:rPr>
+              <a:t>3</a:t>
+            </a:r>
+            <a:endParaRPr lang="en-US" sz="3200" dirty="0"/>
+          </a:p>
+        </p:txBody>
+      </p:sp>
+      <p:sp>
+        <p:nvSpPr>
+          <p:cNvPr id="15" name="Text 13"/>
+          <p:cNvSpPr/>
+          <p:nvPr/>
+        </p:nvSpPr>
+        <p:spPr>
+          <a:xfrm>
+            <a:off x="1280160" y="4389120"/>
+            <a:ext cx="5852160" cy="822960"/>
+          </a:xfrm>
+          <a:prstGeom prst="rect">
+            <a:avLst/>
+          </a:prstGeom>
+          <a:noFill/>
+          <a:ln/>
+        </p:spPr>
+        <p:txBody>
+          <a:bodyPr wrap="square" lIns="0" tIns="0" rIns="0" bIns="0" rtlCol="0" anchor="ctr"/>
+          <a:lstStyle/>
+          <a:p>
+            <a:pPr marL="0" indent="0" algn="l">
+              <a:lnSpc>
+                <a:spcPct val="105000"/>
+              </a:lnSpc>
+              <a:buNone/>
+            </a:pPr>
+            <a:r>
+              <a:rPr lang="en-US" sz="1850" dirty="0">
+                <a:solidFill>
+                  <a:srgbClr val="1E1F24"/>
+                </a:solidFill>
+                <a:latin typeface="Calibri" pitchFamily="34" charset="0"/>
+                <a:ea typeface="Calibri" pitchFamily="34" charset="-122"/>
+                <a:cs typeface="Calibri" pitchFamily="34" charset="-120"/>
+              </a:rPr>
+              <a:t>Verify against outcomes we observed</a:t>
+            </a:r>
+            <a:endParaRPr lang="en-US" sz="1850" dirty="0"/>
+          </a:p>
+        </p:txBody>
+      </p:sp>
+      <p:sp>
+        <p:nvSpPr>
+          <p:cNvPr id="16" name="Shape 14"/>
+          <p:cNvSpPr/>
+          <p:nvPr/>
+        </p:nvSpPr>
+        <p:spPr>
+          <a:xfrm>
+            <a:off x="7406640" y="4407408"/>
+            <a:ext cx="4114800" cy="777240"/>
+          </a:xfrm>
+          <a:prstGeom prst="roundRect">
+            <a:avLst>
+              <a:gd name="adj" fmla="val 7059"/>
+            </a:avLst>
+          </a:prstGeom>
+          <a:solidFill>
+            <a:srgbClr val="F4F4F6"/>
+          </a:solidFill>
+          <a:ln w="12700">
+            <a:solidFill>
+              <a:srgbClr val="D6D8DD"/>
+            </a:solidFill>
+            <a:prstDash val="solid"/>
+          </a:ln>
+        </p:spPr>
+        <p:txBody>
+          <a:bodyPr/>
+          <a:lstStyle/>
+          <a:p>
+            <a:endParaRPr lang="en-IN" b="1"/>
+          </a:p>
+        </p:txBody>
+      </p:sp>
+      <p:sp>
+        <p:nvSpPr>
+          <p:cNvPr id="17" name="Text 15"/>
+          <p:cNvSpPr/>
+          <p:nvPr/>
+        </p:nvSpPr>
+        <p:spPr>
+          <a:xfrm>
+            <a:off x="7571232" y="4407408"/>
+            <a:ext cx="3794760" cy="777240"/>
+          </a:xfrm>
+          <a:prstGeom prst="rect">
+            <a:avLst/>
+          </a:prstGeom>
+          <a:noFill/>
+          <a:ln/>
+        </p:spPr>
+        <p:txBody>
+          <a:bodyPr wrap="square" lIns="0" tIns="0" rIns="0" bIns="0" rtlCol="0" anchor="ctr"/>
+          <a:lstStyle/>
+          <a:p>
+            <a:pPr marL="0" indent="0" algn="l">
+              <a:lnSpc>
+                <a:spcPct val="100000"/>
+              </a:lnSpc>
+              <a:buNone/>
+            </a:pPr>
+            <a:r>
+              <a:rPr lang="en-US" sz="1450" dirty="0">
+                <a:solidFill>
+                  <a:srgbClr val="1E1F24"/>
+                </a:solidFill>
+                <a:latin typeface="Calibri" pitchFamily="34" charset="0"/>
+                <a:ea typeface="Calibri" pitchFamily="34" charset="-122"/>
+                <a:cs typeface="Calibri" pitchFamily="34" charset="-120"/>
+              </a:rPr>
+              <a:t>Direct outcome regression against augmented IPCW, Hajek-normalised, with censoring weights and a district-by-year cluster bootstrap.</a:t>
+            </a:r>
+            <a:endParaRPr lang="en-US" sz="1450" dirty="0"/>
+          </a:p>
+        </p:txBody>
+      </p:sp>
+      <p:sp>
+        <p:nvSpPr>
+          <p:cNvPr id="19" name="Text 17"/>
+          <p:cNvSpPr/>
+          <p:nvPr/>
+        </p:nvSpPr>
+        <p:spPr>
+          <a:xfrm>
+            <a:off x="640080" y="6419088"/>
+            <a:ext cx="5486400" cy="274320"/>
+          </a:xfrm>
+          <a:prstGeom prst="rect">
+            <a:avLst/>
+          </a:prstGeom>
+          <a:noFill/>
+          <a:ln/>
+        </p:spPr>
+        <p:txBody>
+          <a:bodyPr wrap="square" lIns="0" tIns="0" rIns="0" bIns="0" rtlCol="0" anchor="ctr"/>
+          <a:lstStyle/>
+          <a:p>
+            <a:pPr marL="0" indent="0" algn="l">
+              <a:buNone/>
+            </a:pPr>
+            <a:r>
+              <a:rPr lang="en-US" sz="850" dirty="0">
+                <a:solidFill>
+                  <a:srgbClr val="6C6E76"/>
+                </a:solidFill>
+                <a:latin typeface="Calibri" pitchFamily="34" charset="0"/>
+                <a:ea typeface="Calibri" pitchFamily="34" charset="-122"/>
+                <a:cs typeface="Calibri" pitchFamily="34" charset="-120"/>
+              </a:rPr>
               <a:t>Data, Policy and Innovation Centre</a:t>
             </a:r>
             <a:endParaRPr lang="en-US" sz="850" dirty="0"/>
@@ -5230,7 +5814,7 @@
       </p:sp>
       <p:sp>
         <p:nvSpPr>
-          <p:cNvPr id="14" name="Text 12"/>
+          <p:cNvPr id="20" name="Text 18"/>
           <p:cNvSpPr/>
           <p:nvPr/>
         </p:nvSpPr>
@@ -5269,14 +5853,14 @@
       </p:sp>
       <p:sp>
         <p:nvSpPr>
-          <p:cNvPr id="15" name="TextBox 14"/>
+          <p:cNvPr id="21" name="TextBox 20"/>
           <p:cNvSpPr txBox="1"/>
           <p:nvPr/>
         </p:nvSpPr>
         <p:spPr>
           <a:xfrm>
-            <a:off x="640080" y="1847088"/>
-            <a:ext cx="10881360" cy="329184"/>
+            <a:off x="640080" y="5394960"/>
+            <a:ext cx="10881360" cy="237744"/>
           </a:xfrm>
           <a:prstGeom prst="rect">
             <a:avLst/>
@@ -5291,13 +5875,292 @@
           <a:p>
             <a:pPr algn="l"/>
             <a:r>
+              <a:rPr sz="1300" b="0" i="0">
+                <a:solidFill>
+                  <a:srgbClr val="6C6E76"/>
+                </a:solidFill>
+                <a:latin typeface="Calibri"/>
+              </a:rPr>
+              <a:t>LIVE: predicts where similar grievances were historically sent.</a:t>
+            </a:r>
+          </a:p>
+        </p:txBody>
+      </p:sp>
+      <p:sp>
+        <p:nvSpPr>
+          <p:cNvPr id="22" name="TextBox 21"/>
+          <p:cNvSpPr txBox="1"/>
+          <p:nvPr/>
+        </p:nvSpPr>
+        <p:spPr>
+          <a:xfrm>
+            <a:off x="640080" y="5632704"/>
+            <a:ext cx="10881360" cy="237744"/>
+          </a:xfrm>
+          <a:prstGeom prst="rect">
+            <a:avLst/>
+          </a:prstGeom>
+          <a:noFill/>
+        </p:spPr>
+        <p:txBody>
+          <a:bodyPr wrap="square" lIns="0" rIns="0" tIns="0" bIns="0">
+            <a:spAutoFit/>
+          </a:bodyPr>
+          <a:lstStyle/>
+          <a:p>
+            <a:pPr algn="l"/>
+            <a:r>
+              <a:rPr sz="1300" b="0" i="0">
+                <a:solidFill>
+                  <a:srgbClr val="6C6E76"/>
+                </a:solidFill>
+                <a:latin typeface="Calibri"/>
+              </a:rPr>
+              <a:t>RESEARCH ONLY: asks where they would have resolved better.</a:t>
+            </a:r>
+          </a:p>
+        </p:txBody>
+      </p:sp>
+      <p:sp>
+        <p:nvSpPr>
+          <p:cNvPr id="23" name="TextBox 22"/>
+          <p:cNvSpPr txBox="1"/>
+          <p:nvPr/>
+        </p:nvSpPr>
+        <p:spPr>
+          <a:xfrm>
+            <a:off x="640080" y="5961888"/>
+            <a:ext cx="10881360" cy="384048"/>
+          </a:xfrm>
+          <a:prstGeom prst="rect">
+            <a:avLst/>
+          </a:prstGeom>
+          <a:noFill/>
+        </p:spPr>
+        <p:txBody>
+          <a:bodyPr wrap="square" lIns="0" rIns="0" tIns="0" bIns="0">
+            <a:spAutoFit/>
+          </a:bodyPr>
+          <a:lstStyle/>
+          <a:p>
+            <a:pPr algn="l"/>
+            <a:r>
+              <a:rPr sz="1700" b="1" i="0">
+                <a:solidFill>
+                  <a:srgbClr val="7A1F2B"/>
+                </a:solidFill>
+                <a:latin typeface="Calibri"/>
+              </a:rPr>
+              <a:t>A complete offline evaluation. It was never connected to live routing.</a:t>
+            </a:r>
+          </a:p>
+        </p:txBody>
+      </p:sp>
+    </p:spTree>
+  </p:cSld>
+  <p:clrMapOvr>
+    <a:masterClrMapping/>
+  </p:clrMapOvr>
+</p:sld>
+</file>
+
+<file path=ppt/slides/slide21.xml><?xml version="1.0" encoding="utf-8"?>
+<p:sld xmlns:a="http://schemas.openxmlformats.org/drawingml/2006/main" xmlns:p="http://schemas.openxmlformats.org/presentationml/2006/main" xmlns:r="http://schemas.openxmlformats.org/officeDocument/2006/relationships">
+  <p:cSld>
+    <p:spTree>
+      <p:nvGrpSpPr>
+        <p:cNvPr id="1" name=""/>
+        <p:cNvGrpSpPr/>
+        <p:nvPr/>
+      </p:nvGrpSpPr>
+      <p:grpSpPr/>
+      <p:sp>
+        <p:nvSpPr>
+          <p:cNvPr id="2" name="Text 0"/>
+          <p:cNvSpPr/>
+          <p:nvPr/>
+        </p:nvSpPr>
+        <p:spPr>
+          <a:xfrm>
+            <a:off x="640080" y="457200"/>
+            <a:ext cx="10881360" cy="320040"/>
+          </a:xfrm>
+          <a:prstGeom prst="rect">
+            <a:avLst/>
+          </a:prstGeom>
+          <a:noFill/>
+          <a:ln/>
+        </p:spPr>
+        <p:txBody>
+          <a:bodyPr wrap="square" lIns="0" tIns="0" rIns="0" bIns="0" rtlCol="0" anchor="ctr"/>
+          <a:lstStyle/>
+          <a:p>
+            <a:pPr marL="0" indent="0" algn="l">
+              <a:buNone/>
+            </a:pPr>
+            <a:r>
+              <a:rPr lang="en-US" sz="1500" b="1" kern="0" spc="200" dirty="0">
+                <a:solidFill>
+                  <a:srgbClr val="7A1F2B"/>
+                </a:solidFill>
+                <a:latin typeface="Calibri" pitchFamily="34" charset="0"/>
+                <a:ea typeface="Calibri" pitchFamily="34" charset="-122"/>
+                <a:cs typeface="Calibri" pitchFamily="34" charset="-120"/>
+              </a:rPr>
+              <a:t>WHY IT IS NOT LIVE</a:t>
+            </a:r>
+            <a:endParaRPr lang="en-US" sz="1500" dirty="0"/>
+          </a:p>
+        </p:txBody>
+      </p:sp>
+      <p:sp>
+        <p:nvSpPr>
+          <p:cNvPr id="3" name="Text 1"/>
+          <p:cNvSpPr/>
+          <p:nvPr/>
+        </p:nvSpPr>
+        <p:spPr>
+          <a:xfrm>
+            <a:off x="640080" y="868680"/>
+            <a:ext cx="10881360" cy="914400"/>
+          </a:xfrm>
+          <a:prstGeom prst="rect">
+            <a:avLst/>
+          </a:prstGeom>
+          <a:noFill/>
+          <a:ln/>
+        </p:spPr>
+        <p:txBody>
+          <a:bodyPr wrap="square" lIns="0" tIns="0" rIns="0" bIns="0" rtlCol="0" anchor="ctr"/>
+          <a:lstStyle/>
+          <a:p>
+            <a:pPr marL="0" indent="0" algn="l">
+              <a:buNone/>
+            </a:pPr>
+            <a:r>
+              <a:rPr lang="en-US" sz="3400" b="1" dirty="0">
+                <a:solidFill>
+                  <a:srgbClr val="1E1F24"/>
+                </a:solidFill>
+                <a:latin typeface="Cambria" pitchFamily="34" charset="0"/>
+                <a:ea typeface="Cambria" pitchFamily="34" charset="-122"/>
+                <a:cs typeface="Cambria" pitchFamily="34" charset="-120"/>
+              </a:rPr>
+              <a:t>Positivity failed before the second year did</a:t>
+            </a:r>
+            <a:endParaRPr lang="en-US" sz="3400" dirty="0"/>
+          </a:p>
+        </p:txBody>
+      </p:sp>
+      <p:sp>
+        <p:nvSpPr>
+          <p:cNvPr id="13" name="Text 11"/>
+          <p:cNvSpPr/>
+          <p:nvPr/>
+        </p:nvSpPr>
+        <p:spPr>
+          <a:xfrm>
+            <a:off x="640080" y="6419088"/>
+            <a:ext cx="5486400" cy="274320"/>
+          </a:xfrm>
+          <a:prstGeom prst="rect">
+            <a:avLst/>
+          </a:prstGeom>
+          <a:noFill/>
+          <a:ln/>
+        </p:spPr>
+        <p:txBody>
+          <a:bodyPr wrap="square" lIns="0" tIns="0" rIns="0" bIns="0" rtlCol="0" anchor="ctr"/>
+          <a:lstStyle/>
+          <a:p>
+            <a:pPr marL="0" indent="0" algn="l">
+              <a:buNone/>
+            </a:pPr>
+            <a:r>
+              <a:rPr lang="en-US" sz="850" dirty="0">
+                <a:solidFill>
+                  <a:srgbClr val="6C6E76"/>
+                </a:solidFill>
+                <a:latin typeface="Calibri" pitchFamily="34" charset="0"/>
+                <a:ea typeface="Calibri" pitchFamily="34" charset="-122"/>
+                <a:cs typeface="Calibri" pitchFamily="34" charset="-120"/>
+              </a:rPr>
+              <a:t>Data, Policy and Innovation Centre</a:t>
+            </a:r>
+            <a:endParaRPr lang="en-US" sz="850" dirty="0"/>
+          </a:p>
+        </p:txBody>
+      </p:sp>
+      <p:sp>
+        <p:nvSpPr>
+          <p:cNvPr id="14" name="Text 12"/>
+          <p:cNvSpPr/>
+          <p:nvPr/>
+        </p:nvSpPr>
+        <p:spPr>
+          <a:xfrm>
+            <a:off x="6035040" y="6419088"/>
+            <a:ext cx="5486400" cy="274320"/>
+          </a:xfrm>
+          <a:prstGeom prst="rect">
+            <a:avLst/>
+          </a:prstGeom>
+          <a:noFill/>
+          <a:ln/>
+        </p:spPr>
+        <p:txBody>
+          <a:bodyPr wrap="square" lIns="0" tIns="0" rIns="0" bIns="0" rtlCol="0" anchor="ctr"/>
+          <a:lstStyle/>
+          <a:p>
+            <a:pPr marL="0" indent="0" algn="r">
+              <a:buNone/>
+            </a:pPr>
+            <a:r>
+              <a:rPr lang="en-US" sz="850" dirty="0">
+                <a:solidFill>
+                  <a:srgbClr val="6C6E76"/>
+                </a:solidFill>
+                <a:latin typeface="Calibri" pitchFamily="34" charset="0"/>
+                <a:ea typeface="Calibri" pitchFamily="34" charset="-122"/>
+                <a:cs typeface="Calibri" pitchFamily="34" charset="-120"/>
+              </a:rPr>
+              <a:t>Government of Odisha  ×  University of Chicago Trust</a:t>
+            </a:r>
+            <a:endParaRPr lang="en-US" sz="850" dirty="0"/>
+          </a:p>
+        </p:txBody>
+      </p:sp>
+      <p:sp>
+        <p:nvSpPr>
+          <p:cNvPr id="15" name="TextBox 14"/>
+          <p:cNvSpPr txBox="1"/>
+          <p:nvPr/>
+        </p:nvSpPr>
+        <p:spPr>
+          <a:xfrm>
+            <a:off x="640080" y="1847088"/>
+            <a:ext cx="10881360" cy="329184"/>
+          </a:xfrm>
+          <a:prstGeom prst="rect">
+            <a:avLst/>
+          </a:prstGeom>
+          <a:noFill/>
+        </p:spPr>
+        <p:txBody>
+          <a:bodyPr wrap="square" lIns="0" rIns="0" tIns="0" bIns="0">
+            <a:spAutoFit/>
+          </a:bodyPr>
+          <a:lstStyle/>
+          <a:p>
+            <a:pPr algn="l"/>
+            <a:r>
               <a:rPr sz="1700" b="0" i="0">
                 <a:solidFill>
                   <a:srgbClr val="44464D"/>
                 </a:solidFill>
                 <a:latin typeface="Calibri"/>
               </a:rPr>
-              <a:t>So we tested for speed without losing whether action was taken.</a:t>
+              <a:t>The same pipeline, refit and rerun on a year it had never seen.</a:t>
             </a:r>
           </a:p>
         </p:txBody>
@@ -5464,7 +6327,7 @@
                           </a:solidFill>
                           <a:latin typeface="Calibri"/>
                         </a:rPr>
-                        <a:t>Outcome model alone</a:t>
+                        <a:t>Direct estimate, outcome regression</a:t>
                       </a:r>
                     </a:p>
                   </a:txBody>
@@ -5592,7 +6455,7 @@
                           </a:solidFill>
                           <a:latin typeface="Calibri"/>
                         </a:rPr>
-                        <a:t>Doubly robust</a:t>
+                        <a:t>Cross-fitted AIPW</a:t>
                       </a:r>
                     </a:p>
                   </a:txBody>
@@ -5720,7 +6583,7 @@
                           </a:solidFill>
                           <a:latin typeface="Calibri"/>
                         </a:rPr>
-                        <a:t>Error predicting the routes actually used</a:t>
+                        <a:t>Falsification: predicting the arm actually observed</a:t>
                       </a:r>
                     </a:p>
                   </a:txBody>
@@ -5762,7 +6625,7 @@
                           </a:solidFill>
                           <a:latin typeface="Calibri"/>
                         </a:rPr>
-                        <a:t>5%</a:t>
+                        <a:t>5% error</a:t>
                       </a:r>
                     </a:p>
                   </a:txBody>
@@ -5804,7 +6667,7 @@
                           </a:solidFill>
                           <a:latin typeface="Calibri"/>
                         </a:rPr>
-                        <a:t>118%</a:t>
+                        <a:t>118% error</a:t>
                       </a:r>
                     </a:p>
                   </a:txBody>
@@ -5848,7 +6711,7 @@
                           </a:solidFill>
                           <a:latin typeface="Calibri"/>
                         </a:rPr>
-                        <a:t>Suggested route has precedent in that category and district</a:t>
+                        <a:t>Proposed route in observed support</a:t>
                       </a:r>
                     </a:p>
                   </a:txBody>
@@ -5976,7 +6839,7 @@
                           </a:solidFill>
                           <a:latin typeface="Calibri"/>
                         </a:rPr>
-                        <a:t>Still open when the data was cut</a:t>
+                        <a:t>Effective sample as a share of n</a:t>
                       </a:r>
                     </a:p>
                   </a:txBody>
@@ -6018,7 +6881,7 @@
                           </a:solidFill>
                           <a:latin typeface="Calibri"/>
                         </a:rPr>
-                        <a:t>9%</a:t>
+                        <a:t>0.19</a:t>
                       </a:r>
                     </a:p>
                   </a:txBody>
@@ -6060,7 +6923,7 @@
                           </a:solidFill>
                           <a:latin typeface="Calibri"/>
                         </a:rPr>
-                        <a:t>34%</a:t>
+                        <a:t>0.07</a:t>
                       </a:r>
                     </a:p>
                   </a:txBody>
@@ -6125,7 +6988,7 @@
                 </a:solidFill>
                 <a:latin typeface="Calibri"/>
               </a:rPr>
-              <a:t>We withdrew the estimate. No routing gain is established.</a:t>
+              <a:t>DECISION   Withdraw the saving estimate, the correctness threshold and the routing recommendation. Keep the research offline.</a:t>
             </a:r>
           </a:p>
         </p:txBody>
@@ -6160,7 +7023,7 @@
                 </a:solidFill>
                 <a:latin typeface="Calibri"/>
               </a:rPr>
-              <a:t>Positive means the suggested route closed faster. The direct estimator reports no standard error.</a:t>
+              <a:t>Censoring at the cut runs 9% then 34%. The 2025 cohort has seven months against a 365-day outcome, so non-replication and immaturity are not separable here.</a:t>
             </a:r>
           </a:p>
         </p:txBody>
@@ -6173,7 +7036,7 @@
         </p:nvSpPr>
         <p:spPr>
           <a:xfrm>
-            <a:off x="640080" y="5614416"/>
+            <a:off x="640080" y="5632704"/>
             <a:ext cx="10881360" cy="237744"/>
           </a:xfrm>
           <a:prstGeom prst="rect">
@@ -6189,13 +7052,13 @@
           <a:p>
             <a:pPr algn="l"/>
             <a:r>
-              <a:rPr sz="1200" b="0" i="1">
+              <a:rPr sz="1200" b="0" i="0">
                 <a:solidFill>
                   <a:srgbClr val="6C6E76"/>
                 </a:solidFill>
                 <a:latin typeface="Calibri"/>
               </a:rPr>
-              <a:t>The 2025 data stops seven months in. The outcome is measured at 365 days.</a:t>
+              <a:t>Unresolved: assignment-field provenance, intake-time actionability, interference since routing changes the queue, mature follow-up, a governed pilot.</a:t>
             </a:r>
           </a:p>
         </p:txBody>
@@ -6230,746 +7093,8 @@
                 </a:solidFill>
                 <a:latin typeface="Calibri"/>
               </a:rPr>
-              <a:t>Two estimators on the same data disagreed by 33 days. The disagreement is the finding.</a:t>
-            </a:r>
-          </a:p>
-        </p:txBody>
-      </p:sp>
-    </p:spTree>
-  </p:cSld>
-  <p:clrMapOvr>
-    <a:masterClrMapping/>
-  </p:clrMapOvr>
-</p:sld>
-</file>
-
-<file path=ppt/slides/slide21.xml><?xml version="1.0" encoding="utf-8"?>
-<p:sld xmlns:a="http://schemas.openxmlformats.org/drawingml/2006/main" xmlns:p="http://schemas.openxmlformats.org/presentationml/2006/main" xmlns:r="http://schemas.openxmlformats.org/officeDocument/2006/relationships">
-  <p:cSld>
-    <p:spTree>
-      <p:nvGrpSpPr>
-        <p:cNvPr id="1" name=""/>
-        <p:cNvGrpSpPr/>
-        <p:nvPr/>
-      </p:nvGrpSpPr>
-      <p:grpSpPr/>
-      <p:sp>
-        <p:nvSpPr>
-          <p:cNvPr id="2" name="Text 0"/>
-          <p:cNvSpPr/>
-          <p:nvPr/>
-        </p:nvSpPr>
-        <p:spPr>
-          <a:xfrm>
-            <a:off x="640080" y="457200"/>
-            <a:ext cx="10881360" cy="320040"/>
-          </a:xfrm>
-          <a:prstGeom prst="rect">
-            <a:avLst/>
-          </a:prstGeom>
-          <a:noFill/>
-          <a:ln/>
-        </p:spPr>
-        <p:txBody>
-          <a:bodyPr wrap="square" lIns="0" tIns="0" rIns="0" bIns="0" rtlCol="0" anchor="ctr"/>
-          <a:lstStyle/>
-          <a:p>
-            <a:pPr marL="0" indent="0" algn="l">
-              <a:buNone/>
-            </a:pPr>
-            <a:r>
-              <a:rPr lang="en-US" sz="1500" b="1" kern="0" spc="200" dirty="0">
-                <a:solidFill>
-                  <a:srgbClr val="7A1F2B"/>
-                </a:solidFill>
-                <a:latin typeface="Calibri" pitchFamily="34" charset="0"/>
-                <a:ea typeface="Calibri" pitchFamily="34" charset="-122"/>
-                <a:cs typeface="Calibri" pitchFamily="34" charset="-120"/>
-              </a:rPr>
-              <a:t>THE LIMITS</a:t>
-            </a:r>
-            <a:endParaRPr lang="en-US" sz="1500" dirty="0"/>
-          </a:p>
-        </p:txBody>
-      </p:sp>
-      <p:sp>
-        <p:nvSpPr>
-          <p:cNvPr id="3" name="Text 1"/>
-          <p:cNvSpPr/>
-          <p:nvPr/>
-        </p:nvSpPr>
-        <p:spPr>
-          <a:xfrm>
-            <a:off x="640080" y="868680"/>
-            <a:ext cx="10881360" cy="914400"/>
-          </a:xfrm>
-          <a:prstGeom prst="rect">
-            <a:avLst/>
-          </a:prstGeom>
-          <a:noFill/>
-          <a:ln/>
-        </p:spPr>
-        <p:txBody>
-          <a:bodyPr wrap="square" lIns="0" tIns="0" rIns="0" bIns="0" rtlCol="0" anchor="ctr"/>
-          <a:lstStyle/>
-          <a:p>
-            <a:pPr marL="0" indent="0" algn="l">
-              <a:buNone/>
-            </a:pPr>
-            <a:r>
-              <a:rPr lang="en-US" sz="3400" b="1" dirty="0">
-                <a:solidFill>
-                  <a:srgbClr val="1E1F24"/>
-                </a:solidFill>
-                <a:latin typeface="Cambria" pitchFamily="34" charset="0"/>
-                <a:ea typeface="Cambria" pitchFamily="34" charset="-122"/>
-                <a:cs typeface="Cambria" pitchFamily="34" charset="-120"/>
-              </a:rPr>
-              <a:t>What we cannot measure</a:t>
-            </a:r>
-            <a:endParaRPr lang="en-US" sz="3400" dirty="0"/>
-          </a:p>
-        </p:txBody>
-      </p:sp>
-      <p:sp>
-        <p:nvSpPr>
-          <p:cNvPr id="4" name="Text 2"/>
-          <p:cNvSpPr/>
-          <p:nvPr/>
-        </p:nvSpPr>
-        <p:spPr>
-          <a:xfrm>
-            <a:off x="640080" y="2194560"/>
-            <a:ext cx="502920" cy="640080"/>
-          </a:xfrm>
-          <a:prstGeom prst="rect">
-            <a:avLst/>
-          </a:prstGeom>
-          <a:noFill/>
-          <a:ln/>
-        </p:spPr>
-        <p:txBody>
-          <a:bodyPr wrap="square" lIns="0" tIns="0" rIns="0" bIns="0" rtlCol="0" anchor="ctr"/>
-          <a:lstStyle/>
-          <a:p>
-            <a:pPr marL="0" indent="0" algn="l">
-              <a:buNone/>
-            </a:pPr>
-            <a:r>
-              <a:rPr lang="en-US" sz="3200" b="1" dirty="0">
-                <a:solidFill>
-                  <a:srgbClr val="7A1F2B"/>
-                </a:solidFill>
-                <a:latin typeface="Cambria" pitchFamily="34" charset="0"/>
-                <a:ea typeface="Cambria" pitchFamily="34" charset="-122"/>
-                <a:cs typeface="Cambria" pitchFamily="34" charset="-120"/>
-              </a:rPr>
-              <a:t>1</a:t>
-            </a:r>
-            <a:endParaRPr lang="en-US" sz="3200" dirty="0"/>
-          </a:p>
-        </p:txBody>
-      </p:sp>
-      <p:sp>
-        <p:nvSpPr>
-          <p:cNvPr id="5" name="Text 3"/>
-          <p:cNvSpPr/>
-          <p:nvPr/>
-        </p:nvSpPr>
-        <p:spPr>
-          <a:xfrm>
-            <a:off x="1280160" y="2194560"/>
-            <a:ext cx="5852160" cy="822960"/>
-          </a:xfrm>
-          <a:prstGeom prst="rect">
-            <a:avLst/>
-          </a:prstGeom>
-          <a:noFill/>
-          <a:ln/>
-        </p:spPr>
-        <p:txBody>
-          <a:bodyPr wrap="square" lIns="0" tIns="0" rIns="0" bIns="0" rtlCol="0" anchor="ctr"/>
-          <a:lstStyle/>
-          <a:p>
-            <a:pPr marL="0" indent="0" algn="l">
-              <a:lnSpc>
-                <a:spcPct val="105000"/>
-              </a:lnSpc>
-              <a:buNone/>
-            </a:pPr>
-            <a:r>
-              <a:rPr lang="en-US" sz="1850" dirty="0">
-                <a:solidFill>
-                  <a:srgbClr val="1E1F24"/>
-                </a:solidFill>
-                <a:latin typeface="Calibri" pitchFamily="34" charset="0"/>
-                <a:ea typeface="Calibri" pitchFamily="34" charset="-122"/>
-                <a:cs typeface="Calibri" pitchFamily="34" charset="-120"/>
-              </a:rPr>
-              <a:t>We cannot say how accurately it reads a page.</a:t>
-            </a:r>
-            <a:endParaRPr lang="en-US" sz="1850" dirty="0"/>
-          </a:p>
-        </p:txBody>
-      </p:sp>
-      <p:sp>
-        <p:nvSpPr>
-          <p:cNvPr id="6" name="Shape 4"/>
-          <p:cNvSpPr/>
-          <p:nvPr/>
-        </p:nvSpPr>
-        <p:spPr>
-          <a:xfrm>
-            <a:off x="7406640" y="2212848"/>
-            <a:ext cx="4114800" cy="777240"/>
-          </a:xfrm>
-          <a:prstGeom prst="roundRect">
-            <a:avLst>
-              <a:gd name="adj" fmla="val 7059"/>
-            </a:avLst>
-          </a:prstGeom>
-          <a:solidFill>
-            <a:srgbClr val="F4F4F6"/>
-          </a:solidFill>
-          <a:ln w="12700">
-            <a:solidFill>
-              <a:srgbClr val="D6D8DD"/>
-            </a:solidFill>
-            <a:prstDash val="solid"/>
-          </a:ln>
-        </p:spPr>
-        <p:txBody>
-          <a:bodyPr/>
-          <a:lstStyle/>
-          <a:p>
-            <a:endParaRPr lang="en-IN"/>
-          </a:p>
-        </p:txBody>
-      </p:sp>
-      <p:sp>
-        <p:nvSpPr>
-          <p:cNvPr id="7" name="Text 5"/>
-          <p:cNvSpPr/>
-          <p:nvPr/>
-        </p:nvSpPr>
-        <p:spPr>
-          <a:xfrm>
-            <a:off x="7571232" y="2212848"/>
-            <a:ext cx="3794760" cy="777240"/>
-          </a:xfrm>
-          <a:prstGeom prst="rect">
-            <a:avLst/>
-          </a:prstGeom>
-          <a:noFill/>
-          <a:ln/>
-        </p:spPr>
-        <p:txBody>
-          <a:bodyPr wrap="square" lIns="0" tIns="0" rIns="0" bIns="0" rtlCol="0" anchor="ctr"/>
-          <a:lstStyle/>
-          <a:p>
-            <a:pPr marL="0" indent="0" algn="l">
-              <a:lnSpc>
-                <a:spcPct val="100000"/>
-              </a:lnSpc>
-              <a:buNone/>
-            </a:pPr>
-            <a:r>
-              <a:rPr lang="en-US" sz="1450" dirty="0">
-                <a:solidFill>
-                  <a:srgbClr val="1E1F24"/>
-                </a:solidFill>
-                <a:latin typeface="Calibri" pitchFamily="34" charset="0"/>
-                <a:ea typeface="Calibri" pitchFamily="34" charset="-122"/>
-                <a:cs typeface="Calibri" pitchFamily="34" charset="-120"/>
-              </a:rPr>
-              <a:t>Nobody has hand-typed a set of pages to check against. No system can be scored, ours or anyone else's.</a:t>
-            </a:r>
-            <a:endParaRPr lang="en-US" sz="1450" dirty="0"/>
-          </a:p>
-        </p:txBody>
-      </p:sp>
-      <p:sp>
-        <p:nvSpPr>
-          <p:cNvPr id="8" name="Shape 6"/>
-          <p:cNvSpPr/>
-          <p:nvPr/>
-        </p:nvSpPr>
-        <p:spPr>
-          <a:xfrm>
-            <a:off x="640080" y="3154680"/>
-            <a:ext cx="10881360" cy="0"/>
-          </a:xfrm>
-          <a:prstGeom prst="line">
-            <a:avLst/>
-          </a:prstGeom>
-          <a:noFill/>
-          <a:ln w="9525">
-            <a:solidFill>
-              <a:srgbClr val="D6D8DD"/>
-            </a:solidFill>
-            <a:prstDash val="solid"/>
-          </a:ln>
-        </p:spPr>
-        <p:txBody>
-          <a:bodyPr/>
-          <a:lstStyle/>
-          <a:p>
-            <a:endParaRPr lang="en-IN"/>
-          </a:p>
-        </p:txBody>
-      </p:sp>
-      <p:sp>
-        <p:nvSpPr>
-          <p:cNvPr id="9" name="Text 7"/>
-          <p:cNvSpPr/>
-          <p:nvPr/>
-        </p:nvSpPr>
-        <p:spPr>
-          <a:xfrm>
-            <a:off x="640080" y="3291840"/>
-            <a:ext cx="502920" cy="640080"/>
-          </a:xfrm>
-          <a:prstGeom prst="rect">
-            <a:avLst/>
-          </a:prstGeom>
-          <a:noFill/>
-          <a:ln/>
-        </p:spPr>
-        <p:txBody>
-          <a:bodyPr wrap="square" lIns="0" tIns="0" rIns="0" bIns="0" rtlCol="0" anchor="ctr"/>
-          <a:lstStyle/>
-          <a:p>
-            <a:pPr marL="0" indent="0" algn="l">
-              <a:buNone/>
-            </a:pPr>
-            <a:r>
-              <a:rPr lang="en-US" sz="3200" b="1" dirty="0">
-                <a:solidFill>
-                  <a:srgbClr val="7A1F2B"/>
-                </a:solidFill>
-                <a:latin typeface="Cambria" pitchFamily="34" charset="0"/>
-                <a:ea typeface="Cambria" pitchFamily="34" charset="-122"/>
-                <a:cs typeface="Cambria" pitchFamily="34" charset="-120"/>
-              </a:rPr>
-              <a:t>2</a:t>
-            </a:r>
-            <a:endParaRPr lang="en-US" sz="3200" dirty="0"/>
-          </a:p>
-        </p:txBody>
-      </p:sp>
-      <p:sp>
-        <p:nvSpPr>
-          <p:cNvPr id="10" name="Text 8"/>
-          <p:cNvSpPr/>
-          <p:nvPr/>
-        </p:nvSpPr>
-        <p:spPr>
-          <a:xfrm>
-            <a:off x="1280160" y="3291840"/>
-            <a:ext cx="5852160" cy="822960"/>
-          </a:xfrm>
-          <a:prstGeom prst="rect">
-            <a:avLst/>
-          </a:prstGeom>
-          <a:noFill/>
-          <a:ln/>
-        </p:spPr>
-        <p:txBody>
-          <a:bodyPr wrap="square" lIns="0" tIns="0" rIns="0" bIns="0" rtlCol="0" anchor="ctr"/>
-          <a:lstStyle/>
-          <a:p>
-            <a:pPr marL="0" indent="0" algn="l">
-              <a:lnSpc>
-                <a:spcPct val="105000"/>
-              </a:lnSpc>
-              <a:buNone/>
-            </a:pPr>
-            <a:r>
-              <a:rPr lang="en-US" sz="1850" dirty="0">
-                <a:solidFill>
-                  <a:srgbClr val="1E1F24"/>
-                </a:solidFill>
-                <a:latin typeface="Calibri" pitchFamily="34" charset="0"/>
-                <a:ea typeface="Calibri" pitchFamily="34" charset="-122"/>
-                <a:cs typeface="Calibri" pitchFamily="34" charset="-120"/>
-              </a:rPr>
-              <a:t>We cannot say how often redaction hides too much.</a:t>
-            </a:r>
-            <a:endParaRPr lang="en-US" sz="1850" dirty="0"/>
-          </a:p>
-        </p:txBody>
-      </p:sp>
-      <p:sp>
-        <p:nvSpPr>
-          <p:cNvPr id="11" name="Shape 9"/>
-          <p:cNvSpPr/>
-          <p:nvPr/>
-        </p:nvSpPr>
-        <p:spPr>
-          <a:xfrm>
-            <a:off x="7406640" y="3310128"/>
-            <a:ext cx="4114800" cy="777240"/>
-          </a:xfrm>
-          <a:prstGeom prst="roundRect">
-            <a:avLst>
-              <a:gd name="adj" fmla="val 7059"/>
-            </a:avLst>
-          </a:prstGeom>
-          <a:solidFill>
-            <a:srgbClr val="F4F4F6"/>
-          </a:solidFill>
-          <a:ln w="12700">
-            <a:solidFill>
-              <a:srgbClr val="D6D8DD"/>
-            </a:solidFill>
-            <a:prstDash val="solid"/>
-          </a:ln>
-        </p:spPr>
-        <p:txBody>
-          <a:bodyPr/>
-          <a:lstStyle/>
-          <a:p>
-            <a:endParaRPr lang="en-IN"/>
-          </a:p>
-        </p:txBody>
-      </p:sp>
-      <p:sp>
-        <p:nvSpPr>
-          <p:cNvPr id="12" name="Text 10"/>
-          <p:cNvSpPr/>
-          <p:nvPr/>
-        </p:nvSpPr>
-        <p:spPr>
-          <a:xfrm>
-            <a:off x="7571232" y="3310128"/>
-            <a:ext cx="3794760" cy="777240"/>
-          </a:xfrm>
-          <a:prstGeom prst="rect">
-            <a:avLst/>
-          </a:prstGeom>
-          <a:noFill/>
-          <a:ln/>
-        </p:spPr>
-        <p:txBody>
-          <a:bodyPr wrap="square" lIns="0" tIns="0" rIns="0" bIns="0" rtlCol="0" anchor="ctr"/>
-          <a:lstStyle/>
-          <a:p>
-            <a:r>
-              <a:rPr lang="en-US" sz="1450" dirty="0">
-                <a:solidFill>
-                  <a:srgbClr val="1E1F24"/>
-                </a:solidFill>
-                <a:latin typeface="Calibri" pitchFamily="34" charset="0"/>
-                <a:ea typeface="Calibri" pitchFamily="34" charset="-122"/>
-                <a:cs typeface="Calibri" pitchFamily="34" charset="-120"/>
-              </a:rPr>
-              <a:t>We marked what should be hidden. We never marked what should not, so a miss and an over-redaction look the same.</a:t>
-            </a:r>
-            <a:endParaRPr lang="en-US" sz="1450" dirty="0"/>
-          </a:p>
-        </p:txBody>
-      </p:sp>
-      <p:sp>
-        <p:nvSpPr>
-          <p:cNvPr id="13" name="Shape 11"/>
-          <p:cNvSpPr/>
-          <p:nvPr/>
-        </p:nvSpPr>
-        <p:spPr>
-          <a:xfrm>
-            <a:off x="640080" y="4251960"/>
-            <a:ext cx="10881360" cy="0"/>
-          </a:xfrm>
-          <a:prstGeom prst="line">
-            <a:avLst/>
-          </a:prstGeom>
-          <a:noFill/>
-          <a:ln w="9525">
-            <a:solidFill>
-              <a:srgbClr val="D6D8DD"/>
-            </a:solidFill>
-            <a:prstDash val="solid"/>
-          </a:ln>
-        </p:spPr>
-        <p:txBody>
-          <a:bodyPr/>
-          <a:lstStyle/>
-          <a:p>
-            <a:endParaRPr lang="en-IN"/>
-          </a:p>
-        </p:txBody>
-      </p:sp>
-      <p:sp>
-        <p:nvSpPr>
-          <p:cNvPr id="14" name="Text 12"/>
-          <p:cNvSpPr/>
-          <p:nvPr/>
-        </p:nvSpPr>
-        <p:spPr>
-          <a:xfrm>
-            <a:off x="640080" y="4389120"/>
-            <a:ext cx="502920" cy="640080"/>
-          </a:xfrm>
-          <a:prstGeom prst="rect">
-            <a:avLst/>
-          </a:prstGeom>
-          <a:noFill/>
-          <a:ln/>
-        </p:spPr>
-        <p:txBody>
-          <a:bodyPr wrap="square" lIns="0" tIns="0" rIns="0" bIns="0" rtlCol="0" anchor="ctr"/>
-          <a:lstStyle/>
-          <a:p>
-            <a:pPr marL="0" indent="0" algn="l">
-              <a:buNone/>
-            </a:pPr>
-            <a:r>
-              <a:rPr lang="en-US" sz="3200" b="1" dirty="0">
-                <a:solidFill>
-                  <a:srgbClr val="7A1F2B"/>
-                </a:solidFill>
-                <a:latin typeface="Cambria" pitchFamily="34" charset="0"/>
-                <a:ea typeface="Cambria" pitchFamily="34" charset="-122"/>
-                <a:cs typeface="Cambria" pitchFamily="34" charset="-120"/>
-              </a:rPr>
-              <a:t>3</a:t>
-            </a:r>
-            <a:endParaRPr lang="en-US" sz="3200" dirty="0"/>
-          </a:p>
-        </p:txBody>
-      </p:sp>
-      <p:sp>
-        <p:nvSpPr>
-          <p:cNvPr id="15" name="Text 13"/>
-          <p:cNvSpPr/>
-          <p:nvPr/>
-        </p:nvSpPr>
-        <p:spPr>
-          <a:xfrm>
-            <a:off x="1280160" y="4389120"/>
-            <a:ext cx="5852160" cy="822960"/>
-          </a:xfrm>
-          <a:prstGeom prst="rect">
-            <a:avLst/>
-          </a:prstGeom>
-          <a:noFill/>
-          <a:ln/>
-        </p:spPr>
-        <p:txBody>
-          <a:bodyPr wrap="square" lIns="0" tIns="0" rIns="0" bIns="0" rtlCol="0" anchor="ctr"/>
-          <a:lstStyle/>
-          <a:p>
-            <a:pPr marL="0" indent="0" algn="l">
-              <a:lnSpc>
-                <a:spcPct val="105000"/>
-              </a:lnSpc>
-              <a:buNone/>
-            </a:pPr>
-            <a:r>
-              <a:rPr lang="en-US" sz="1850" dirty="0">
-                <a:solidFill>
-                  <a:srgbClr val="1E1F24"/>
-                </a:solidFill>
-                <a:latin typeface="Calibri" pitchFamily="34" charset="0"/>
-                <a:ea typeface="Calibri" pitchFamily="34" charset="-122"/>
-                <a:cs typeface="Calibri" pitchFamily="34" charset="-120"/>
-              </a:rPr>
-              <a:t>We cannot say it saves officer time.</a:t>
-            </a:r>
-            <a:endParaRPr lang="en-US" sz="1850" dirty="0"/>
-          </a:p>
-        </p:txBody>
-      </p:sp>
-      <p:sp>
-        <p:nvSpPr>
-          <p:cNvPr id="16" name="Shape 14"/>
-          <p:cNvSpPr/>
-          <p:nvPr/>
-        </p:nvSpPr>
-        <p:spPr>
-          <a:xfrm>
-            <a:off x="7406640" y="4407408"/>
-            <a:ext cx="4114800" cy="777240"/>
-          </a:xfrm>
-          <a:prstGeom prst="roundRect">
-            <a:avLst>
-              <a:gd name="adj" fmla="val 7059"/>
-            </a:avLst>
-          </a:prstGeom>
-          <a:solidFill>
-            <a:srgbClr val="F4F4F6"/>
-          </a:solidFill>
-          <a:ln w="12700">
-            <a:solidFill>
-              <a:srgbClr val="D6D8DD"/>
-            </a:solidFill>
-            <a:prstDash val="solid"/>
-          </a:ln>
-        </p:spPr>
-        <p:txBody>
-          <a:bodyPr/>
-          <a:lstStyle/>
-          <a:p>
-            <a:endParaRPr lang="en-IN" b="1"/>
-          </a:p>
-        </p:txBody>
-      </p:sp>
-      <p:sp>
-        <p:nvSpPr>
-          <p:cNvPr id="17" name="Text 15"/>
-          <p:cNvSpPr/>
-          <p:nvPr/>
-        </p:nvSpPr>
-        <p:spPr>
-          <a:xfrm>
-            <a:off x="7571232" y="4407408"/>
-            <a:ext cx="3794760" cy="777240"/>
-          </a:xfrm>
-          <a:prstGeom prst="rect">
-            <a:avLst/>
-          </a:prstGeom>
-          <a:noFill/>
-          <a:ln/>
-        </p:spPr>
-        <p:txBody>
-          <a:bodyPr wrap="square" lIns="0" tIns="0" rIns="0" bIns="0" rtlCol="0" anchor="ctr"/>
-          <a:lstStyle/>
-          <a:p>
-            <a:pPr marL="0" indent="0" algn="l">
-              <a:lnSpc>
-                <a:spcPct val="100000"/>
-              </a:lnSpc>
-              <a:buNone/>
-            </a:pPr>
-            <a:r>
-              <a:rPr lang="en-US" sz="1450" dirty="0">
-                <a:solidFill>
-                  <a:srgbClr val="1E1F24"/>
-                </a:solidFill>
-                <a:latin typeface="Calibri" pitchFamily="34" charset="0"/>
-                <a:ea typeface="Calibri" pitchFamily="34" charset="-122"/>
-                <a:cs typeface="Calibri" pitchFamily="34" charset="-120"/>
-              </a:rPr>
-              <a:t>The 10 to 15 minute baseline is self-reported and was never timed. No trial has been run.</a:t>
-            </a:r>
-            <a:endParaRPr lang="en-US" sz="1450" dirty="0"/>
-          </a:p>
-        </p:txBody>
-      </p:sp>
-      <p:sp>
-        <p:nvSpPr>
-          <p:cNvPr id="18" name="Text 16"/>
-          <p:cNvSpPr/>
-          <p:nvPr/>
-        </p:nvSpPr>
-        <p:spPr>
-          <a:xfrm>
-            <a:off x="640080" y="5577840"/>
-            <a:ext cx="10881360" cy="365760"/>
-          </a:xfrm>
-          <a:prstGeom prst="rect">
-            <a:avLst/>
-          </a:prstGeom>
-          <a:noFill/>
-          <a:ln/>
-        </p:spPr>
-        <p:txBody>
-          <a:bodyPr wrap="square" lIns="0" tIns="0" rIns="0" bIns="0" rtlCol="0" anchor="ctr"/>
-          <a:lstStyle/>
-          <a:p>
-            <a:pPr marL="0" indent="0" algn="l">
-              <a:buNone/>
-            </a:pPr>
-            <a:r>
-              <a:rPr lang="en-US" sz="1650" b="1" i="1" dirty="0">
-                <a:solidFill>
-                  <a:srgbClr val="6C6E76"/>
-                </a:solidFill>
-                <a:latin typeface="Calibri" pitchFamily="34" charset="0"/>
-                <a:ea typeface="Calibri" pitchFamily="34" charset="-122"/>
-                <a:cs typeface="Calibri" pitchFamily="34" charset="-120"/>
-              </a:rPr>
-              <a:t>Every figure in this deck was produced by us, on our own data. None of it has been checked by an officer.</a:t>
-            </a:r>
-            <a:endParaRPr lang="en-US" sz="1650" b="1" dirty="0"/>
-          </a:p>
-        </p:txBody>
-      </p:sp>
-      <p:sp>
-        <p:nvSpPr>
-          <p:cNvPr id="19" name="Text 17"/>
-          <p:cNvSpPr/>
-          <p:nvPr/>
-        </p:nvSpPr>
-        <p:spPr>
-          <a:xfrm>
-            <a:off x="640080" y="6419088"/>
-            <a:ext cx="5486400" cy="274320"/>
-          </a:xfrm>
-          <a:prstGeom prst="rect">
-            <a:avLst/>
-          </a:prstGeom>
-          <a:noFill/>
-          <a:ln/>
-        </p:spPr>
-        <p:txBody>
-          <a:bodyPr wrap="square" lIns="0" tIns="0" rIns="0" bIns="0" rtlCol="0" anchor="ctr"/>
-          <a:lstStyle/>
-          <a:p>
-            <a:pPr marL="0" indent="0" algn="l">
-              <a:buNone/>
-            </a:pPr>
-            <a:r>
-              <a:rPr lang="en-US" sz="850" dirty="0">
-                <a:solidFill>
-                  <a:srgbClr val="6C6E76"/>
-                </a:solidFill>
-                <a:latin typeface="Calibri" pitchFamily="34" charset="0"/>
-                <a:ea typeface="Calibri" pitchFamily="34" charset="-122"/>
-                <a:cs typeface="Calibri" pitchFamily="34" charset="-120"/>
-              </a:rPr>
-              <a:t>Data, Policy and Innovation Centre</a:t>
-            </a:r>
-            <a:endParaRPr lang="en-US" sz="850" dirty="0"/>
-          </a:p>
-        </p:txBody>
-      </p:sp>
-      <p:sp>
-        <p:nvSpPr>
-          <p:cNvPr id="20" name="Text 18"/>
-          <p:cNvSpPr/>
-          <p:nvPr/>
-        </p:nvSpPr>
-        <p:spPr>
-          <a:xfrm>
-            <a:off x="6035040" y="6419088"/>
-            <a:ext cx="5486400" cy="274320"/>
-          </a:xfrm>
-          <a:prstGeom prst="rect">
-            <a:avLst/>
-          </a:prstGeom>
-          <a:noFill/>
-          <a:ln/>
-        </p:spPr>
-        <p:txBody>
-          <a:bodyPr wrap="square" lIns="0" tIns="0" rIns="0" bIns="0" rtlCol="0" anchor="ctr"/>
-          <a:lstStyle/>
-          <a:p>
-            <a:pPr marL="0" indent="0" algn="r">
-              <a:buNone/>
-            </a:pPr>
-            <a:r>
-              <a:rPr lang="en-US" sz="850" dirty="0">
-                <a:solidFill>
-                  <a:srgbClr val="6C6E76"/>
-                </a:solidFill>
-                <a:latin typeface="Calibri" pitchFamily="34" charset="0"/>
-                <a:ea typeface="Calibri" pitchFamily="34" charset="-122"/>
-                <a:cs typeface="Calibri" pitchFamily="34" charset="-120"/>
-              </a:rPr>
-              <a:t>Government of Odisha  ×  University of Chicago Trust</a:t>
-            </a:r>
-            <a:endParaRPr lang="en-US" sz="850" dirty="0"/>
+              <a:t>We withdrew the estimate, not the research question.</a:t>
+            </a:r>
           </a:p>
         </p:txBody>
       </p:sp>
@@ -7024,7 +7149,7 @@
                 <a:ea typeface="Calibri" pitchFamily="34" charset="-122"/>
                 <a:cs typeface="Calibri" pitchFamily="34" charset="-120"/>
               </a:rPr>
-              <a:t>THE OUTSIDE OPTION: SARVAM</a:t>
+              <a:t>THE LIMITS</a:t>
             </a:r>
             <a:endParaRPr lang="en-US" sz="1500" dirty="0"/>
           </a:p>
@@ -7063,7 +7188,7 @@
                 <a:ea typeface="Cambria" pitchFamily="34" charset="-122"/>
                 <a:cs typeface="Cambria" pitchFamily="34" charset="-120"/>
               </a:rPr>
-              <a:t>It does more. We have not shown it does better</a:t>
+              <a:t>What we cannot measure</a:t>
             </a:r>
             <a:endParaRPr lang="en-US" sz="3400" dirty="0"/>
           </a:p>
@@ -7071,14 +7196,14 @@
       </p:sp>
       <p:sp>
         <p:nvSpPr>
-          <p:cNvPr id="5" name="Text 3"/>
-          <p:cNvSpPr/>
-          <p:nvPr/>
-        </p:nvSpPr>
-        <p:spPr>
-          <a:xfrm>
-            <a:off x="640080" y="2179321"/>
-            <a:ext cx="10881360" cy="292608"/>
+          <p:cNvPr id="4" name="Text 2"/>
+          <p:cNvSpPr/>
+          <p:nvPr/>
+        </p:nvSpPr>
+        <p:spPr>
+          <a:xfrm>
+            <a:off x="640080" y="2194560"/>
+            <a:ext cx="502920" cy="640080"/>
           </a:xfrm>
           <a:prstGeom prst="rect">
             <a:avLst/>
@@ -7094,17 +7219,59 @@
               <a:buNone/>
             </a:pPr>
             <a:r>
-              <a:rPr lang="en-US" sz="1350" b="1" kern="0" spc="150" dirty="0">
+              <a:rPr lang="en-US" sz="3200" b="1" dirty="0">
                 <a:solidFill>
                   <a:srgbClr val="7A1F2B"/>
+                </a:solidFill>
+                <a:latin typeface="Cambria" pitchFamily="34" charset="0"/>
+                <a:ea typeface="Cambria" pitchFamily="34" charset="-122"/>
+                <a:cs typeface="Cambria" pitchFamily="34" charset="-120"/>
+              </a:rPr>
+              <a:t>1</a:t>
+            </a:r>
+            <a:endParaRPr lang="en-US" sz="3200" dirty="0"/>
+          </a:p>
+        </p:txBody>
+      </p:sp>
+      <p:sp>
+        <p:nvSpPr>
+          <p:cNvPr id="5" name="Text 3"/>
+          <p:cNvSpPr/>
+          <p:nvPr/>
+        </p:nvSpPr>
+        <p:spPr>
+          <a:xfrm>
+            <a:off x="1280160" y="2194560"/>
+            <a:ext cx="5852160" cy="822960"/>
+          </a:xfrm>
+          <a:prstGeom prst="rect">
+            <a:avLst/>
+          </a:prstGeom>
+          <a:noFill/>
+          <a:ln/>
+        </p:spPr>
+        <p:txBody>
+          <a:bodyPr wrap="square" lIns="0" tIns="0" rIns="0" bIns="0" rtlCol="0" anchor="ctr"/>
+          <a:lstStyle/>
+          <a:p>
+            <a:pPr marL="0" indent="0" algn="l">
+              <a:lnSpc>
+                <a:spcPct val="105000"/>
+              </a:lnSpc>
+              <a:buNone/>
+            </a:pPr>
+            <a:r>
+              <a:rPr lang="en-US" sz="1850" dirty="0">
+                <a:solidFill>
+                  <a:srgbClr val="1E1F24"/>
                 </a:solidFill>
                 <a:latin typeface="Calibri" pitchFamily="34" charset="0"/>
                 <a:ea typeface="Calibri" pitchFamily="34" charset="-122"/>
                 <a:cs typeface="Calibri" pitchFamily="34" charset="-120"/>
               </a:rPr>
-              <a:t>What it does</a:t>
-            </a:r>
-            <a:endParaRPr lang="en-US" sz="1350" dirty="0"/>
+              <a:t>We cannot say how accurately it reads a page.</a:t>
+            </a:r>
+            <a:endParaRPr lang="en-US" sz="1850" dirty="0"/>
           </a:p>
         </p:txBody>
       </p:sp>
@@ -7116,16 +7283,23 @@
         </p:nvSpPr>
         <p:spPr>
           <a:xfrm>
-            <a:off x="640080" y="2663953"/>
-            <a:ext cx="91440" cy="91440"/>
-          </a:xfrm>
-          <a:prstGeom prst="rect">
-            <a:avLst/>
+            <a:off x="7406640" y="2212848"/>
+            <a:ext cx="4114800" cy="777240"/>
+          </a:xfrm>
+          <a:prstGeom prst="roundRect">
+            <a:avLst>
+              <a:gd name="adj" fmla="val 7059"/>
+            </a:avLst>
           </a:prstGeom>
           <a:solidFill>
-            <a:srgbClr val="7A1F2B"/>
+            <a:srgbClr val="F4F4F6"/>
           </a:solidFill>
-          <a:ln/>
+          <a:ln w="12700">
+            <a:solidFill>
+              <a:srgbClr val="D6D8DD"/>
+            </a:solidFill>
+            <a:prstDash val="solid"/>
+          </a:ln>
         </p:spPr>
         <p:txBody>
           <a:bodyPr/>
@@ -7143,24 +7317,138 @@
         </p:nvSpPr>
         <p:spPr>
           <a:xfrm>
-            <a:off x="932688" y="2545081"/>
-            <a:ext cx="10607040" cy="411480"/>
-          </a:xfrm>
-          <a:prstGeom prst="rect">
-            <a:avLst/>
-          </a:prstGeom>
-          <a:noFill/>
-          <a:ln/>
-        </p:spPr>
-        <p:txBody>
-          <a:bodyPr wrap="square" lIns="0" tIns="0" rIns="0" bIns="0" rtlCol="0" anchor="t"/>
+            <a:off x="7571232" y="2212848"/>
+            <a:ext cx="3794760" cy="777240"/>
+          </a:xfrm>
+          <a:prstGeom prst="rect">
+            <a:avLst/>
+          </a:prstGeom>
+          <a:noFill/>
+          <a:ln/>
+        </p:spPr>
+        <p:txBody>
+          <a:bodyPr wrap="square" lIns="0" tIns="0" rIns="0" bIns="0" rtlCol="0" anchor="ctr"/>
+          <a:lstStyle/>
+          <a:p>
+            <a:pPr marL="0" indent="0" algn="l">
+              <a:lnSpc>
+                <a:spcPct val="100000"/>
+              </a:lnSpc>
+              <a:buNone/>
+            </a:pPr>
+            <a:r>
+              <a:rPr lang="en-US" sz="1450" dirty="0">
+                <a:solidFill>
+                  <a:srgbClr val="1E1F24"/>
+                </a:solidFill>
+                <a:latin typeface="Calibri" pitchFamily="34" charset="0"/>
+                <a:ea typeface="Calibri" pitchFamily="34" charset="-122"/>
+                <a:cs typeface="Calibri" pitchFamily="34" charset="-120"/>
+              </a:rPr>
+              <a:t>Nobody has hand-typed a set of pages to check against. No system can be scored, ours or anyone else's.</a:t>
+            </a:r>
+            <a:endParaRPr lang="en-US" sz="1450" dirty="0"/>
+          </a:p>
+        </p:txBody>
+      </p:sp>
+      <p:sp>
+        <p:nvSpPr>
+          <p:cNvPr id="8" name="Shape 6"/>
+          <p:cNvSpPr/>
+          <p:nvPr/>
+        </p:nvSpPr>
+        <p:spPr>
+          <a:xfrm>
+            <a:off x="640080" y="3154680"/>
+            <a:ext cx="10881360" cy="0"/>
+          </a:xfrm>
+          <a:prstGeom prst="line">
+            <a:avLst/>
+          </a:prstGeom>
+          <a:noFill/>
+          <a:ln w="9525">
+            <a:solidFill>
+              <a:srgbClr val="D6D8DD"/>
+            </a:solidFill>
+            <a:prstDash val="solid"/>
+          </a:ln>
+        </p:spPr>
+        <p:txBody>
+          <a:bodyPr/>
+          <a:lstStyle/>
+          <a:p>
+            <a:endParaRPr lang="en-IN"/>
+          </a:p>
+        </p:txBody>
+      </p:sp>
+      <p:sp>
+        <p:nvSpPr>
+          <p:cNvPr id="9" name="Text 7"/>
+          <p:cNvSpPr/>
+          <p:nvPr/>
+        </p:nvSpPr>
+        <p:spPr>
+          <a:xfrm>
+            <a:off x="640080" y="3291840"/>
+            <a:ext cx="502920" cy="640080"/>
+          </a:xfrm>
+          <a:prstGeom prst="rect">
+            <a:avLst/>
+          </a:prstGeom>
+          <a:noFill/>
+          <a:ln/>
+        </p:spPr>
+        <p:txBody>
+          <a:bodyPr wrap="square" lIns="0" tIns="0" rIns="0" bIns="0" rtlCol="0" anchor="ctr"/>
           <a:lstStyle/>
           <a:p>
             <a:pPr marL="0" indent="0" algn="l">
               <a:buNone/>
             </a:pPr>
             <a:r>
-              <a:rPr lang="en-US" sz="1800" dirty="0">
+              <a:rPr lang="en-US" sz="3200" b="1" dirty="0">
+                <a:solidFill>
+                  <a:srgbClr val="7A1F2B"/>
+                </a:solidFill>
+                <a:latin typeface="Cambria" pitchFamily="34" charset="0"/>
+                <a:ea typeface="Cambria" pitchFamily="34" charset="-122"/>
+                <a:cs typeface="Cambria" pitchFamily="34" charset="-120"/>
+              </a:rPr>
+              <a:t>2</a:t>
+            </a:r>
+            <a:endParaRPr lang="en-US" sz="3200" dirty="0"/>
+          </a:p>
+        </p:txBody>
+      </p:sp>
+      <p:sp>
+        <p:nvSpPr>
+          <p:cNvPr id="10" name="Text 8"/>
+          <p:cNvSpPr/>
+          <p:nvPr/>
+        </p:nvSpPr>
+        <p:spPr>
+          <a:xfrm>
+            <a:off x="1280160" y="3291840"/>
+            <a:ext cx="5852160" cy="822960"/>
+          </a:xfrm>
+          <a:prstGeom prst="rect">
+            <a:avLst/>
+          </a:prstGeom>
+          <a:noFill/>
+          <a:ln/>
+        </p:spPr>
+        <p:txBody>
+          <a:bodyPr wrap="square" lIns="0" tIns="0" rIns="0" bIns="0" rtlCol="0" anchor="ctr"/>
+          <a:lstStyle/>
+          <a:p>
+            <a:pPr marL="0" indent="0" algn="l">
+              <a:lnSpc>
+                <a:spcPct val="105000"/>
+              </a:lnSpc>
+              <a:buNone/>
+            </a:pPr>
+            <a:r>
+              <a:rPr lang="en-US" sz="1850" dirty="0">
                 <a:solidFill>
                   <a:srgbClr val="1E1F24"/>
                 </a:solidFill>
@@ -7168,30 +7456,37 @@
                 <a:ea typeface="Calibri" pitchFamily="34" charset="-122"/>
                 <a:cs typeface="Calibri" pitchFamily="34" charset="-120"/>
               </a:rPr>
-              <a:t>One call at ₹1.50 a page returns the text, a category, a one-line summary and the district.</a:t>
-            </a:r>
-            <a:endParaRPr lang="en-US" sz="1800" dirty="0"/>
-          </a:p>
-        </p:txBody>
-      </p:sp>
-      <p:sp>
-        <p:nvSpPr>
-          <p:cNvPr id="8" name="Shape 6"/>
-          <p:cNvSpPr/>
-          <p:nvPr/>
-        </p:nvSpPr>
-        <p:spPr>
-          <a:xfrm>
-            <a:off x="640080" y="3166873"/>
-            <a:ext cx="91440" cy="91440"/>
-          </a:xfrm>
-          <a:prstGeom prst="rect">
-            <a:avLst/>
+              <a:t>We cannot say how often redaction hides too much.</a:t>
+            </a:r>
+            <a:endParaRPr lang="en-US" sz="1850" dirty="0"/>
+          </a:p>
+        </p:txBody>
+      </p:sp>
+      <p:sp>
+        <p:nvSpPr>
+          <p:cNvPr id="11" name="Shape 9"/>
+          <p:cNvSpPr/>
+          <p:nvPr/>
+        </p:nvSpPr>
+        <p:spPr>
+          <a:xfrm>
+            <a:off x="7406640" y="3310128"/>
+            <a:ext cx="4114800" cy="777240"/>
+          </a:xfrm>
+          <a:prstGeom prst="roundRect">
+            <a:avLst>
+              <a:gd name="adj" fmla="val 7059"/>
+            </a:avLst>
           </a:prstGeom>
           <a:solidFill>
-            <a:srgbClr val="7A1F2B"/>
+            <a:srgbClr val="F4F4F6"/>
           </a:solidFill>
-          <a:ln/>
+          <a:ln w="12700">
+            <a:solidFill>
+              <a:srgbClr val="D6D8DD"/>
+            </a:solidFill>
+            <a:prstDash val="solid"/>
+          </a:ln>
         </p:spPr>
         <p:txBody>
           <a:bodyPr/>
@@ -7203,30 +7498,138 @@
       </p:sp>
       <p:sp>
         <p:nvSpPr>
-          <p:cNvPr id="9" name="Text 7"/>
-          <p:cNvSpPr/>
-          <p:nvPr/>
-        </p:nvSpPr>
-        <p:spPr>
-          <a:xfrm>
-            <a:off x="932688" y="3048001"/>
-            <a:ext cx="10607040" cy="411480"/>
-          </a:xfrm>
-          <a:prstGeom prst="rect">
-            <a:avLst/>
-          </a:prstGeom>
-          <a:noFill/>
-          <a:ln/>
-        </p:spPr>
-        <p:txBody>
-          <a:bodyPr wrap="square" lIns="0" tIns="0" rIns="0" bIns="0" rtlCol="0" anchor="t"/>
+          <p:cNvPr id="12" name="Text 10"/>
+          <p:cNvSpPr/>
+          <p:nvPr/>
+        </p:nvSpPr>
+        <p:spPr>
+          <a:xfrm>
+            <a:off x="7571232" y="3310128"/>
+            <a:ext cx="3794760" cy="777240"/>
+          </a:xfrm>
+          <a:prstGeom prst="rect">
+            <a:avLst/>
+          </a:prstGeom>
+          <a:noFill/>
+          <a:ln/>
+        </p:spPr>
+        <p:txBody>
+          <a:bodyPr wrap="square" lIns="0" tIns="0" rIns="0" bIns="0" rtlCol="0" anchor="ctr"/>
+          <a:lstStyle/>
+          <a:p>
+            <a:r>
+              <a:rPr lang="en-US" sz="1450" dirty="0">
+                <a:solidFill>
+                  <a:srgbClr val="1E1F24"/>
+                </a:solidFill>
+                <a:latin typeface="Calibri" pitchFamily="34" charset="0"/>
+                <a:ea typeface="Calibri" pitchFamily="34" charset="-122"/>
+                <a:cs typeface="Calibri" pitchFamily="34" charset="-120"/>
+              </a:rPr>
+              <a:t>We marked what should be hidden. We never marked what should not, so a miss and an over-redaction look the same.</a:t>
+            </a:r>
+            <a:endParaRPr lang="en-US" sz="1450" dirty="0"/>
+          </a:p>
+        </p:txBody>
+      </p:sp>
+      <p:sp>
+        <p:nvSpPr>
+          <p:cNvPr id="13" name="Shape 11"/>
+          <p:cNvSpPr/>
+          <p:nvPr/>
+        </p:nvSpPr>
+        <p:spPr>
+          <a:xfrm>
+            <a:off x="640080" y="4251960"/>
+            <a:ext cx="10881360" cy="0"/>
+          </a:xfrm>
+          <a:prstGeom prst="line">
+            <a:avLst/>
+          </a:prstGeom>
+          <a:noFill/>
+          <a:ln w="9525">
+            <a:solidFill>
+              <a:srgbClr val="D6D8DD"/>
+            </a:solidFill>
+            <a:prstDash val="solid"/>
+          </a:ln>
+        </p:spPr>
+        <p:txBody>
+          <a:bodyPr/>
+          <a:lstStyle/>
+          <a:p>
+            <a:endParaRPr lang="en-IN"/>
+          </a:p>
+        </p:txBody>
+      </p:sp>
+      <p:sp>
+        <p:nvSpPr>
+          <p:cNvPr id="14" name="Text 12"/>
+          <p:cNvSpPr/>
+          <p:nvPr/>
+        </p:nvSpPr>
+        <p:spPr>
+          <a:xfrm>
+            <a:off x="640080" y="4389120"/>
+            <a:ext cx="502920" cy="640080"/>
+          </a:xfrm>
+          <a:prstGeom prst="rect">
+            <a:avLst/>
+          </a:prstGeom>
+          <a:noFill/>
+          <a:ln/>
+        </p:spPr>
+        <p:txBody>
+          <a:bodyPr wrap="square" lIns="0" tIns="0" rIns="0" bIns="0" rtlCol="0" anchor="ctr"/>
           <a:lstStyle/>
           <a:p>
             <a:pPr marL="0" indent="0" algn="l">
               <a:buNone/>
             </a:pPr>
             <a:r>
-              <a:rPr lang="en-US" sz="1800" dirty="0">
+              <a:rPr lang="en-US" sz="3200" b="1" dirty="0">
+                <a:solidFill>
+                  <a:srgbClr val="7A1F2B"/>
+                </a:solidFill>
+                <a:latin typeface="Cambria" pitchFamily="34" charset="0"/>
+                <a:ea typeface="Cambria" pitchFamily="34" charset="-122"/>
+                <a:cs typeface="Cambria" pitchFamily="34" charset="-120"/>
+              </a:rPr>
+              <a:t>3</a:t>
+            </a:r>
+            <a:endParaRPr lang="en-US" sz="3200" dirty="0"/>
+          </a:p>
+        </p:txBody>
+      </p:sp>
+      <p:sp>
+        <p:nvSpPr>
+          <p:cNvPr id="15" name="Text 13"/>
+          <p:cNvSpPr/>
+          <p:nvPr/>
+        </p:nvSpPr>
+        <p:spPr>
+          <a:xfrm>
+            <a:off x="1280160" y="4389120"/>
+            <a:ext cx="5852160" cy="822960"/>
+          </a:xfrm>
+          <a:prstGeom prst="rect">
+            <a:avLst/>
+          </a:prstGeom>
+          <a:noFill/>
+          <a:ln/>
+        </p:spPr>
+        <p:txBody>
+          <a:bodyPr wrap="square" lIns="0" tIns="0" rIns="0" bIns="0" rtlCol="0" anchor="ctr"/>
+          <a:lstStyle/>
+          <a:p>
+            <a:pPr marL="0" indent="0" algn="l">
+              <a:lnSpc>
+                <a:spcPct val="105000"/>
+              </a:lnSpc>
+              <a:buNone/>
+            </a:pPr>
+            <a:r>
+              <a:rPr lang="en-US" sz="1850" dirty="0">
                 <a:solidFill>
                   <a:srgbClr val="1E1F24"/>
                 </a:solidFill>
@@ -7234,22 +7637,98 @@
                 <a:ea typeface="Calibri" pitchFamily="34" charset="-122"/>
                 <a:cs typeface="Calibri" pitchFamily="34" charset="-120"/>
               </a:rPr>
-              <a:t>It reads 22 Indian languages including Odia. Ours reads English.</a:t>
-            </a:r>
-            <a:endParaRPr lang="en-US" sz="1800" dirty="0"/>
-          </a:p>
-        </p:txBody>
-      </p:sp>
-      <p:sp>
-        <p:nvSpPr>
-          <p:cNvPr id="10" name="Text 8"/>
-          <p:cNvSpPr/>
-          <p:nvPr/>
-        </p:nvSpPr>
-        <p:spPr>
-          <a:xfrm>
-            <a:off x="640080" y="3972025"/>
-            <a:ext cx="10881360" cy="292608"/>
+              <a:t>We cannot say it saves officer time.</a:t>
+            </a:r>
+            <a:endParaRPr lang="en-US" sz="1850" dirty="0"/>
+          </a:p>
+        </p:txBody>
+      </p:sp>
+      <p:sp>
+        <p:nvSpPr>
+          <p:cNvPr id="16" name="Shape 14"/>
+          <p:cNvSpPr/>
+          <p:nvPr/>
+        </p:nvSpPr>
+        <p:spPr>
+          <a:xfrm>
+            <a:off x="7406640" y="4407408"/>
+            <a:ext cx="4114800" cy="777240"/>
+          </a:xfrm>
+          <a:prstGeom prst="roundRect">
+            <a:avLst>
+              <a:gd name="adj" fmla="val 7059"/>
+            </a:avLst>
+          </a:prstGeom>
+          <a:solidFill>
+            <a:srgbClr val="F4F4F6"/>
+          </a:solidFill>
+          <a:ln w="12700">
+            <a:solidFill>
+              <a:srgbClr val="D6D8DD"/>
+            </a:solidFill>
+            <a:prstDash val="solid"/>
+          </a:ln>
+        </p:spPr>
+        <p:txBody>
+          <a:bodyPr/>
+          <a:lstStyle/>
+          <a:p>
+            <a:endParaRPr lang="en-IN" b="1"/>
+          </a:p>
+        </p:txBody>
+      </p:sp>
+      <p:sp>
+        <p:nvSpPr>
+          <p:cNvPr id="17" name="Text 15"/>
+          <p:cNvSpPr/>
+          <p:nvPr/>
+        </p:nvSpPr>
+        <p:spPr>
+          <a:xfrm>
+            <a:off x="7571232" y="4407408"/>
+            <a:ext cx="3794760" cy="777240"/>
+          </a:xfrm>
+          <a:prstGeom prst="rect">
+            <a:avLst/>
+          </a:prstGeom>
+          <a:noFill/>
+          <a:ln/>
+        </p:spPr>
+        <p:txBody>
+          <a:bodyPr wrap="square" lIns="0" tIns="0" rIns="0" bIns="0" rtlCol="0" anchor="ctr"/>
+          <a:lstStyle/>
+          <a:p>
+            <a:pPr marL="0" indent="0" algn="l">
+              <a:lnSpc>
+                <a:spcPct val="100000"/>
+              </a:lnSpc>
+              <a:buNone/>
+            </a:pPr>
+            <a:r>
+              <a:rPr lang="en-US" sz="1450" dirty="0">
+                <a:solidFill>
+                  <a:srgbClr val="1E1F24"/>
+                </a:solidFill>
+                <a:latin typeface="Calibri" pitchFamily="34" charset="0"/>
+                <a:ea typeface="Calibri" pitchFamily="34" charset="-122"/>
+                <a:cs typeface="Calibri" pitchFamily="34" charset="-120"/>
+              </a:rPr>
+              <a:t>The 10 to 15 minute baseline is self-reported and was never timed. No trial has been run.</a:t>
+            </a:r>
+            <a:endParaRPr lang="en-US" sz="1450" dirty="0"/>
+          </a:p>
+        </p:txBody>
+      </p:sp>
+      <p:sp>
+        <p:nvSpPr>
+          <p:cNvPr id="18" name="Text 16"/>
+          <p:cNvSpPr/>
+          <p:nvPr/>
+        </p:nvSpPr>
+        <p:spPr>
+          <a:xfrm>
+            <a:off x="640080" y="5577840"/>
+            <a:ext cx="10881360" cy="365760"/>
           </a:xfrm>
           <a:prstGeom prst="rect">
             <a:avLst/>
@@ -7265,30 +7744,30 @@
               <a:buNone/>
             </a:pPr>
             <a:r>
-              <a:rPr lang="en-US" sz="1350" b="1" kern="0" spc="150" dirty="0">
-                <a:solidFill>
-                  <a:srgbClr val="7A1F2B"/>
+              <a:rPr lang="en-US" sz="1650" b="1" i="1" dirty="0">
+                <a:solidFill>
+                  <a:srgbClr val="6C6E76"/>
                 </a:solidFill>
                 <a:latin typeface="Calibri" pitchFamily="34" charset="0"/>
                 <a:ea typeface="Calibri" pitchFamily="34" charset="-122"/>
                 <a:cs typeface="Calibri" pitchFamily="34" charset="-120"/>
               </a:rPr>
-              <a:t>What we established</a:t>
-            </a:r>
-            <a:endParaRPr lang="en-US" sz="1350" dirty="0"/>
-          </a:p>
-        </p:txBody>
-      </p:sp>
-      <p:sp>
-        <p:nvSpPr>
-          <p:cNvPr id="15" name="Text 13"/>
-          <p:cNvSpPr/>
-          <p:nvPr/>
-        </p:nvSpPr>
-        <p:spPr>
-          <a:xfrm>
-            <a:off x="640080" y="5532120"/>
-            <a:ext cx="9144000" cy="457200"/>
+              <a:t>Every figure in this deck was produced by us, on our own data. None of it has been checked by an officer.</a:t>
+            </a:r>
+            <a:endParaRPr lang="en-US" sz="1650" b="1" dirty="0"/>
+          </a:p>
+        </p:txBody>
+      </p:sp>
+      <p:sp>
+        <p:nvSpPr>
+          <p:cNvPr id="19" name="Text 17"/>
+          <p:cNvSpPr/>
+          <p:nvPr/>
+        </p:nvSpPr>
+        <p:spPr>
+          <a:xfrm>
+            <a:off x="640080" y="6419088"/>
+            <a:ext cx="5486400" cy="274320"/>
           </a:xfrm>
           <a:prstGeom prst="rect">
             <a:avLst/>
@@ -7304,29 +7783,29 @@
               <a:buNone/>
             </a:pPr>
             <a:r>
-              <a:rPr lang="en-US" sz="2000" b="1" i="1" dirty="0">
-                <a:solidFill>
-                  <a:srgbClr val="7A1F2B"/>
+              <a:rPr lang="en-US" sz="850" dirty="0">
+                <a:solidFill>
+                  <a:srgbClr val="6C6E76"/>
                 </a:solidFill>
                 <a:latin typeface="Calibri" pitchFamily="34" charset="0"/>
                 <a:ea typeface="Calibri" pitchFamily="34" charset="-122"/>
                 <a:cs typeface="Calibri" pitchFamily="34" charset="-120"/>
               </a:rPr>
-              <a:t>Different is not better. Using it also sends citizen documents outside our control.</a:t>
-            </a:r>
-            <a:endParaRPr lang="en-US" sz="2000" dirty="0"/>
-          </a:p>
-        </p:txBody>
-      </p:sp>
-      <p:sp>
-        <p:nvSpPr>
-          <p:cNvPr id="16" name="Text 14"/>
-          <p:cNvSpPr/>
-          <p:nvPr/>
-        </p:nvSpPr>
-        <p:spPr>
-          <a:xfrm>
-            <a:off x="640080" y="6419088"/>
+              <a:t>Data, Policy and Innovation Centre</a:t>
+            </a:r>
+            <a:endParaRPr lang="en-US" sz="850" dirty="0"/>
+          </a:p>
+        </p:txBody>
+      </p:sp>
+      <p:sp>
+        <p:nvSpPr>
+          <p:cNvPr id="20" name="Text 18"/>
+          <p:cNvSpPr/>
+          <p:nvPr/>
+        </p:nvSpPr>
+        <p:spPr>
+          <a:xfrm>
+            <a:off x="6035040" y="6419088"/>
             <a:ext cx="5486400" cy="274320"/>
           </a:xfrm>
           <a:prstGeom prst="rect">
@@ -7339,7 +7818,7 @@
           <a:bodyPr wrap="square" lIns="0" tIns="0" rIns="0" bIns="0" rtlCol="0" anchor="ctr"/>
           <a:lstStyle/>
           <a:p>
-            <a:pPr marL="0" indent="0" algn="l">
+            <a:pPr marL="0" indent="0" algn="r">
               <a:buNone/>
             </a:pPr>
             <a:r>
@@ -7351,281 +7830,9 @@
                 <a:ea typeface="Calibri" pitchFamily="34" charset="-122"/>
                 <a:cs typeface="Calibri" pitchFamily="34" charset="-120"/>
               </a:rPr>
-              <a:t>Data, Policy and Innovation Centre</a:t>
+              <a:t>Government of Odisha  ×  University of Chicago Trust</a:t>
             </a:r>
             <a:endParaRPr lang="en-US" sz="850" dirty="0"/>
-          </a:p>
-        </p:txBody>
-      </p:sp>
-      <p:sp>
-        <p:nvSpPr>
-          <p:cNvPr id="17" name="Text 15"/>
-          <p:cNvSpPr/>
-          <p:nvPr/>
-        </p:nvSpPr>
-        <p:spPr>
-          <a:xfrm>
-            <a:off x="6035040" y="6419088"/>
-            <a:ext cx="5486400" cy="274320"/>
-          </a:xfrm>
-          <a:prstGeom prst="rect">
-            <a:avLst/>
-          </a:prstGeom>
-          <a:noFill/>
-          <a:ln/>
-        </p:spPr>
-        <p:txBody>
-          <a:bodyPr wrap="square" lIns="0" tIns="0" rIns="0" bIns="0" rtlCol="0" anchor="ctr"/>
-          <a:lstStyle/>
-          <a:p>
-            <a:pPr marL="0" indent="0" algn="r">
-              <a:buNone/>
-            </a:pPr>
-            <a:r>
-              <a:rPr lang="en-US" sz="850" dirty="0">
-                <a:solidFill>
-                  <a:srgbClr val="6C6E76"/>
-                </a:solidFill>
-                <a:latin typeface="Calibri" pitchFamily="34" charset="0"/>
-                <a:ea typeface="Calibri" pitchFamily="34" charset="-122"/>
-                <a:cs typeface="Calibri" pitchFamily="34" charset="-120"/>
-              </a:rPr>
-              <a:t>Government of Odisha  ×  University of Chicago Trust</a:t>
-            </a:r>
-            <a:endParaRPr lang="en-US" sz="850" dirty="0"/>
-          </a:p>
-        </p:txBody>
-      </p:sp>
-      <p:sp>
-        <p:nvSpPr>
-          <p:cNvPr id="27" name="Shape 3">
-            <a:extLst>
-              <a:ext uri="{FF2B5EF4-FFF2-40B4-BE49-F238E27FC236}">
-                <a16:creationId xmlns:a16="http://schemas.microsoft.com/office/drawing/2014/main" id="{8EA7243F-3A2E-791F-90D8-11B33EB858C8}"/>
-              </a:ext>
-            </a:extLst>
-          </p:cNvPr>
-          <p:cNvSpPr/>
-          <p:nvPr/>
-        </p:nvSpPr>
-        <p:spPr>
-          <a:xfrm>
-            <a:off x="632059" y="3571929"/>
-            <a:ext cx="91440" cy="91440"/>
-          </a:xfrm>
-          <a:prstGeom prst="rect">
-            <a:avLst/>
-          </a:prstGeom>
-          <a:solidFill>
-            <a:srgbClr val="7A1F2B"/>
-          </a:solidFill>
-          <a:ln/>
-        </p:spPr>
-        <p:txBody>
-          <a:bodyPr/>
-          <a:lstStyle/>
-          <a:p>
-            <a:endParaRPr lang="en-IN" dirty="0"/>
-          </a:p>
-        </p:txBody>
-      </p:sp>
-      <p:sp>
-        <p:nvSpPr>
-          <p:cNvPr id="29" name="Text 4">
-            <a:extLst>
-              <a:ext uri="{FF2B5EF4-FFF2-40B4-BE49-F238E27FC236}">
-                <a16:creationId xmlns:a16="http://schemas.microsoft.com/office/drawing/2014/main" id="{9F020A29-8C39-EAFD-C8B8-DBAB2A5F634C}"/>
-              </a:ext>
-            </a:extLst>
-          </p:cNvPr>
-          <p:cNvSpPr/>
-          <p:nvPr/>
-        </p:nvSpPr>
-        <p:spPr>
-          <a:xfrm>
-            <a:off x="924667" y="3453057"/>
-            <a:ext cx="10607040" cy="411480"/>
-          </a:xfrm>
-          <a:prstGeom prst="rect">
-            <a:avLst/>
-          </a:prstGeom>
-          <a:noFill/>
-          <a:ln/>
-        </p:spPr>
-        <p:txBody>
-          <a:bodyPr wrap="square" lIns="0" tIns="0" rIns="0" bIns="0" rtlCol="0" anchor="t"/>
-          <a:lstStyle/>
-          <a:p>
-            <a:pPr marL="0" indent="0" algn="l">
-              <a:buNone/>
-            </a:pPr>
-            <a:r>
-              <a:rPr lang="en-US" sz="1800" dirty="0">
-                <a:solidFill>
-                  <a:srgbClr val="1E1F24"/>
-                </a:solidFill>
-                <a:latin typeface="Calibri" pitchFamily="34" charset="0"/>
-                <a:ea typeface="Calibri" pitchFamily="34" charset="-122"/>
-                <a:cs typeface="Calibri" pitchFamily="34" charset="-120"/>
-              </a:rPr>
-              <a:t>It reads handwriting. Ours does not.</a:t>
-            </a:r>
-            <a:endParaRPr lang="en-US" sz="1800" dirty="0"/>
-          </a:p>
-        </p:txBody>
-      </p:sp>
-      <p:sp>
-        <p:nvSpPr>
-          <p:cNvPr id="31" name="Shape 8">
-            <a:extLst>
-              <a:ext uri="{FF2B5EF4-FFF2-40B4-BE49-F238E27FC236}">
-                <a16:creationId xmlns:a16="http://schemas.microsoft.com/office/drawing/2014/main" id="{25210A73-5BE3-463C-04D8-421B6ACD8FD7}"/>
-              </a:ext>
-            </a:extLst>
-          </p:cNvPr>
-          <p:cNvSpPr/>
-          <p:nvPr/>
-        </p:nvSpPr>
-        <p:spPr>
-          <a:xfrm>
-            <a:off x="632059" y="4458260"/>
-            <a:ext cx="91440" cy="91440"/>
-          </a:xfrm>
-          <a:prstGeom prst="rect">
-            <a:avLst/>
-          </a:prstGeom>
-          <a:solidFill>
-            <a:srgbClr val="7A1F2B"/>
-          </a:solidFill>
-          <a:ln/>
-        </p:spPr>
-        <p:txBody>
-          <a:bodyPr/>
-          <a:lstStyle/>
-          <a:p>
-            <a:endParaRPr lang="en-IN"/>
-          </a:p>
-        </p:txBody>
-      </p:sp>
-      <p:sp>
-        <p:nvSpPr>
-          <p:cNvPr id="33" name="Text 9">
-            <a:extLst>
-              <a:ext uri="{FF2B5EF4-FFF2-40B4-BE49-F238E27FC236}">
-                <a16:creationId xmlns:a16="http://schemas.microsoft.com/office/drawing/2014/main" id="{A6157D09-2797-0B89-7747-CE5934045003}"/>
-              </a:ext>
-            </a:extLst>
-          </p:cNvPr>
-          <p:cNvSpPr/>
-          <p:nvPr/>
-        </p:nvSpPr>
-        <p:spPr>
-          <a:xfrm>
-            <a:off x="924667" y="4339388"/>
-            <a:ext cx="10607040" cy="411480"/>
-          </a:xfrm>
-          <a:prstGeom prst="rect">
-            <a:avLst/>
-          </a:prstGeom>
-          <a:noFill/>
-          <a:ln/>
-        </p:spPr>
-        <p:txBody>
-          <a:bodyPr wrap="square" lIns="0" tIns="0" rIns="0" bIns="0" rtlCol="0" anchor="t"/>
-          <a:lstStyle/>
-          <a:p>
-            <a:pPr marL="0" indent="0" algn="l">
-              <a:buNone/>
-            </a:pPr>
-            <a:r>
-              <a:rPr lang="en-US" sz="1800" dirty="0">
-                <a:solidFill>
-                  <a:srgbClr val="1E1F24"/>
-                </a:solidFill>
-                <a:latin typeface="Calibri" pitchFamily="34" charset="0"/>
-                <a:ea typeface="Calibri" pitchFamily="34" charset="-122"/>
-                <a:cs typeface="Calibri" pitchFamily="34" charset="-120"/>
-              </a:rPr>
-              <a:t>On all 61 pages we compared, the two systems produced different text.</a:t>
-            </a:r>
-            <a:endParaRPr lang="en-US" sz="1800" dirty="0"/>
-          </a:p>
-        </p:txBody>
-      </p:sp>
-      <p:sp>
-        <p:nvSpPr>
-          <p:cNvPr id="35" name="Shape 10">
-            <a:extLst>
-              <a:ext uri="{FF2B5EF4-FFF2-40B4-BE49-F238E27FC236}">
-                <a16:creationId xmlns:a16="http://schemas.microsoft.com/office/drawing/2014/main" id="{16BEB2B2-75AE-B017-BEB6-8D7DF2D87DD6}"/>
-              </a:ext>
-            </a:extLst>
-          </p:cNvPr>
-          <p:cNvSpPr/>
-          <p:nvPr/>
-        </p:nvSpPr>
-        <p:spPr>
-          <a:xfrm>
-            <a:off x="632059" y="4961180"/>
-            <a:ext cx="91440" cy="91440"/>
-          </a:xfrm>
-          <a:prstGeom prst="rect">
-            <a:avLst/>
-          </a:prstGeom>
-          <a:solidFill>
-            <a:srgbClr val="7A1F2B"/>
-          </a:solidFill>
-          <a:ln/>
-        </p:spPr>
-        <p:txBody>
-          <a:bodyPr/>
-          <a:lstStyle/>
-          <a:p>
-            <a:endParaRPr lang="en-IN"/>
-          </a:p>
-        </p:txBody>
-      </p:sp>
-      <p:sp>
-        <p:nvSpPr>
-          <p:cNvPr id="37" name="Text 11">
-            <a:extLst>
-              <a:ext uri="{FF2B5EF4-FFF2-40B4-BE49-F238E27FC236}">
-                <a16:creationId xmlns:a16="http://schemas.microsoft.com/office/drawing/2014/main" id="{E4B7C2E5-1571-8403-3E23-54FAD9D0D9A0}"/>
-              </a:ext>
-            </a:extLst>
-          </p:cNvPr>
-          <p:cNvSpPr/>
-          <p:nvPr/>
-        </p:nvSpPr>
-        <p:spPr>
-          <a:xfrm>
-            <a:off x="924667" y="4842308"/>
-            <a:ext cx="10607040" cy="411480"/>
-          </a:xfrm>
-          <a:prstGeom prst="rect">
-            <a:avLst/>
-          </a:prstGeom>
-          <a:noFill/>
-          <a:ln/>
-        </p:spPr>
-        <p:txBody>
-          <a:bodyPr wrap="square" lIns="0" tIns="0" rIns="0" bIns="0" rtlCol="0" anchor="t"/>
-          <a:lstStyle/>
-          <a:p>
-            <a:pPr marL="0" indent="0" algn="l">
-              <a:buNone/>
-            </a:pPr>
-            <a:r>
-              <a:rPr lang="en-US" sz="1800" dirty="0">
-                <a:solidFill>
-                  <a:srgbClr val="1E1F24"/>
-                </a:solidFill>
-                <a:latin typeface="Calibri" pitchFamily="34" charset="0"/>
-                <a:ea typeface="Calibri" pitchFamily="34" charset="-122"/>
-                <a:cs typeface="Calibri" pitchFamily="34" charset="-120"/>
-              </a:rPr>
-              <a:t>The category and summary it returned were never graded against anything.</a:t>
-            </a:r>
           </a:p>
         </p:txBody>
       </p:sp>
@@ -7638,6 +7845,662 @@
 </file>
 
 <file path=ppt/slides/slide23.xml><?xml version="1.0" encoding="utf-8"?>
+<p:sld xmlns:a="http://schemas.openxmlformats.org/drawingml/2006/main" xmlns:p="http://schemas.openxmlformats.org/presentationml/2006/main" xmlns:r="http://schemas.openxmlformats.org/officeDocument/2006/relationships">
+  <p:cSld>
+    <p:spTree>
+      <p:nvGrpSpPr>
+        <p:cNvPr id="1" name=""/>
+        <p:cNvGrpSpPr/>
+        <p:nvPr/>
+      </p:nvGrpSpPr>
+      <p:grpSpPr/>
+      <p:sp>
+        <p:nvSpPr>
+          <p:cNvPr id="2" name="Text 0"/>
+          <p:cNvSpPr/>
+          <p:nvPr/>
+        </p:nvSpPr>
+        <p:spPr>
+          <a:xfrm>
+            <a:off x="640080" y="457200"/>
+            <a:ext cx="10881360" cy="320040"/>
+          </a:xfrm>
+          <a:prstGeom prst="rect">
+            <a:avLst/>
+          </a:prstGeom>
+          <a:noFill/>
+          <a:ln/>
+        </p:spPr>
+        <p:txBody>
+          <a:bodyPr wrap="square" lIns="0" tIns="0" rIns="0" bIns="0" rtlCol="0" anchor="ctr"/>
+          <a:lstStyle/>
+          <a:p>
+            <a:pPr marL="0" indent="0" algn="l">
+              <a:buNone/>
+            </a:pPr>
+            <a:r>
+              <a:rPr lang="en-US" sz="1500" b="1" kern="0" spc="200" dirty="0">
+                <a:solidFill>
+                  <a:srgbClr val="7A1F2B"/>
+                </a:solidFill>
+                <a:latin typeface="Calibri" pitchFamily="34" charset="0"/>
+                <a:ea typeface="Calibri" pitchFamily="34" charset="-122"/>
+                <a:cs typeface="Calibri" pitchFamily="34" charset="-120"/>
+              </a:rPr>
+              <a:t>THE OUTSIDE OPTION: SARVAM</a:t>
+            </a:r>
+            <a:endParaRPr lang="en-US" sz="1500" dirty="0"/>
+          </a:p>
+        </p:txBody>
+      </p:sp>
+      <p:sp>
+        <p:nvSpPr>
+          <p:cNvPr id="3" name="Text 1"/>
+          <p:cNvSpPr/>
+          <p:nvPr/>
+        </p:nvSpPr>
+        <p:spPr>
+          <a:xfrm>
+            <a:off x="640080" y="868680"/>
+            <a:ext cx="10881360" cy="914400"/>
+          </a:xfrm>
+          <a:prstGeom prst="rect">
+            <a:avLst/>
+          </a:prstGeom>
+          <a:noFill/>
+          <a:ln/>
+        </p:spPr>
+        <p:txBody>
+          <a:bodyPr wrap="square" lIns="0" tIns="0" rIns="0" bIns="0" rtlCol="0" anchor="ctr"/>
+          <a:lstStyle/>
+          <a:p>
+            <a:pPr marL="0" indent="0" algn="l">
+              <a:buNone/>
+            </a:pPr>
+            <a:r>
+              <a:rPr lang="en-US" sz="3400" b="1" dirty="0">
+                <a:solidFill>
+                  <a:srgbClr val="1E1F24"/>
+                </a:solidFill>
+                <a:latin typeface="Cambria" pitchFamily="34" charset="0"/>
+                <a:ea typeface="Cambria" pitchFamily="34" charset="-122"/>
+                <a:cs typeface="Cambria" pitchFamily="34" charset="-120"/>
+              </a:rPr>
+              <a:t>It does more. We have not shown it does better</a:t>
+            </a:r>
+            <a:endParaRPr lang="en-US" sz="3400" dirty="0"/>
+          </a:p>
+        </p:txBody>
+      </p:sp>
+      <p:sp>
+        <p:nvSpPr>
+          <p:cNvPr id="5" name="Text 3"/>
+          <p:cNvSpPr/>
+          <p:nvPr/>
+        </p:nvSpPr>
+        <p:spPr>
+          <a:xfrm>
+            <a:off x="640080" y="2179321"/>
+            <a:ext cx="10881360" cy="292608"/>
+          </a:xfrm>
+          <a:prstGeom prst="rect">
+            <a:avLst/>
+          </a:prstGeom>
+          <a:noFill/>
+          <a:ln/>
+        </p:spPr>
+        <p:txBody>
+          <a:bodyPr wrap="square" lIns="0" tIns="0" rIns="0" bIns="0" rtlCol="0" anchor="ctr"/>
+          <a:lstStyle/>
+          <a:p>
+            <a:pPr marL="0" indent="0" algn="l">
+              <a:buNone/>
+            </a:pPr>
+            <a:r>
+              <a:rPr lang="en-US" sz="1350" b="1" kern="0" spc="150" dirty="0">
+                <a:solidFill>
+                  <a:srgbClr val="7A1F2B"/>
+                </a:solidFill>
+                <a:latin typeface="Calibri" pitchFamily="34" charset="0"/>
+                <a:ea typeface="Calibri" pitchFamily="34" charset="-122"/>
+                <a:cs typeface="Calibri" pitchFamily="34" charset="-120"/>
+              </a:rPr>
+              <a:t>What it does</a:t>
+            </a:r>
+            <a:endParaRPr lang="en-US" sz="1350" dirty="0"/>
+          </a:p>
+        </p:txBody>
+      </p:sp>
+      <p:sp>
+        <p:nvSpPr>
+          <p:cNvPr id="6" name="Shape 4"/>
+          <p:cNvSpPr/>
+          <p:nvPr/>
+        </p:nvSpPr>
+        <p:spPr>
+          <a:xfrm>
+            <a:off x="640080" y="2663953"/>
+            <a:ext cx="91440" cy="91440"/>
+          </a:xfrm>
+          <a:prstGeom prst="rect">
+            <a:avLst/>
+          </a:prstGeom>
+          <a:solidFill>
+            <a:srgbClr val="7A1F2B"/>
+          </a:solidFill>
+          <a:ln/>
+        </p:spPr>
+        <p:txBody>
+          <a:bodyPr/>
+          <a:lstStyle/>
+          <a:p>
+            <a:endParaRPr lang="en-IN"/>
+          </a:p>
+        </p:txBody>
+      </p:sp>
+      <p:sp>
+        <p:nvSpPr>
+          <p:cNvPr id="7" name="Text 5"/>
+          <p:cNvSpPr/>
+          <p:nvPr/>
+        </p:nvSpPr>
+        <p:spPr>
+          <a:xfrm>
+            <a:off x="932688" y="2545081"/>
+            <a:ext cx="10607040" cy="411480"/>
+          </a:xfrm>
+          <a:prstGeom prst="rect">
+            <a:avLst/>
+          </a:prstGeom>
+          <a:noFill/>
+          <a:ln/>
+        </p:spPr>
+        <p:txBody>
+          <a:bodyPr wrap="square" lIns="0" tIns="0" rIns="0" bIns="0" rtlCol="0" anchor="t"/>
+          <a:lstStyle/>
+          <a:p>
+            <a:pPr marL="0" indent="0" algn="l">
+              <a:buNone/>
+            </a:pPr>
+            <a:r>
+              <a:rPr lang="en-US" sz="1800" dirty="0">
+                <a:solidFill>
+                  <a:srgbClr val="1E1F24"/>
+                </a:solidFill>
+                <a:latin typeface="Calibri" pitchFamily="34" charset="0"/>
+                <a:ea typeface="Calibri" pitchFamily="34" charset="-122"/>
+                <a:cs typeface="Calibri" pitchFamily="34" charset="-120"/>
+              </a:rPr>
+              <a:t>One call at ₹1.50 a page returns the text, a category, a one-line summary and the district.</a:t>
+            </a:r>
+            <a:endParaRPr lang="en-US" sz="1800" dirty="0"/>
+          </a:p>
+        </p:txBody>
+      </p:sp>
+      <p:sp>
+        <p:nvSpPr>
+          <p:cNvPr id="8" name="Shape 6"/>
+          <p:cNvSpPr/>
+          <p:nvPr/>
+        </p:nvSpPr>
+        <p:spPr>
+          <a:xfrm>
+            <a:off x="640080" y="3166873"/>
+            <a:ext cx="91440" cy="91440"/>
+          </a:xfrm>
+          <a:prstGeom prst="rect">
+            <a:avLst/>
+          </a:prstGeom>
+          <a:solidFill>
+            <a:srgbClr val="7A1F2B"/>
+          </a:solidFill>
+          <a:ln/>
+        </p:spPr>
+        <p:txBody>
+          <a:bodyPr/>
+          <a:lstStyle/>
+          <a:p>
+            <a:endParaRPr lang="en-IN"/>
+          </a:p>
+        </p:txBody>
+      </p:sp>
+      <p:sp>
+        <p:nvSpPr>
+          <p:cNvPr id="9" name="Text 7"/>
+          <p:cNvSpPr/>
+          <p:nvPr/>
+        </p:nvSpPr>
+        <p:spPr>
+          <a:xfrm>
+            <a:off x="932688" y="3048001"/>
+            <a:ext cx="10607040" cy="411480"/>
+          </a:xfrm>
+          <a:prstGeom prst="rect">
+            <a:avLst/>
+          </a:prstGeom>
+          <a:noFill/>
+          <a:ln/>
+        </p:spPr>
+        <p:txBody>
+          <a:bodyPr wrap="square" lIns="0" tIns="0" rIns="0" bIns="0" rtlCol="0" anchor="t"/>
+          <a:lstStyle/>
+          <a:p>
+            <a:pPr marL="0" indent="0" algn="l">
+              <a:buNone/>
+            </a:pPr>
+            <a:r>
+              <a:rPr lang="en-US" sz="1800" dirty="0">
+                <a:solidFill>
+                  <a:srgbClr val="1E1F24"/>
+                </a:solidFill>
+                <a:latin typeface="Calibri" pitchFamily="34" charset="0"/>
+                <a:ea typeface="Calibri" pitchFamily="34" charset="-122"/>
+                <a:cs typeface="Calibri" pitchFamily="34" charset="-120"/>
+              </a:rPr>
+              <a:t>It reads 22 Indian languages including Odia. Ours reads English.</a:t>
+            </a:r>
+            <a:endParaRPr lang="en-US" sz="1800" dirty="0"/>
+          </a:p>
+        </p:txBody>
+      </p:sp>
+      <p:sp>
+        <p:nvSpPr>
+          <p:cNvPr id="10" name="Text 8"/>
+          <p:cNvSpPr/>
+          <p:nvPr/>
+        </p:nvSpPr>
+        <p:spPr>
+          <a:xfrm>
+            <a:off x="640080" y="3972025"/>
+            <a:ext cx="10881360" cy="292608"/>
+          </a:xfrm>
+          <a:prstGeom prst="rect">
+            <a:avLst/>
+          </a:prstGeom>
+          <a:noFill/>
+          <a:ln/>
+        </p:spPr>
+        <p:txBody>
+          <a:bodyPr wrap="square" lIns="0" tIns="0" rIns="0" bIns="0" rtlCol="0" anchor="ctr"/>
+          <a:lstStyle/>
+          <a:p>
+            <a:pPr marL="0" indent="0" algn="l">
+              <a:buNone/>
+            </a:pPr>
+            <a:r>
+              <a:rPr lang="en-US" sz="1350" b="1" kern="0" spc="150" dirty="0">
+                <a:solidFill>
+                  <a:srgbClr val="7A1F2B"/>
+                </a:solidFill>
+                <a:latin typeface="Calibri" pitchFamily="34" charset="0"/>
+                <a:ea typeface="Calibri" pitchFamily="34" charset="-122"/>
+                <a:cs typeface="Calibri" pitchFamily="34" charset="-120"/>
+              </a:rPr>
+              <a:t>What we established</a:t>
+            </a:r>
+            <a:endParaRPr lang="en-US" sz="1350" dirty="0"/>
+          </a:p>
+        </p:txBody>
+      </p:sp>
+      <p:sp>
+        <p:nvSpPr>
+          <p:cNvPr id="15" name="Text 13"/>
+          <p:cNvSpPr/>
+          <p:nvPr/>
+        </p:nvSpPr>
+        <p:spPr>
+          <a:xfrm>
+            <a:off x="640080" y="5532120"/>
+            <a:ext cx="9144000" cy="457200"/>
+          </a:xfrm>
+          <a:prstGeom prst="rect">
+            <a:avLst/>
+          </a:prstGeom>
+          <a:noFill/>
+          <a:ln/>
+        </p:spPr>
+        <p:txBody>
+          <a:bodyPr wrap="square" lIns="0" tIns="0" rIns="0" bIns="0" rtlCol="0" anchor="ctr"/>
+          <a:lstStyle/>
+          <a:p>
+            <a:pPr marL="0" indent="0" algn="l">
+              <a:buNone/>
+            </a:pPr>
+            <a:r>
+              <a:rPr lang="en-US" sz="2000" b="1" i="1" dirty="0">
+                <a:solidFill>
+                  <a:srgbClr val="7A1F2B"/>
+                </a:solidFill>
+                <a:latin typeface="Calibri" pitchFamily="34" charset="0"/>
+                <a:ea typeface="Calibri" pitchFamily="34" charset="-122"/>
+                <a:cs typeface="Calibri" pitchFamily="34" charset="-120"/>
+              </a:rPr>
+              <a:t>Different is not better. Using it also sends citizen documents outside our control.</a:t>
+            </a:r>
+            <a:endParaRPr lang="en-US" sz="2000" dirty="0"/>
+          </a:p>
+        </p:txBody>
+      </p:sp>
+      <p:sp>
+        <p:nvSpPr>
+          <p:cNvPr id="16" name="Text 14"/>
+          <p:cNvSpPr/>
+          <p:nvPr/>
+        </p:nvSpPr>
+        <p:spPr>
+          <a:xfrm>
+            <a:off x="640080" y="6419088"/>
+            <a:ext cx="5486400" cy="274320"/>
+          </a:xfrm>
+          <a:prstGeom prst="rect">
+            <a:avLst/>
+          </a:prstGeom>
+          <a:noFill/>
+          <a:ln/>
+        </p:spPr>
+        <p:txBody>
+          <a:bodyPr wrap="square" lIns="0" tIns="0" rIns="0" bIns="0" rtlCol="0" anchor="ctr"/>
+          <a:lstStyle/>
+          <a:p>
+            <a:pPr marL="0" indent="0" algn="l">
+              <a:buNone/>
+            </a:pPr>
+            <a:r>
+              <a:rPr lang="en-US" sz="850" dirty="0">
+                <a:solidFill>
+                  <a:srgbClr val="6C6E76"/>
+                </a:solidFill>
+                <a:latin typeface="Calibri" pitchFamily="34" charset="0"/>
+                <a:ea typeface="Calibri" pitchFamily="34" charset="-122"/>
+                <a:cs typeface="Calibri" pitchFamily="34" charset="-120"/>
+              </a:rPr>
+              <a:t>Data, Policy and Innovation Centre</a:t>
+            </a:r>
+            <a:endParaRPr lang="en-US" sz="850" dirty="0"/>
+          </a:p>
+        </p:txBody>
+      </p:sp>
+      <p:sp>
+        <p:nvSpPr>
+          <p:cNvPr id="17" name="Text 15"/>
+          <p:cNvSpPr/>
+          <p:nvPr/>
+        </p:nvSpPr>
+        <p:spPr>
+          <a:xfrm>
+            <a:off x="6035040" y="6419088"/>
+            <a:ext cx="5486400" cy="274320"/>
+          </a:xfrm>
+          <a:prstGeom prst="rect">
+            <a:avLst/>
+          </a:prstGeom>
+          <a:noFill/>
+          <a:ln/>
+        </p:spPr>
+        <p:txBody>
+          <a:bodyPr wrap="square" lIns="0" tIns="0" rIns="0" bIns="0" rtlCol="0" anchor="ctr"/>
+          <a:lstStyle/>
+          <a:p>
+            <a:pPr marL="0" indent="0" algn="r">
+              <a:buNone/>
+            </a:pPr>
+            <a:r>
+              <a:rPr lang="en-US" sz="850" dirty="0">
+                <a:solidFill>
+                  <a:srgbClr val="6C6E76"/>
+                </a:solidFill>
+                <a:latin typeface="Calibri" pitchFamily="34" charset="0"/>
+                <a:ea typeface="Calibri" pitchFamily="34" charset="-122"/>
+                <a:cs typeface="Calibri" pitchFamily="34" charset="-120"/>
+              </a:rPr>
+              <a:t>Government of Odisha  ×  University of Chicago Trust</a:t>
+            </a:r>
+            <a:endParaRPr lang="en-US" sz="850" dirty="0"/>
+          </a:p>
+        </p:txBody>
+      </p:sp>
+      <p:sp>
+        <p:nvSpPr>
+          <p:cNvPr id="27" name="Shape 3">
+            <a:extLst>
+              <a:ext uri="{FF2B5EF4-FFF2-40B4-BE49-F238E27FC236}">
+                <a16:creationId xmlns:a16="http://schemas.microsoft.com/office/drawing/2014/main" id="{8EA7243F-3A2E-791F-90D8-11B33EB858C8}"/>
+              </a:ext>
+            </a:extLst>
+          </p:cNvPr>
+          <p:cNvSpPr/>
+          <p:nvPr/>
+        </p:nvSpPr>
+        <p:spPr>
+          <a:xfrm>
+            <a:off x="632059" y="3571929"/>
+            <a:ext cx="91440" cy="91440"/>
+          </a:xfrm>
+          <a:prstGeom prst="rect">
+            <a:avLst/>
+          </a:prstGeom>
+          <a:solidFill>
+            <a:srgbClr val="7A1F2B"/>
+          </a:solidFill>
+          <a:ln/>
+        </p:spPr>
+        <p:txBody>
+          <a:bodyPr/>
+          <a:lstStyle/>
+          <a:p>
+            <a:endParaRPr lang="en-IN" dirty="0"/>
+          </a:p>
+        </p:txBody>
+      </p:sp>
+      <p:sp>
+        <p:nvSpPr>
+          <p:cNvPr id="29" name="Text 4">
+            <a:extLst>
+              <a:ext uri="{FF2B5EF4-FFF2-40B4-BE49-F238E27FC236}">
+                <a16:creationId xmlns:a16="http://schemas.microsoft.com/office/drawing/2014/main" id="{9F020A29-8C39-EAFD-C8B8-DBAB2A5F634C}"/>
+              </a:ext>
+            </a:extLst>
+          </p:cNvPr>
+          <p:cNvSpPr/>
+          <p:nvPr/>
+        </p:nvSpPr>
+        <p:spPr>
+          <a:xfrm>
+            <a:off x="924667" y="3453057"/>
+            <a:ext cx="10607040" cy="411480"/>
+          </a:xfrm>
+          <a:prstGeom prst="rect">
+            <a:avLst/>
+          </a:prstGeom>
+          <a:noFill/>
+          <a:ln/>
+        </p:spPr>
+        <p:txBody>
+          <a:bodyPr wrap="square" lIns="0" tIns="0" rIns="0" bIns="0" rtlCol="0" anchor="t"/>
+          <a:lstStyle/>
+          <a:p>
+            <a:pPr marL="0" indent="0" algn="l">
+              <a:buNone/>
+            </a:pPr>
+            <a:r>
+              <a:rPr lang="en-US" sz="1800" dirty="0">
+                <a:solidFill>
+                  <a:srgbClr val="1E1F24"/>
+                </a:solidFill>
+                <a:latin typeface="Calibri" pitchFamily="34" charset="0"/>
+                <a:ea typeface="Calibri" pitchFamily="34" charset="-122"/>
+                <a:cs typeface="Calibri" pitchFamily="34" charset="-120"/>
+              </a:rPr>
+              <a:t>It reads handwriting. Ours does not.</a:t>
+            </a:r>
+            <a:endParaRPr lang="en-US" sz="1800" dirty="0"/>
+          </a:p>
+        </p:txBody>
+      </p:sp>
+      <p:sp>
+        <p:nvSpPr>
+          <p:cNvPr id="31" name="Shape 8">
+            <a:extLst>
+              <a:ext uri="{FF2B5EF4-FFF2-40B4-BE49-F238E27FC236}">
+                <a16:creationId xmlns:a16="http://schemas.microsoft.com/office/drawing/2014/main" id="{25210A73-5BE3-463C-04D8-421B6ACD8FD7}"/>
+              </a:ext>
+            </a:extLst>
+          </p:cNvPr>
+          <p:cNvSpPr/>
+          <p:nvPr/>
+        </p:nvSpPr>
+        <p:spPr>
+          <a:xfrm>
+            <a:off x="632059" y="4458260"/>
+            <a:ext cx="91440" cy="91440"/>
+          </a:xfrm>
+          <a:prstGeom prst="rect">
+            <a:avLst/>
+          </a:prstGeom>
+          <a:solidFill>
+            <a:srgbClr val="7A1F2B"/>
+          </a:solidFill>
+          <a:ln/>
+        </p:spPr>
+        <p:txBody>
+          <a:bodyPr/>
+          <a:lstStyle/>
+          <a:p>
+            <a:endParaRPr lang="en-IN"/>
+          </a:p>
+        </p:txBody>
+      </p:sp>
+      <p:sp>
+        <p:nvSpPr>
+          <p:cNvPr id="33" name="Text 9">
+            <a:extLst>
+              <a:ext uri="{FF2B5EF4-FFF2-40B4-BE49-F238E27FC236}">
+                <a16:creationId xmlns:a16="http://schemas.microsoft.com/office/drawing/2014/main" id="{A6157D09-2797-0B89-7747-CE5934045003}"/>
+              </a:ext>
+            </a:extLst>
+          </p:cNvPr>
+          <p:cNvSpPr/>
+          <p:nvPr/>
+        </p:nvSpPr>
+        <p:spPr>
+          <a:xfrm>
+            <a:off x="924667" y="4339388"/>
+            <a:ext cx="10607040" cy="411480"/>
+          </a:xfrm>
+          <a:prstGeom prst="rect">
+            <a:avLst/>
+          </a:prstGeom>
+          <a:noFill/>
+          <a:ln/>
+        </p:spPr>
+        <p:txBody>
+          <a:bodyPr wrap="square" lIns="0" tIns="0" rIns="0" bIns="0" rtlCol="0" anchor="t"/>
+          <a:lstStyle/>
+          <a:p>
+            <a:pPr marL="0" indent="0" algn="l">
+              <a:buNone/>
+            </a:pPr>
+            <a:r>
+              <a:rPr lang="en-US" sz="1800" dirty="0">
+                <a:solidFill>
+                  <a:srgbClr val="1E1F24"/>
+                </a:solidFill>
+                <a:latin typeface="Calibri" pitchFamily="34" charset="0"/>
+                <a:ea typeface="Calibri" pitchFamily="34" charset="-122"/>
+                <a:cs typeface="Calibri" pitchFamily="34" charset="-120"/>
+              </a:rPr>
+              <a:t>On all 61 pages we compared, the two systems produced different text.</a:t>
+            </a:r>
+            <a:endParaRPr lang="en-US" sz="1800" dirty="0"/>
+          </a:p>
+        </p:txBody>
+      </p:sp>
+      <p:sp>
+        <p:nvSpPr>
+          <p:cNvPr id="35" name="Shape 10">
+            <a:extLst>
+              <a:ext uri="{FF2B5EF4-FFF2-40B4-BE49-F238E27FC236}">
+                <a16:creationId xmlns:a16="http://schemas.microsoft.com/office/drawing/2014/main" id="{16BEB2B2-75AE-B017-BEB6-8D7DF2D87DD6}"/>
+              </a:ext>
+            </a:extLst>
+          </p:cNvPr>
+          <p:cNvSpPr/>
+          <p:nvPr/>
+        </p:nvSpPr>
+        <p:spPr>
+          <a:xfrm>
+            <a:off x="632059" y="4961180"/>
+            <a:ext cx="91440" cy="91440"/>
+          </a:xfrm>
+          <a:prstGeom prst="rect">
+            <a:avLst/>
+          </a:prstGeom>
+          <a:solidFill>
+            <a:srgbClr val="7A1F2B"/>
+          </a:solidFill>
+          <a:ln/>
+        </p:spPr>
+        <p:txBody>
+          <a:bodyPr/>
+          <a:lstStyle/>
+          <a:p>
+            <a:endParaRPr lang="en-IN"/>
+          </a:p>
+        </p:txBody>
+      </p:sp>
+      <p:sp>
+        <p:nvSpPr>
+          <p:cNvPr id="37" name="Text 11">
+            <a:extLst>
+              <a:ext uri="{FF2B5EF4-FFF2-40B4-BE49-F238E27FC236}">
+                <a16:creationId xmlns:a16="http://schemas.microsoft.com/office/drawing/2014/main" id="{E4B7C2E5-1571-8403-3E23-54FAD9D0D9A0}"/>
+              </a:ext>
+            </a:extLst>
+          </p:cNvPr>
+          <p:cNvSpPr/>
+          <p:nvPr/>
+        </p:nvSpPr>
+        <p:spPr>
+          <a:xfrm>
+            <a:off x="924667" y="4842308"/>
+            <a:ext cx="10607040" cy="411480"/>
+          </a:xfrm>
+          <a:prstGeom prst="rect">
+            <a:avLst/>
+          </a:prstGeom>
+          <a:noFill/>
+          <a:ln/>
+        </p:spPr>
+        <p:txBody>
+          <a:bodyPr wrap="square" lIns="0" tIns="0" rIns="0" bIns="0" rtlCol="0" anchor="t"/>
+          <a:lstStyle/>
+          <a:p>
+            <a:pPr marL="0" indent="0" algn="l">
+              <a:buNone/>
+            </a:pPr>
+            <a:r>
+              <a:rPr lang="en-US" sz="1800" dirty="0">
+                <a:solidFill>
+                  <a:srgbClr val="1E1F24"/>
+                </a:solidFill>
+                <a:latin typeface="Calibri" pitchFamily="34" charset="0"/>
+                <a:ea typeface="Calibri" pitchFamily="34" charset="-122"/>
+                <a:cs typeface="Calibri" pitchFamily="34" charset="-120"/>
+              </a:rPr>
+              <a:t>The category and summary it returned were never graded against anything.</a:t>
+            </a:r>
+          </a:p>
+        </p:txBody>
+      </p:sp>
+    </p:spTree>
+  </p:cSld>
+  <p:clrMapOvr>
+    <a:masterClrMapping/>
+  </p:clrMapOvr>
+</p:sld>
+</file>
+
+<file path=ppt/slides/slide24.xml><?xml version="1.0" encoding="utf-8"?>
 <p:sld xmlns:a="http://schemas.openxmlformats.org/drawingml/2006/main" xmlns:p="http://schemas.openxmlformats.org/presentationml/2006/main" xmlns:r="http://schemas.openxmlformats.org/officeDocument/2006/relationships">
   <p:cSld>
     <p:spTree>

--- a/docs/presentations/2026-08-24-timing-quality/Janasunani_2.0_Timing_and_Quality.pptx
+++ b/docs/presentations/2026-08-24-timing-quality/Janasunani_2.0_Timing_and_Quality.pptx
@@ -4077,7 +4077,7 @@
         </p:nvSpPr>
         <p:spPr>
           <a:xfrm>
-            <a:off x="640080" y="5742432"/>
+            <a:off x="640080" y="5669280"/>
             <a:ext cx="10881360" cy="237744"/>
           </a:xfrm>
           <a:prstGeom prst="rect">
@@ -4112,7 +4112,7 @@
         </p:nvSpPr>
         <p:spPr>
           <a:xfrm>
-            <a:off x="640080" y="5961888"/>
+            <a:off x="640080" y="5879592"/>
             <a:ext cx="10881360" cy="237744"/>
           </a:xfrm>
           <a:prstGeom prst="rect">
@@ -4147,7 +4147,7 @@
         </p:nvSpPr>
         <p:spPr>
           <a:xfrm>
-            <a:off x="640080" y="6199632"/>
+            <a:off x="640080" y="6089904"/>
             <a:ext cx="10881360" cy="201168"/>
           </a:xfrm>
           <a:prstGeom prst="rect">
@@ -6781,7 +6781,7 @@
                 <a:ea typeface="Calibri" pitchFamily="34" charset="-122"/>
                 <a:cs typeface="Calibri" pitchFamily="34" charset="-120"/>
               </a:rPr>
-              <a:t>Every spike carries filings, distinct problems and distinct citizens. Four hundred citizens on one road and two hundred unrelated problems look identical in a count.</a:t>
+              <a:t>Every spike carries filings, distinct problems and distinct citizens. A campaign and two hundred separate problems count the same.</a:t>
             </a:r>
             <a:endParaRPr lang="en-US" sz="1450" dirty="0"/>
           </a:p>
@@ -6968,7 +6968,7 @@
                 <a:ea typeface="Calibri" pitchFamily="34" charset="-122"/>
                 <a:cs typeface="Calibri" pitchFamily="34" charset="-120"/>
               </a:rPr>
-              <a:t>Grouped by what complaints are about rather than the category assigned at intake. Concentrated in one place and rising is the alert worth acting on.</a:t>
+              <a:t>Grouped by what complaints are about, not the category assigned at intake. Concentrated in one place and rising is the alert worth acting on.</a:t>
             </a:r>
             <a:endParaRPr lang="en-US" sz="1450" dirty="0"/>
           </a:p>

--- a/docs/presentations/2026-08-24-timing-quality/Janasunani_2.0_Timing_and_Quality.pptx
+++ b/docs/presentations/2026-08-24-timing-quality/Janasunani_2.0_Timing_and_Quality.pptx
@@ -1158,13 +1158,31 @@
           <a:p/>
           <a:p>
             <a:r>
-              <a:t>WHAT WE ACTUALLY RAN. Two runs, docs/evidence/sarvam_cached_benchmark.json. A 5-page validation (₹7.50) and a 300-page run that died at 65 pages on credit exhaustion, 3 HTTP 402s, 7 job failures. 61 pages paired and scored in total.</a:t>
+              <a:t>WHAT WE RAN, 2026-08-25. A 200-page stratified draw from Sambalpur/2024, both arms, ₹300 at list price, 87 grievances across 30 categories. 200 pages processed, 198 scored, 2 SarvamError failures. outputs/sarvam_run_2026-08-25/. Two earlier runs are superseded: a 5-page validation and a 300-page run that died at 65 pages on credit exhaustion.</a:t>
             </a:r>
           </a:p>
           <a:p/>
           <a:p>
             <a:r>
-              <a:t>WHAT WE FOUND, AND WHAT IT COVERS. Normalised exact-text divergence 1.000 on both runs: the two systems differed on every page. Sarvam returns more characters, ratio 1.2433 then 1.3345. That figure is TRANSCRIPTION ONLY. It compares OCR text and says nothing about the category or summary fields. Divergence says they disagree, never who is right.</a:t>
+              <a:t>LATENCY, and this is the number the deck lacked until now. Derived from submission to result in the egress audit log, outputs/sarvam_run_2026-08-25/sarvam_audit.sqlite, excluding the later recovery re-reads. Digitise: median 6 s a page, mean 9 s, p90 16 s, n=200. Extract: median 11 s, mean 13 s, p90 19 s, n=198. Polling is 5 s quantised, so treat these as 5 s resolution. Our own OCR is 5.8 s a page on the same class of document, so per page there is nothing in it. THROUGHPUT is the real constraint: 10 requests a minute does not rise with the plan tier, the run averaged 1.2 pages a minute end to end, and the 96,469-page English corpus is roughly ten days of continuous calling.</a:t>
+            </a:r>
+          </a:p>
+          <a:p/>
+          <a:p>
+            <a:r>
+              <a:t>THE CATEGORY GRADE, and say plainly that it measures our schema and not the provider. Sarvam returned a category on 11 of 87 grievances and matched the officer's label on 0 of those 11: 'Sanction of new AWC buildings' against gold ICDS, 'Revenue &amp; law Order' against Land Matters, 'Social Benefit' against Health Care. The v1 schema described the field as the complaints taxonomy and then never listed it, so the model had nothing to choose from and answered with subject lines. Schema v2 adds the 35-label enum and is now the default. A corrected run is extract-only, about ₹200.</a:t>
+            </a:r>
+          </a:p>
+          <a:p/>
+          <a:p>
+            <a:r>
+              <a:t>WHY DISTRICT IS GONE FROM v2, if asked. It was the best-populated field in the run, 100 of 198 pages, because it sits on the letterhead. It is also a structured column on complaints, recorded at intake and known for every grievance, so the extraction budget went to the one field we already had while the field we needed came back on 11. Reinstate it only as an explicit intake-accuracy cross-check.</a:t>
+            </a:r>
+          </a:p>
+          <a:p/>
+          <a:p>
+            <a:r>
+              <a:t>TRANSCRIPTION. Normalised exact-text divergence 0.995, 95% CI [0.985, 1.005], n=198 pages clustered on 87 tickets: the two systems differed on 197 of 198. Sarvam returns 295,117 normalised characters against pytesseract's 189,497, a ratio of 1.56. Divergence says they disagree, never who is right, and no hand-transcribed answer key exists (#53).</a:t>
             </a:r>
           </a:p>
           <a:p/>
@@ -1992,7 +2010,7 @@
                 <a:ea typeface="Cambria" pitchFamily="34" charset="-122"/>
                 <a:cs typeface="Cambria" pitchFamily="34" charset="-120"/>
               </a:rPr>
-              <a:t>The record has never been read</a:t>
+              <a:t>1.37 million grievances, 6.5 million action notes</a:t>
             </a:r>
             <a:endParaRPr lang="en-US" sz="3400" dirty="0"/>
           </a:p>
@@ -2525,7 +2543,7 @@
                 <a:ea typeface="Cambria" pitchFamily="34" charset="-122"/>
                 <a:cs typeface="Cambria" pitchFamily="34" charset="-120"/>
               </a:rPr>
-              <a:t>Deduplication needs every record at once</a:t>
+              <a:t>The live path and the batch path</a:t>
             </a:r>
             <a:endParaRPr lang="en-US" sz="3400" dirty="0"/>
           </a:p>
@@ -4329,7 +4347,7 @@
                 <a:ea typeface="Cambria" pitchFamily="34" charset="-122"/>
                 <a:cs typeface="Cambria" pitchFamily="34" charset="-120"/>
               </a:rPr>
-              <a:t>The department suggestion is learned from history</a:t>
+              <a:t>The department suggestion: an empirical crosswalk</a:t>
             </a:r>
             <a:endParaRPr lang="en-US" sz="3400" dirty="0"/>
           </a:p>
@@ -4754,7 +4772,7 @@
                 <a:ea typeface="Cambria" pitchFamily="34" charset="-122"/>
                 <a:cs typeface="Cambria" pitchFamily="34" charset="-120"/>
               </a:rPr>
-              <a:t>Closing a case costs nothing</a:t>
+              <a:t>Closures on the six-template disposal ladder</a:t>
             </a:r>
             <a:endParaRPr lang="en-US" sz="3400" dirty="0"/>
           </a:p>
@@ -5366,7 +5384,7 @@
                 <a:ea typeface="Cambria" pitchFamily="34" charset="-122"/>
                 <a:cs typeface="Cambria" pitchFamily="34" charset="-120"/>
               </a:rPr>
-              <a:t>We built the test before we built the feature</a:t>
+              <a:t>How the routing evaluation was built</a:t>
             </a:r>
             <a:endParaRPr lang="en-US" sz="3400" dirty="0"/>
           </a:p>
@@ -6170,7 +6188,7 @@
                 <a:ea typeface="Cambria" pitchFamily="34" charset="-122"/>
                 <a:cs typeface="Cambria" pitchFamily="34" charset="-120"/>
               </a:rPr>
-              <a:t>The second year failed every check we had</a:t>
+              <a:t>Validation and untouched-year diagnostics</a:t>
             </a:r>
             <a:endParaRPr lang="en-US" sz="3400" dirty="0"/>
           </a:p>
@@ -7312,7 +7330,7 @@
                 <a:ea typeface="Cambria" pitchFamily="34" charset="-122"/>
                 <a:cs typeface="Cambria" pitchFamily="34" charset="-120"/>
               </a:rPr>
-              <a:t>The dashboards count filings, not problems</a:t>
+              <a:t>Duplicate-adjusted workload, spikes and themes</a:t>
             </a:r>
             <a:endParaRPr lang="en-US" sz="3400" dirty="0"/>
           </a:p>
@@ -8788,7 +8806,7 @@
                 <a:ea typeface="Cambria" pitchFamily="34" charset="-122"/>
                 <a:cs typeface="Cambria" pitchFamily="34" charset="-120"/>
               </a:rPr>
-              <a:t>It does more. We have not shown it does better</a:t>
+              <a:t>Sarvam: fields returned, latency and divergence</a:t>
             </a:r>
             <a:endParaRPr lang="en-US" sz="3400" dirty="0"/>
           </a:p>
@@ -8893,7 +8911,7 @@
                 <a:ea typeface="Calibri" pitchFamily="34" charset="-122"/>
                 <a:cs typeface="Calibri" pitchFamily="34" charset="-120"/>
               </a:rPr>
-              <a:t>One call at ₹1.50 a page returns the text, a category, a one-line summary and the district.</a:t>
+              <a:t>One call at ₹1.50 a page returns the page text, a category and a summary.</a:t>
             </a:r>
             <a:endParaRPr lang="en-US" sz="1800" dirty="0"/>
           </a:p>
@@ -8998,7 +9016,7 @@
                 <a:ea typeface="Calibri" pitchFamily="34" charset="-122"/>
                 <a:cs typeface="Calibri" pitchFamily="34" charset="-120"/>
               </a:rPr>
-              <a:t>What we established</a:t>
+              <a:t>What we measured, on 200 pages of Sambalpur 2024</a:t>
             </a:r>
             <a:endParaRPr lang="en-US" sz="1350" dirty="0"/>
           </a:p>
@@ -9037,7 +9055,7 @@
                 <a:ea typeface="Calibri" pitchFamily="34" charset="-122"/>
                 <a:cs typeface="Calibri" pitchFamily="34" charset="-120"/>
               </a:rPr>
-              <a:t>Different is not better. Using it also sends citizen documents outside our control.</a:t>
+              <a:t>Different is not better, and using it sends citizen documents outside our control.</a:t>
             </a:r>
             <a:endParaRPr lang="en-US" sz="2000" dirty="0"/>
           </a:p>
@@ -9271,7 +9289,7 @@
                 <a:ea typeface="Calibri" pitchFamily="34" charset="-122"/>
                 <a:cs typeface="Calibri" pitchFamily="34" charset="-120"/>
               </a:rPr>
-              <a:t>On all 61 pages we compared, the two systems produced different text.</a:t>
+              <a:t>6 s to read a page, 11 s to extract the fields. Ours reads a page in 5.8 s.</a:t>
             </a:r>
             <a:endParaRPr lang="en-US" sz="1800" dirty="0"/>
           </a:p>
@@ -9349,7 +9367,42 @@
                 <a:ea typeface="Calibri" pitchFamily="34" charset="-122"/>
                 <a:cs typeface="Calibri" pitchFamily="34" charset="-120"/>
               </a:rPr>
-              <a:t>The category and summary it returned were never graded against anything.</a:t>
+              <a:t>The two systems differed on 197 of 198 pages. Sarvam returns 1.6 times the characters.</a:t>
+            </a:r>
+          </a:p>
+        </p:txBody>
+      </p:sp>
+      <p:sp>
+        <p:nvSpPr>
+          <p:cNvPr id="38" name="TextBox 37"/>
+          <p:cNvSpPr txBox="1"/>
+          <p:nvPr/>
+        </p:nvSpPr>
+        <p:spPr>
+          <a:xfrm>
+            <a:off x="640080" y="6053328"/>
+            <a:ext cx="10881360" cy="329184"/>
+          </a:xfrm>
+          <a:prstGeom prst="rect">
+            <a:avLst/>
+          </a:prstGeom>
+          <a:noFill/>
+        </p:spPr>
+        <p:txBody>
+          <a:bodyPr wrap="square" lIns="0" rIns="0" tIns="0" bIns="0">
+            <a:spAutoFit/>
+          </a:bodyPr>
+          <a:lstStyle/>
+          <a:p>
+            <a:pPr algn="l"/>
+            <a:r>
+              <a:rPr sz="1100" b="0" i="1">
+                <a:solidFill>
+                  <a:srgbClr val="6C6E76"/>
+                </a:solidFill>
+                <a:latin typeface="Calibri"/>
+              </a:rPr>
+              <a:t>Capped at ten requests a minute: this run took 166 minutes and the English corpus would take about ten days. It returned a category on 11 of 87 grievances and matched none, because our v1 schema never listed the categories.</a:t>
             </a:r>
           </a:p>
         </p:txBody>

--- a/docs/presentations/2026-08-24-timing-quality/Janasunani_2.0_Timing_and_Quality.pptx
+++ b/docs/presentations/2026-08-24-timing-quality/Janasunani_2.0_Timing_and_Quality.pptx
@@ -1170,7 +1170,7 @@
           <a:p/>
           <a:p>
             <a:r>
-              <a:t>THE CATEGORY GRADE, and say plainly that it measures our schema and not the provider. Sarvam returned a category on 11 of 87 grievances and matched the officer's label on 0 of those 11: 'Sanction of new AWC buildings' against gold ICDS, 'Revenue &amp; law Order' against Land Matters, 'Social Benefit' against Health Care. The v1 schema described the field as the complaints taxonomy and then never listed it, so the model had nothing to choose from and answered with subject lines. Schema v2 adds the 35-label enum and is now the default. A corrected run is extract-only, about ₹200.</a:t>
+              <a:t>THE CATEGORY GRADE, and say plainly that it measures our schema and not the provider. Sarvam returned a category on 11 of 87 grievances and matched the officer's label on 0 of those 11. What came back was a subject line rather than a taxonomy label: the specific relief the petitioner asked for, or the name of an administrative wing. The v1 schema described the field as the complaints taxonomy and then never listed it, so the model had nothing to choose from. Schema v2 adds the 35-label enum and is now the default. A corrected run is extract-only, about ₹200.</a:t>
             </a:r>
           </a:p>
           <a:p/>
@@ -1188,31 +1188,25 @@
           <a:p/>
           <a:p>
             <a:r>
-              <a:t>THE EXTRACT FIELDS WERE NEVER GRADED. Sarvam did return them: 61 extract jobs completed in the 300-page run. Nothing was compared against them.</a:t>
+              <a:t>SUMMARY WAS NOT GRADED, and could not have been. It was only ever scoped as divergence against BART with no gold referee, and summary_divergence is the same function as divergence_rate under another name (sarvam_scorecard.py:234). Even fully run it could only have said the two summaries differ, never which was better.</a:t>
             </a:r>
           </a:p>
           <a:p/>
           <a:p>
             <a:r>
-              <a:t>  Category was the DECLARED PRIMARY OUTCOME and came back null. Reason, verbatim from outputs/sarvam_validation/sarvam_scorecard.md: 'Not measured — no gold labels (gold_category) in sample; run with --join-metadata from the lake slice.' This is the cheap gap. The recorded category already sits in our own database; the sample was simply not joined to it. Unlike OCR, no new ground truth has to be created.</a:t>
+              <a:t>  The superseded 300-page run returned 61 extract jobs that were compared against nothing, because that sample was never joined to the recorded category. The join is what --join-metadata does, and the 2026-08-25 run used it — which is why there is a category grade to report at all this time.</a:t>
             </a:r>
           </a:p>
           <a:p/>
           <a:p>
             <a:r>
-              <a:t>  Summary was only ever scoped as divergence against BART with no gold referee, and summary_divergence is the same function as divergence_rate under another name (sarvam_scorecard.py:234). Even fully run it could only have said the two summaries differ, never which was better. It was not run: no paired sarvam_summary / pipeline_summary in the sample.</a:t>
+              <a:t>  A schema bug returned HTTP 400 on every extract submission until 2026-08-09, which is why the 5-page validation run has no extract output at all. Every test mocked the transport, so no test could see the 400.</a:t>
             </a:r>
           </a:p>
           <a:p/>
           <a:p>
             <a:r>
-              <a:t>  A schema bug returned HTTP 400 on every extract submission until 2026-08-09, which is why the 5-page validation run has no extract output at all. Every test mocked the transport, so no test could see the 400.</a:t>
-            </a:r>
-          </a:p>
-          <a:p/>
-          <a:p>
-            <a:r>
-              <a:t>NOT MEASURED, do not claim: OCR accuracy, category accuracy, summary quality, latency (stated in four places), actual billed cost (every rupee figure is list price), observed language split, handwritten versus printed split.</a:t>
+              <a:t>NOT MEASURED, do not claim: OCR accuracy, summary quality, actual billed cost (every rupee figure is list price), observed language split, handwritten versus printed split. Latency and category accuracy ARE now measured — see above, and carry the caveat with the category number rather than quoting it bare.</a:t>
             </a:r>
           </a:p>
           <a:p/>

--- a/docs/presentations/2026-08-24-timing-quality/Janasunani_2.0_Timing_and_Quality.pptx
+++ b/docs/presentations/2026-08-24-timing-quality/Janasunani_2.0_Timing_and_Quality.pptx
@@ -1146,7 +1146,7 @@
           <a:p/>
           <a:p>
             <a:r>
-              <a:t>THE FOUR EXTRACT FIELDS, which is the 'does more' claim: grievance_category, summary, district, grievance_text. That is our OCR, categoriser and summariser in one call. janasunani/evaluation/sarvam_grievance_schema.py, schema v1, pinned so a later edit cannot silently move a headline number. docs/DELIVERY.md:163: 'our pipeline has no equivalent'.</a:t>
+              <a:t>THE EXTRACT FIELDS, which is the 'does more' claim: grievance_category, summary and grievance_text. That is our OCR, categoriser and summariser in one call. janasunani/evaluation/sarvam_grievance_schema.py, schema v2, pinned so a later edit cannot silently move a headline number. docs/DELIVERY.md:163: 'our pipeline has no equivalent'. The 2026-08-25 run below was made against v1, which had a fourth field, district, and no enum on the category — both of which is why it graded the way it did. v2 is what a corrected run would use.</a:t>
             </a:r>
           </a:p>
           <a:p/>

--- a/docs/presentations/2026-08-24-timing-quality/Janasunani_2.0_Timing_and_Quality.pptx
+++ b/docs/presentations/2026-08-24-timing-quality/Janasunani_2.0_Timing_and_Quality.pptx
@@ -1164,7 +1164,7 @@
           <a:p/>
           <a:p>
             <a:r>
-              <a:t>LATENCY, and this is the number the deck lacked until now. Derived from submission to result in the egress audit log, outputs/sarvam_run_2026-08-25/sarvam_audit.sqlite, excluding the later recovery re-reads. Digitise: median 6 s a page, mean 9 s, p90 16 s, n=200. Extract: median 11 s, mean 13 s, p90 19 s, n=198. Polling is 5 s quantised, so treat these as 5 s resolution. Our own OCR is 5.8 s a page on the same class of document, so per page there is nothing in it. THROUGHPUT is the real constraint: 10 requests a minute does not rise with the plan tier, the run averaged 1.2 pages a minute end to end, and the 96,469-page English corpus is roughly ten days of continuous calling.</a:t>
+              <a:t>LATENCY, and this is the number the deck lacked until now. Derived from submission to result in the egress audit log, outputs/sarvam_run_2026-08-25/sarvam_audit.sqlite, excluding the later recovery re-reads. Digitise: median 6 s a page, mean 9 s, p90 16 s, n=200. Extract: median 11 s, mean 13 s, p90 19 s, n=198. Polling is 5 s quantised, so treat these as 5 s resolution. Our own OCR is 5.8 s a page on the same class of document, so per page there is nothing in it. THROUGHPUT is the real constraint, and note it is two calls a page, not one: --arm both submits digitise and extract separately (sarvam_evaluate.py:596 and :604), billed ₹0.50 and ₹1.00. So the 10-requests-a-minute cap, which does not rise with the plan tier, is a ceiling of 5 pages a minute for both arms. The run averaged 1.2 pages a minute end to end, about a quarter of that ceiling. The 96,469-page English corpus is 192,938 requests on both arms, roughly thirteen days of continuous calling; digitise alone would be about seven.</a:t>
             </a:r>
           </a:p>
           <a:p/>
@@ -1218,7 +1218,7 @@
           <a:p/>
           <a:p>
             <a:r>
-              <a:t>COST AT SCALE, projected list price: ₹48,000 to digitise the 96,469-page English corpus, ₹145,000 for both endpoints, ₹8,050 to push 1.37M subjects through the 105B text model. At 10 requests a minute, which does not rise with the plan tier, the full corpus is roughly ten days of continuous calling. It is a measurement instrument, not a backfill path. Do not quote ₹700; that was priced on the withdrawn 30B model.</a:t>
+              <a:t>COST AT SCALE, projected list price: ₹48,000 to digitise the 96,469-page English corpus, ₹145,000 for both endpoints, ₹8,050 to push 1.37M subjects through the 105B text model. At 10 requests a minute, which does not rise with the plan tier, and two calls a page on both endpoints, the full corpus is roughly thirteen days of continuous calling; digitise alone is about seven. It is a measurement instrument, not a backfill path. Do not quote ₹700; that was priced on the withdrawn 30B model.</a:t>
             </a:r>
           </a:p>
         </p:txBody>
@@ -8905,7 +8905,7 @@
                 <a:ea typeface="Calibri" pitchFamily="34" charset="-122"/>
                 <a:cs typeface="Calibri" pitchFamily="34" charset="-120"/>
               </a:rPr>
-              <a:t>One call at ₹1.50 a page returns the page text, a category and a summary.</a:t>
+              <a:t>Two calls a page, ₹0.50 to read it and ₹1.00 to pull fields out: text, category, summary.</a:t>
             </a:r>
             <a:endParaRPr lang="en-US" sz="1800" dirty="0"/>
           </a:p>
@@ -9396,7 +9396,7 @@
                 </a:solidFill>
                 <a:latin typeface="Calibri"/>
               </a:rPr>
-              <a:t>Capped at ten requests a minute: this run took 166 minutes and the English corpus would take about ten days. It returned a category on 11 of 87 grievances and matched none, because our v1 schema never listed the categories.</a:t>
+              <a:t>Capped at ten requests a minute, and two calls a page: this run took 166 minutes and the English corpus would take about thirteen days. It returned a category on 11 of 87 grievances and matched none, because our v1 schema never listed the categories.</a:t>
             </a:r>
           </a:p>
         </p:txBody>

--- a/docs/presentations/2026-08-24-timing-quality/Janasunani_2.0_Timing_and_Quality.pptx
+++ b/docs/presentations/2026-08-24-timing-quality/Janasunani_2.0_Timing_and_Quality.pptx
@@ -1088,7 +1088,7 @@
           <a:p/>
           <a:p>
             <a:r>
-              <a:t>Two more we do not claim, if asked: no gain from duplicate detection beyond the 37,299 repeats officers already confirmed, and no accuracy result for the outside option on slide 11.</a:t>
+              <a:t>Two more we do not claim, if asked: no gain from duplicate detection beyond the 37,299 repeats officers already confirmed, and no OCR accuracy result for the outside option on slide 11. Its latency is measured and its category was graded; it is transcription accuracy specifically that has no referee, because divergence never says which system is right and no hand-transcribed answer key exists (#53).</a:t>
             </a:r>
           </a:p>
           <a:p/>
@@ -1164,7 +1164,7 @@
           <a:p/>
           <a:p>
             <a:r>
-              <a:t>LATENCY, and this is the number the deck lacked until now. Derived from submission to result in the egress audit log, outputs/sarvam_run_2026-08-25/sarvam_audit.sqlite, excluding the later recovery re-reads. Digitise: median 6 s a page, mean 9 s, p90 16 s, n=200. Extract: median 11 s, mean 13 s, p90 19 s, n=198. Polling is 5 s quantised, so treat these as 5 s resolution. Our own OCR is 5.8 s a page on the same class of document, so per page there is nothing in it. THROUGHPUT is the real constraint, and note it is two calls a page, not one: --arm both submits digitise and extract separately (sarvam_evaluate.py:596 and :604), billed ₹0.50 and ₹1.00. So the 10-requests-a-minute cap, which does not rise with the plan tier, is a ceiling of 5 pages a minute for both arms. The run averaged 1.2 pages a minute end to end, about a quarter of that ceiling. The 96,469-page English corpus is 192,938 requests on both arms, roughly thirteen days of continuous calling; digitise alone would be about seven.</a:t>
+              <a:t>LATENCY, and this is the number the deck lacked until now. Derived from submission to result in the egress audit log, outputs/sarvam_run_2026-08-25/sarvam_audit.sqlite, excluding the later recovery re-reads. Digitise: median 6 s a page, mean 9 s, p90 16 s, n=200. Extract: median 11 s, mean 13 s, p90 19 s, n=198. Polling is 5 s quantised, so treat these as 5 s resolution. DO NOT COMPARE THIS TO OUR 5.8 s. That figure is from an n=20 synthetic-fixture run, not from documents, so the two are not the same class of input and a per-page comparison between them means nothing. A real-document local measurement is #318; until it lands there is no like-for-like latency comparison to make. THROUGHPUT is the real constraint, and note it is two calls a page, not one: --arm both submits digitise and extract separately (sarvam_evaluate.py:596 and :604), billed ₹0.50 and ₹1.00. So the 10-requests-a-minute cap, which does not rise with the plan tier, is a ceiling of 5 pages a minute for both arms. The run averaged 1.2 pages a minute end to end, about a quarter of that ceiling. The 96,469-page English corpus is 192,938 requests on both arms, roughly thirteen days of continuous calling; digitise alone would be about seven.</a:t>
             </a:r>
           </a:p>
           <a:p/>
@@ -9283,7 +9283,7 @@
                 <a:ea typeface="Calibri" pitchFamily="34" charset="-122"/>
                 <a:cs typeface="Calibri" pitchFamily="34" charset="-120"/>
               </a:rPr>
-              <a:t>6 s to read a page, 11 s to extract the fields. Ours reads a page in 5.8 s.</a:t>
+              <a:t>6 s to read a page, 11 s to extract the fields, at ten requests a minute.</a:t>
             </a:r>
             <a:endParaRPr lang="en-US" sz="1800" dirty="0"/>
           </a:p>

--- a/docs/presentations/2026-08-24-timing-quality/Janasunani_2.0_Timing_and_Quality.pptx
+++ b/docs/presentations/2026-08-24-timing-quality/Janasunani_2.0_Timing_and_Quality.pptx
@@ -1164,7 +1164,7 @@
           <a:p/>
           <a:p>
             <a:r>
-              <a:t>LATENCY, and this is the number the deck lacked until now. Derived from submission to result in the egress audit log, outputs/sarvam_run_2026-08-25/sarvam_audit.sqlite, excluding the later recovery re-reads. Digitise: median 6 s a page, mean 9 s, p90 16 s, n=200. Extract: median 11 s, mean 13 s, p90 19 s, n=198. Polling is 5 s quantised, so treat these as 5 s resolution. DO NOT COMPARE THIS TO OUR 5.8 s. That figure is from an n=20 synthetic-fixture run, not from documents, so the two are not the same class of input and a per-page comparison between them means nothing. A real-document local measurement is #318; until it lands there is no like-for-like latency comparison to make. THROUGHPUT is the real constraint, and note it is two calls a page, not one: --arm both submits digitise and extract separately (sarvam_evaluate.py:596 and :604), billed ₹0.50 and ₹1.00. So the 10-requests-a-minute cap, which does not rise with the plan tier, is a ceiling of 5 pages a minute for both arms. The run averaged 1.2 pages a minute end to end, about a quarter of that ceiling. The 96,469-page English corpus is 192,938 requests on both arms, roughly thirteen days of continuous calling; digitise alone would be about seven.</a:t>
+              <a:t>LATENCY, and this is the number the deck lacked until now. Derived from submission to result in the egress audit log, outputs/sarvam_run_2026-08-25/sarvam_audit.sqlite, excluding the later recovery re-reads. Digitise: median 6 s a page, mean 9 s, p90 16 s, n=200. Extract: median 11 s, mean 13 s, p90 19 s, n=198. Polling is 5 s quantised, so treat these as 5 s resolution. DO NOT COMPARE THIS TO OUR 5.8 s. That figure is from an n=20 synthetic-fixture run, not from documents, so the two are not the same class of input and a per-page comparison between them means nothing. A real-document local measurement is #318; until it lands there is no like-for-like latency comparison to make. THROUGHPUT is the real constraint, and note it is two calls a page, not one: --arm both submits digitise and extract separately (sarvam_evaluate.py:596 and :604), billed ₹0.50 and ₹1.00. So the 10-requests-a-minute cap, which does not rise with the plan tier, is a ceiling of 5 pages a minute for both arms. The run averaged 1.2 pages a minute end to end, about a quarter of that ceiling. Quote both numbers, because the gap between them is the point. The 96,469-page English corpus is 192,938 requests on both arms: 13 days at the cap (192,938 / 10 a minute), which is a floor and assumes perfect saturation, and about 56 days at the 1.2 pages a minute we measured (96,469 / 1.2). The calls are sequential and blocking, so the measured rate is the one to plan against. Digitise alone is about seven days at the cap. If asked why the gap: nothing here is batched or concurrent, and that is a property of this runner, not of the provider.</a:t>
             </a:r>
           </a:p>
           <a:p/>
@@ -1218,7 +1218,7 @@
           <a:p/>
           <a:p>
             <a:r>
-              <a:t>COST AT SCALE, projected list price: ₹48,000 to digitise the 96,469-page English corpus, ₹145,000 for both endpoints, ₹8,050 to push 1.37M subjects through the 105B text model. At 10 requests a minute, which does not rise with the plan tier, and two calls a page on both endpoints, the full corpus is roughly thirteen days of continuous calling; digitise alone is about seven. It is a measurement instrument, not a backfill path. Do not quote ₹700; that was priced on the withdrawn 30B model.</a:t>
+              <a:t>COST AT SCALE, projected list price: ₹48,000 to digitise the 96,469-page English corpus, ₹145,000 for both endpoints, ₹8,050 to push 1.37M subjects through the 105B text model. At 10 requests a minute, which does not rise with the plan tier, and two calls a page on both endpoints, the full corpus is thirteen days of continuous calling at the cap and about eight weeks at the throughput actually observed; digitise alone is about seven days at the cap. It is a measurement instrument, not a backfill path. Do not quote ₹700; that was priced on the withdrawn 30B model.</a:t>
             </a:r>
           </a:p>
         </p:txBody>
@@ -9396,7 +9396,7 @@
                 </a:solidFill>
                 <a:latin typeface="Calibri"/>
               </a:rPr>
-              <a:t>Capped at ten requests a minute, and two calls a page: this run took 166 minutes and the English corpus would take about thirteen days. It returned a category on 11 of 87 grievances and matched none, because our v1 schema never listed the categories.</a:t>
+              <a:t>Capped at ten requests a minute, and two calls a page: this run took 166 minutes. At the cap the English corpus is thirteen days; at the rate this run actually achieved, about eight weeks. It returned a category on 11 of 87 grievances and matched none, because our v1 schema never listed the categories.</a:t>
             </a:r>
           </a:p>
         </p:txBody>
